--- a/docs/proposals/presentations/Familiar-Nine-for-managers.pptx
+++ b/docs/proposals/presentations/Familiar-Nine-for-managers.pptx
@@ -14,9 +14,10 @@
     <p:sldId id="262" r:id="rId8"/>
     <p:sldId id="263" r:id="rId9"/>
     <p:sldId id="264" r:id="rId10"/>
+    <p:sldId id="265" r:id="rId11"/>
   </p:sldIdLst>
   <p:notesMasterIdLst>
-    <p:notesMasterId r:id="rId11"/>
+    <p:notesMasterId r:id="rId12"/>
   </p:notesMasterIdLst>
   <p:sldSz cx="9144000" cy="5143500"/>
   <p:notesSz cx="5143500" cy="9144000"/>
@@ -883,6 +884,94 @@
 </p:notes>
 </file>
 
+<file path=ppt/notesSlides/notesSlide10.xml><?xml version="1.0" encoding="utf-8"?>
+<p:notes xmlns:a="http://schemas.openxmlformats.org/drawingml/2006/main" xmlns:r="http://schemas.openxmlformats.org/officeDocument/2006/relationships" xmlns:p="http://schemas.openxmlformats.org/presentationml/2006/main">
+  <p:cSld>
+    <p:spTree>
+      <p:nvGrpSpPr>
+        <p:cNvPr id="1" name=""/>
+        <p:cNvGrpSpPr/>
+        <p:nvPr/>
+      </p:nvGrpSpPr>
+      <p:grpSpPr>
+        <a:xfrm>
+          <a:off x="0" y="0"/>
+          <a:ext cx="0" cy="0"/>
+          <a:chOff x="0" y="0"/>
+          <a:chExt cx="0" cy="0"/>
+        </a:xfrm>
+      </p:grpSpPr>
+      <p:sp>
+        <p:nvSpPr>
+          <p:cNvPr id="2" name="Slide Image Placeholder 1"/>
+          <p:cNvSpPr>
+            <a:spLocks noGrp="1" noRot="1" noChangeAspect="1"/>
+          </p:cNvSpPr>
+          <p:nvPr>
+            <p:ph type="sldImg"/>
+          </p:nvPr>
+        </p:nvSpPr>
+        <p:spPr/>
+      </p:sp>
+      <p:sp>
+        <p:nvSpPr>
+          <p:cNvPr id="3" name="Notes Placeholder 2"/>
+          <p:cNvSpPr>
+            <a:spLocks noGrp="1"/>
+          </p:cNvSpPr>
+          <p:nvPr>
+            <p:ph type="body" idx="1"/>
+          </p:nvPr>
+        </p:nvSpPr>
+        <p:spPr/>
+        <p:txBody>
+          <a:bodyPr/>
+          <a:lstStyle/>
+          <a:p>
+            <a:r>
+              <a:rPr lang="en-US" dirty="0"/>
+              <a:t>Leave the sheet with them. Questions about a particular week or hour are answered there.</a:t>
+            </a:r>
+            <a:endParaRPr lang="en-US" dirty="0"/>
+          </a:p>
+        </p:txBody>
+      </p:sp>
+      <p:sp>
+        <p:nvSpPr>
+          <p:cNvPr id="4" name="Slide Number Placeholder 3"/>
+          <p:cNvSpPr>
+            <a:spLocks noGrp="1"/>
+          </p:cNvSpPr>
+          <p:nvPr>
+            <p:ph type="sldNum" sz="quarter" idx="10"/>
+          </p:nvPr>
+        </p:nvSpPr>
+        <p:spPr/>
+        <p:txBody>
+          <a:bodyPr/>
+          <a:lstStyle/>
+          <a:p>
+            <a:fld id="{F7021451-1387-4CA6-816F-3879F97B5CBC}" type="slidenum">
+              <a:rPr lang="en-US"/>
+              <a:t>10</a:t>
+            </a:fld>
+            <a:endParaRPr lang="en-US"/>
+          </a:p>
+        </p:txBody>
+      </p:sp>
+    </p:spTree>
+    <p:extLst>
+      <p:ext uri="{BB962C8B-B14F-4D97-AF65-F5344CB8AC3E}">
+        <p14:creationId xmlns:p14="http://schemas.microsoft.com/office/powerpoint/2010/main" val="1024086991"/>
+      </p:ext>
+    </p:extLst>
+  </p:cSld>
+  <p:clrMapOvr>
+    <a:masterClrMapping/>
+  </p:clrMapOvr>
+</p:notes>
+</file>
+
 <file path=ppt/notesSlides/notesSlide2.xml><?xml version="1.0" encoding="utf-8"?>
 <p:notes xmlns:a="http://schemas.openxmlformats.org/drawingml/2006/main" xmlns:r="http://schemas.openxmlformats.org/officeDocument/2006/relationships" xmlns:p="http://schemas.openxmlformats.org/presentationml/2006/main">
   <p:cSld>
@@ -1193,7 +1282,7 @@
           <a:p>
             <a:r>
               <a:rPr lang="en-US" dirty="0"/>
-              <a:t>Every working week pays exactly 35 hours Monday to Saturday — 42,000 minutes across the link — so no overtime is built into the rota. Sunday is not contracted, so the ten Sunday duties are worked as rest-day overtime, exactly as today’s eight are. Cover weeks stay at four, which is a slightly smaller share of a longer link: worth deciding deliberately.</a:t>
+              <a:t>Every working week pays exactly 35 hours Monday to Saturday — 42,000 minutes across the link — so no overtime is built into the rota. Sunday is not contracted, so the ten Sunday duties are worked as rest-day overtime, exactly as today’s eight are. Cover weeks stay at four, which is a slightly smaller share of a longer link: worth deciding deliberately. The two extra Sunday overtime duties a week come from the confirmed Sunday staffing of ten, not from Familiar Nine — any link that meets the rules needs them.</a:t>
             </a:r>
             <a:endParaRPr lang="en-US" dirty="0"/>
           </a:p>
@@ -1369,7 +1458,7 @@
           <a:p>
             <a:r>
               <a:rPr lang="en-US" dirty="0"/>
-              <a:t>Same 35 hours; the average shift is six minutes longer (8h20 against 8h14), which is what pays for the two fewer days. Annual leave works the same way, and a cover week still counts as four days of leave. Expect the late finishes to be the main objection: three to the close and five after 22:00 put about 20 more a year on each person — one extra every two or three weeks.</a:t>
+              <a:t>All three pass the December rules and have no fatigue finding the design could have avoided, so the choice between them is a judgement about people, not a score. Right Away follows the trains very slightly more closely but asks people to learn twelve new shift times and has a 9h30 duty. All Clear keeps more of an existing supplied design but gives two full weekends off in 24 instead of six, runs to nine days in a row, and follows the trains worse than today’s link on a Sunday. The fourth, Just Enough, also meets every rule but has three fatigue findings. All 28 are on the one-page summary.</a:t>
             </a:r>
             <a:endParaRPr lang="en-US" dirty="0"/>
           </a:p>
@@ -1457,7 +1546,7 @@
           <a:p>
             <a:r>
               <a:rPr lang="en-US" dirty="0"/>
-              <a:t>The Sunday finish stays at 23:25 — that is agreed practice. The 13-day limit used in the checks is Chiltern practice; its written source is still to be cited.</a:t>
+              <a:t>Days at work fall from 219 to 217 a year (Monday to Saturday; Sunday is overtime). The late finishes come from the December staffing — three to the close and five after 22:00, where today has two and four — so any link that meets the rules will have more of them; they average about 20 more a year each, one extra every two or three weeks.</a:t>
             </a:r>
             <a:endParaRPr lang="en-US" dirty="0"/>
           </a:p>
@@ -1545,7 +1634,7 @@
           <a:p>
             <a:r>
               <a:rPr lang="en-US" dirty="0"/>
-              <a:t>Leave the sheet with them. Questions about a particular week or hour are answered there.</a:t>
+              <a:t>The Sunday finish stays at 23:25 — that is agreed practice. The 13-day limit used in the checks is Chiltern practice; its written source is still to be cited.</a:t>
             </a:r>
             <a:endParaRPr lang="en-US" dirty="0"/>
           </a:p>
@@ -2092,6 +2181,250 @@
 </p:sld>
 </file>
 
+<file path=ppt/slides/slide10.xml><?xml version="1.0" encoding="utf-8"?>
+<p:sld xmlns:a="http://schemas.openxmlformats.org/drawingml/2006/main" xmlns:r="http://schemas.openxmlformats.org/officeDocument/2006/relationships" xmlns:p="http://schemas.openxmlformats.org/presentationml/2006/main">
+  <p:cSld name="Slide 10">
+    <p:bg>
+      <p:bgPr>
+        <a:solidFill>
+          <a:srgbClr val="001E3C"/>
+        </a:solidFill>
+      </p:bgPr>
+    </p:bg>
+    <p:spTree>
+      <p:nvGrpSpPr>
+        <p:cNvPr id="1" name=""/>
+        <p:cNvGrpSpPr/>
+        <p:nvPr/>
+      </p:nvGrpSpPr>
+      <p:grpSpPr>
+        <a:xfrm>
+          <a:off x="0" y="0"/>
+          <a:ext cx="0" cy="0"/>
+          <a:chOff x="0" y="0"/>
+          <a:chExt cx="0" cy="0"/>
+        </a:xfrm>
+      </p:grpSpPr>
+      <p:sp>
+        <p:nvSpPr>
+          <p:cNvPr id="2" name="Shape 0"/>
+          <p:cNvSpPr/>
+          <p:nvPr/>
+        </p:nvSpPr>
+        <p:spPr>
+          <a:xfrm>
+            <a:off x="548640" y="640080"/>
+            <a:ext cx="731520" cy="731520"/>
+          </a:xfrm>
+          <a:prstGeom prst="ellipse">
+            <a:avLst/>
+          </a:prstGeom>
+          <a:solidFill>
+            <a:srgbClr val="F5C800"/>
+          </a:solidFill>
+          <a:ln w="12700">
+            <a:solidFill>
+              <a:srgbClr val="F5C800"/>
+            </a:solidFill>
+            <a:prstDash val="solid"/>
+          </a:ln>
+        </p:spPr>
+      </p:sp>
+      <p:pic>
+        <p:nvPicPr>
+          <p:cNvPr id="3" name="Image 0" descr="preencoded.png">    </p:cNvPr>
+          <p:cNvPicPr>
+            <a:picLocks noChangeAspect="1"/>
+          </p:cNvPicPr>
+          <p:nvPr/>
+        </p:nvPicPr>
+        <p:blipFill>
+          <a:blip r:embed="rId1"/>
+          <a:stretch>
+            <a:fillRect/>
+          </a:stretch>
+        </p:blipFill>
+        <p:spPr>
+          <a:xfrm>
+            <a:off x="709574" y="801014"/>
+            <a:ext cx="409651" cy="409651"/>
+          </a:xfrm>
+          <a:prstGeom prst="rect">
+            <a:avLst/>
+          </a:prstGeom>
+        </p:spPr>
+      </p:pic>
+      <p:sp>
+        <p:nvSpPr>
+          <p:cNvPr id="4" name="Text 1"/>
+          <p:cNvSpPr txBox="1"/>
+          <p:nvPr/>
+        </p:nvSpPr>
+        <p:spPr>
+          <a:xfrm>
+            <a:off x="548640" y="1600200"/>
+            <a:ext cx="8046720" cy="731520"/>
+          </a:xfrm>
+          <a:prstGeom prst="rect">
+            <a:avLst/>
+          </a:prstGeom>
+          <a:noFill/>
+          <a:ln/>
+        </p:spPr>
+        <p:txBody>
+          <a:bodyPr wrap="square" lIns="0" tIns="0" rIns="0" bIns="0" rtlCol="0" anchor="ctr"/>
+          <a:lstStyle/>
+          <a:p>
+            <a:pPr indent="0" marL="0">
+              <a:buNone/>
+            </a:pPr>
+            <a:r>
+              <a:rPr lang="en-US" sz="4000" b="1" dirty="0">
+                <a:solidFill>
+                  <a:srgbClr val="FFFFFF"/>
+                </a:solidFill>
+                <a:latin typeface="Inter" pitchFamily="34" charset="0"/>
+                <a:ea typeface="Inter" pitchFamily="34" charset="-122"/>
+                <a:cs typeface="Inter" pitchFamily="34" charset="-120"/>
+              </a:rPr>
+              <a:t>The detail</a:t>
+            </a:r>
+            <a:endParaRPr lang="en-US" sz="4000" dirty="0"/>
+          </a:p>
+        </p:txBody>
+      </p:sp>
+      <p:sp>
+        <p:nvSpPr>
+          <p:cNvPr id="5" name="Text 2"/>
+          <p:cNvSpPr txBox="1"/>
+          <p:nvPr/>
+        </p:nvSpPr>
+        <p:spPr>
+          <a:xfrm>
+            <a:off x="548640" y="2468880"/>
+            <a:ext cx="8046720" cy="1463040"/>
+          </a:xfrm>
+          <a:prstGeom prst="rect">
+            <a:avLst/>
+          </a:prstGeom>
+          <a:noFill/>
+          <a:ln/>
+        </p:spPr>
+        <p:txBody>
+          <a:bodyPr wrap="square" lIns="0" tIns="0" rIns="0" bIns="0" rtlCol="0" anchor="ctr"/>
+          <a:lstStyle/>
+          <a:p>
+            <a:pPr marL="342900" indent="-342900">
+              <a:spcAft>
+                <a:spcPts val="800"/>
+              </a:spcAft>
+              <a:buSzPct val="100000"/>
+              <a:buChar char="•"/>
+            </a:pPr>
+            <a:r>
+              <a:rPr lang="en-US" sz="1800" dirty="0">
+                <a:solidFill>
+                  <a:srgbClr val="FFFFFF"/>
+                </a:solidFill>
+                <a:latin typeface="Inter" pitchFamily="34" charset="0"/>
+                <a:ea typeface="Inter" pitchFamily="34" charset="-122"/>
+                <a:cs typeface="Inter" pitchFamily="34" charset="-120"/>
+              </a:rPr>
+              <a:t>Every week of the link, day by day</a:t>
+            </a:r>
+            <a:endParaRPr lang="en-US" sz="1800" dirty="0"/>
+          </a:p>
+          <a:p>
+            <a:pPr marL="342900" indent="-342900">
+              <a:spcAft>
+                <a:spcPts val="800"/>
+              </a:spcAft>
+              <a:buSzPct val="100000"/>
+              <a:buChar char="•"/>
+            </a:pPr>
+            <a:r>
+              <a:rPr lang="en-US" sz="1800" dirty="0">
+                <a:solidFill>
+                  <a:srgbClr val="FFFFFF"/>
+                </a:solidFill>
+                <a:latin typeface="Inter" pitchFamily="34" charset="0"/>
+                <a:ea typeface="Inter" pitchFamily="34" charset="-122"/>
+                <a:cs typeface="Inter" pitchFamily="34" charset="-120"/>
+              </a:rPr>
+              <a:t>Staff on duty hour by hour, against the trains</a:t>
+            </a:r>
+            <a:endParaRPr lang="en-US" sz="1800" dirty="0"/>
+          </a:p>
+          <a:p>
+            <a:pPr marL="342900" indent="-342900">
+              <a:spcAft>
+                <a:spcPts val="800"/>
+              </a:spcAft>
+              <a:buSzPct val="100000"/>
+              <a:buChar char="•"/>
+            </a:pPr>
+            <a:r>
+              <a:rPr lang="en-US" sz="1800" dirty="0">
+                <a:solidFill>
+                  <a:srgbClr val="FFFFFF"/>
+                </a:solidFill>
+                <a:latin typeface="Inter" pitchFamily="34" charset="0"/>
+                <a:ea typeface="Inter" pitchFamily="34" charset="-122"/>
+                <a:cs typeface="Inter" pitchFamily="34" charset="-120"/>
+              </a:rPr>
+              <a:t>Each staffing rule and each ORR factor, checked</a:t>
+            </a:r>
+            <a:endParaRPr lang="en-US" sz="1800" dirty="0"/>
+          </a:p>
+        </p:txBody>
+      </p:sp>
+      <p:sp>
+        <p:nvSpPr>
+          <p:cNvPr id="6" name="Text 3"/>
+          <p:cNvSpPr txBox="1"/>
+          <p:nvPr/>
+        </p:nvSpPr>
+        <p:spPr>
+          <a:xfrm>
+            <a:off x="548640" y="4343400"/>
+            <a:ext cx="8046720" cy="365760"/>
+          </a:xfrm>
+          <a:prstGeom prst="rect">
+            <a:avLst/>
+          </a:prstGeom>
+          <a:noFill/>
+          <a:ln/>
+        </p:spPr>
+        <p:txBody>
+          <a:bodyPr wrap="square" lIns="0" tIns="0" rIns="0" bIns="0" rtlCol="0" anchor="ctr"/>
+          <a:lstStyle/>
+          <a:p>
+            <a:pPr indent="0" marL="0">
+              <a:buNone/>
+            </a:pPr>
+            <a:r>
+              <a:rPr lang="en-US" sz="1300" dirty="0">
+                <a:solidFill>
+                  <a:srgbClr val="F5C800"/>
+                </a:solidFill>
+                <a:latin typeface="Inter" pitchFamily="34" charset="0"/>
+                <a:ea typeface="Inter" pitchFamily="34" charset="-122"/>
+                <a:cs typeface="Inter" pitchFamily="34" charset="-120"/>
+              </a:rPr>
+              <a:t>All in the ten-page proposal sheet · Familiar Nine · F9-24-K31</a:t>
+            </a:r>
+            <a:endParaRPr lang="en-US" sz="1300" dirty="0"/>
+          </a:p>
+        </p:txBody>
+      </p:sp>
+    </p:spTree>
+  </p:cSld>
+  <p:clrMapOvr>
+    <a:masterClrMapping/>
+  </p:clrMapOvr>
+</p:sld>
+</file>
+
 <file path=ppt/slides/slide2.xml><?xml version="1.0" encoding="utf-8"?>
 <p:sld xmlns:a="http://schemas.openxmlformats.org/drawingml/2006/main" xmlns:r="http://schemas.openxmlformats.org/officeDocument/2006/relationships" xmlns:p="http://schemas.openxmlformats.org/presentationml/2006/main">
   <p:cSld name="Slide 2">
@@ -2587,7 +2920,7 @@
                 <a:ea typeface="Inter" pitchFamily="34" charset="-122"/>
                 <a:cs typeface="Inter" pitchFamily="34" charset="-120"/>
               </a:rPr>
-              <a:t>fatigue warning signs</a:t>
+              <a:t>design-specific fatigue findings</a:t>
             </a:r>
             <a:endParaRPr lang="en-US" sz="1500" dirty="0"/>
           </a:p>
@@ -2838,7 +3171,7 @@
                 <a:ea typeface="Inter" pitchFamily="34" charset="-122"/>
                 <a:cs typeface="Inter" pitchFamily="34" charset="-120"/>
               </a:rPr>
-              <a:t>Every staffing level you set, within the contract, with no fatigue warnings — on 24 people.</a:t>
+              <a:t>Every staffing level met, within the contract, with no design fatigue findings.</a:t>
             </a:r>
             <a:endParaRPr lang="en-US" sz="1400" dirty="0"/>
           </a:p>
@@ -4082,7 +4415,7 @@
                 <a:ea typeface="Inter" pitchFamily="34" charset="-122"/>
                 <a:cs typeface="Inter" pitchFamily="34" charset="-120"/>
               </a:rPr>
-              <a:t>Nearly twice as close to the timetable on weekdays; more than twice at weekends.</a:t>
+              <a:t>Staff are where the trains are — much closer to the December pattern, every day.</a:t>
             </a:r>
             <a:endParaRPr lang="en-US" sz="1400" dirty="0"/>
           </a:p>
@@ -4091,6 +4424,45 @@
       <p:sp>
         <p:nvSpPr>
           <p:cNvPr id="7" name="Text 4"/>
+          <p:cNvSpPr txBox="1"/>
+          <p:nvPr/>
+        </p:nvSpPr>
+        <p:spPr>
+          <a:xfrm>
+            <a:off x="4023360" y="4754880"/>
+            <a:ext cx="4663440" cy="310896"/>
+          </a:xfrm>
+          <a:prstGeom prst="rect">
+            <a:avLst/>
+          </a:prstGeom>
+          <a:noFill/>
+          <a:ln/>
+        </p:spPr>
+        <p:txBody>
+          <a:bodyPr wrap="square" lIns="0" tIns="0" rIns="0" bIns="0" rtlCol="0" anchor="t"/>
+          <a:lstStyle/>
+          <a:p>
+            <a:pPr algn="r" indent="0" marL="0">
+              <a:buNone/>
+            </a:pPr>
+            <a:r>
+              <a:rPr lang="en-US" sz="850" i="1" dirty="0">
+                <a:solidFill>
+                  <a:srgbClr val="5B6778"/>
+                </a:solidFill>
+                <a:latin typeface="Inter" pitchFamily="34" charset="0"/>
+                <a:ea typeface="Inter" pitchFamily="34" charset="-122"/>
+                <a:cs typeface="Inter" pitchFamily="34" charset="-120"/>
+              </a:rPr>
+              <a:t>A measure of the day’s shape only — not a staffing requirement or a passenger forecast.</a:t>
+            </a:r>
+            <a:endParaRPr lang="en-US" sz="850" dirty="0"/>
+          </a:p>
+        </p:txBody>
+      </p:sp>
+      <p:sp>
+        <p:nvSpPr>
+          <p:cNvPr id="8" name="Text 5"/>
           <p:cNvSpPr txBox="1"/>
           <p:nvPr/>
         </p:nvSpPr>
@@ -4192,7 +4564,7 @@
                 <a:ea typeface="Inter" pitchFamily="34" charset="-122"/>
                 <a:cs typeface="Inter" pitchFamily="34" charset="-120"/>
               </a:rPr>
-              <a:t>People and cost</a:t>
+              <a:t>People and hours</a:t>
             </a:r>
             <a:endParaRPr lang="en-US" sz="3000" dirty="0"/>
           </a:p>
@@ -5061,7 +5433,7 @@
                 <a:ea typeface="Inter" pitchFamily="34" charset="-122"/>
                 <a:cs typeface="Inter" pitchFamily="34" charset="-120"/>
               </a:rPr>
-              <a:t>Fatigue and safety</a:t>
+              <a:t>Fatigue checks</a:t>
             </a:r>
             <a:endParaRPr lang="en-US" sz="3000" dirty="0"/>
           </a:p>
@@ -5244,7 +5616,7 @@
                 <a:ea typeface="Inter" pitchFamily="34" charset="-122"/>
                 <a:cs typeface="Inter" pitchFamily="34" charset="-120"/>
               </a:rPr>
-              <a:t>ORR fatigue warning signs in the design</a:t>
+              <a:t>Design-specific fatigue findings (ORR list)</a:t>
             </a:r>
             <a:endParaRPr lang="en-US" sz="1400" dirty="0"/>
           </a:p>
@@ -5388,7 +5760,7 @@
                 <a:ea typeface="Inter" pitchFamily="34" charset="-122"/>
                 <a:cs typeface="Inter" pitchFamily="34" charset="-120"/>
               </a:rPr>
-              <a:t>Most days worked in a row (limit 13)</a:t>
+              <a:t>Most days in a row (limit 13, source to confirm)</a:t>
             </a:r>
             <a:endParaRPr lang="en-US" sz="1400" dirty="0"/>
           </a:p>
@@ -5820,7 +6192,7 @@
                 <a:ea typeface="Inter" pitchFamily="34" charset="-122"/>
                 <a:cs typeface="Inter" pitchFamily="34" charset="-120"/>
               </a:rPr>
-              <a:t>Every limit met with room to spare, and none of the ORR’s warning signs.</a:t>
+              <a:t>Every limit met with room to spare, and no design-specific fatigue findings.</a:t>
             </a:r>
             <a:endParaRPr lang="en-US" sz="1400" dirty="0"/>
           </a:p>
@@ -5829,6 +6201,45 @@
       <p:sp>
         <p:nvSpPr>
           <p:cNvPr id="24" name="Text 22"/>
+          <p:cNvSpPr txBox="1"/>
+          <p:nvPr/>
+        </p:nvSpPr>
+        <p:spPr>
+          <a:xfrm>
+            <a:off x="4023360" y="4754880"/>
+            <a:ext cx="4663440" cy="310896"/>
+          </a:xfrm>
+          <a:prstGeom prst="rect">
+            <a:avLst/>
+          </a:prstGeom>
+          <a:noFill/>
+          <a:ln/>
+        </p:spPr>
+        <p:txBody>
+          <a:bodyPr wrap="square" lIns="0" tIns="0" rIns="0" bIns="0" rtlCol="0" anchor="t"/>
+          <a:lstStyle/>
+          <a:p>
+            <a:pPr algn="r" indent="0" marL="0">
+              <a:buNone/>
+            </a:pPr>
+            <a:r>
+              <a:rPr lang="en-US" sz="850" i="1" dirty="0">
+                <a:solidFill>
+                  <a:srgbClr val="5B6778"/>
+                </a:solidFill>
+                <a:latin typeface="Inter" pitchFamily="34" charset="0"/>
+                <a:ea typeface="Inter" pitchFamily="34" charset="-122"/>
+                <a:cs typeface="Inter" pitchFamily="34" charset="-120"/>
+              </a:rPr>
+              <a:t>Not counted: early starts and weekly rotation, which every link has. Not a risk assessment.</a:t>
+            </a:r>
+            <a:endParaRPr lang="en-US" sz="850" dirty="0"/>
+          </a:p>
+        </p:txBody>
+      </p:sp>
+      <p:sp>
+        <p:nvSpPr>
+          <p:cNvPr id="25" name="Text 23"/>
           <p:cNvSpPr txBox="1"/>
           <p:nvPr/>
         </p:nvSpPr>
@@ -5930,7 +6341,7 @@
                 <a:ea typeface="Inter" pitchFamily="34" charset="-122"/>
                 <a:cs typeface="Inter" pitchFamily="34" charset="-120"/>
               </a:rPr>
-              <a:t>Will staff accept it?</a:t>
+              <a:t>Why Familiar Nine?</a:t>
             </a:r>
             <a:endParaRPr lang="en-US" sz="3000" dirty="0"/>
           </a:p>
@@ -5969,957 +6380,2228 @@
                 <a:ea typeface="Inter" pitchFamily="34" charset="-122"/>
                 <a:cs typeface="Inter" pitchFamily="34" charset="-120"/>
               </a:rPr>
-              <a:t>The things colleagues ask first</a:t>
+              <a:t>Four of the 28 proposals meet every rule — three with no design fatigue findings</a:t>
             </a:r>
             <a:endParaRPr lang="en-US" sz="1500" dirty="0"/>
           </a:p>
         </p:txBody>
       </p:sp>
-      <p:sp>
-        <p:nvSpPr>
-          <p:cNvPr id="4" name="Text 2"/>
-          <p:cNvSpPr txBox="1"/>
-          <p:nvPr/>
-        </p:nvSpPr>
-        <p:spPr>
-          <a:xfrm>
-            <a:off x="4297680" y="1417320"/>
-            <a:ext cx="2194560" cy="320040"/>
-          </a:xfrm>
-          <a:prstGeom prst="rect">
-            <a:avLst/>
-          </a:prstGeom>
-          <a:noFill/>
-          <a:ln/>
-        </p:spPr>
-        <p:txBody>
-          <a:bodyPr wrap="square" lIns="0" tIns="0" rIns="0" bIns="0" rtlCol="0" anchor="ctr"/>
-          <a:lstStyle/>
-          <a:p>
-            <a:pPr algn="ctr" indent="0" marL="0">
-              <a:buNone/>
-            </a:pPr>
-            <a:r>
-              <a:rPr lang="en-US" sz="1300" b="1" dirty="0">
-                <a:solidFill>
-                  <a:srgbClr val="5B6778"/>
-                </a:solidFill>
-                <a:latin typeface="Inter" pitchFamily="34" charset="0"/>
-                <a:ea typeface="Inter" pitchFamily="34" charset="-122"/>
-                <a:cs typeface="Inter" pitchFamily="34" charset="-120"/>
-              </a:rPr>
-              <a:t>Today</a:t>
-            </a:r>
-            <a:endParaRPr lang="en-US" sz="1300" dirty="0"/>
-          </a:p>
-        </p:txBody>
-      </p:sp>
-      <p:sp>
-        <p:nvSpPr>
-          <p:cNvPr id="5" name="Text 3"/>
-          <p:cNvSpPr txBox="1"/>
-          <p:nvPr/>
-        </p:nvSpPr>
-        <p:spPr>
-          <a:xfrm>
-            <a:off x="6492240" y="1417320"/>
-            <a:ext cx="2194560" cy="320040"/>
-          </a:xfrm>
-          <a:prstGeom prst="rect">
-            <a:avLst/>
-          </a:prstGeom>
-          <a:noFill/>
-          <a:ln/>
-        </p:spPr>
-        <p:txBody>
-          <a:bodyPr wrap="square" lIns="0" tIns="0" rIns="0" bIns="0" rtlCol="0" anchor="ctr"/>
-          <a:lstStyle/>
-          <a:p>
-            <a:pPr algn="ctr" indent="0" marL="0">
-              <a:buNone/>
-            </a:pPr>
-            <a:r>
-              <a:rPr lang="en-US" sz="1300" b="1" dirty="0">
-                <a:solidFill>
-                  <a:srgbClr val="001E3C"/>
-                </a:solidFill>
-                <a:latin typeface="Inter" pitchFamily="34" charset="0"/>
-                <a:ea typeface="Inter" pitchFamily="34" charset="-122"/>
-                <a:cs typeface="Inter" pitchFamily="34" charset="-120"/>
-              </a:rPr>
-              <a:t>Familiar Nine</a:t>
-            </a:r>
-            <a:endParaRPr lang="en-US" sz="1300" dirty="0"/>
-          </a:p>
-        </p:txBody>
-      </p:sp>
-      <p:sp>
-        <p:nvSpPr>
-          <p:cNvPr id="6" name="Shape 4"/>
-          <p:cNvSpPr/>
-          <p:nvPr/>
-        </p:nvSpPr>
-        <p:spPr>
-          <a:xfrm>
-            <a:off x="457200" y="1801368"/>
-            <a:ext cx="8229600" cy="301752"/>
-          </a:xfrm>
-          <a:prstGeom prst="roundRect">
-            <a:avLst>
-              <a:gd name="adj" fmla="val 18182"/>
-            </a:avLst>
-          </a:prstGeom>
-          <a:solidFill>
-            <a:srgbClr val="EEF2F7"/>
-          </a:solidFill>
-          <a:ln w="12700">
-            <a:solidFill>
-              <a:srgbClr val="EEF2F7"/>
-            </a:solidFill>
-            <a:prstDash val="solid"/>
-          </a:ln>
-        </p:spPr>
-      </p:sp>
-      <p:sp>
-        <p:nvSpPr>
-          <p:cNvPr id="7" name="Text 5"/>
-          <p:cNvSpPr txBox="1"/>
-          <p:nvPr/>
-        </p:nvSpPr>
-        <p:spPr>
-          <a:xfrm>
-            <a:off x="640080" y="1801368"/>
-            <a:ext cx="3657600" cy="301752"/>
-          </a:xfrm>
-          <a:prstGeom prst="rect">
-            <a:avLst/>
-          </a:prstGeom>
-          <a:noFill/>
-          <a:ln/>
-        </p:spPr>
-        <p:txBody>
-          <a:bodyPr wrap="square" lIns="0" tIns="0" rIns="0" bIns="0" rtlCol="0" anchor="ctr"/>
-          <a:lstStyle/>
-          <a:p>
-            <a:pPr indent="0" marL="0">
-              <a:buNone/>
-            </a:pPr>
-            <a:r>
-              <a:rPr lang="en-US" sz="1400" dirty="0">
-                <a:solidFill>
-                  <a:srgbClr val="1B2533"/>
-                </a:solidFill>
-                <a:latin typeface="Inter" pitchFamily="34" charset="0"/>
-                <a:ea typeface="Inter" pitchFamily="34" charset="-122"/>
-                <a:cs typeface="Inter" pitchFamily="34" charset="-120"/>
-              </a:rPr>
-              <a:t>Shift times people already work</a:t>
-            </a:r>
-            <a:endParaRPr lang="en-US" sz="1400" dirty="0"/>
-          </a:p>
-        </p:txBody>
-      </p:sp>
-      <p:sp>
-        <p:nvSpPr>
-          <p:cNvPr id="8" name="Text 6"/>
-          <p:cNvSpPr txBox="1"/>
-          <p:nvPr/>
-        </p:nvSpPr>
-        <p:spPr>
-          <a:xfrm>
-            <a:off x="4297680" y="1801368"/>
-            <a:ext cx="2194560" cy="301752"/>
-          </a:xfrm>
-          <a:prstGeom prst="rect">
-            <a:avLst/>
-          </a:prstGeom>
-          <a:noFill/>
-          <a:ln/>
-        </p:spPr>
-        <p:txBody>
-          <a:bodyPr wrap="square" lIns="0" tIns="0" rIns="0" bIns="0" rtlCol="0" anchor="ctr"/>
-          <a:lstStyle/>
-          <a:p>
-            <a:pPr algn="ctr" indent="0" marL="0">
-              <a:buNone/>
-            </a:pPr>
-            <a:r>
-              <a:rPr lang="en-US" sz="1600" dirty="0">
-                <a:solidFill>
-                  <a:srgbClr val="5B6778"/>
-                </a:solidFill>
-                <a:latin typeface="Inter" pitchFamily="34" charset="0"/>
-                <a:ea typeface="Inter" pitchFamily="34" charset="-122"/>
-                <a:cs typeface="Inter" pitchFamily="34" charset="-120"/>
-              </a:rPr>
-              <a:t>—</a:t>
-            </a:r>
-            <a:endParaRPr lang="en-US" sz="1600" dirty="0"/>
-          </a:p>
-        </p:txBody>
-      </p:sp>
-      <p:sp>
-        <p:nvSpPr>
-          <p:cNvPr id="9" name="Text 7"/>
-          <p:cNvSpPr txBox="1"/>
-          <p:nvPr/>
-        </p:nvSpPr>
-        <p:spPr>
-          <a:xfrm>
-            <a:off x="6492240" y="1801368"/>
-            <a:ext cx="2194560" cy="301752"/>
-          </a:xfrm>
-          <a:prstGeom prst="rect">
-            <a:avLst/>
-          </a:prstGeom>
-          <a:noFill/>
-          <a:ln/>
-        </p:spPr>
-        <p:txBody>
-          <a:bodyPr wrap="square" lIns="0" tIns="0" rIns="0" bIns="0" rtlCol="0" anchor="ctr"/>
-          <a:lstStyle/>
-          <a:p>
-            <a:pPr algn="ctr" indent="0" marL="0">
-              <a:buNone/>
-            </a:pPr>
-            <a:r>
-              <a:rPr lang="en-US" sz="1800" b="1" dirty="0">
-                <a:solidFill>
-                  <a:srgbClr val="1E7B4B"/>
-                </a:solidFill>
-                <a:latin typeface="Inter" pitchFamily="34" charset="0"/>
-                <a:ea typeface="Inter" pitchFamily="34" charset="-122"/>
-                <a:cs typeface="Inter" pitchFamily="34" charset="-120"/>
-              </a:rPr>
-              <a:t>9 of 15</a:t>
-            </a:r>
-            <a:endParaRPr lang="en-US" sz="1800" dirty="0"/>
-          </a:p>
-        </p:txBody>
-      </p:sp>
-      <p:sp>
-        <p:nvSpPr>
-          <p:cNvPr id="10" name="Shape 8"/>
-          <p:cNvSpPr/>
-          <p:nvPr/>
-        </p:nvSpPr>
-        <p:spPr>
-          <a:xfrm>
-            <a:off x="457200" y="2194560"/>
-            <a:ext cx="8229600" cy="301752"/>
-          </a:xfrm>
-          <a:prstGeom prst="roundRect">
-            <a:avLst>
-              <a:gd name="adj" fmla="val 18182"/>
-            </a:avLst>
-          </a:prstGeom>
-          <a:solidFill>
-            <a:srgbClr val="FFFFFF"/>
-          </a:solidFill>
-          <a:ln w="12700">
-            <a:solidFill>
-              <a:srgbClr val="DDE3EA"/>
-            </a:solidFill>
-            <a:prstDash val="solid"/>
-          </a:ln>
-        </p:spPr>
-      </p:sp>
-      <p:sp>
-        <p:nvSpPr>
-          <p:cNvPr id="11" name="Text 9"/>
-          <p:cNvSpPr txBox="1"/>
-          <p:nvPr/>
-        </p:nvSpPr>
-        <p:spPr>
-          <a:xfrm>
-            <a:off x="640080" y="2194560"/>
-            <a:ext cx="3657600" cy="301752"/>
-          </a:xfrm>
-          <a:prstGeom prst="rect">
-            <a:avLst/>
-          </a:prstGeom>
-          <a:noFill/>
-          <a:ln/>
-        </p:spPr>
-        <p:txBody>
-          <a:bodyPr wrap="square" lIns="0" tIns="0" rIns="0" bIns="0" rtlCol="0" anchor="ctr"/>
-          <a:lstStyle/>
-          <a:p>
-            <a:pPr indent="0" marL="0">
-              <a:buNone/>
-            </a:pPr>
-            <a:r>
-              <a:rPr lang="en-US" sz="1400" dirty="0">
-                <a:solidFill>
-                  <a:srgbClr val="1B2533"/>
-                </a:solidFill>
-                <a:latin typeface="Inter" pitchFamily="34" charset="0"/>
-                <a:ea typeface="Inter" pitchFamily="34" charset="-122"/>
-                <a:cs typeface="Inter" pitchFamily="34" charset="-120"/>
-              </a:rPr>
-              <a:t>Full weekends off</a:t>
-            </a:r>
-            <a:endParaRPr lang="en-US" sz="1400" dirty="0"/>
-          </a:p>
-        </p:txBody>
-      </p:sp>
-      <p:sp>
-        <p:nvSpPr>
-          <p:cNvPr id="12" name="Text 10"/>
-          <p:cNvSpPr txBox="1"/>
-          <p:nvPr/>
-        </p:nvSpPr>
-        <p:spPr>
-          <a:xfrm>
-            <a:off x="4297680" y="2194560"/>
-            <a:ext cx="2194560" cy="301752"/>
-          </a:xfrm>
-          <a:prstGeom prst="rect">
-            <a:avLst/>
-          </a:prstGeom>
-          <a:noFill/>
-          <a:ln/>
-        </p:spPr>
-        <p:txBody>
-          <a:bodyPr wrap="square" lIns="0" tIns="0" rIns="0" bIns="0" rtlCol="0" anchor="ctr"/>
-          <a:lstStyle/>
-          <a:p>
-            <a:pPr algn="ctr" indent="0" marL="0">
-              <a:buNone/>
-            </a:pPr>
-            <a:r>
-              <a:rPr lang="en-US" sz="1600" dirty="0">
-                <a:solidFill>
-                  <a:srgbClr val="5B6778"/>
-                </a:solidFill>
-                <a:latin typeface="Inter" pitchFamily="34" charset="0"/>
-                <a:ea typeface="Inter" pitchFamily="34" charset="-122"/>
-                <a:cs typeface="Inter" pitchFamily="34" charset="-120"/>
-              </a:rPr>
-              <a:t>4 in 20</a:t>
-            </a:r>
-            <a:endParaRPr lang="en-US" sz="1600" dirty="0"/>
-          </a:p>
-        </p:txBody>
-      </p:sp>
-      <p:sp>
-        <p:nvSpPr>
-          <p:cNvPr id="13" name="Text 11"/>
-          <p:cNvSpPr txBox="1"/>
-          <p:nvPr/>
-        </p:nvSpPr>
-        <p:spPr>
-          <a:xfrm>
-            <a:off x="6492240" y="2194560"/>
-            <a:ext cx="2194560" cy="301752"/>
-          </a:xfrm>
-          <a:prstGeom prst="rect">
-            <a:avLst/>
-          </a:prstGeom>
-          <a:noFill/>
-          <a:ln/>
-        </p:spPr>
-        <p:txBody>
-          <a:bodyPr wrap="square" lIns="0" tIns="0" rIns="0" bIns="0" rtlCol="0" anchor="ctr"/>
-          <a:lstStyle/>
-          <a:p>
-            <a:pPr algn="ctr" indent="0" marL="0">
-              <a:buNone/>
-            </a:pPr>
-            <a:r>
-              <a:rPr lang="en-US" sz="1800" b="1" dirty="0">
-                <a:solidFill>
-                  <a:srgbClr val="1E7B4B"/>
-                </a:solidFill>
-                <a:latin typeface="Inter" pitchFamily="34" charset="0"/>
-                <a:ea typeface="Inter" pitchFamily="34" charset="-122"/>
-                <a:cs typeface="Inter" pitchFamily="34" charset="-120"/>
-              </a:rPr>
-              <a:t>6 in 24</a:t>
-            </a:r>
-            <a:endParaRPr lang="en-US" sz="1800" dirty="0"/>
-          </a:p>
-        </p:txBody>
-      </p:sp>
-      <p:sp>
-        <p:nvSpPr>
-          <p:cNvPr id="14" name="Shape 12"/>
-          <p:cNvSpPr/>
-          <p:nvPr/>
-        </p:nvSpPr>
-        <p:spPr>
-          <a:xfrm>
-            <a:off x="457200" y="2587752"/>
-            <a:ext cx="8229600" cy="301752"/>
-          </a:xfrm>
-          <a:prstGeom prst="roundRect">
-            <a:avLst>
-              <a:gd name="adj" fmla="val 18182"/>
-            </a:avLst>
-          </a:prstGeom>
-          <a:solidFill>
-            <a:srgbClr val="EEF2F7"/>
-          </a:solidFill>
-          <a:ln w="12700">
-            <a:solidFill>
-              <a:srgbClr val="EEF2F7"/>
-            </a:solidFill>
-            <a:prstDash val="solid"/>
-          </a:ln>
-        </p:spPr>
-      </p:sp>
-      <p:sp>
-        <p:nvSpPr>
-          <p:cNvPr id="15" name="Text 13"/>
-          <p:cNvSpPr txBox="1"/>
-          <p:nvPr/>
-        </p:nvSpPr>
-        <p:spPr>
-          <a:xfrm>
-            <a:off x="640080" y="2587752"/>
-            <a:ext cx="3657600" cy="301752"/>
-          </a:xfrm>
-          <a:prstGeom prst="rect">
-            <a:avLst/>
-          </a:prstGeom>
-          <a:noFill/>
-          <a:ln/>
-        </p:spPr>
-        <p:txBody>
-          <a:bodyPr wrap="square" lIns="0" tIns="0" rIns="0" bIns="0" rtlCol="0" anchor="ctr"/>
-          <a:lstStyle/>
-          <a:p>
-            <a:pPr indent="0" marL="0">
-              <a:buNone/>
-            </a:pPr>
-            <a:r>
-              <a:rPr lang="en-US" sz="1400" dirty="0">
-                <a:solidFill>
-                  <a:srgbClr val="1B2533"/>
-                </a:solidFill>
-                <a:latin typeface="Inter" pitchFamily="34" charset="0"/>
-                <a:ea typeface="Inter" pitchFamily="34" charset="-122"/>
-                <a:cs typeface="Inter" pitchFamily="34" charset="-120"/>
-              </a:rPr>
-              <a:t>Days at work a year</a:t>
-            </a:r>
-            <a:endParaRPr lang="en-US" sz="1400" dirty="0"/>
-          </a:p>
-        </p:txBody>
-      </p:sp>
-      <p:sp>
-        <p:nvSpPr>
-          <p:cNvPr id="16" name="Text 14"/>
-          <p:cNvSpPr txBox="1"/>
-          <p:nvPr/>
-        </p:nvSpPr>
-        <p:spPr>
-          <a:xfrm>
-            <a:off x="4297680" y="2587752"/>
-            <a:ext cx="2194560" cy="301752"/>
-          </a:xfrm>
-          <a:prstGeom prst="rect">
-            <a:avLst/>
-          </a:prstGeom>
-          <a:noFill/>
-          <a:ln/>
-        </p:spPr>
-        <p:txBody>
-          <a:bodyPr wrap="square" lIns="0" tIns="0" rIns="0" bIns="0" rtlCol="0" anchor="ctr"/>
-          <a:lstStyle/>
-          <a:p>
-            <a:pPr algn="ctr" indent="0" marL="0">
-              <a:buNone/>
-            </a:pPr>
-            <a:r>
-              <a:rPr lang="en-US" sz="1600" dirty="0">
-                <a:solidFill>
-                  <a:srgbClr val="5B6778"/>
-                </a:solidFill>
-                <a:latin typeface="Inter" pitchFamily="34" charset="0"/>
-                <a:ea typeface="Inter" pitchFamily="34" charset="-122"/>
-                <a:cs typeface="Inter" pitchFamily="34" charset="-120"/>
-              </a:rPr>
-              <a:t>219</a:t>
-            </a:r>
-            <a:endParaRPr lang="en-US" sz="1600" dirty="0"/>
-          </a:p>
-        </p:txBody>
-      </p:sp>
-      <p:sp>
-        <p:nvSpPr>
-          <p:cNvPr id="17" name="Text 15"/>
-          <p:cNvSpPr txBox="1"/>
-          <p:nvPr/>
-        </p:nvSpPr>
-        <p:spPr>
-          <a:xfrm>
-            <a:off x="6492240" y="2587752"/>
-            <a:ext cx="2194560" cy="301752"/>
-          </a:xfrm>
-          <a:prstGeom prst="rect">
-            <a:avLst/>
-          </a:prstGeom>
-          <a:noFill/>
-          <a:ln/>
-        </p:spPr>
-        <p:txBody>
-          <a:bodyPr wrap="square" lIns="0" tIns="0" rIns="0" bIns="0" rtlCol="0" anchor="ctr"/>
-          <a:lstStyle/>
-          <a:p>
-            <a:pPr algn="ctr" indent="0" marL="0">
-              <a:buNone/>
-            </a:pPr>
-            <a:r>
-              <a:rPr lang="en-US" sz="1800" b="1" dirty="0">
-                <a:solidFill>
-                  <a:srgbClr val="1E7B4B"/>
-                </a:solidFill>
-                <a:latin typeface="Inter" pitchFamily="34" charset="0"/>
-                <a:ea typeface="Inter" pitchFamily="34" charset="-122"/>
-                <a:cs typeface="Inter" pitchFamily="34" charset="-120"/>
-              </a:rPr>
-              <a:t>217</a:t>
-            </a:r>
-            <a:endParaRPr lang="en-US" sz="1800" dirty="0"/>
-          </a:p>
-        </p:txBody>
-      </p:sp>
-      <p:sp>
-        <p:nvSpPr>
-          <p:cNvPr id="18" name="Shape 16"/>
-          <p:cNvSpPr/>
-          <p:nvPr/>
-        </p:nvSpPr>
-        <p:spPr>
-          <a:xfrm>
-            <a:off x="457200" y="2980944"/>
-            <a:ext cx="8229600" cy="301752"/>
-          </a:xfrm>
-          <a:prstGeom prst="roundRect">
-            <a:avLst>
-              <a:gd name="adj" fmla="val 18182"/>
-            </a:avLst>
-          </a:prstGeom>
-          <a:solidFill>
-            <a:srgbClr val="FFFFFF"/>
-          </a:solidFill>
-          <a:ln w="12700">
-            <a:solidFill>
-              <a:srgbClr val="DDE3EA"/>
-            </a:solidFill>
-            <a:prstDash val="solid"/>
-          </a:ln>
-        </p:spPr>
-      </p:sp>
-      <p:sp>
-        <p:nvSpPr>
-          <p:cNvPr id="19" name="Text 17"/>
-          <p:cNvSpPr txBox="1"/>
-          <p:nvPr/>
-        </p:nvSpPr>
-        <p:spPr>
-          <a:xfrm>
-            <a:off x="640080" y="2980944"/>
-            <a:ext cx="3657600" cy="301752"/>
-          </a:xfrm>
-          <a:prstGeom prst="rect">
-            <a:avLst/>
-          </a:prstGeom>
-          <a:noFill/>
-          <a:ln/>
-        </p:spPr>
-        <p:txBody>
-          <a:bodyPr wrap="square" lIns="0" tIns="0" rIns="0" bIns="0" rtlCol="0" anchor="ctr"/>
-          <a:lstStyle/>
-          <a:p>
-            <a:pPr indent="0" marL="0">
-              <a:buNone/>
-            </a:pPr>
-            <a:r>
-              <a:rPr lang="en-US" sz="1400" dirty="0">
-                <a:solidFill>
-                  <a:srgbClr val="1B2533"/>
-                </a:solidFill>
-                <a:latin typeface="Inter" pitchFamily="34" charset="0"/>
-                <a:ea typeface="Inter" pitchFamily="34" charset="-122"/>
-                <a:cs typeface="Inter" pitchFamily="34" charset="-120"/>
-              </a:rPr>
-              <a:t>Weeks on one shift time all week</a:t>
-            </a:r>
-            <a:endParaRPr lang="en-US" sz="1400" dirty="0"/>
-          </a:p>
-        </p:txBody>
-      </p:sp>
-      <p:sp>
-        <p:nvSpPr>
-          <p:cNvPr id="20" name="Text 18"/>
-          <p:cNvSpPr txBox="1"/>
-          <p:nvPr/>
-        </p:nvSpPr>
-        <p:spPr>
-          <a:xfrm>
-            <a:off x="4297680" y="2980944"/>
-            <a:ext cx="2194560" cy="301752"/>
-          </a:xfrm>
-          <a:prstGeom prst="rect">
-            <a:avLst/>
-          </a:prstGeom>
-          <a:noFill/>
-          <a:ln/>
-        </p:spPr>
-        <p:txBody>
-          <a:bodyPr wrap="square" lIns="0" tIns="0" rIns="0" bIns="0" rtlCol="0" anchor="ctr"/>
-          <a:lstStyle/>
-          <a:p>
-            <a:pPr algn="ctr" indent="0" marL="0">
-              <a:buNone/>
-            </a:pPr>
-            <a:r>
-              <a:rPr lang="en-US" sz="1600" dirty="0">
-                <a:solidFill>
-                  <a:srgbClr val="5B6778"/>
-                </a:solidFill>
-                <a:latin typeface="Inter" pitchFamily="34" charset="0"/>
-                <a:ea typeface="Inter" pitchFamily="34" charset="-122"/>
-                <a:cs typeface="Inter" pitchFamily="34" charset="-120"/>
-              </a:rPr>
-              <a:t>7 of 16</a:t>
-            </a:r>
-            <a:endParaRPr lang="en-US" sz="1600" dirty="0"/>
-          </a:p>
-        </p:txBody>
-      </p:sp>
-      <p:sp>
-        <p:nvSpPr>
-          <p:cNvPr id="21" name="Text 19"/>
-          <p:cNvSpPr txBox="1"/>
-          <p:nvPr/>
-        </p:nvSpPr>
-        <p:spPr>
-          <a:xfrm>
-            <a:off x="6492240" y="2980944"/>
-            <a:ext cx="2194560" cy="301752"/>
-          </a:xfrm>
-          <a:prstGeom prst="rect">
-            <a:avLst/>
-          </a:prstGeom>
-          <a:noFill/>
-          <a:ln/>
-        </p:spPr>
-        <p:txBody>
-          <a:bodyPr wrap="square" lIns="0" tIns="0" rIns="0" bIns="0" rtlCol="0" anchor="ctr"/>
-          <a:lstStyle/>
-          <a:p>
-            <a:pPr algn="ctr" indent="0" marL="0">
-              <a:buNone/>
-            </a:pPr>
-            <a:r>
-              <a:rPr lang="en-US" sz="1800" b="1" dirty="0">
-                <a:solidFill>
-                  <a:srgbClr val="1E7B4B"/>
-                </a:solidFill>
-                <a:latin typeface="Inter" pitchFamily="34" charset="0"/>
-                <a:ea typeface="Inter" pitchFamily="34" charset="-122"/>
-                <a:cs typeface="Inter" pitchFamily="34" charset="-120"/>
-              </a:rPr>
-              <a:t>14 of 20</a:t>
-            </a:r>
-            <a:endParaRPr lang="en-US" sz="1800" dirty="0"/>
-          </a:p>
-        </p:txBody>
-      </p:sp>
-      <p:sp>
-        <p:nvSpPr>
-          <p:cNvPr id="22" name="Shape 20"/>
-          <p:cNvSpPr/>
-          <p:nvPr/>
-        </p:nvSpPr>
-        <p:spPr>
-          <a:xfrm>
-            <a:off x="457200" y="3374136"/>
-            <a:ext cx="8229600" cy="301752"/>
-          </a:xfrm>
-          <a:prstGeom prst="roundRect">
-            <a:avLst>
-              <a:gd name="adj" fmla="val 18182"/>
-            </a:avLst>
-          </a:prstGeom>
-          <a:solidFill>
-            <a:srgbClr val="EEF2F7"/>
-          </a:solidFill>
-          <a:ln w="12700">
-            <a:solidFill>
-              <a:srgbClr val="EEF2F7"/>
-            </a:solidFill>
-            <a:prstDash val="solid"/>
-          </a:ln>
-        </p:spPr>
-      </p:sp>
-      <p:sp>
-        <p:nvSpPr>
-          <p:cNvPr id="23" name="Text 21"/>
-          <p:cNvSpPr txBox="1"/>
-          <p:nvPr/>
-        </p:nvSpPr>
-        <p:spPr>
-          <a:xfrm>
-            <a:off x="640080" y="3374136"/>
-            <a:ext cx="3657600" cy="301752"/>
-          </a:xfrm>
-          <a:prstGeom prst="rect">
-            <a:avLst/>
-          </a:prstGeom>
-          <a:noFill/>
-          <a:ln/>
-        </p:spPr>
-        <p:txBody>
-          <a:bodyPr wrap="square" lIns="0" tIns="0" rIns="0" bIns="0" rtlCol="0" anchor="ctr"/>
-          <a:lstStyle/>
-          <a:p>
-            <a:pPr indent="0" marL="0">
-              <a:buNone/>
-            </a:pPr>
-            <a:r>
-              <a:rPr lang="en-US" sz="1400" dirty="0">
-                <a:solidFill>
-                  <a:srgbClr val="1B2533"/>
-                </a:solidFill>
-                <a:latin typeface="Inter" pitchFamily="34" charset="0"/>
-                <a:ea typeface="Inter" pitchFamily="34" charset="-122"/>
-                <a:cs typeface="Inter" pitchFamily="34" charset="-120"/>
-              </a:rPr>
-              <a:t>Closing shift: weekday · Sat · Sun</a:t>
-            </a:r>
-            <a:endParaRPr lang="en-US" sz="1400" dirty="0"/>
-          </a:p>
-        </p:txBody>
-      </p:sp>
-      <p:sp>
-        <p:nvSpPr>
-          <p:cNvPr id="24" name="Text 22"/>
-          <p:cNvSpPr txBox="1"/>
-          <p:nvPr/>
-        </p:nvSpPr>
-        <p:spPr>
-          <a:xfrm>
-            <a:off x="4297680" y="3374136"/>
-            <a:ext cx="2194560" cy="301752"/>
-          </a:xfrm>
-          <a:prstGeom prst="rect">
-            <a:avLst/>
-          </a:prstGeom>
-          <a:noFill/>
-          <a:ln/>
-        </p:spPr>
-        <p:txBody>
-          <a:bodyPr wrap="square" lIns="0" tIns="0" rIns="0" bIns="0" rtlCol="0" anchor="ctr"/>
-          <a:lstStyle/>
-          <a:p>
-            <a:pPr algn="ctr" indent="0" marL="0">
-              <a:buNone/>
-            </a:pPr>
-            <a:r>
-              <a:rPr lang="en-US" sz="1600" dirty="0">
-                <a:solidFill>
-                  <a:srgbClr val="5B6778"/>
-                </a:solidFill>
-                <a:latin typeface="Inter" pitchFamily="34" charset="0"/>
-                <a:ea typeface="Inter" pitchFamily="34" charset="-122"/>
-                <a:cs typeface="Inter" pitchFamily="34" charset="-120"/>
-              </a:rPr>
-              <a:t>8h40 · 9h10 · 8h55</a:t>
-            </a:r>
-            <a:endParaRPr lang="en-US" sz="1600" dirty="0"/>
-          </a:p>
-        </p:txBody>
-      </p:sp>
-      <p:sp>
-        <p:nvSpPr>
-          <p:cNvPr id="25" name="Text 23"/>
-          <p:cNvSpPr txBox="1"/>
-          <p:nvPr/>
-        </p:nvSpPr>
-        <p:spPr>
-          <a:xfrm>
-            <a:off x="6492240" y="3374136"/>
-            <a:ext cx="2194560" cy="301752"/>
-          </a:xfrm>
-          <a:prstGeom prst="rect">
-            <a:avLst/>
-          </a:prstGeom>
-          <a:noFill/>
-          <a:ln/>
-        </p:spPr>
-        <p:txBody>
-          <a:bodyPr wrap="square" lIns="0" tIns="0" rIns="0" bIns="0" rtlCol="0" anchor="ctr"/>
-          <a:lstStyle/>
-          <a:p>
-            <a:pPr algn="ctr" indent="0" marL="0">
-              <a:buNone/>
-            </a:pPr>
-            <a:r>
-              <a:rPr lang="en-US" sz="1800" b="1" dirty="0">
-                <a:solidFill>
-                  <a:srgbClr val="1E7B4B"/>
-                </a:solidFill>
-                <a:latin typeface="Inter" pitchFamily="34" charset="0"/>
-                <a:ea typeface="Inter" pitchFamily="34" charset="-122"/>
-                <a:cs typeface="Inter" pitchFamily="34" charset="-120"/>
-              </a:rPr>
-              <a:t>8h10 · 8h40 · 8h10</a:t>
-            </a:r>
-            <a:endParaRPr lang="en-US" sz="1800" dirty="0"/>
-          </a:p>
-        </p:txBody>
-      </p:sp>
-      <p:sp>
-        <p:nvSpPr>
-          <p:cNvPr id="26" name="Shape 24"/>
-          <p:cNvSpPr/>
-          <p:nvPr/>
-        </p:nvSpPr>
-        <p:spPr>
-          <a:xfrm>
-            <a:off x="457200" y="3767328"/>
-            <a:ext cx="8229600" cy="301752"/>
-          </a:xfrm>
-          <a:prstGeom prst="roundRect">
-            <a:avLst>
-              <a:gd name="adj" fmla="val 18182"/>
-            </a:avLst>
-          </a:prstGeom>
-          <a:solidFill>
-            <a:srgbClr val="FFFFFF"/>
-          </a:solidFill>
-          <a:ln w="12700">
-            <a:solidFill>
-              <a:srgbClr val="DDE3EA"/>
-            </a:solidFill>
-            <a:prstDash val="solid"/>
-          </a:ln>
-        </p:spPr>
-      </p:sp>
-      <p:sp>
-        <p:nvSpPr>
-          <p:cNvPr id="27" name="Text 25"/>
-          <p:cNvSpPr txBox="1"/>
-          <p:nvPr/>
-        </p:nvSpPr>
-        <p:spPr>
-          <a:xfrm>
-            <a:off x="640080" y="3767328"/>
-            <a:ext cx="3657600" cy="301752"/>
-          </a:xfrm>
-          <a:prstGeom prst="rect">
-            <a:avLst/>
-          </a:prstGeom>
-          <a:noFill/>
-          <a:ln/>
-        </p:spPr>
-        <p:txBody>
-          <a:bodyPr wrap="square" lIns="0" tIns="0" rIns="0" bIns="0" rtlCol="0" anchor="ctr"/>
-          <a:lstStyle/>
-          <a:p>
-            <a:pPr indent="0" marL="0">
-              <a:buNone/>
-            </a:pPr>
-            <a:r>
-              <a:rPr lang="en-US" sz="1400" dirty="0">
-                <a:solidFill>
-                  <a:srgbClr val="1B2533"/>
-                </a:solidFill>
-                <a:latin typeface="Inter" pitchFamily="34" charset="0"/>
-                <a:ea typeface="Inter" pitchFamily="34" charset="-122"/>
-                <a:cs typeface="Inter" pitchFamily="34" charset="-120"/>
-              </a:rPr>
-              <a:t>Finishing at 23:00 or later — each, a year</a:t>
-            </a:r>
-            <a:endParaRPr lang="en-US" sz="1400" dirty="0"/>
-          </a:p>
-        </p:txBody>
-      </p:sp>
-      <p:sp>
-        <p:nvSpPr>
-          <p:cNvPr id="28" name="Text 26"/>
-          <p:cNvSpPr txBox="1"/>
-          <p:nvPr/>
-        </p:nvSpPr>
-        <p:spPr>
-          <a:xfrm>
-            <a:off x="4297680" y="3767328"/>
-            <a:ext cx="2194560" cy="301752"/>
-          </a:xfrm>
-          <a:prstGeom prst="rect">
-            <a:avLst/>
-          </a:prstGeom>
-          <a:noFill/>
-          <a:ln/>
-        </p:spPr>
-        <p:txBody>
-          <a:bodyPr wrap="square" lIns="0" tIns="0" rIns="0" bIns="0" rtlCol="0" anchor="ctr"/>
-          <a:lstStyle/>
-          <a:p>
-            <a:pPr algn="ctr" indent="0" marL="0">
-              <a:buNone/>
-            </a:pPr>
-            <a:r>
-              <a:rPr lang="en-US" sz="1600" dirty="0">
-                <a:solidFill>
-                  <a:srgbClr val="5B6778"/>
-                </a:solidFill>
-                <a:latin typeface="Inter" pitchFamily="34" charset="0"/>
-                <a:ea typeface="Inter" pitchFamily="34" charset="-122"/>
-                <a:cs typeface="Inter" pitchFamily="34" charset="-120"/>
-              </a:rPr>
-              <a:t>39</a:t>
-            </a:r>
-            <a:endParaRPr lang="en-US" sz="1600" dirty="0"/>
-          </a:p>
-        </p:txBody>
-      </p:sp>
-      <p:sp>
-        <p:nvSpPr>
-          <p:cNvPr id="29" name="Text 27"/>
-          <p:cNvSpPr txBox="1"/>
-          <p:nvPr/>
-        </p:nvSpPr>
-        <p:spPr>
-          <a:xfrm>
-            <a:off x="6492240" y="3767328"/>
-            <a:ext cx="2194560" cy="301752"/>
-          </a:xfrm>
-          <a:prstGeom prst="rect">
-            <a:avLst/>
-          </a:prstGeom>
-          <a:noFill/>
-          <a:ln/>
-        </p:spPr>
-        <p:txBody>
-          <a:bodyPr wrap="square" lIns="0" tIns="0" rIns="0" bIns="0" rtlCol="0" anchor="ctr"/>
-          <a:lstStyle/>
-          <a:p>
-            <a:pPr algn="ctr" indent="0" marL="0">
-              <a:buNone/>
-            </a:pPr>
-            <a:r>
-              <a:rPr lang="en-US" sz="1800" b="1" dirty="0">
-                <a:solidFill>
-                  <a:srgbClr val="A15C00"/>
-                </a:solidFill>
-                <a:latin typeface="Inter" pitchFamily="34" charset="0"/>
-                <a:ea typeface="Inter" pitchFamily="34" charset="-122"/>
-                <a:cs typeface="Inter" pitchFamily="34" charset="-120"/>
-              </a:rPr>
-              <a:t>59</a:t>
-            </a:r>
-            <a:endParaRPr lang="en-US" sz="1800" dirty="0"/>
-          </a:p>
-        </p:txBody>
-      </p:sp>
-      <p:sp>
-        <p:nvSpPr>
-          <p:cNvPr id="30" name="Shape 28"/>
+      <p:graphicFrame>
+        <p:nvGraphicFramePr>
+          <p:cNvPr id="8" name="Table 0"/>
+          <p:cNvGraphicFramePr>
+            <a:graphicFrameLocks noGrp="1"/>
+          </p:cNvGraphicFramePr>
+          <p:nvPr>
+            <p:extLst>
+              <p:ext uri="{D42A27DB-BD31-4B8C-83A1-F6EECF244321}">
+                <p14:modId xmlns:p14="http://schemas.microsoft.com/office/powerpoint/2010/main" val="1579011935"/>
+              </p:ext>
+            </p:extLst>
+          </p:nvPr>
+        </p:nvGraphicFramePr>
+        <p:xfrm>
+          <a:off x="457200" y="1325880"/>
+          <a:ext cx="8229600" cy="914400"/>
+        </p:xfrm>
+        <a:graphic>
+          <a:graphicData uri="http://schemas.openxmlformats.org/drawingml/2006/table">
+            <a:tbl>
+              <a:tblPr/>
+              <a:tblGrid>
+                <a:gridCol w="3566160"/>
+                <a:gridCol w="1554480"/>
+                <a:gridCol w="1554480"/>
+                <a:gridCol w="1554480"/>
+              </a:tblGrid>
+              <a:tr h="329184">
+                <a:tc>
+                  <a:txBody>
+                    <a:bodyPr/>
+                    <a:lstStyle/>
+                    <a:p>
+                      <a:pPr algn="ctr" indent="0" marL="0">
+                        <a:buNone/>
+                      </a:pPr>
+                      <a:endParaRPr lang="en-US" sz="1200" dirty="0">
+                        <a:latin typeface="Inter" charset="0"/>
+                        <a:ea typeface="Inter" charset="0"/>
+                        <a:cs typeface="Inter" charset="0"/>
+                      </a:endParaRPr>
+                    </a:p>
+                  </a:txBody>
+                  <a:tcPr marL="91440" marR="91440" marT="0" marB="0" anchor="ctr">
+                    <a:lnL w="9525" cap="flat" cmpd="sng" algn="ctr">
+                      <a:solidFill>
+                        <a:srgbClr val="DDE3EA"/>
+                      </a:solidFill>
+                      <a:prstDash val="solid"/>
+                      <a:round/>
+                      <a:headEnd type="none" w="med" len="med"/>
+                      <a:tailEnd type="none" w="med" len="med"/>
+                    </a:lnL>
+                    <a:lnR w="9525" cap="flat" cmpd="sng" algn="ctr">
+                      <a:solidFill>
+                        <a:srgbClr val="DDE3EA"/>
+                      </a:solidFill>
+                      <a:prstDash val="solid"/>
+                      <a:round/>
+                      <a:headEnd type="none" w="med" len="med"/>
+                      <a:tailEnd type="none" w="med" len="med"/>
+                    </a:lnR>
+                    <a:lnT w="9525" cap="flat" cmpd="sng" algn="ctr">
+                      <a:solidFill>
+                        <a:srgbClr val="DDE3EA"/>
+                      </a:solidFill>
+                      <a:prstDash val="solid"/>
+                      <a:round/>
+                      <a:headEnd type="none" w="med" len="med"/>
+                      <a:tailEnd type="none" w="med" len="med"/>
+                    </a:lnT>
+                    <a:lnB w="9525" cap="flat" cmpd="sng" algn="ctr">
+                      <a:solidFill>
+                        <a:srgbClr val="DDE3EA"/>
+                      </a:solidFill>
+                      <a:prstDash val="solid"/>
+                      <a:round/>
+                      <a:headEnd type="none" w="med" len="med"/>
+                      <a:tailEnd type="none" w="med" len="med"/>
+                    </a:lnB>
+                    <a:solidFill>
+                      <a:srgbClr val="EEF2F7"/>
+                    </a:solidFill>
+                  </a:tcPr>
+                </a:tc>
+                <a:tc>
+                  <a:txBody>
+                    <a:bodyPr/>
+                    <a:lstStyle/>
+                    <a:p>
+                      <a:pPr algn="ctr" indent="0" marL="0">
+                        <a:buNone/>
+                      </a:pPr>
+                      <a:r>
+                        <a:rPr lang="en-US" sz="1200" b="1" dirty="0">
+                          <a:solidFill>
+                            <a:srgbClr val="FFFFFF"/>
+                          </a:solidFill>
+                          <a:latin typeface="Inter" pitchFamily="34" charset="0"/>
+                          <a:ea typeface="Inter" pitchFamily="34" charset="-122"/>
+                          <a:cs typeface="Inter" pitchFamily="34" charset="-120"/>
+                        </a:rPr>
+                        <a:t>Familiar Nine</a:t>
+                      </a:r>
+                      <a:endParaRPr lang="en-US" sz="1200" dirty="0">
+                        <a:latin typeface="Inter" charset="0"/>
+                        <a:ea typeface="Inter" charset="0"/>
+                        <a:cs typeface="Inter" charset="0"/>
+                      </a:endParaRPr>
+                    </a:p>
+                  </a:txBody>
+                  <a:tcPr marL="91440" marR="91440" marT="0" marB="0" anchor="ctr">
+                    <a:lnL w="9525" cap="flat" cmpd="sng" algn="ctr">
+                      <a:solidFill>
+                        <a:srgbClr val="DDE3EA"/>
+                      </a:solidFill>
+                      <a:prstDash val="solid"/>
+                      <a:round/>
+                      <a:headEnd type="none" w="med" len="med"/>
+                      <a:tailEnd type="none" w="med" len="med"/>
+                    </a:lnL>
+                    <a:lnR w="9525" cap="flat" cmpd="sng" algn="ctr">
+                      <a:solidFill>
+                        <a:srgbClr val="DDE3EA"/>
+                      </a:solidFill>
+                      <a:prstDash val="solid"/>
+                      <a:round/>
+                      <a:headEnd type="none" w="med" len="med"/>
+                      <a:tailEnd type="none" w="med" len="med"/>
+                    </a:lnR>
+                    <a:lnT w="9525" cap="flat" cmpd="sng" algn="ctr">
+                      <a:solidFill>
+                        <a:srgbClr val="DDE3EA"/>
+                      </a:solidFill>
+                      <a:prstDash val="solid"/>
+                      <a:round/>
+                      <a:headEnd type="none" w="med" len="med"/>
+                      <a:tailEnd type="none" w="med" len="med"/>
+                    </a:lnT>
+                    <a:lnB w="9525" cap="flat" cmpd="sng" algn="ctr">
+                      <a:solidFill>
+                        <a:srgbClr val="DDE3EA"/>
+                      </a:solidFill>
+                      <a:prstDash val="solid"/>
+                      <a:round/>
+                      <a:headEnd type="none" w="med" len="med"/>
+                      <a:tailEnd type="none" w="med" len="med"/>
+                    </a:lnB>
+                    <a:solidFill>
+                      <a:srgbClr val="001E3C"/>
+                    </a:solidFill>
+                  </a:tcPr>
+                </a:tc>
+                <a:tc>
+                  <a:txBody>
+                    <a:bodyPr/>
+                    <a:lstStyle/>
+                    <a:p>
+                      <a:pPr algn="ctr" indent="0" marL="0">
+                        <a:buNone/>
+                      </a:pPr>
+                      <a:r>
+                        <a:rPr lang="en-US" sz="1200" b="1" dirty="0">
+                          <a:solidFill>
+                            <a:srgbClr val="001E3C"/>
+                          </a:solidFill>
+                          <a:latin typeface="Inter" pitchFamily="34" charset="0"/>
+                          <a:ea typeface="Inter" pitchFamily="34" charset="-122"/>
+                          <a:cs typeface="Inter" pitchFamily="34" charset="-120"/>
+                        </a:rPr>
+                        <a:t>Right Away</a:t>
+                      </a:r>
+                      <a:endParaRPr lang="en-US" sz="1200" dirty="0">
+                        <a:latin typeface="Inter" charset="0"/>
+                        <a:ea typeface="Inter" charset="0"/>
+                        <a:cs typeface="Inter" charset="0"/>
+                      </a:endParaRPr>
+                    </a:p>
+                  </a:txBody>
+                  <a:tcPr marL="91440" marR="91440" marT="0" marB="0" anchor="ctr">
+                    <a:lnL w="9525" cap="flat" cmpd="sng" algn="ctr">
+                      <a:solidFill>
+                        <a:srgbClr val="DDE3EA"/>
+                      </a:solidFill>
+                      <a:prstDash val="solid"/>
+                      <a:round/>
+                      <a:headEnd type="none" w="med" len="med"/>
+                      <a:tailEnd type="none" w="med" len="med"/>
+                    </a:lnL>
+                    <a:lnR w="9525" cap="flat" cmpd="sng" algn="ctr">
+                      <a:solidFill>
+                        <a:srgbClr val="DDE3EA"/>
+                      </a:solidFill>
+                      <a:prstDash val="solid"/>
+                      <a:round/>
+                      <a:headEnd type="none" w="med" len="med"/>
+                      <a:tailEnd type="none" w="med" len="med"/>
+                    </a:lnR>
+                    <a:lnT w="9525" cap="flat" cmpd="sng" algn="ctr">
+                      <a:solidFill>
+                        <a:srgbClr val="DDE3EA"/>
+                      </a:solidFill>
+                      <a:prstDash val="solid"/>
+                      <a:round/>
+                      <a:headEnd type="none" w="med" len="med"/>
+                      <a:tailEnd type="none" w="med" len="med"/>
+                    </a:lnT>
+                    <a:lnB w="9525" cap="flat" cmpd="sng" algn="ctr">
+                      <a:solidFill>
+                        <a:srgbClr val="DDE3EA"/>
+                      </a:solidFill>
+                      <a:prstDash val="solid"/>
+                      <a:round/>
+                      <a:headEnd type="none" w="med" len="med"/>
+                      <a:tailEnd type="none" w="med" len="med"/>
+                    </a:lnB>
+                    <a:solidFill>
+                      <a:srgbClr val="EEF2F7"/>
+                    </a:solidFill>
+                  </a:tcPr>
+                </a:tc>
+                <a:tc>
+                  <a:txBody>
+                    <a:bodyPr/>
+                    <a:lstStyle/>
+                    <a:p>
+                      <a:pPr algn="ctr" indent="0" marL="0">
+                        <a:buNone/>
+                      </a:pPr>
+                      <a:r>
+                        <a:rPr lang="en-US" sz="1200" b="1" dirty="0">
+                          <a:solidFill>
+                            <a:srgbClr val="001E3C"/>
+                          </a:solidFill>
+                          <a:latin typeface="Inter" pitchFamily="34" charset="0"/>
+                          <a:ea typeface="Inter" pitchFamily="34" charset="-122"/>
+                          <a:cs typeface="Inter" pitchFamily="34" charset="-120"/>
+                        </a:rPr>
+                        <a:t>All Clear</a:t>
+                      </a:r>
+                      <a:endParaRPr lang="en-US" sz="1200" dirty="0">
+                        <a:latin typeface="Inter" charset="0"/>
+                        <a:ea typeface="Inter" charset="0"/>
+                        <a:cs typeface="Inter" charset="0"/>
+                      </a:endParaRPr>
+                    </a:p>
+                  </a:txBody>
+                  <a:tcPr marL="91440" marR="91440" marT="0" marB="0" anchor="ctr">
+                    <a:lnL w="9525" cap="flat" cmpd="sng" algn="ctr">
+                      <a:solidFill>
+                        <a:srgbClr val="DDE3EA"/>
+                      </a:solidFill>
+                      <a:prstDash val="solid"/>
+                      <a:round/>
+                      <a:headEnd type="none" w="med" len="med"/>
+                      <a:tailEnd type="none" w="med" len="med"/>
+                    </a:lnL>
+                    <a:lnR w="9525" cap="flat" cmpd="sng" algn="ctr">
+                      <a:solidFill>
+                        <a:srgbClr val="DDE3EA"/>
+                      </a:solidFill>
+                      <a:prstDash val="solid"/>
+                      <a:round/>
+                      <a:headEnd type="none" w="med" len="med"/>
+                      <a:tailEnd type="none" w="med" len="med"/>
+                    </a:lnR>
+                    <a:lnT w="9525" cap="flat" cmpd="sng" algn="ctr">
+                      <a:solidFill>
+                        <a:srgbClr val="DDE3EA"/>
+                      </a:solidFill>
+                      <a:prstDash val="solid"/>
+                      <a:round/>
+                      <a:headEnd type="none" w="med" len="med"/>
+                      <a:tailEnd type="none" w="med" len="med"/>
+                    </a:lnT>
+                    <a:lnB w="9525" cap="flat" cmpd="sng" algn="ctr">
+                      <a:solidFill>
+                        <a:srgbClr val="DDE3EA"/>
+                      </a:solidFill>
+                      <a:prstDash val="solid"/>
+                      <a:round/>
+                      <a:headEnd type="none" w="med" len="med"/>
+                      <a:tailEnd type="none" w="med" len="med"/>
+                    </a:lnB>
+                    <a:solidFill>
+                      <a:srgbClr val="EEF2F7"/>
+                    </a:solidFill>
+                  </a:tcPr>
+                </a:tc>
+              </a:tr>
+              <a:tr h="329184">
+                <a:tc>
+                  <a:txBody>
+                    <a:bodyPr/>
+                    <a:lstStyle/>
+                    <a:p>
+                      <a:pPr algn="l" indent="0" marL="0">
+                        <a:buNone/>
+                      </a:pPr>
+                      <a:r>
+                        <a:rPr lang="en-US" sz="1200" b="1" dirty="0">
+                          <a:solidFill>
+                            <a:srgbClr val="1B2533"/>
+                          </a:solidFill>
+                          <a:latin typeface="Inter" pitchFamily="34" charset="0"/>
+                          <a:ea typeface="Inter" pitchFamily="34" charset="-122"/>
+                          <a:cs typeface="Inter" pitchFamily="34" charset="-120"/>
+                        </a:rPr>
+                        <a:t>December rules met</a:t>
+                      </a:r>
+                      <a:endParaRPr lang="en-US" sz="1200" dirty="0">
+                        <a:latin typeface="Inter" charset="0"/>
+                        <a:ea typeface="Inter" charset="0"/>
+                        <a:cs typeface="Inter" charset="0"/>
+                      </a:endParaRPr>
+                    </a:p>
+                  </a:txBody>
+                  <a:tcPr marL="91440" marR="91440" marT="0" marB="0" anchor="ctr">
+                    <a:lnL w="9525" cap="flat" cmpd="sng" algn="ctr">
+                      <a:solidFill>
+                        <a:srgbClr val="DDE3EA"/>
+                      </a:solidFill>
+                      <a:prstDash val="solid"/>
+                      <a:round/>
+                      <a:headEnd type="none" w="med" len="med"/>
+                      <a:tailEnd type="none" w="med" len="med"/>
+                    </a:lnL>
+                    <a:lnR w="9525" cap="flat" cmpd="sng" algn="ctr">
+                      <a:solidFill>
+                        <a:srgbClr val="DDE3EA"/>
+                      </a:solidFill>
+                      <a:prstDash val="solid"/>
+                      <a:round/>
+                      <a:headEnd type="none" w="med" len="med"/>
+                      <a:tailEnd type="none" w="med" len="med"/>
+                    </a:lnR>
+                    <a:lnT w="9525" cap="flat" cmpd="sng" algn="ctr">
+                      <a:solidFill>
+                        <a:srgbClr val="DDE3EA"/>
+                      </a:solidFill>
+                      <a:prstDash val="solid"/>
+                      <a:round/>
+                      <a:headEnd type="none" w="med" len="med"/>
+                      <a:tailEnd type="none" w="med" len="med"/>
+                    </a:lnT>
+                    <a:lnB w="9525" cap="flat" cmpd="sng" algn="ctr">
+                      <a:solidFill>
+                        <a:srgbClr val="DDE3EA"/>
+                      </a:solidFill>
+                      <a:prstDash val="solid"/>
+                      <a:round/>
+                      <a:headEnd type="none" w="med" len="med"/>
+                      <a:tailEnd type="none" w="med" len="med"/>
+                    </a:lnB>
+                    <a:solidFill>
+                      <a:srgbClr val="FFFFFF"/>
+                    </a:solidFill>
+                  </a:tcPr>
+                </a:tc>
+                <a:tc>
+                  <a:txBody>
+                    <a:bodyPr/>
+                    <a:lstStyle/>
+                    <a:p>
+                      <a:pPr algn="ctr" indent="0" marL="0">
+                        <a:buNone/>
+                      </a:pPr>
+                      <a:r>
+                        <a:rPr lang="en-US" sz="1200" b="1" dirty="0">
+                          <a:solidFill>
+                            <a:srgbClr val="001E3C"/>
+                          </a:solidFill>
+                          <a:latin typeface="Inter" pitchFamily="34" charset="0"/>
+                          <a:ea typeface="Inter" pitchFamily="34" charset="-122"/>
+                          <a:cs typeface="Inter" pitchFamily="34" charset="-120"/>
+                        </a:rPr>
+                        <a:t>11 of 11</a:t>
+                      </a:r>
+                      <a:endParaRPr lang="en-US" sz="1200" dirty="0">
+                        <a:latin typeface="Inter" charset="0"/>
+                        <a:ea typeface="Inter" charset="0"/>
+                        <a:cs typeface="Inter" charset="0"/>
+                      </a:endParaRPr>
+                    </a:p>
+                  </a:txBody>
+                  <a:tcPr marL="91440" marR="91440" marT="0" marB="0" anchor="ctr">
+                    <a:lnL w="9525" cap="flat" cmpd="sng" algn="ctr">
+                      <a:solidFill>
+                        <a:srgbClr val="DDE3EA"/>
+                      </a:solidFill>
+                      <a:prstDash val="solid"/>
+                      <a:round/>
+                      <a:headEnd type="none" w="med" len="med"/>
+                      <a:tailEnd type="none" w="med" len="med"/>
+                    </a:lnL>
+                    <a:lnR w="9525" cap="flat" cmpd="sng" algn="ctr">
+                      <a:solidFill>
+                        <a:srgbClr val="DDE3EA"/>
+                      </a:solidFill>
+                      <a:prstDash val="solid"/>
+                      <a:round/>
+                      <a:headEnd type="none" w="med" len="med"/>
+                      <a:tailEnd type="none" w="med" len="med"/>
+                    </a:lnR>
+                    <a:lnT w="9525" cap="flat" cmpd="sng" algn="ctr">
+                      <a:solidFill>
+                        <a:srgbClr val="DDE3EA"/>
+                      </a:solidFill>
+                      <a:prstDash val="solid"/>
+                      <a:round/>
+                      <a:headEnd type="none" w="med" len="med"/>
+                      <a:tailEnd type="none" w="med" len="med"/>
+                    </a:lnT>
+                    <a:lnB w="9525" cap="flat" cmpd="sng" algn="ctr">
+                      <a:solidFill>
+                        <a:srgbClr val="DDE3EA"/>
+                      </a:solidFill>
+                      <a:prstDash val="solid"/>
+                      <a:round/>
+                      <a:headEnd type="none" w="med" len="med"/>
+                      <a:tailEnd type="none" w="med" len="med"/>
+                    </a:lnB>
+                    <a:solidFill>
+                      <a:srgbClr val="FFF4C2"/>
+                    </a:solidFill>
+                  </a:tcPr>
+                </a:tc>
+                <a:tc>
+                  <a:txBody>
+                    <a:bodyPr/>
+                    <a:lstStyle/>
+                    <a:p>
+                      <a:pPr algn="ctr" indent="0" marL="0">
+                        <a:buNone/>
+                      </a:pPr>
+                      <a:r>
+                        <a:rPr lang="en-US" sz="1200" dirty="0">
+                          <a:solidFill>
+                            <a:srgbClr val="5B6778"/>
+                          </a:solidFill>
+                          <a:latin typeface="Inter" pitchFamily="34" charset="0"/>
+                          <a:ea typeface="Inter" pitchFamily="34" charset="-122"/>
+                          <a:cs typeface="Inter" pitchFamily="34" charset="-120"/>
+                        </a:rPr>
+                        <a:t>11 of 11</a:t>
+                      </a:r>
+                      <a:endParaRPr lang="en-US" sz="1200" dirty="0">
+                        <a:latin typeface="Inter" charset="0"/>
+                        <a:ea typeface="Inter" charset="0"/>
+                        <a:cs typeface="Inter" charset="0"/>
+                      </a:endParaRPr>
+                    </a:p>
+                  </a:txBody>
+                  <a:tcPr marL="91440" marR="91440" marT="0" marB="0" anchor="ctr">
+                    <a:lnL w="9525" cap="flat" cmpd="sng" algn="ctr">
+                      <a:solidFill>
+                        <a:srgbClr val="DDE3EA"/>
+                      </a:solidFill>
+                      <a:prstDash val="solid"/>
+                      <a:round/>
+                      <a:headEnd type="none" w="med" len="med"/>
+                      <a:tailEnd type="none" w="med" len="med"/>
+                    </a:lnL>
+                    <a:lnR w="9525" cap="flat" cmpd="sng" algn="ctr">
+                      <a:solidFill>
+                        <a:srgbClr val="DDE3EA"/>
+                      </a:solidFill>
+                      <a:prstDash val="solid"/>
+                      <a:round/>
+                      <a:headEnd type="none" w="med" len="med"/>
+                      <a:tailEnd type="none" w="med" len="med"/>
+                    </a:lnR>
+                    <a:lnT w="9525" cap="flat" cmpd="sng" algn="ctr">
+                      <a:solidFill>
+                        <a:srgbClr val="DDE3EA"/>
+                      </a:solidFill>
+                      <a:prstDash val="solid"/>
+                      <a:round/>
+                      <a:headEnd type="none" w="med" len="med"/>
+                      <a:tailEnd type="none" w="med" len="med"/>
+                    </a:lnT>
+                    <a:lnB w="9525" cap="flat" cmpd="sng" algn="ctr">
+                      <a:solidFill>
+                        <a:srgbClr val="DDE3EA"/>
+                      </a:solidFill>
+                      <a:prstDash val="solid"/>
+                      <a:round/>
+                      <a:headEnd type="none" w="med" len="med"/>
+                      <a:tailEnd type="none" w="med" len="med"/>
+                    </a:lnB>
+                    <a:solidFill>
+                      <a:srgbClr val="FFFFFF"/>
+                    </a:solidFill>
+                  </a:tcPr>
+                </a:tc>
+                <a:tc>
+                  <a:txBody>
+                    <a:bodyPr/>
+                    <a:lstStyle/>
+                    <a:p>
+                      <a:pPr algn="ctr" indent="0" marL="0">
+                        <a:buNone/>
+                      </a:pPr>
+                      <a:r>
+                        <a:rPr lang="en-US" sz="1200" dirty="0">
+                          <a:solidFill>
+                            <a:srgbClr val="5B6778"/>
+                          </a:solidFill>
+                          <a:latin typeface="Inter" pitchFamily="34" charset="0"/>
+                          <a:ea typeface="Inter" pitchFamily="34" charset="-122"/>
+                          <a:cs typeface="Inter" pitchFamily="34" charset="-120"/>
+                        </a:rPr>
+                        <a:t>11 of 11</a:t>
+                      </a:r>
+                      <a:endParaRPr lang="en-US" sz="1200" dirty="0">
+                        <a:latin typeface="Inter" charset="0"/>
+                        <a:ea typeface="Inter" charset="0"/>
+                        <a:cs typeface="Inter" charset="0"/>
+                      </a:endParaRPr>
+                    </a:p>
+                  </a:txBody>
+                  <a:tcPr marL="91440" marR="91440" marT="0" marB="0" anchor="ctr">
+                    <a:lnL w="9525" cap="flat" cmpd="sng" algn="ctr">
+                      <a:solidFill>
+                        <a:srgbClr val="DDE3EA"/>
+                      </a:solidFill>
+                      <a:prstDash val="solid"/>
+                      <a:round/>
+                      <a:headEnd type="none" w="med" len="med"/>
+                      <a:tailEnd type="none" w="med" len="med"/>
+                    </a:lnL>
+                    <a:lnR w="9525" cap="flat" cmpd="sng" algn="ctr">
+                      <a:solidFill>
+                        <a:srgbClr val="DDE3EA"/>
+                      </a:solidFill>
+                      <a:prstDash val="solid"/>
+                      <a:round/>
+                      <a:headEnd type="none" w="med" len="med"/>
+                      <a:tailEnd type="none" w="med" len="med"/>
+                    </a:lnR>
+                    <a:lnT w="9525" cap="flat" cmpd="sng" algn="ctr">
+                      <a:solidFill>
+                        <a:srgbClr val="DDE3EA"/>
+                      </a:solidFill>
+                      <a:prstDash val="solid"/>
+                      <a:round/>
+                      <a:headEnd type="none" w="med" len="med"/>
+                      <a:tailEnd type="none" w="med" len="med"/>
+                    </a:lnT>
+                    <a:lnB w="9525" cap="flat" cmpd="sng" algn="ctr">
+                      <a:solidFill>
+                        <a:srgbClr val="DDE3EA"/>
+                      </a:solidFill>
+                      <a:prstDash val="solid"/>
+                      <a:round/>
+                      <a:headEnd type="none" w="med" len="med"/>
+                      <a:tailEnd type="none" w="med" len="med"/>
+                    </a:lnB>
+                    <a:solidFill>
+                      <a:srgbClr val="FFFFFF"/>
+                    </a:solidFill>
+                  </a:tcPr>
+                </a:tc>
+              </a:tr>
+              <a:tr h="329184">
+                <a:tc>
+                  <a:txBody>
+                    <a:bodyPr/>
+                    <a:lstStyle/>
+                    <a:p>
+                      <a:pPr algn="l" indent="0" marL="0">
+                        <a:buNone/>
+                      </a:pPr>
+                      <a:r>
+                        <a:rPr lang="en-US" sz="1200" b="1" dirty="0">
+                          <a:solidFill>
+                            <a:srgbClr val="1B2533"/>
+                          </a:solidFill>
+                          <a:latin typeface="Inter" pitchFamily="34" charset="0"/>
+                          <a:ea typeface="Inter" pitchFamily="34" charset="-122"/>
+                          <a:cs typeface="Inter" pitchFamily="34" charset="-120"/>
+                        </a:rPr>
+                        <a:t>Design-specific fatigue findings</a:t>
+                      </a:r>
+                      <a:endParaRPr lang="en-US" sz="1200" dirty="0">
+                        <a:latin typeface="Inter" charset="0"/>
+                        <a:ea typeface="Inter" charset="0"/>
+                        <a:cs typeface="Inter" charset="0"/>
+                      </a:endParaRPr>
+                    </a:p>
+                  </a:txBody>
+                  <a:tcPr marL="91440" marR="91440" marT="0" marB="0" anchor="ctr">
+                    <a:lnL w="9525" cap="flat" cmpd="sng" algn="ctr">
+                      <a:solidFill>
+                        <a:srgbClr val="DDE3EA"/>
+                      </a:solidFill>
+                      <a:prstDash val="solid"/>
+                      <a:round/>
+                      <a:headEnd type="none" w="med" len="med"/>
+                      <a:tailEnd type="none" w="med" len="med"/>
+                    </a:lnL>
+                    <a:lnR w="9525" cap="flat" cmpd="sng" algn="ctr">
+                      <a:solidFill>
+                        <a:srgbClr val="DDE3EA"/>
+                      </a:solidFill>
+                      <a:prstDash val="solid"/>
+                      <a:round/>
+                      <a:headEnd type="none" w="med" len="med"/>
+                      <a:tailEnd type="none" w="med" len="med"/>
+                    </a:lnR>
+                    <a:lnT w="9525" cap="flat" cmpd="sng" algn="ctr">
+                      <a:solidFill>
+                        <a:srgbClr val="DDE3EA"/>
+                      </a:solidFill>
+                      <a:prstDash val="solid"/>
+                      <a:round/>
+                      <a:headEnd type="none" w="med" len="med"/>
+                      <a:tailEnd type="none" w="med" len="med"/>
+                    </a:lnT>
+                    <a:lnB w="9525" cap="flat" cmpd="sng" algn="ctr">
+                      <a:solidFill>
+                        <a:srgbClr val="DDE3EA"/>
+                      </a:solidFill>
+                      <a:prstDash val="solid"/>
+                      <a:round/>
+                      <a:headEnd type="none" w="med" len="med"/>
+                      <a:tailEnd type="none" w="med" len="med"/>
+                    </a:lnB>
+                    <a:solidFill>
+                      <a:srgbClr val="FFFFFF"/>
+                    </a:solidFill>
+                  </a:tcPr>
+                </a:tc>
+                <a:tc>
+                  <a:txBody>
+                    <a:bodyPr/>
+                    <a:lstStyle/>
+                    <a:p>
+                      <a:pPr algn="ctr" indent="0" marL="0">
+                        <a:buNone/>
+                      </a:pPr>
+                      <a:r>
+                        <a:rPr lang="en-US" sz="1200" b="1" dirty="0">
+                          <a:solidFill>
+                            <a:srgbClr val="001E3C"/>
+                          </a:solidFill>
+                          <a:latin typeface="Inter" pitchFamily="34" charset="0"/>
+                          <a:ea typeface="Inter" pitchFamily="34" charset="-122"/>
+                          <a:cs typeface="Inter" pitchFamily="34" charset="-120"/>
+                        </a:rPr>
+                        <a:t>0</a:t>
+                      </a:r>
+                      <a:endParaRPr lang="en-US" sz="1200" dirty="0">
+                        <a:latin typeface="Inter" charset="0"/>
+                        <a:ea typeface="Inter" charset="0"/>
+                        <a:cs typeface="Inter" charset="0"/>
+                      </a:endParaRPr>
+                    </a:p>
+                  </a:txBody>
+                  <a:tcPr marL="91440" marR="91440" marT="0" marB="0" anchor="ctr">
+                    <a:lnL w="9525" cap="flat" cmpd="sng" algn="ctr">
+                      <a:solidFill>
+                        <a:srgbClr val="DDE3EA"/>
+                      </a:solidFill>
+                      <a:prstDash val="solid"/>
+                      <a:round/>
+                      <a:headEnd type="none" w="med" len="med"/>
+                      <a:tailEnd type="none" w="med" len="med"/>
+                    </a:lnL>
+                    <a:lnR w="9525" cap="flat" cmpd="sng" algn="ctr">
+                      <a:solidFill>
+                        <a:srgbClr val="DDE3EA"/>
+                      </a:solidFill>
+                      <a:prstDash val="solid"/>
+                      <a:round/>
+                      <a:headEnd type="none" w="med" len="med"/>
+                      <a:tailEnd type="none" w="med" len="med"/>
+                    </a:lnR>
+                    <a:lnT w="9525" cap="flat" cmpd="sng" algn="ctr">
+                      <a:solidFill>
+                        <a:srgbClr val="DDE3EA"/>
+                      </a:solidFill>
+                      <a:prstDash val="solid"/>
+                      <a:round/>
+                      <a:headEnd type="none" w="med" len="med"/>
+                      <a:tailEnd type="none" w="med" len="med"/>
+                    </a:lnT>
+                    <a:lnB w="9525" cap="flat" cmpd="sng" algn="ctr">
+                      <a:solidFill>
+                        <a:srgbClr val="DDE3EA"/>
+                      </a:solidFill>
+                      <a:prstDash val="solid"/>
+                      <a:round/>
+                      <a:headEnd type="none" w="med" len="med"/>
+                      <a:tailEnd type="none" w="med" len="med"/>
+                    </a:lnB>
+                    <a:solidFill>
+                      <a:srgbClr val="FFF4C2"/>
+                    </a:solidFill>
+                  </a:tcPr>
+                </a:tc>
+                <a:tc>
+                  <a:txBody>
+                    <a:bodyPr/>
+                    <a:lstStyle/>
+                    <a:p>
+                      <a:pPr algn="ctr" indent="0" marL="0">
+                        <a:buNone/>
+                      </a:pPr>
+                      <a:r>
+                        <a:rPr lang="en-US" sz="1200" dirty="0">
+                          <a:solidFill>
+                            <a:srgbClr val="5B6778"/>
+                          </a:solidFill>
+                          <a:latin typeface="Inter" pitchFamily="34" charset="0"/>
+                          <a:ea typeface="Inter" pitchFamily="34" charset="-122"/>
+                          <a:cs typeface="Inter" pitchFamily="34" charset="-120"/>
+                        </a:rPr>
+                        <a:t>0</a:t>
+                      </a:r>
+                      <a:endParaRPr lang="en-US" sz="1200" dirty="0">
+                        <a:latin typeface="Inter" charset="0"/>
+                        <a:ea typeface="Inter" charset="0"/>
+                        <a:cs typeface="Inter" charset="0"/>
+                      </a:endParaRPr>
+                    </a:p>
+                  </a:txBody>
+                  <a:tcPr marL="91440" marR="91440" marT="0" marB="0" anchor="ctr">
+                    <a:lnL w="9525" cap="flat" cmpd="sng" algn="ctr">
+                      <a:solidFill>
+                        <a:srgbClr val="DDE3EA"/>
+                      </a:solidFill>
+                      <a:prstDash val="solid"/>
+                      <a:round/>
+                      <a:headEnd type="none" w="med" len="med"/>
+                      <a:tailEnd type="none" w="med" len="med"/>
+                    </a:lnL>
+                    <a:lnR w="9525" cap="flat" cmpd="sng" algn="ctr">
+                      <a:solidFill>
+                        <a:srgbClr val="DDE3EA"/>
+                      </a:solidFill>
+                      <a:prstDash val="solid"/>
+                      <a:round/>
+                      <a:headEnd type="none" w="med" len="med"/>
+                      <a:tailEnd type="none" w="med" len="med"/>
+                    </a:lnR>
+                    <a:lnT w="9525" cap="flat" cmpd="sng" algn="ctr">
+                      <a:solidFill>
+                        <a:srgbClr val="DDE3EA"/>
+                      </a:solidFill>
+                      <a:prstDash val="solid"/>
+                      <a:round/>
+                      <a:headEnd type="none" w="med" len="med"/>
+                      <a:tailEnd type="none" w="med" len="med"/>
+                    </a:lnT>
+                    <a:lnB w="9525" cap="flat" cmpd="sng" algn="ctr">
+                      <a:solidFill>
+                        <a:srgbClr val="DDE3EA"/>
+                      </a:solidFill>
+                      <a:prstDash val="solid"/>
+                      <a:round/>
+                      <a:headEnd type="none" w="med" len="med"/>
+                      <a:tailEnd type="none" w="med" len="med"/>
+                    </a:lnB>
+                    <a:solidFill>
+                      <a:srgbClr val="FFFFFF"/>
+                    </a:solidFill>
+                  </a:tcPr>
+                </a:tc>
+                <a:tc>
+                  <a:txBody>
+                    <a:bodyPr/>
+                    <a:lstStyle/>
+                    <a:p>
+                      <a:pPr algn="ctr" indent="0" marL="0">
+                        <a:buNone/>
+                      </a:pPr>
+                      <a:r>
+                        <a:rPr lang="en-US" sz="1200" dirty="0">
+                          <a:solidFill>
+                            <a:srgbClr val="5B6778"/>
+                          </a:solidFill>
+                          <a:latin typeface="Inter" pitchFamily="34" charset="0"/>
+                          <a:ea typeface="Inter" pitchFamily="34" charset="-122"/>
+                          <a:cs typeface="Inter" pitchFamily="34" charset="-120"/>
+                        </a:rPr>
+                        <a:t>0</a:t>
+                      </a:r>
+                      <a:endParaRPr lang="en-US" sz="1200" dirty="0">
+                        <a:latin typeface="Inter" charset="0"/>
+                        <a:ea typeface="Inter" charset="0"/>
+                        <a:cs typeface="Inter" charset="0"/>
+                      </a:endParaRPr>
+                    </a:p>
+                  </a:txBody>
+                  <a:tcPr marL="91440" marR="91440" marT="0" marB="0" anchor="ctr">
+                    <a:lnL w="9525" cap="flat" cmpd="sng" algn="ctr">
+                      <a:solidFill>
+                        <a:srgbClr val="DDE3EA"/>
+                      </a:solidFill>
+                      <a:prstDash val="solid"/>
+                      <a:round/>
+                      <a:headEnd type="none" w="med" len="med"/>
+                      <a:tailEnd type="none" w="med" len="med"/>
+                    </a:lnL>
+                    <a:lnR w="9525" cap="flat" cmpd="sng" algn="ctr">
+                      <a:solidFill>
+                        <a:srgbClr val="DDE3EA"/>
+                      </a:solidFill>
+                      <a:prstDash val="solid"/>
+                      <a:round/>
+                      <a:headEnd type="none" w="med" len="med"/>
+                      <a:tailEnd type="none" w="med" len="med"/>
+                    </a:lnR>
+                    <a:lnT w="9525" cap="flat" cmpd="sng" algn="ctr">
+                      <a:solidFill>
+                        <a:srgbClr val="DDE3EA"/>
+                      </a:solidFill>
+                      <a:prstDash val="solid"/>
+                      <a:round/>
+                      <a:headEnd type="none" w="med" len="med"/>
+                      <a:tailEnd type="none" w="med" len="med"/>
+                    </a:lnT>
+                    <a:lnB w="9525" cap="flat" cmpd="sng" algn="ctr">
+                      <a:solidFill>
+                        <a:srgbClr val="DDE3EA"/>
+                      </a:solidFill>
+                      <a:prstDash val="solid"/>
+                      <a:round/>
+                      <a:headEnd type="none" w="med" len="med"/>
+                      <a:tailEnd type="none" w="med" len="med"/>
+                    </a:lnB>
+                    <a:solidFill>
+                      <a:srgbClr val="FFFFFF"/>
+                    </a:solidFill>
+                  </a:tcPr>
+                </a:tc>
+              </a:tr>
+              <a:tr h="329184">
+                <a:tc>
+                  <a:txBody>
+                    <a:bodyPr/>
+                    <a:lstStyle/>
+                    <a:p>
+                      <a:pPr algn="l" indent="0" marL="0">
+                        <a:buNone/>
+                      </a:pPr>
+                      <a:r>
+                        <a:rPr lang="en-US" sz="1200" b="1" dirty="0">
+                          <a:solidFill>
+                            <a:srgbClr val="1B2533"/>
+                          </a:solidFill>
+                          <a:latin typeface="Inter" pitchFamily="34" charset="0"/>
+                          <a:ea typeface="Inter" pitchFamily="34" charset="-122"/>
+                          <a:cs typeface="Inter" pitchFamily="34" charset="-120"/>
+                        </a:rPr>
+                        <a:t>Shift times already worked today</a:t>
+                      </a:r>
+                      <a:endParaRPr lang="en-US" sz="1200" dirty="0">
+                        <a:latin typeface="Inter" charset="0"/>
+                        <a:ea typeface="Inter" charset="0"/>
+                        <a:cs typeface="Inter" charset="0"/>
+                      </a:endParaRPr>
+                    </a:p>
+                  </a:txBody>
+                  <a:tcPr marL="91440" marR="91440" marT="0" marB="0" anchor="ctr">
+                    <a:lnL w="9525" cap="flat" cmpd="sng" algn="ctr">
+                      <a:solidFill>
+                        <a:srgbClr val="DDE3EA"/>
+                      </a:solidFill>
+                      <a:prstDash val="solid"/>
+                      <a:round/>
+                      <a:headEnd type="none" w="med" len="med"/>
+                      <a:tailEnd type="none" w="med" len="med"/>
+                    </a:lnL>
+                    <a:lnR w="9525" cap="flat" cmpd="sng" algn="ctr">
+                      <a:solidFill>
+                        <a:srgbClr val="DDE3EA"/>
+                      </a:solidFill>
+                      <a:prstDash val="solid"/>
+                      <a:round/>
+                      <a:headEnd type="none" w="med" len="med"/>
+                      <a:tailEnd type="none" w="med" len="med"/>
+                    </a:lnR>
+                    <a:lnT w="9525" cap="flat" cmpd="sng" algn="ctr">
+                      <a:solidFill>
+                        <a:srgbClr val="DDE3EA"/>
+                      </a:solidFill>
+                      <a:prstDash val="solid"/>
+                      <a:round/>
+                      <a:headEnd type="none" w="med" len="med"/>
+                      <a:tailEnd type="none" w="med" len="med"/>
+                    </a:lnT>
+                    <a:lnB w="9525" cap="flat" cmpd="sng" algn="ctr">
+                      <a:solidFill>
+                        <a:srgbClr val="DDE3EA"/>
+                      </a:solidFill>
+                      <a:prstDash val="solid"/>
+                      <a:round/>
+                      <a:headEnd type="none" w="med" len="med"/>
+                      <a:tailEnd type="none" w="med" len="med"/>
+                    </a:lnB>
+                    <a:solidFill>
+                      <a:srgbClr val="FFFFFF"/>
+                    </a:solidFill>
+                  </a:tcPr>
+                </a:tc>
+                <a:tc>
+                  <a:txBody>
+                    <a:bodyPr/>
+                    <a:lstStyle/>
+                    <a:p>
+                      <a:pPr algn="ctr" indent="0" marL="0">
+                        <a:buNone/>
+                      </a:pPr>
+                      <a:r>
+                        <a:rPr lang="en-US" sz="1200" b="1" dirty="0">
+                          <a:solidFill>
+                            <a:srgbClr val="001E3C"/>
+                          </a:solidFill>
+                          <a:latin typeface="Inter" pitchFamily="34" charset="0"/>
+                          <a:ea typeface="Inter" pitchFamily="34" charset="-122"/>
+                          <a:cs typeface="Inter" pitchFamily="34" charset="-120"/>
+                        </a:rPr>
+                        <a:t>9 of 15</a:t>
+                      </a:r>
+                      <a:endParaRPr lang="en-US" sz="1200" dirty="0">
+                        <a:latin typeface="Inter" charset="0"/>
+                        <a:ea typeface="Inter" charset="0"/>
+                        <a:cs typeface="Inter" charset="0"/>
+                      </a:endParaRPr>
+                    </a:p>
+                  </a:txBody>
+                  <a:tcPr marL="91440" marR="91440" marT="0" marB="0" anchor="ctr">
+                    <a:lnL w="9525" cap="flat" cmpd="sng" algn="ctr">
+                      <a:solidFill>
+                        <a:srgbClr val="DDE3EA"/>
+                      </a:solidFill>
+                      <a:prstDash val="solid"/>
+                      <a:round/>
+                      <a:headEnd type="none" w="med" len="med"/>
+                      <a:tailEnd type="none" w="med" len="med"/>
+                    </a:lnL>
+                    <a:lnR w="9525" cap="flat" cmpd="sng" algn="ctr">
+                      <a:solidFill>
+                        <a:srgbClr val="DDE3EA"/>
+                      </a:solidFill>
+                      <a:prstDash val="solid"/>
+                      <a:round/>
+                      <a:headEnd type="none" w="med" len="med"/>
+                      <a:tailEnd type="none" w="med" len="med"/>
+                    </a:lnR>
+                    <a:lnT w="9525" cap="flat" cmpd="sng" algn="ctr">
+                      <a:solidFill>
+                        <a:srgbClr val="DDE3EA"/>
+                      </a:solidFill>
+                      <a:prstDash val="solid"/>
+                      <a:round/>
+                      <a:headEnd type="none" w="med" len="med"/>
+                      <a:tailEnd type="none" w="med" len="med"/>
+                    </a:lnT>
+                    <a:lnB w="9525" cap="flat" cmpd="sng" algn="ctr">
+                      <a:solidFill>
+                        <a:srgbClr val="DDE3EA"/>
+                      </a:solidFill>
+                      <a:prstDash val="solid"/>
+                      <a:round/>
+                      <a:headEnd type="none" w="med" len="med"/>
+                      <a:tailEnd type="none" w="med" len="med"/>
+                    </a:lnB>
+                    <a:solidFill>
+                      <a:srgbClr val="FFF4C2"/>
+                    </a:solidFill>
+                  </a:tcPr>
+                </a:tc>
+                <a:tc>
+                  <a:txBody>
+                    <a:bodyPr/>
+                    <a:lstStyle/>
+                    <a:p>
+                      <a:pPr algn="ctr" indent="0" marL="0">
+                        <a:buNone/>
+                      </a:pPr>
+                      <a:r>
+                        <a:rPr lang="en-US" sz="1200" dirty="0">
+                          <a:solidFill>
+                            <a:srgbClr val="5B6778"/>
+                          </a:solidFill>
+                          <a:latin typeface="Inter" pitchFamily="34" charset="0"/>
+                          <a:ea typeface="Inter" pitchFamily="34" charset="-122"/>
+                          <a:cs typeface="Inter" pitchFamily="34" charset="-120"/>
+                        </a:rPr>
+                        <a:t>5 of 17</a:t>
+                      </a:r>
+                      <a:endParaRPr lang="en-US" sz="1200" dirty="0">
+                        <a:latin typeface="Inter" charset="0"/>
+                        <a:ea typeface="Inter" charset="0"/>
+                        <a:cs typeface="Inter" charset="0"/>
+                      </a:endParaRPr>
+                    </a:p>
+                  </a:txBody>
+                  <a:tcPr marL="91440" marR="91440" marT="0" marB="0" anchor="ctr">
+                    <a:lnL w="9525" cap="flat" cmpd="sng" algn="ctr">
+                      <a:solidFill>
+                        <a:srgbClr val="DDE3EA"/>
+                      </a:solidFill>
+                      <a:prstDash val="solid"/>
+                      <a:round/>
+                      <a:headEnd type="none" w="med" len="med"/>
+                      <a:tailEnd type="none" w="med" len="med"/>
+                    </a:lnL>
+                    <a:lnR w="9525" cap="flat" cmpd="sng" algn="ctr">
+                      <a:solidFill>
+                        <a:srgbClr val="DDE3EA"/>
+                      </a:solidFill>
+                      <a:prstDash val="solid"/>
+                      <a:round/>
+                      <a:headEnd type="none" w="med" len="med"/>
+                      <a:tailEnd type="none" w="med" len="med"/>
+                    </a:lnR>
+                    <a:lnT w="9525" cap="flat" cmpd="sng" algn="ctr">
+                      <a:solidFill>
+                        <a:srgbClr val="DDE3EA"/>
+                      </a:solidFill>
+                      <a:prstDash val="solid"/>
+                      <a:round/>
+                      <a:headEnd type="none" w="med" len="med"/>
+                      <a:tailEnd type="none" w="med" len="med"/>
+                    </a:lnT>
+                    <a:lnB w="9525" cap="flat" cmpd="sng" algn="ctr">
+                      <a:solidFill>
+                        <a:srgbClr val="DDE3EA"/>
+                      </a:solidFill>
+                      <a:prstDash val="solid"/>
+                      <a:round/>
+                      <a:headEnd type="none" w="med" len="med"/>
+                      <a:tailEnd type="none" w="med" len="med"/>
+                    </a:lnB>
+                    <a:solidFill>
+                      <a:srgbClr val="FFFFFF"/>
+                    </a:solidFill>
+                  </a:tcPr>
+                </a:tc>
+                <a:tc>
+                  <a:txBody>
+                    <a:bodyPr/>
+                    <a:lstStyle/>
+                    <a:p>
+                      <a:pPr algn="ctr" indent="0" marL="0">
+                        <a:buNone/>
+                      </a:pPr>
+                      <a:r>
+                        <a:rPr lang="en-US" sz="1200" dirty="0">
+                          <a:solidFill>
+                            <a:srgbClr val="5B6778"/>
+                          </a:solidFill>
+                          <a:latin typeface="Inter" pitchFamily="34" charset="0"/>
+                          <a:ea typeface="Inter" pitchFamily="34" charset="-122"/>
+                          <a:cs typeface="Inter" pitchFamily="34" charset="-120"/>
+                        </a:rPr>
+                        <a:t>7 of 16</a:t>
+                      </a:r>
+                      <a:endParaRPr lang="en-US" sz="1200" dirty="0">
+                        <a:latin typeface="Inter" charset="0"/>
+                        <a:ea typeface="Inter" charset="0"/>
+                        <a:cs typeface="Inter" charset="0"/>
+                      </a:endParaRPr>
+                    </a:p>
+                  </a:txBody>
+                  <a:tcPr marL="91440" marR="91440" marT="0" marB="0" anchor="ctr">
+                    <a:lnL w="9525" cap="flat" cmpd="sng" algn="ctr">
+                      <a:solidFill>
+                        <a:srgbClr val="DDE3EA"/>
+                      </a:solidFill>
+                      <a:prstDash val="solid"/>
+                      <a:round/>
+                      <a:headEnd type="none" w="med" len="med"/>
+                      <a:tailEnd type="none" w="med" len="med"/>
+                    </a:lnL>
+                    <a:lnR w="9525" cap="flat" cmpd="sng" algn="ctr">
+                      <a:solidFill>
+                        <a:srgbClr val="DDE3EA"/>
+                      </a:solidFill>
+                      <a:prstDash val="solid"/>
+                      <a:round/>
+                      <a:headEnd type="none" w="med" len="med"/>
+                      <a:tailEnd type="none" w="med" len="med"/>
+                    </a:lnR>
+                    <a:lnT w="9525" cap="flat" cmpd="sng" algn="ctr">
+                      <a:solidFill>
+                        <a:srgbClr val="DDE3EA"/>
+                      </a:solidFill>
+                      <a:prstDash val="solid"/>
+                      <a:round/>
+                      <a:headEnd type="none" w="med" len="med"/>
+                      <a:tailEnd type="none" w="med" len="med"/>
+                    </a:lnT>
+                    <a:lnB w="9525" cap="flat" cmpd="sng" algn="ctr">
+                      <a:solidFill>
+                        <a:srgbClr val="DDE3EA"/>
+                      </a:solidFill>
+                      <a:prstDash val="solid"/>
+                      <a:round/>
+                      <a:headEnd type="none" w="med" len="med"/>
+                      <a:tailEnd type="none" w="med" len="med"/>
+                    </a:lnB>
+                    <a:solidFill>
+                      <a:srgbClr val="FFFFFF"/>
+                    </a:solidFill>
+                  </a:tcPr>
+                </a:tc>
+              </a:tr>
+              <a:tr h="329184">
+                <a:tc>
+                  <a:txBody>
+                    <a:bodyPr/>
+                    <a:lstStyle/>
+                    <a:p>
+                      <a:pPr algn="l" indent="0" marL="0">
+                        <a:buNone/>
+                      </a:pPr>
+                      <a:r>
+                        <a:rPr lang="en-US" sz="1200" b="1" dirty="0">
+                          <a:solidFill>
+                            <a:srgbClr val="1B2533"/>
+                          </a:solidFill>
+                          <a:latin typeface="Inter" pitchFamily="34" charset="0"/>
+                          <a:ea typeface="Inter" pitchFamily="34" charset="-122"/>
+                          <a:cs typeface="Inter" pitchFamily="34" charset="-120"/>
+                        </a:rPr>
+                        <a:t>Longest shift · shortest rest</a:t>
+                      </a:r>
+                      <a:endParaRPr lang="en-US" sz="1200" dirty="0">
+                        <a:latin typeface="Inter" charset="0"/>
+                        <a:ea typeface="Inter" charset="0"/>
+                        <a:cs typeface="Inter" charset="0"/>
+                      </a:endParaRPr>
+                    </a:p>
+                  </a:txBody>
+                  <a:tcPr marL="91440" marR="91440" marT="0" marB="0" anchor="ctr">
+                    <a:lnL w="9525" cap="flat" cmpd="sng" algn="ctr">
+                      <a:solidFill>
+                        <a:srgbClr val="DDE3EA"/>
+                      </a:solidFill>
+                      <a:prstDash val="solid"/>
+                      <a:round/>
+                      <a:headEnd type="none" w="med" len="med"/>
+                      <a:tailEnd type="none" w="med" len="med"/>
+                    </a:lnL>
+                    <a:lnR w="9525" cap="flat" cmpd="sng" algn="ctr">
+                      <a:solidFill>
+                        <a:srgbClr val="DDE3EA"/>
+                      </a:solidFill>
+                      <a:prstDash val="solid"/>
+                      <a:round/>
+                      <a:headEnd type="none" w="med" len="med"/>
+                      <a:tailEnd type="none" w="med" len="med"/>
+                    </a:lnR>
+                    <a:lnT w="9525" cap="flat" cmpd="sng" algn="ctr">
+                      <a:solidFill>
+                        <a:srgbClr val="DDE3EA"/>
+                      </a:solidFill>
+                      <a:prstDash val="solid"/>
+                      <a:round/>
+                      <a:headEnd type="none" w="med" len="med"/>
+                      <a:tailEnd type="none" w="med" len="med"/>
+                    </a:lnT>
+                    <a:lnB w="9525" cap="flat" cmpd="sng" algn="ctr">
+                      <a:solidFill>
+                        <a:srgbClr val="DDE3EA"/>
+                      </a:solidFill>
+                      <a:prstDash val="solid"/>
+                      <a:round/>
+                      <a:headEnd type="none" w="med" len="med"/>
+                      <a:tailEnd type="none" w="med" len="med"/>
+                    </a:lnB>
+                    <a:solidFill>
+                      <a:srgbClr val="FFFFFF"/>
+                    </a:solidFill>
+                  </a:tcPr>
+                </a:tc>
+                <a:tc>
+                  <a:txBody>
+                    <a:bodyPr/>
+                    <a:lstStyle/>
+                    <a:p>
+                      <a:pPr algn="ctr" indent="0" marL="0">
+                        <a:buNone/>
+                      </a:pPr>
+                      <a:r>
+                        <a:rPr lang="en-US" sz="1200" b="1" dirty="0">
+                          <a:solidFill>
+                            <a:srgbClr val="001E3C"/>
+                          </a:solidFill>
+                          <a:latin typeface="Inter" pitchFamily="34" charset="0"/>
+                          <a:ea typeface="Inter" pitchFamily="34" charset="-122"/>
+                          <a:cs typeface="Inter" pitchFamily="34" charset="-120"/>
+                        </a:rPr>
+                        <a:t>9h00 · 14h20</a:t>
+                      </a:r>
+                      <a:endParaRPr lang="en-US" sz="1200" dirty="0">
+                        <a:latin typeface="Inter" charset="0"/>
+                        <a:ea typeface="Inter" charset="0"/>
+                        <a:cs typeface="Inter" charset="0"/>
+                      </a:endParaRPr>
+                    </a:p>
+                  </a:txBody>
+                  <a:tcPr marL="91440" marR="91440" marT="0" marB="0" anchor="ctr">
+                    <a:lnL w="9525" cap="flat" cmpd="sng" algn="ctr">
+                      <a:solidFill>
+                        <a:srgbClr val="DDE3EA"/>
+                      </a:solidFill>
+                      <a:prstDash val="solid"/>
+                      <a:round/>
+                      <a:headEnd type="none" w="med" len="med"/>
+                      <a:tailEnd type="none" w="med" len="med"/>
+                    </a:lnL>
+                    <a:lnR w="9525" cap="flat" cmpd="sng" algn="ctr">
+                      <a:solidFill>
+                        <a:srgbClr val="DDE3EA"/>
+                      </a:solidFill>
+                      <a:prstDash val="solid"/>
+                      <a:round/>
+                      <a:headEnd type="none" w="med" len="med"/>
+                      <a:tailEnd type="none" w="med" len="med"/>
+                    </a:lnR>
+                    <a:lnT w="9525" cap="flat" cmpd="sng" algn="ctr">
+                      <a:solidFill>
+                        <a:srgbClr val="DDE3EA"/>
+                      </a:solidFill>
+                      <a:prstDash val="solid"/>
+                      <a:round/>
+                      <a:headEnd type="none" w="med" len="med"/>
+                      <a:tailEnd type="none" w="med" len="med"/>
+                    </a:lnT>
+                    <a:lnB w="9525" cap="flat" cmpd="sng" algn="ctr">
+                      <a:solidFill>
+                        <a:srgbClr val="DDE3EA"/>
+                      </a:solidFill>
+                      <a:prstDash val="solid"/>
+                      <a:round/>
+                      <a:headEnd type="none" w="med" len="med"/>
+                      <a:tailEnd type="none" w="med" len="med"/>
+                    </a:lnB>
+                    <a:solidFill>
+                      <a:srgbClr val="FFF4C2"/>
+                    </a:solidFill>
+                  </a:tcPr>
+                </a:tc>
+                <a:tc>
+                  <a:txBody>
+                    <a:bodyPr/>
+                    <a:lstStyle/>
+                    <a:p>
+                      <a:pPr algn="ctr" indent="0" marL="0">
+                        <a:buNone/>
+                      </a:pPr>
+                      <a:r>
+                        <a:rPr lang="en-US" sz="1200" dirty="0">
+                          <a:solidFill>
+                            <a:srgbClr val="5B6778"/>
+                          </a:solidFill>
+                          <a:latin typeface="Inter" pitchFamily="34" charset="0"/>
+                          <a:ea typeface="Inter" pitchFamily="34" charset="-122"/>
+                          <a:cs typeface="Inter" pitchFamily="34" charset="-120"/>
+                        </a:rPr>
+                        <a:t>9h30 · 14h05</a:t>
+                      </a:r>
+                      <a:endParaRPr lang="en-US" sz="1200" dirty="0">
+                        <a:latin typeface="Inter" charset="0"/>
+                        <a:ea typeface="Inter" charset="0"/>
+                        <a:cs typeface="Inter" charset="0"/>
+                      </a:endParaRPr>
+                    </a:p>
+                  </a:txBody>
+                  <a:tcPr marL="91440" marR="91440" marT="0" marB="0" anchor="ctr">
+                    <a:lnL w="9525" cap="flat" cmpd="sng" algn="ctr">
+                      <a:solidFill>
+                        <a:srgbClr val="DDE3EA"/>
+                      </a:solidFill>
+                      <a:prstDash val="solid"/>
+                      <a:round/>
+                      <a:headEnd type="none" w="med" len="med"/>
+                      <a:tailEnd type="none" w="med" len="med"/>
+                    </a:lnL>
+                    <a:lnR w="9525" cap="flat" cmpd="sng" algn="ctr">
+                      <a:solidFill>
+                        <a:srgbClr val="DDE3EA"/>
+                      </a:solidFill>
+                      <a:prstDash val="solid"/>
+                      <a:round/>
+                      <a:headEnd type="none" w="med" len="med"/>
+                      <a:tailEnd type="none" w="med" len="med"/>
+                    </a:lnR>
+                    <a:lnT w="9525" cap="flat" cmpd="sng" algn="ctr">
+                      <a:solidFill>
+                        <a:srgbClr val="DDE3EA"/>
+                      </a:solidFill>
+                      <a:prstDash val="solid"/>
+                      <a:round/>
+                      <a:headEnd type="none" w="med" len="med"/>
+                      <a:tailEnd type="none" w="med" len="med"/>
+                    </a:lnT>
+                    <a:lnB w="9525" cap="flat" cmpd="sng" algn="ctr">
+                      <a:solidFill>
+                        <a:srgbClr val="DDE3EA"/>
+                      </a:solidFill>
+                      <a:prstDash val="solid"/>
+                      <a:round/>
+                      <a:headEnd type="none" w="med" len="med"/>
+                      <a:tailEnd type="none" w="med" len="med"/>
+                    </a:lnB>
+                    <a:solidFill>
+                      <a:srgbClr val="FFFFFF"/>
+                    </a:solidFill>
+                  </a:tcPr>
+                </a:tc>
+                <a:tc>
+                  <a:txBody>
+                    <a:bodyPr/>
+                    <a:lstStyle/>
+                    <a:p>
+                      <a:pPr algn="ctr" indent="0" marL="0">
+                        <a:buNone/>
+                      </a:pPr>
+                      <a:r>
+                        <a:rPr lang="en-US" sz="1200" dirty="0">
+                          <a:solidFill>
+                            <a:srgbClr val="5B6778"/>
+                          </a:solidFill>
+                          <a:latin typeface="Inter" pitchFamily="34" charset="0"/>
+                          <a:ea typeface="Inter" pitchFamily="34" charset="-122"/>
+                          <a:cs typeface="Inter" pitchFamily="34" charset="-120"/>
+                        </a:rPr>
+                        <a:t>9h10 · 14h05</a:t>
+                      </a:r>
+                      <a:endParaRPr lang="en-US" sz="1200" dirty="0">
+                        <a:latin typeface="Inter" charset="0"/>
+                        <a:ea typeface="Inter" charset="0"/>
+                        <a:cs typeface="Inter" charset="0"/>
+                      </a:endParaRPr>
+                    </a:p>
+                  </a:txBody>
+                  <a:tcPr marL="91440" marR="91440" marT="0" marB="0" anchor="ctr">
+                    <a:lnL w="9525" cap="flat" cmpd="sng" algn="ctr">
+                      <a:solidFill>
+                        <a:srgbClr val="DDE3EA"/>
+                      </a:solidFill>
+                      <a:prstDash val="solid"/>
+                      <a:round/>
+                      <a:headEnd type="none" w="med" len="med"/>
+                      <a:tailEnd type="none" w="med" len="med"/>
+                    </a:lnL>
+                    <a:lnR w="9525" cap="flat" cmpd="sng" algn="ctr">
+                      <a:solidFill>
+                        <a:srgbClr val="DDE3EA"/>
+                      </a:solidFill>
+                      <a:prstDash val="solid"/>
+                      <a:round/>
+                      <a:headEnd type="none" w="med" len="med"/>
+                      <a:tailEnd type="none" w="med" len="med"/>
+                    </a:lnR>
+                    <a:lnT w="9525" cap="flat" cmpd="sng" algn="ctr">
+                      <a:solidFill>
+                        <a:srgbClr val="DDE3EA"/>
+                      </a:solidFill>
+                      <a:prstDash val="solid"/>
+                      <a:round/>
+                      <a:headEnd type="none" w="med" len="med"/>
+                      <a:tailEnd type="none" w="med" len="med"/>
+                    </a:lnT>
+                    <a:lnB w="9525" cap="flat" cmpd="sng" algn="ctr">
+                      <a:solidFill>
+                        <a:srgbClr val="DDE3EA"/>
+                      </a:solidFill>
+                      <a:prstDash val="solid"/>
+                      <a:round/>
+                      <a:headEnd type="none" w="med" len="med"/>
+                      <a:tailEnd type="none" w="med" len="med"/>
+                    </a:lnB>
+                    <a:solidFill>
+                      <a:srgbClr val="FFFFFF"/>
+                    </a:solidFill>
+                  </a:tcPr>
+                </a:tc>
+              </a:tr>
+              <a:tr h="329184">
+                <a:tc>
+                  <a:txBody>
+                    <a:bodyPr/>
+                    <a:lstStyle/>
+                    <a:p>
+                      <a:pPr algn="l" indent="0" marL="0">
+                        <a:buNone/>
+                      </a:pPr>
+                      <a:r>
+                        <a:rPr lang="en-US" sz="1200" b="1" dirty="0">
+                          <a:solidFill>
+                            <a:srgbClr val="1B2533"/>
+                          </a:solidFill>
+                          <a:latin typeface="Inter" pitchFamily="34" charset="0"/>
+                          <a:ea typeface="Inter" pitchFamily="34" charset="-122"/>
+                          <a:cs typeface="Inter" pitchFamily="34" charset="-120"/>
+                        </a:rPr>
+                        <a:t>Full weekends off · most days in a row</a:t>
+                      </a:r>
+                      <a:endParaRPr lang="en-US" sz="1200" dirty="0">
+                        <a:latin typeface="Inter" charset="0"/>
+                        <a:ea typeface="Inter" charset="0"/>
+                        <a:cs typeface="Inter" charset="0"/>
+                      </a:endParaRPr>
+                    </a:p>
+                  </a:txBody>
+                  <a:tcPr marL="91440" marR="91440" marT="0" marB="0" anchor="ctr">
+                    <a:lnL w="9525" cap="flat" cmpd="sng" algn="ctr">
+                      <a:solidFill>
+                        <a:srgbClr val="DDE3EA"/>
+                      </a:solidFill>
+                      <a:prstDash val="solid"/>
+                      <a:round/>
+                      <a:headEnd type="none" w="med" len="med"/>
+                      <a:tailEnd type="none" w="med" len="med"/>
+                    </a:lnL>
+                    <a:lnR w="9525" cap="flat" cmpd="sng" algn="ctr">
+                      <a:solidFill>
+                        <a:srgbClr val="DDE3EA"/>
+                      </a:solidFill>
+                      <a:prstDash val="solid"/>
+                      <a:round/>
+                      <a:headEnd type="none" w="med" len="med"/>
+                      <a:tailEnd type="none" w="med" len="med"/>
+                    </a:lnR>
+                    <a:lnT w="9525" cap="flat" cmpd="sng" algn="ctr">
+                      <a:solidFill>
+                        <a:srgbClr val="DDE3EA"/>
+                      </a:solidFill>
+                      <a:prstDash val="solid"/>
+                      <a:round/>
+                      <a:headEnd type="none" w="med" len="med"/>
+                      <a:tailEnd type="none" w="med" len="med"/>
+                    </a:lnT>
+                    <a:lnB w="9525" cap="flat" cmpd="sng" algn="ctr">
+                      <a:solidFill>
+                        <a:srgbClr val="DDE3EA"/>
+                      </a:solidFill>
+                      <a:prstDash val="solid"/>
+                      <a:round/>
+                      <a:headEnd type="none" w="med" len="med"/>
+                      <a:tailEnd type="none" w="med" len="med"/>
+                    </a:lnB>
+                    <a:solidFill>
+                      <a:srgbClr val="FFFFFF"/>
+                    </a:solidFill>
+                  </a:tcPr>
+                </a:tc>
+                <a:tc>
+                  <a:txBody>
+                    <a:bodyPr/>
+                    <a:lstStyle/>
+                    <a:p>
+                      <a:pPr algn="ctr" indent="0" marL="0">
+                        <a:buNone/>
+                      </a:pPr>
+                      <a:r>
+                        <a:rPr lang="en-US" sz="1200" b="1" dirty="0">
+                          <a:solidFill>
+                            <a:srgbClr val="001E3C"/>
+                          </a:solidFill>
+                          <a:latin typeface="Inter" pitchFamily="34" charset="0"/>
+                          <a:ea typeface="Inter" pitchFamily="34" charset="-122"/>
+                          <a:cs typeface="Inter" pitchFamily="34" charset="-120"/>
+                        </a:rPr>
+                        <a:t>6 in 24 · 6</a:t>
+                      </a:r>
+                      <a:endParaRPr lang="en-US" sz="1200" dirty="0">
+                        <a:latin typeface="Inter" charset="0"/>
+                        <a:ea typeface="Inter" charset="0"/>
+                        <a:cs typeface="Inter" charset="0"/>
+                      </a:endParaRPr>
+                    </a:p>
+                  </a:txBody>
+                  <a:tcPr marL="91440" marR="91440" marT="0" marB="0" anchor="ctr">
+                    <a:lnL w="9525" cap="flat" cmpd="sng" algn="ctr">
+                      <a:solidFill>
+                        <a:srgbClr val="DDE3EA"/>
+                      </a:solidFill>
+                      <a:prstDash val="solid"/>
+                      <a:round/>
+                      <a:headEnd type="none" w="med" len="med"/>
+                      <a:tailEnd type="none" w="med" len="med"/>
+                    </a:lnL>
+                    <a:lnR w="9525" cap="flat" cmpd="sng" algn="ctr">
+                      <a:solidFill>
+                        <a:srgbClr val="DDE3EA"/>
+                      </a:solidFill>
+                      <a:prstDash val="solid"/>
+                      <a:round/>
+                      <a:headEnd type="none" w="med" len="med"/>
+                      <a:tailEnd type="none" w="med" len="med"/>
+                    </a:lnR>
+                    <a:lnT w="9525" cap="flat" cmpd="sng" algn="ctr">
+                      <a:solidFill>
+                        <a:srgbClr val="DDE3EA"/>
+                      </a:solidFill>
+                      <a:prstDash val="solid"/>
+                      <a:round/>
+                      <a:headEnd type="none" w="med" len="med"/>
+                      <a:tailEnd type="none" w="med" len="med"/>
+                    </a:lnT>
+                    <a:lnB w="9525" cap="flat" cmpd="sng" algn="ctr">
+                      <a:solidFill>
+                        <a:srgbClr val="DDE3EA"/>
+                      </a:solidFill>
+                      <a:prstDash val="solid"/>
+                      <a:round/>
+                      <a:headEnd type="none" w="med" len="med"/>
+                      <a:tailEnd type="none" w="med" len="med"/>
+                    </a:lnB>
+                    <a:solidFill>
+                      <a:srgbClr val="FFF4C2"/>
+                    </a:solidFill>
+                  </a:tcPr>
+                </a:tc>
+                <a:tc>
+                  <a:txBody>
+                    <a:bodyPr/>
+                    <a:lstStyle/>
+                    <a:p>
+                      <a:pPr algn="ctr" indent="0" marL="0">
+                        <a:buNone/>
+                      </a:pPr>
+                      <a:r>
+                        <a:rPr lang="en-US" sz="1200" dirty="0">
+                          <a:solidFill>
+                            <a:srgbClr val="5B6778"/>
+                          </a:solidFill>
+                          <a:latin typeface="Inter" pitchFamily="34" charset="0"/>
+                          <a:ea typeface="Inter" pitchFamily="34" charset="-122"/>
+                          <a:cs typeface="Inter" pitchFamily="34" charset="-120"/>
+                        </a:rPr>
+                        <a:t>6 in 24 · 6</a:t>
+                      </a:r>
+                      <a:endParaRPr lang="en-US" sz="1200" dirty="0">
+                        <a:latin typeface="Inter" charset="0"/>
+                        <a:ea typeface="Inter" charset="0"/>
+                        <a:cs typeface="Inter" charset="0"/>
+                      </a:endParaRPr>
+                    </a:p>
+                  </a:txBody>
+                  <a:tcPr marL="91440" marR="91440" marT="0" marB="0" anchor="ctr">
+                    <a:lnL w="9525" cap="flat" cmpd="sng" algn="ctr">
+                      <a:solidFill>
+                        <a:srgbClr val="DDE3EA"/>
+                      </a:solidFill>
+                      <a:prstDash val="solid"/>
+                      <a:round/>
+                      <a:headEnd type="none" w="med" len="med"/>
+                      <a:tailEnd type="none" w="med" len="med"/>
+                    </a:lnL>
+                    <a:lnR w="9525" cap="flat" cmpd="sng" algn="ctr">
+                      <a:solidFill>
+                        <a:srgbClr val="DDE3EA"/>
+                      </a:solidFill>
+                      <a:prstDash val="solid"/>
+                      <a:round/>
+                      <a:headEnd type="none" w="med" len="med"/>
+                      <a:tailEnd type="none" w="med" len="med"/>
+                    </a:lnR>
+                    <a:lnT w="9525" cap="flat" cmpd="sng" algn="ctr">
+                      <a:solidFill>
+                        <a:srgbClr val="DDE3EA"/>
+                      </a:solidFill>
+                      <a:prstDash val="solid"/>
+                      <a:round/>
+                      <a:headEnd type="none" w="med" len="med"/>
+                      <a:tailEnd type="none" w="med" len="med"/>
+                    </a:lnT>
+                    <a:lnB w="9525" cap="flat" cmpd="sng" algn="ctr">
+                      <a:solidFill>
+                        <a:srgbClr val="DDE3EA"/>
+                      </a:solidFill>
+                      <a:prstDash val="solid"/>
+                      <a:round/>
+                      <a:headEnd type="none" w="med" len="med"/>
+                      <a:tailEnd type="none" w="med" len="med"/>
+                    </a:lnB>
+                    <a:solidFill>
+                      <a:srgbClr val="FFFFFF"/>
+                    </a:solidFill>
+                  </a:tcPr>
+                </a:tc>
+                <a:tc>
+                  <a:txBody>
+                    <a:bodyPr/>
+                    <a:lstStyle/>
+                    <a:p>
+                      <a:pPr algn="ctr" indent="0" marL="0">
+                        <a:buNone/>
+                      </a:pPr>
+                      <a:r>
+                        <a:rPr lang="en-US" sz="1200" dirty="0">
+                          <a:solidFill>
+                            <a:srgbClr val="5B6778"/>
+                          </a:solidFill>
+                          <a:latin typeface="Inter" pitchFamily="34" charset="0"/>
+                          <a:ea typeface="Inter" pitchFamily="34" charset="-122"/>
+                          <a:cs typeface="Inter" pitchFamily="34" charset="-120"/>
+                        </a:rPr>
+                        <a:t>2 in 24 · 9</a:t>
+                      </a:r>
+                      <a:endParaRPr lang="en-US" sz="1200" dirty="0">
+                        <a:latin typeface="Inter" charset="0"/>
+                        <a:ea typeface="Inter" charset="0"/>
+                        <a:cs typeface="Inter" charset="0"/>
+                      </a:endParaRPr>
+                    </a:p>
+                  </a:txBody>
+                  <a:tcPr marL="91440" marR="91440" marT="0" marB="0" anchor="ctr">
+                    <a:lnL w="9525" cap="flat" cmpd="sng" algn="ctr">
+                      <a:solidFill>
+                        <a:srgbClr val="DDE3EA"/>
+                      </a:solidFill>
+                      <a:prstDash val="solid"/>
+                      <a:round/>
+                      <a:headEnd type="none" w="med" len="med"/>
+                      <a:tailEnd type="none" w="med" len="med"/>
+                    </a:lnL>
+                    <a:lnR w="9525" cap="flat" cmpd="sng" algn="ctr">
+                      <a:solidFill>
+                        <a:srgbClr val="DDE3EA"/>
+                      </a:solidFill>
+                      <a:prstDash val="solid"/>
+                      <a:round/>
+                      <a:headEnd type="none" w="med" len="med"/>
+                      <a:tailEnd type="none" w="med" len="med"/>
+                    </a:lnR>
+                    <a:lnT w="9525" cap="flat" cmpd="sng" algn="ctr">
+                      <a:solidFill>
+                        <a:srgbClr val="DDE3EA"/>
+                      </a:solidFill>
+                      <a:prstDash val="solid"/>
+                      <a:round/>
+                      <a:headEnd type="none" w="med" len="med"/>
+                      <a:tailEnd type="none" w="med" len="med"/>
+                    </a:lnT>
+                    <a:lnB w="9525" cap="flat" cmpd="sng" algn="ctr">
+                      <a:solidFill>
+                        <a:srgbClr val="DDE3EA"/>
+                      </a:solidFill>
+                      <a:prstDash val="solid"/>
+                      <a:round/>
+                      <a:headEnd type="none" w="med" len="med"/>
+                      <a:tailEnd type="none" w="med" len="med"/>
+                    </a:lnB>
+                    <a:solidFill>
+                      <a:srgbClr val="FFFFFF"/>
+                    </a:solidFill>
+                  </a:tcPr>
+                </a:tc>
+              </a:tr>
+              <a:tr h="329184">
+                <a:tc>
+                  <a:txBody>
+                    <a:bodyPr/>
+                    <a:lstStyle/>
+                    <a:p>
+                      <a:pPr algn="l" indent="0" marL="0">
+                        <a:buNone/>
+                      </a:pPr>
+                      <a:r>
+                        <a:rPr lang="en-US" sz="1200" b="1" dirty="0">
+                          <a:solidFill>
+                            <a:srgbClr val="1B2533"/>
+                          </a:solidFill>
+                          <a:latin typeface="Inter" pitchFamily="34" charset="0"/>
+                          <a:ea typeface="Inter" pitchFamily="34" charset="-122"/>
+                          <a:cs typeface="Inter" pitchFamily="34" charset="-120"/>
+                        </a:rPr>
+                        <a:t>Fit to the trains: weekday · Sat · Sun (lower is closer)</a:t>
+                      </a:r>
+                      <a:endParaRPr lang="en-US" sz="1200" dirty="0">
+                        <a:latin typeface="Inter" charset="0"/>
+                        <a:ea typeface="Inter" charset="0"/>
+                        <a:cs typeface="Inter" charset="0"/>
+                      </a:endParaRPr>
+                    </a:p>
+                  </a:txBody>
+                  <a:tcPr marL="91440" marR="91440" marT="0" marB="0" anchor="ctr">
+                    <a:lnL w="9525" cap="flat" cmpd="sng" algn="ctr">
+                      <a:solidFill>
+                        <a:srgbClr val="DDE3EA"/>
+                      </a:solidFill>
+                      <a:prstDash val="solid"/>
+                      <a:round/>
+                      <a:headEnd type="none" w="med" len="med"/>
+                      <a:tailEnd type="none" w="med" len="med"/>
+                    </a:lnL>
+                    <a:lnR w="9525" cap="flat" cmpd="sng" algn="ctr">
+                      <a:solidFill>
+                        <a:srgbClr val="DDE3EA"/>
+                      </a:solidFill>
+                      <a:prstDash val="solid"/>
+                      <a:round/>
+                      <a:headEnd type="none" w="med" len="med"/>
+                      <a:tailEnd type="none" w="med" len="med"/>
+                    </a:lnR>
+                    <a:lnT w="9525" cap="flat" cmpd="sng" algn="ctr">
+                      <a:solidFill>
+                        <a:srgbClr val="DDE3EA"/>
+                      </a:solidFill>
+                      <a:prstDash val="solid"/>
+                      <a:round/>
+                      <a:headEnd type="none" w="med" len="med"/>
+                      <a:tailEnd type="none" w="med" len="med"/>
+                    </a:lnT>
+                    <a:lnB w="9525" cap="flat" cmpd="sng" algn="ctr">
+                      <a:solidFill>
+                        <a:srgbClr val="DDE3EA"/>
+                      </a:solidFill>
+                      <a:prstDash val="solid"/>
+                      <a:round/>
+                      <a:headEnd type="none" w="med" len="med"/>
+                      <a:tailEnd type="none" w="med" len="med"/>
+                    </a:lnB>
+                    <a:solidFill>
+                      <a:srgbClr val="FFFFFF"/>
+                    </a:solidFill>
+                  </a:tcPr>
+                </a:tc>
+                <a:tc>
+                  <a:txBody>
+                    <a:bodyPr/>
+                    <a:lstStyle/>
+                    <a:p>
+                      <a:pPr algn="ctr" indent="0" marL="0">
+                        <a:buNone/>
+                      </a:pPr>
+                      <a:r>
+                        <a:rPr lang="en-US" sz="1200" b="1" dirty="0">
+                          <a:solidFill>
+                            <a:srgbClr val="001E3C"/>
+                          </a:solidFill>
+                          <a:latin typeface="Inter" pitchFamily="34" charset="0"/>
+                          <a:ea typeface="Inter" pitchFamily="34" charset="-122"/>
+                          <a:cs typeface="Inter" pitchFamily="34" charset="-120"/>
+                        </a:rPr>
+                        <a:t>28 · 15 · 31</a:t>
+                      </a:r>
+                      <a:endParaRPr lang="en-US" sz="1200" dirty="0">
+                        <a:latin typeface="Inter" charset="0"/>
+                        <a:ea typeface="Inter" charset="0"/>
+                        <a:cs typeface="Inter" charset="0"/>
+                      </a:endParaRPr>
+                    </a:p>
+                  </a:txBody>
+                  <a:tcPr marL="91440" marR="91440" marT="0" marB="0" anchor="ctr">
+                    <a:lnL w="9525" cap="flat" cmpd="sng" algn="ctr">
+                      <a:solidFill>
+                        <a:srgbClr val="DDE3EA"/>
+                      </a:solidFill>
+                      <a:prstDash val="solid"/>
+                      <a:round/>
+                      <a:headEnd type="none" w="med" len="med"/>
+                      <a:tailEnd type="none" w="med" len="med"/>
+                    </a:lnL>
+                    <a:lnR w="9525" cap="flat" cmpd="sng" algn="ctr">
+                      <a:solidFill>
+                        <a:srgbClr val="DDE3EA"/>
+                      </a:solidFill>
+                      <a:prstDash val="solid"/>
+                      <a:round/>
+                      <a:headEnd type="none" w="med" len="med"/>
+                      <a:tailEnd type="none" w="med" len="med"/>
+                    </a:lnR>
+                    <a:lnT w="9525" cap="flat" cmpd="sng" algn="ctr">
+                      <a:solidFill>
+                        <a:srgbClr val="DDE3EA"/>
+                      </a:solidFill>
+                      <a:prstDash val="solid"/>
+                      <a:round/>
+                      <a:headEnd type="none" w="med" len="med"/>
+                      <a:tailEnd type="none" w="med" len="med"/>
+                    </a:lnT>
+                    <a:lnB w="9525" cap="flat" cmpd="sng" algn="ctr">
+                      <a:solidFill>
+                        <a:srgbClr val="DDE3EA"/>
+                      </a:solidFill>
+                      <a:prstDash val="solid"/>
+                      <a:round/>
+                      <a:headEnd type="none" w="med" len="med"/>
+                      <a:tailEnd type="none" w="med" len="med"/>
+                    </a:lnB>
+                    <a:solidFill>
+                      <a:srgbClr val="FFF4C2"/>
+                    </a:solidFill>
+                  </a:tcPr>
+                </a:tc>
+                <a:tc>
+                  <a:txBody>
+                    <a:bodyPr/>
+                    <a:lstStyle/>
+                    <a:p>
+                      <a:pPr algn="ctr" indent="0" marL="0">
+                        <a:buNone/>
+                      </a:pPr>
+                      <a:r>
+                        <a:rPr lang="en-US" sz="1200" dirty="0">
+                          <a:solidFill>
+                            <a:srgbClr val="5B6778"/>
+                          </a:solidFill>
+                          <a:latin typeface="Inter" pitchFamily="34" charset="0"/>
+                          <a:ea typeface="Inter" pitchFamily="34" charset="-122"/>
+                          <a:cs typeface="Inter" pitchFamily="34" charset="-120"/>
+                        </a:rPr>
+                        <a:t>27 · 15 · 29</a:t>
+                      </a:r>
+                      <a:endParaRPr lang="en-US" sz="1200" dirty="0">
+                        <a:latin typeface="Inter" charset="0"/>
+                        <a:ea typeface="Inter" charset="0"/>
+                        <a:cs typeface="Inter" charset="0"/>
+                      </a:endParaRPr>
+                    </a:p>
+                  </a:txBody>
+                  <a:tcPr marL="91440" marR="91440" marT="0" marB="0" anchor="ctr">
+                    <a:lnL w="9525" cap="flat" cmpd="sng" algn="ctr">
+                      <a:solidFill>
+                        <a:srgbClr val="DDE3EA"/>
+                      </a:solidFill>
+                      <a:prstDash val="solid"/>
+                      <a:round/>
+                      <a:headEnd type="none" w="med" len="med"/>
+                      <a:tailEnd type="none" w="med" len="med"/>
+                    </a:lnL>
+                    <a:lnR w="9525" cap="flat" cmpd="sng" algn="ctr">
+                      <a:solidFill>
+                        <a:srgbClr val="DDE3EA"/>
+                      </a:solidFill>
+                      <a:prstDash val="solid"/>
+                      <a:round/>
+                      <a:headEnd type="none" w="med" len="med"/>
+                      <a:tailEnd type="none" w="med" len="med"/>
+                    </a:lnR>
+                    <a:lnT w="9525" cap="flat" cmpd="sng" algn="ctr">
+                      <a:solidFill>
+                        <a:srgbClr val="DDE3EA"/>
+                      </a:solidFill>
+                      <a:prstDash val="solid"/>
+                      <a:round/>
+                      <a:headEnd type="none" w="med" len="med"/>
+                      <a:tailEnd type="none" w="med" len="med"/>
+                    </a:lnT>
+                    <a:lnB w="9525" cap="flat" cmpd="sng" algn="ctr">
+                      <a:solidFill>
+                        <a:srgbClr val="DDE3EA"/>
+                      </a:solidFill>
+                      <a:prstDash val="solid"/>
+                      <a:round/>
+                      <a:headEnd type="none" w="med" len="med"/>
+                      <a:tailEnd type="none" w="med" len="med"/>
+                    </a:lnB>
+                    <a:solidFill>
+                      <a:srgbClr val="FFFFFF"/>
+                    </a:solidFill>
+                  </a:tcPr>
+                </a:tc>
+                <a:tc>
+                  <a:txBody>
+                    <a:bodyPr/>
+                    <a:lstStyle/>
+                    <a:p>
+                      <a:pPr algn="ctr" indent="0" marL="0">
+                        <a:buNone/>
+                      </a:pPr>
+                      <a:r>
+                        <a:rPr lang="en-US" sz="1200" dirty="0">
+                          <a:solidFill>
+                            <a:srgbClr val="5B6778"/>
+                          </a:solidFill>
+                          <a:latin typeface="Inter" pitchFamily="34" charset="0"/>
+                          <a:ea typeface="Inter" pitchFamily="34" charset="-122"/>
+                          <a:cs typeface="Inter" pitchFamily="34" charset="-120"/>
+                        </a:rPr>
+                        <a:t>42 · 38 · 78</a:t>
+                      </a:r>
+                      <a:endParaRPr lang="en-US" sz="1200" dirty="0">
+                        <a:latin typeface="Inter" charset="0"/>
+                        <a:ea typeface="Inter" charset="0"/>
+                        <a:cs typeface="Inter" charset="0"/>
+                      </a:endParaRPr>
+                    </a:p>
+                  </a:txBody>
+                  <a:tcPr marL="91440" marR="91440" marT="0" marB="0" anchor="ctr">
+                    <a:lnL w="9525" cap="flat" cmpd="sng" algn="ctr">
+                      <a:solidFill>
+                        <a:srgbClr val="DDE3EA"/>
+                      </a:solidFill>
+                      <a:prstDash val="solid"/>
+                      <a:round/>
+                      <a:headEnd type="none" w="med" len="med"/>
+                      <a:tailEnd type="none" w="med" len="med"/>
+                    </a:lnL>
+                    <a:lnR w="9525" cap="flat" cmpd="sng" algn="ctr">
+                      <a:solidFill>
+                        <a:srgbClr val="DDE3EA"/>
+                      </a:solidFill>
+                      <a:prstDash val="solid"/>
+                      <a:round/>
+                      <a:headEnd type="none" w="med" len="med"/>
+                      <a:tailEnd type="none" w="med" len="med"/>
+                    </a:lnR>
+                    <a:lnT w="9525" cap="flat" cmpd="sng" algn="ctr">
+                      <a:solidFill>
+                        <a:srgbClr val="DDE3EA"/>
+                      </a:solidFill>
+                      <a:prstDash val="solid"/>
+                      <a:round/>
+                      <a:headEnd type="none" w="med" len="med"/>
+                      <a:tailEnd type="none" w="med" len="med"/>
+                    </a:lnT>
+                    <a:lnB w="9525" cap="flat" cmpd="sng" algn="ctr">
+                      <a:solidFill>
+                        <a:srgbClr val="DDE3EA"/>
+                      </a:solidFill>
+                      <a:prstDash val="solid"/>
+                      <a:round/>
+                      <a:headEnd type="none" w="med" len="med"/>
+                      <a:tailEnd type="none" w="med" len="med"/>
+                    </a:lnB>
+                    <a:solidFill>
+                      <a:srgbClr val="FFFFFF"/>
+                    </a:solidFill>
+                  </a:tcPr>
+                </a:tc>
+              </a:tr>
+              <a:tr h="329184">
+                <a:tc>
+                  <a:txBody>
+                    <a:bodyPr/>
+                    <a:lstStyle/>
+                    <a:p>
+                      <a:pPr algn="l" indent="0" marL="0">
+                        <a:buNone/>
+                      </a:pPr>
+                      <a:r>
+                        <a:rPr lang="en-US" sz="1200" b="1" dirty="0">
+                          <a:solidFill>
+                            <a:srgbClr val="1B2533"/>
+                          </a:solidFill>
+                          <a:latin typeface="Inter" pitchFamily="34" charset="0"/>
+                          <a:ea typeface="Inter" pitchFamily="34" charset="-122"/>
+                          <a:cs typeface="Inter" pitchFamily="34" charset="-120"/>
+                        </a:rPr>
+                        <a:t>Finishing at 23:00 or later — each, a year</a:t>
+                      </a:r>
+                      <a:endParaRPr lang="en-US" sz="1200" dirty="0">
+                        <a:latin typeface="Inter" charset="0"/>
+                        <a:ea typeface="Inter" charset="0"/>
+                        <a:cs typeface="Inter" charset="0"/>
+                      </a:endParaRPr>
+                    </a:p>
+                  </a:txBody>
+                  <a:tcPr marL="91440" marR="91440" marT="0" marB="0" anchor="ctr">
+                    <a:lnL w="9525" cap="flat" cmpd="sng" algn="ctr">
+                      <a:solidFill>
+                        <a:srgbClr val="DDE3EA"/>
+                      </a:solidFill>
+                      <a:prstDash val="solid"/>
+                      <a:round/>
+                      <a:headEnd type="none" w="med" len="med"/>
+                      <a:tailEnd type="none" w="med" len="med"/>
+                    </a:lnL>
+                    <a:lnR w="9525" cap="flat" cmpd="sng" algn="ctr">
+                      <a:solidFill>
+                        <a:srgbClr val="DDE3EA"/>
+                      </a:solidFill>
+                      <a:prstDash val="solid"/>
+                      <a:round/>
+                      <a:headEnd type="none" w="med" len="med"/>
+                      <a:tailEnd type="none" w="med" len="med"/>
+                    </a:lnR>
+                    <a:lnT w="9525" cap="flat" cmpd="sng" algn="ctr">
+                      <a:solidFill>
+                        <a:srgbClr val="DDE3EA"/>
+                      </a:solidFill>
+                      <a:prstDash val="solid"/>
+                      <a:round/>
+                      <a:headEnd type="none" w="med" len="med"/>
+                      <a:tailEnd type="none" w="med" len="med"/>
+                    </a:lnT>
+                    <a:lnB w="9525" cap="flat" cmpd="sng" algn="ctr">
+                      <a:solidFill>
+                        <a:srgbClr val="DDE3EA"/>
+                      </a:solidFill>
+                      <a:prstDash val="solid"/>
+                      <a:round/>
+                      <a:headEnd type="none" w="med" len="med"/>
+                      <a:tailEnd type="none" w="med" len="med"/>
+                    </a:lnB>
+                    <a:solidFill>
+                      <a:srgbClr val="FFFFFF"/>
+                    </a:solidFill>
+                  </a:tcPr>
+                </a:tc>
+                <a:tc>
+                  <a:txBody>
+                    <a:bodyPr/>
+                    <a:lstStyle/>
+                    <a:p>
+                      <a:pPr algn="ctr" indent="0" marL="0">
+                        <a:buNone/>
+                      </a:pPr>
+                      <a:r>
+                        <a:rPr lang="en-US" sz="1200" b="1" dirty="0">
+                          <a:solidFill>
+                            <a:srgbClr val="001E3C"/>
+                          </a:solidFill>
+                          <a:latin typeface="Inter" pitchFamily="34" charset="0"/>
+                          <a:ea typeface="Inter" pitchFamily="34" charset="-122"/>
+                          <a:cs typeface="Inter" pitchFamily="34" charset="-120"/>
+                        </a:rPr>
+                        <a:t>59</a:t>
+                      </a:r>
+                      <a:endParaRPr lang="en-US" sz="1200" dirty="0">
+                        <a:latin typeface="Inter" charset="0"/>
+                        <a:ea typeface="Inter" charset="0"/>
+                        <a:cs typeface="Inter" charset="0"/>
+                      </a:endParaRPr>
+                    </a:p>
+                  </a:txBody>
+                  <a:tcPr marL="91440" marR="91440" marT="0" marB="0" anchor="ctr">
+                    <a:lnL w="9525" cap="flat" cmpd="sng" algn="ctr">
+                      <a:solidFill>
+                        <a:srgbClr val="DDE3EA"/>
+                      </a:solidFill>
+                      <a:prstDash val="solid"/>
+                      <a:round/>
+                      <a:headEnd type="none" w="med" len="med"/>
+                      <a:tailEnd type="none" w="med" len="med"/>
+                    </a:lnL>
+                    <a:lnR w="9525" cap="flat" cmpd="sng" algn="ctr">
+                      <a:solidFill>
+                        <a:srgbClr val="DDE3EA"/>
+                      </a:solidFill>
+                      <a:prstDash val="solid"/>
+                      <a:round/>
+                      <a:headEnd type="none" w="med" len="med"/>
+                      <a:tailEnd type="none" w="med" len="med"/>
+                    </a:lnR>
+                    <a:lnT w="9525" cap="flat" cmpd="sng" algn="ctr">
+                      <a:solidFill>
+                        <a:srgbClr val="DDE3EA"/>
+                      </a:solidFill>
+                      <a:prstDash val="solid"/>
+                      <a:round/>
+                      <a:headEnd type="none" w="med" len="med"/>
+                      <a:tailEnd type="none" w="med" len="med"/>
+                    </a:lnT>
+                    <a:lnB w="9525" cap="flat" cmpd="sng" algn="ctr">
+                      <a:solidFill>
+                        <a:srgbClr val="DDE3EA"/>
+                      </a:solidFill>
+                      <a:prstDash val="solid"/>
+                      <a:round/>
+                      <a:headEnd type="none" w="med" len="med"/>
+                      <a:tailEnd type="none" w="med" len="med"/>
+                    </a:lnB>
+                    <a:solidFill>
+                      <a:srgbClr val="FFF4C2"/>
+                    </a:solidFill>
+                  </a:tcPr>
+                </a:tc>
+                <a:tc>
+                  <a:txBody>
+                    <a:bodyPr/>
+                    <a:lstStyle/>
+                    <a:p>
+                      <a:pPr algn="ctr" indent="0" marL="0">
+                        <a:buNone/>
+                      </a:pPr>
+                      <a:r>
+                        <a:rPr lang="en-US" sz="1200" dirty="0">
+                          <a:solidFill>
+                            <a:srgbClr val="5B6778"/>
+                          </a:solidFill>
+                          <a:latin typeface="Inter" pitchFamily="34" charset="0"/>
+                          <a:ea typeface="Inter" pitchFamily="34" charset="-122"/>
+                          <a:cs typeface="Inter" pitchFamily="34" charset="-120"/>
+                        </a:rPr>
+                        <a:t>59</a:t>
+                      </a:r>
+                      <a:endParaRPr lang="en-US" sz="1200" dirty="0">
+                        <a:latin typeface="Inter" charset="0"/>
+                        <a:ea typeface="Inter" charset="0"/>
+                        <a:cs typeface="Inter" charset="0"/>
+                      </a:endParaRPr>
+                    </a:p>
+                  </a:txBody>
+                  <a:tcPr marL="91440" marR="91440" marT="0" marB="0" anchor="ctr">
+                    <a:lnL w="9525" cap="flat" cmpd="sng" algn="ctr">
+                      <a:solidFill>
+                        <a:srgbClr val="DDE3EA"/>
+                      </a:solidFill>
+                      <a:prstDash val="solid"/>
+                      <a:round/>
+                      <a:headEnd type="none" w="med" len="med"/>
+                      <a:tailEnd type="none" w="med" len="med"/>
+                    </a:lnL>
+                    <a:lnR w="9525" cap="flat" cmpd="sng" algn="ctr">
+                      <a:solidFill>
+                        <a:srgbClr val="DDE3EA"/>
+                      </a:solidFill>
+                      <a:prstDash val="solid"/>
+                      <a:round/>
+                      <a:headEnd type="none" w="med" len="med"/>
+                      <a:tailEnd type="none" w="med" len="med"/>
+                    </a:lnR>
+                    <a:lnT w="9525" cap="flat" cmpd="sng" algn="ctr">
+                      <a:solidFill>
+                        <a:srgbClr val="DDE3EA"/>
+                      </a:solidFill>
+                      <a:prstDash val="solid"/>
+                      <a:round/>
+                      <a:headEnd type="none" w="med" len="med"/>
+                      <a:tailEnd type="none" w="med" len="med"/>
+                    </a:lnT>
+                    <a:lnB w="9525" cap="flat" cmpd="sng" algn="ctr">
+                      <a:solidFill>
+                        <a:srgbClr val="DDE3EA"/>
+                      </a:solidFill>
+                      <a:prstDash val="solid"/>
+                      <a:round/>
+                      <a:headEnd type="none" w="med" len="med"/>
+                      <a:tailEnd type="none" w="med" len="med"/>
+                    </a:lnB>
+                    <a:solidFill>
+                      <a:srgbClr val="FFFFFF"/>
+                    </a:solidFill>
+                  </a:tcPr>
+                </a:tc>
+                <a:tc>
+                  <a:txBody>
+                    <a:bodyPr/>
+                    <a:lstStyle/>
+                    <a:p>
+                      <a:pPr algn="ctr" indent="0" marL="0">
+                        <a:buNone/>
+                      </a:pPr>
+                      <a:r>
+                        <a:rPr lang="en-US" sz="1200" dirty="0">
+                          <a:solidFill>
+                            <a:srgbClr val="5B6778"/>
+                          </a:solidFill>
+                          <a:latin typeface="Inter" pitchFamily="34" charset="0"/>
+                          <a:ea typeface="Inter" pitchFamily="34" charset="-122"/>
+                          <a:cs typeface="Inter" pitchFamily="34" charset="-120"/>
+                        </a:rPr>
+                        <a:t>50</a:t>
+                      </a:r>
+                      <a:endParaRPr lang="en-US" sz="1200" dirty="0">
+                        <a:latin typeface="Inter" charset="0"/>
+                        <a:ea typeface="Inter" charset="0"/>
+                        <a:cs typeface="Inter" charset="0"/>
+                      </a:endParaRPr>
+                    </a:p>
+                  </a:txBody>
+                  <a:tcPr marL="91440" marR="91440" marT="0" marB="0" anchor="ctr">
+                    <a:lnL w="9525" cap="flat" cmpd="sng" algn="ctr">
+                      <a:solidFill>
+                        <a:srgbClr val="DDE3EA"/>
+                      </a:solidFill>
+                      <a:prstDash val="solid"/>
+                      <a:round/>
+                      <a:headEnd type="none" w="med" len="med"/>
+                      <a:tailEnd type="none" w="med" len="med"/>
+                    </a:lnL>
+                    <a:lnR w="9525" cap="flat" cmpd="sng" algn="ctr">
+                      <a:solidFill>
+                        <a:srgbClr val="DDE3EA"/>
+                      </a:solidFill>
+                      <a:prstDash val="solid"/>
+                      <a:round/>
+                      <a:headEnd type="none" w="med" len="med"/>
+                      <a:tailEnd type="none" w="med" len="med"/>
+                    </a:lnR>
+                    <a:lnT w="9525" cap="flat" cmpd="sng" algn="ctr">
+                      <a:solidFill>
+                        <a:srgbClr val="DDE3EA"/>
+                      </a:solidFill>
+                      <a:prstDash val="solid"/>
+                      <a:round/>
+                      <a:headEnd type="none" w="med" len="med"/>
+                      <a:tailEnd type="none" w="med" len="med"/>
+                    </a:lnT>
+                    <a:lnB w="9525" cap="flat" cmpd="sng" algn="ctr">
+                      <a:solidFill>
+                        <a:srgbClr val="DDE3EA"/>
+                      </a:solidFill>
+                      <a:prstDash val="solid"/>
+                      <a:round/>
+                      <a:headEnd type="none" w="med" len="med"/>
+                      <a:tailEnd type="none" w="med" len="med"/>
+                    </a:lnB>
+                    <a:solidFill>
+                      <a:srgbClr val="FFFFFF"/>
+                    </a:solidFill>
+                  </a:tcPr>
+                </a:tc>
+              </a:tr>
+            </a:tbl>
+          </a:graphicData>
+        </a:graphic>
+      </p:graphicFrame>
+      <p:sp>
+        <p:nvSpPr>
+          <p:cNvPr id="5" name="Shape 2"/>
           <p:cNvSpPr/>
           <p:nvPr/>
         </p:nvSpPr>
@@ -6946,7 +8628,7 @@
       </p:sp>
       <p:sp>
         <p:nvSpPr>
-          <p:cNvPr id="31" name="Text 29"/>
+          <p:cNvPr id="6" name="Text 3"/>
           <p:cNvSpPr txBox="1"/>
           <p:nvPr/>
         </p:nvSpPr>
@@ -6977,7 +8659,7 @@
                 <a:ea typeface="Inter" pitchFamily="34" charset="-122"/>
                 <a:cs typeface="Inter" pitchFamily="34" charset="-120"/>
               </a:rPr>
-              <a:t>Familiar times, shorter closers, more weekends, fewer days at work — easier to agree.</a:t>
+              <a:t>Not the only good option — it trades a little train fit for familiar, shorter shifts.</a:t>
             </a:r>
             <a:endParaRPr lang="en-US" sz="1400" dirty="0"/>
           </a:p>
@@ -6985,7 +8667,7 @@
       </p:sp>
       <p:sp>
         <p:nvSpPr>
-          <p:cNvPr id="32" name="Text 30"/>
+          <p:cNvPr id="7" name="Text 4"/>
           <p:cNvSpPr txBox="1"/>
           <p:nvPr/>
         </p:nvSpPr>
@@ -7087,7 +8769,7 @@
                 <a:ea typeface="Inter" pitchFamily="34" charset="-122"/>
                 <a:cs typeface="Inter" pitchFamily="34" charset="-120"/>
               </a:rPr>
-              <a:t>Where it stands</a:t>
+              <a:t>What colleagues will notice</a:t>
             </a:r>
             <a:endParaRPr lang="en-US" sz="3000" dirty="0"/>
           </a:p>
@@ -7126,7 +8808,7 @@
                 <a:ea typeface="Inter" pitchFamily="34" charset="-122"/>
                 <a:cs typeface="Inter" pitchFamily="34" charset="-120"/>
               </a:rPr>
-              <a:t>Three things confirmed, one decision left</a:t>
+              <a:t>The good and the not so good — the colleague presentation shows both</a:t>
             </a:r>
             <a:endParaRPr lang="en-US" sz="1500" dirty="0"/>
           </a:p>
@@ -7140,10 +8822,37 @@
         </p:nvSpPr>
         <p:spPr>
           <a:xfrm>
-            <a:off x="457200" y="1371600"/>
-            <a:ext cx="457200" cy="457200"/>
-          </a:xfrm>
-          <a:prstGeom prst="ellipse">
+            <a:off x="457200" y="1325880"/>
+            <a:ext cx="4023360" cy="2697480"/>
+          </a:xfrm>
+          <a:prstGeom prst="roundRect">
+            <a:avLst>
+              <a:gd name="adj" fmla="val 3390"/>
+            </a:avLst>
+          </a:prstGeom>
+          <a:solidFill>
+            <a:srgbClr val="EEF2F7"/>
+          </a:solidFill>
+          <a:ln w="12700">
+            <a:solidFill>
+              <a:srgbClr val="EEF2F7"/>
+            </a:solidFill>
+            <a:prstDash val="solid"/>
+          </a:ln>
+        </p:spPr>
+      </p:sp>
+      <p:sp>
+        <p:nvSpPr>
+          <p:cNvPr id="5" name="Shape 3"/>
+          <p:cNvSpPr/>
+          <p:nvPr/>
+        </p:nvSpPr>
+        <p:spPr>
+          <a:xfrm>
+            <a:off x="457200" y="1325880"/>
+            <a:ext cx="73152" cy="2697480"/>
+          </a:xfrm>
+          <a:prstGeom prst="rect">
             <a:avLst/>
           </a:prstGeom>
           <a:solidFill>
@@ -7159,53 +8868,14 @@
       </p:sp>
       <p:sp>
         <p:nvSpPr>
-          <p:cNvPr id="5" name="Text 3"/>
-          <p:cNvSpPr txBox="1"/>
-          <p:nvPr/>
-        </p:nvSpPr>
-        <p:spPr>
-          <a:xfrm>
-            <a:off x="457200" y="1371600"/>
-            <a:ext cx="457200" cy="457200"/>
-          </a:xfrm>
-          <a:prstGeom prst="rect">
-            <a:avLst/>
-          </a:prstGeom>
-          <a:noFill/>
-          <a:ln/>
-        </p:spPr>
-        <p:txBody>
-          <a:bodyPr wrap="square" lIns="0" tIns="0" rIns="0" bIns="0" rtlCol="0" anchor="ctr"/>
-          <a:lstStyle/>
-          <a:p>
-            <a:pPr algn="ctr" indent="0" marL="0">
-              <a:buNone/>
-            </a:pPr>
-            <a:r>
-              <a:rPr lang="en-US" sz="1800" b="1" dirty="0">
-                <a:solidFill>
-                  <a:srgbClr val="FFFFFF"/>
-                </a:solidFill>
-                <a:latin typeface="Inter" pitchFamily="34" charset="0"/>
-                <a:ea typeface="Inter" pitchFamily="34" charset="-122"/>
-                <a:cs typeface="Inter" pitchFamily="34" charset="-120"/>
-              </a:rPr>
-              <a:t>✓</a:t>
-            </a:r>
-            <a:endParaRPr lang="en-US" sz="1800" dirty="0"/>
-          </a:p>
-        </p:txBody>
-      </p:sp>
-      <p:sp>
-        <p:nvSpPr>
           <p:cNvPr id="6" name="Text 4"/>
           <p:cNvSpPr txBox="1"/>
           <p:nvPr/>
         </p:nvSpPr>
         <p:spPr>
           <a:xfrm>
-            <a:off x="1097280" y="1335024"/>
-            <a:ext cx="7589520" cy="292608"/>
+            <a:off x="731520" y="1463040"/>
+            <a:ext cx="3566160" cy="365760"/>
           </a:xfrm>
           <a:prstGeom prst="rect">
             <a:avLst/>
@@ -7223,52 +8893,140 @@
             <a:r>
               <a:rPr lang="en-US" sz="1600" b="1" dirty="0">
                 <a:solidFill>
+                  <a:srgbClr val="1E7B4B"/>
+                </a:solidFill>
+                <a:latin typeface="Inter" pitchFamily="34" charset="0"/>
+                <a:ea typeface="Inter" pitchFamily="34" charset="-122"/>
+                <a:cs typeface="Inter" pitchFamily="34" charset="-120"/>
+              </a:rPr>
+              <a:t>Likely to welcome</a:t>
+            </a:r>
+            <a:endParaRPr lang="en-US" sz="1600" dirty="0"/>
+          </a:p>
+        </p:txBody>
+      </p:sp>
+      <p:sp>
+        <p:nvSpPr>
+          <p:cNvPr id="7" name="Text 5"/>
+          <p:cNvSpPr txBox="1"/>
+          <p:nvPr/>
+        </p:nvSpPr>
+        <p:spPr>
+          <a:xfrm>
+            <a:off x="731520" y="1901952"/>
+            <a:ext cx="3611880" cy="2011680"/>
+          </a:xfrm>
+          <a:prstGeom prst="rect">
+            <a:avLst/>
+          </a:prstGeom>
+          <a:noFill/>
+          <a:ln/>
+        </p:spPr>
+        <p:txBody>
+          <a:bodyPr wrap="square" lIns="0" tIns="0" rIns="0" bIns="0" rtlCol="0" anchor="t"/>
+          <a:lstStyle/>
+          <a:p>
+            <a:pPr marL="342900" indent="-342900">
+              <a:spcAft>
+                <a:spcPts val="600"/>
+              </a:spcAft>
+              <a:buSzPct val="100000"/>
+              <a:buChar char="•"/>
+            </a:pPr>
+            <a:r>
+              <a:rPr lang="en-US" sz="1300" dirty="0">
+                <a:solidFill>
                   <a:srgbClr val="1B2533"/>
                 </a:solidFill>
                 <a:latin typeface="Inter" pitchFamily="34" charset="0"/>
                 <a:ea typeface="Inter" pitchFamily="34" charset="-122"/>
                 <a:cs typeface="Inter" pitchFamily="34" charset="-120"/>
               </a:rPr>
-              <a:t>Staffing levels — confirmed</a:t>
-            </a:r>
-            <a:endParaRPr lang="en-US" sz="1600" dirty="0"/>
-          </a:p>
-        </p:txBody>
-      </p:sp>
-      <p:sp>
-        <p:nvSpPr>
-          <p:cNvPr id="7" name="Text 5"/>
-          <p:cNvSpPr txBox="1"/>
-          <p:nvPr/>
-        </p:nvSpPr>
-        <p:spPr>
-          <a:xfrm>
-            <a:off x="1097280" y="1618488"/>
-            <a:ext cx="7589520" cy="274320"/>
-          </a:xfrm>
-          <a:prstGeom prst="rect">
-            <a:avLst/>
-          </a:prstGeom>
-          <a:noFill/>
-          <a:ln/>
-        </p:spPr>
-        <p:txBody>
-          <a:bodyPr wrap="square" lIns="0" tIns="0" rIns="0" bIns="0" rtlCol="0" anchor="ctr"/>
-          <a:lstStyle/>
-          <a:p>
-            <a:pPr indent="0" marL="0">
-              <a:buNone/>
+              <a:t>6 full weekends off in 24 (today 4 in 20)</a:t>
+            </a:r>
+            <a:endParaRPr lang="en-US" sz="1300" dirty="0"/>
+          </a:p>
+          <a:p>
+            <a:pPr marL="342900" indent="-342900">
+              <a:spcAft>
+                <a:spcPts val="600"/>
+              </a:spcAft>
+              <a:buSzPct val="100000"/>
+              <a:buChar char="•"/>
             </a:pPr>
             <a:r>
               <a:rPr lang="en-US" sz="1300" dirty="0">
                 <a:solidFill>
-                  <a:srgbClr val="5B6778"/>
-                </a:solidFill>
-                <a:latin typeface="Inter" pitchFamily="34" charset="0"/>
-                <a:ea typeface="Inter" pitchFamily="34" charset="-122"/>
-                <a:cs typeface="Inter" pitchFamily="34" charset="-120"/>
-              </a:rPr>
-              <a:t>The eleven December rules. Everything here is built on them.</a:t>
+                  <a:srgbClr val="1B2533"/>
+                </a:solidFill>
+                <a:latin typeface="Inter" pitchFamily="34" charset="0"/>
+                <a:ea typeface="Inter" pitchFamily="34" charset="-122"/>
+                <a:cs typeface="Inter" pitchFamily="34" charset="-120"/>
+              </a:rPr>
+              <a:t>At most 6 days in a row (today 9)</a:t>
+            </a:r>
+            <a:endParaRPr lang="en-US" sz="1300" dirty="0"/>
+          </a:p>
+          <a:p>
+            <a:pPr marL="342900" indent="-342900">
+              <a:spcAft>
+                <a:spcPts val="600"/>
+              </a:spcAft>
+              <a:buSzPct val="100000"/>
+              <a:buChar char="•"/>
+            </a:pPr>
+            <a:r>
+              <a:rPr lang="en-US" sz="1300" dirty="0">
+                <a:solidFill>
+                  <a:srgbClr val="1B2533"/>
+                </a:solidFill>
+                <a:latin typeface="Inter" pitchFamily="34" charset="0"/>
+                <a:ea typeface="Inter" pitchFamily="34" charset="-122"/>
+                <a:cs typeface="Inter" pitchFamily="34" charset="-120"/>
+              </a:rPr>
+              <a:t>Every closing shift 30–45 minutes shorter</a:t>
+            </a:r>
+            <a:endParaRPr lang="en-US" sz="1300" dirty="0"/>
+          </a:p>
+          <a:p>
+            <a:pPr marL="342900" indent="-342900">
+              <a:spcAft>
+                <a:spcPts val="600"/>
+              </a:spcAft>
+              <a:buSzPct val="100000"/>
+              <a:buChar char="•"/>
+            </a:pPr>
+            <a:r>
+              <a:rPr lang="en-US" sz="1300" dirty="0">
+                <a:solidFill>
+                  <a:srgbClr val="1B2533"/>
+                </a:solidFill>
+                <a:latin typeface="Inter" pitchFamily="34" charset="0"/>
+                <a:ea typeface="Inter" pitchFamily="34" charset="-122"/>
+                <a:cs typeface="Inter" pitchFamily="34" charset="-120"/>
+              </a:rPr>
+              <a:t>9 of the 15 shift times already worked</a:t>
+            </a:r>
+            <a:endParaRPr lang="en-US" sz="1300" dirty="0"/>
+          </a:p>
+          <a:p>
+            <a:pPr marL="342900" indent="-342900">
+              <a:spcAft>
+                <a:spcPts val="600"/>
+              </a:spcAft>
+              <a:buSzPct val="100000"/>
+              <a:buChar char="•"/>
+            </a:pPr>
+            <a:r>
+              <a:rPr lang="en-US" sz="1300" dirty="0">
+                <a:solidFill>
+                  <a:srgbClr val="1B2533"/>
+                </a:solidFill>
+                <a:latin typeface="Inter" pitchFamily="34" charset="0"/>
+                <a:ea typeface="Inter" pitchFamily="34" charset="-122"/>
+                <a:cs typeface="Inter" pitchFamily="34" charset="-120"/>
+              </a:rPr>
+              <a:t>Shortest rest 14h20 (today 12h30)</a:t>
             </a:r>
             <a:endParaRPr lang="en-US" sz="1300" dirty="0"/>
           </a:p>
@@ -7282,18 +9040,20 @@
         </p:nvSpPr>
         <p:spPr>
           <a:xfrm>
-            <a:off x="457200" y="2029968"/>
-            <a:ext cx="457200" cy="457200"/>
-          </a:xfrm>
-          <a:prstGeom prst="ellipse">
-            <a:avLst/>
+            <a:off x="4663440" y="1325880"/>
+            <a:ext cx="4023360" cy="2697480"/>
+          </a:xfrm>
+          <a:prstGeom prst="roundRect">
+            <a:avLst>
+              <a:gd name="adj" fmla="val 3390"/>
+            </a:avLst>
           </a:prstGeom>
           <a:solidFill>
-            <a:srgbClr val="1E7B4B"/>
+            <a:srgbClr val="EEF2F7"/>
           </a:solidFill>
           <a:ln w="12700">
             <a:solidFill>
-              <a:srgbClr val="1E7B4B"/>
+              <a:srgbClr val="EEF2F7"/>
             </a:solidFill>
             <a:prstDash val="solid"/>
           </a:ln>
@@ -7301,141 +9061,24 @@
       </p:sp>
       <p:sp>
         <p:nvSpPr>
-          <p:cNvPr id="9" name="Text 7"/>
-          <p:cNvSpPr txBox="1"/>
-          <p:nvPr/>
-        </p:nvSpPr>
-        <p:spPr>
-          <a:xfrm>
-            <a:off x="457200" y="2029968"/>
-            <a:ext cx="457200" cy="457200"/>
-          </a:xfrm>
-          <a:prstGeom prst="rect">
-            <a:avLst/>
-          </a:prstGeom>
-          <a:noFill/>
-          <a:ln/>
-        </p:spPr>
-        <p:txBody>
-          <a:bodyPr wrap="square" lIns="0" tIns="0" rIns="0" bIns="0" rtlCol="0" anchor="ctr"/>
-          <a:lstStyle/>
-          <a:p>
-            <a:pPr algn="ctr" indent="0" marL="0">
-              <a:buNone/>
-            </a:pPr>
-            <a:r>
-              <a:rPr lang="en-US" sz="1800" b="1" dirty="0">
-                <a:solidFill>
-                  <a:srgbClr val="FFFFFF"/>
-                </a:solidFill>
-                <a:latin typeface="Inter" pitchFamily="34" charset="0"/>
-                <a:ea typeface="Inter" pitchFamily="34" charset="-122"/>
-                <a:cs typeface="Inter" pitchFamily="34" charset="-120"/>
-              </a:rPr>
-              <a:t>✓</a:t>
-            </a:r>
-            <a:endParaRPr lang="en-US" sz="1800" dirty="0"/>
-          </a:p>
-        </p:txBody>
-      </p:sp>
-      <p:sp>
-        <p:nvSpPr>
-          <p:cNvPr id="10" name="Text 8"/>
-          <p:cNvSpPr txBox="1"/>
-          <p:nvPr/>
-        </p:nvSpPr>
-        <p:spPr>
-          <a:xfrm>
-            <a:off x="1097280" y="1993392"/>
-            <a:ext cx="7589520" cy="292608"/>
-          </a:xfrm>
-          <a:prstGeom prst="rect">
-            <a:avLst/>
-          </a:prstGeom>
-          <a:noFill/>
-          <a:ln/>
-        </p:spPr>
-        <p:txBody>
-          <a:bodyPr wrap="square" lIns="0" tIns="0" rIns="0" bIns="0" rtlCol="0" anchor="ctr"/>
-          <a:lstStyle/>
-          <a:p>
-            <a:pPr indent="0" marL="0">
-              <a:buNone/>
-            </a:pPr>
-            <a:r>
-              <a:rPr lang="en-US" sz="1600" b="1" dirty="0">
-                <a:solidFill>
-                  <a:srgbClr val="1B2533"/>
-                </a:solidFill>
-                <a:latin typeface="Inter" pitchFamily="34" charset="0"/>
-                <a:ea typeface="Inter" pitchFamily="34" charset="-122"/>
-                <a:cs typeface="Inter" pitchFamily="34" charset="-120"/>
-              </a:rPr>
-              <a:t>24 people on the link — confirmed</a:t>
-            </a:r>
-            <a:endParaRPr lang="en-US" sz="1600" dirty="0"/>
-          </a:p>
-        </p:txBody>
-      </p:sp>
-      <p:sp>
-        <p:nvSpPr>
-          <p:cNvPr id="11" name="Text 9"/>
-          <p:cNvSpPr txBox="1"/>
-          <p:nvPr/>
-        </p:nvSpPr>
-        <p:spPr>
-          <a:xfrm>
-            <a:off x="1097280" y="2276856"/>
-            <a:ext cx="7589520" cy="274320"/>
-          </a:xfrm>
-          <a:prstGeom prst="rect">
-            <a:avLst/>
-          </a:prstGeom>
-          <a:noFill/>
-          <a:ln/>
-        </p:spPr>
-        <p:txBody>
-          <a:bodyPr wrap="square" lIns="0" tIns="0" rIns="0" bIns="0" rtlCol="0" anchor="ctr"/>
-          <a:lstStyle/>
-          <a:p>
-            <a:pPr indent="0" marL="0">
-              <a:buNone/>
-            </a:pPr>
-            <a:r>
-              <a:rPr lang="en-US" sz="1300" dirty="0">
-                <a:solidFill>
-                  <a:srgbClr val="5B6778"/>
-                </a:solidFill>
-                <a:latin typeface="Inter" pitchFamily="34" charset="0"/>
-                <a:ea typeface="Inter" pitchFamily="34" charset="-122"/>
-                <a:cs typeface="Inter" pitchFamily="34" charset="-120"/>
-              </a:rPr>
-              <a:t>Four more than today.</a:t>
-            </a:r>
-            <a:endParaRPr lang="en-US" sz="1300" dirty="0"/>
-          </a:p>
-        </p:txBody>
-      </p:sp>
-      <p:sp>
-        <p:nvSpPr>
-          <p:cNvPr id="12" name="Shape 10"/>
+          <p:cNvPr id="9" name="Shape 7"/>
           <p:cNvSpPr/>
           <p:nvPr/>
         </p:nvSpPr>
         <p:spPr>
           <a:xfrm>
-            <a:off x="457200" y="2688336"/>
-            <a:ext cx="457200" cy="457200"/>
-          </a:xfrm>
-          <a:prstGeom prst="ellipse">
+            <a:off x="4663440" y="1325880"/>
+            <a:ext cx="73152" cy="2697480"/>
+          </a:xfrm>
+          <a:prstGeom prst="rect">
             <a:avLst/>
           </a:prstGeom>
           <a:solidFill>
-            <a:srgbClr val="1E7B4B"/>
+            <a:srgbClr val="A15C00"/>
           </a:solidFill>
           <a:ln w="12700">
             <a:solidFill>
-              <a:srgbClr val="1E7B4B"/>
+              <a:srgbClr val="A15C00"/>
             </a:solidFill>
             <a:prstDash val="solid"/>
           </a:ln>
@@ -7443,53 +9086,14 @@
       </p:sp>
       <p:sp>
         <p:nvSpPr>
-          <p:cNvPr id="13" name="Text 11"/>
-          <p:cNvSpPr txBox="1"/>
-          <p:nvPr/>
-        </p:nvSpPr>
-        <p:spPr>
-          <a:xfrm>
-            <a:off x="457200" y="2688336"/>
-            <a:ext cx="457200" cy="457200"/>
-          </a:xfrm>
-          <a:prstGeom prst="rect">
-            <a:avLst/>
-          </a:prstGeom>
-          <a:noFill/>
-          <a:ln/>
-        </p:spPr>
-        <p:txBody>
-          <a:bodyPr wrap="square" lIns="0" tIns="0" rIns="0" bIns="0" rtlCol="0" anchor="ctr"/>
-          <a:lstStyle/>
-          <a:p>
-            <a:pPr algn="ctr" indent="0" marL="0">
-              <a:buNone/>
-            </a:pPr>
-            <a:r>
-              <a:rPr lang="en-US" sz="1800" b="1" dirty="0">
-                <a:solidFill>
-                  <a:srgbClr val="FFFFFF"/>
-                </a:solidFill>
-                <a:latin typeface="Inter" pitchFamily="34" charset="0"/>
-                <a:ea typeface="Inter" pitchFamily="34" charset="-122"/>
-                <a:cs typeface="Inter" pitchFamily="34" charset="-120"/>
-              </a:rPr>
-              <a:t>✓</a:t>
-            </a:r>
-            <a:endParaRPr lang="en-US" sz="1800" dirty="0"/>
-          </a:p>
-        </p:txBody>
-      </p:sp>
-      <p:sp>
-        <p:nvSpPr>
-          <p:cNvPr id="14" name="Text 12"/>
-          <p:cNvSpPr txBox="1"/>
-          <p:nvPr/>
-        </p:nvSpPr>
-        <p:spPr>
-          <a:xfrm>
-            <a:off x="1097280" y="2651760"/>
-            <a:ext cx="7589520" cy="292608"/>
+          <p:cNvPr id="10" name="Text 8"/>
+          <p:cNvSpPr txBox="1"/>
+          <p:nvPr/>
+        </p:nvSpPr>
+        <p:spPr>
+          <a:xfrm>
+            <a:off x="4937760" y="1463040"/>
+            <a:ext cx="3566160" cy="365760"/>
           </a:xfrm>
           <a:prstGeom prst="rect">
             <a:avLst/>
@@ -7507,77 +9111,167 @@
             <a:r>
               <a:rPr lang="en-US" sz="1600" b="1" dirty="0">
                 <a:solidFill>
+                  <a:srgbClr val="A15C00"/>
+                </a:solidFill>
+                <a:latin typeface="Inter" pitchFamily="34" charset="0"/>
+                <a:ea typeface="Inter" pitchFamily="34" charset="-122"/>
+                <a:cs typeface="Inter" pitchFamily="34" charset="-120"/>
+              </a:rPr>
+              <a:t>Likely to worry about</a:t>
+            </a:r>
+            <a:endParaRPr lang="en-US" sz="1600" dirty="0"/>
+          </a:p>
+        </p:txBody>
+      </p:sp>
+      <p:sp>
+        <p:nvSpPr>
+          <p:cNvPr id="11" name="Text 9"/>
+          <p:cNvSpPr txBox="1"/>
+          <p:nvPr/>
+        </p:nvSpPr>
+        <p:spPr>
+          <a:xfrm>
+            <a:off x="4937760" y="1901952"/>
+            <a:ext cx="3611880" cy="2011680"/>
+          </a:xfrm>
+          <a:prstGeom prst="rect">
+            <a:avLst/>
+          </a:prstGeom>
+          <a:noFill/>
+          <a:ln/>
+        </p:spPr>
+        <p:txBody>
+          <a:bodyPr wrap="square" lIns="0" tIns="0" rIns="0" bIns="0" rtlCol="0" anchor="t"/>
+          <a:lstStyle/>
+          <a:p>
+            <a:pPr marL="342900" indent="-342900">
+              <a:spcAft>
+                <a:spcPts val="600"/>
+              </a:spcAft>
+              <a:buSzPct val="100000"/>
+              <a:buChar char="•"/>
+            </a:pPr>
+            <a:r>
+              <a:rPr lang="en-US" sz="1300" dirty="0">
+                <a:solidFill>
                   <a:srgbClr val="1B2533"/>
                 </a:solidFill>
                 <a:latin typeface="Inter" pitchFamily="34" charset="0"/>
                 <a:ea typeface="Inter" pitchFamily="34" charset="-122"/>
                 <a:cs typeface="Inter" pitchFamily="34" charset="-120"/>
               </a:rPr>
-              <a:t>Sunday cover — confirmed</a:t>
-            </a:r>
-            <a:endParaRPr lang="en-US" sz="1600" dirty="0"/>
-          </a:p>
-        </p:txBody>
-      </p:sp>
-      <p:sp>
-        <p:nvSpPr>
-          <p:cNvPr id="15" name="Text 13"/>
-          <p:cNvSpPr txBox="1"/>
-          <p:nvPr/>
-        </p:nvSpPr>
-        <p:spPr>
-          <a:xfrm>
-            <a:off x="1097280" y="2935224"/>
-            <a:ext cx="7589520" cy="274320"/>
-          </a:xfrm>
-          <a:prstGeom prst="rect">
-            <a:avLst/>
-          </a:prstGeom>
-          <a:noFill/>
-          <a:ln/>
-        </p:spPr>
-        <p:txBody>
-          <a:bodyPr wrap="square" lIns="0" tIns="0" rIns="0" bIns="0" rtlCol="0" anchor="ctr"/>
-          <a:lstStyle/>
-          <a:p>
-            <a:pPr indent="0" marL="0">
-              <a:buNone/>
+              <a:t>59 finishes at 23:00 or later a year each (today 39)</a:t>
+            </a:r>
+            <a:endParaRPr lang="en-US" sz="1300" dirty="0"/>
+          </a:p>
+          <a:p>
+            <a:pPr marL="342900" indent="-342900">
+              <a:spcAft>
+                <a:spcPts val="600"/>
+              </a:spcAft>
+              <a:buSzPct val="100000"/>
+              <a:buChar char="•"/>
             </a:pPr>
             <a:r>
               <a:rPr lang="en-US" sz="1300" dirty="0">
                 <a:solidFill>
-                  <a:srgbClr val="5B6778"/>
-                </a:solidFill>
-                <a:latin typeface="Inter" pitchFamily="34" charset="0"/>
-                <a:ea typeface="Inter" pitchFamily="34" charset="-122"/>
-                <a:cs typeface="Inter" pitchFamily="34" charset="-120"/>
-              </a:rPr>
-              <a:t>Ten on a Sunday, worked as overtime, as today.</a:t>
+                  <a:srgbClr val="1B2533"/>
+                </a:solidFill>
+                <a:latin typeface="Inter" pitchFamily="34" charset="0"/>
+                <a:ea typeface="Inter" pitchFamily="34" charset="-122"/>
+                <a:cs typeface="Inter" pitchFamily="34" charset="-120"/>
+              </a:rPr>
+              <a:t>6 new shift times to learn</a:t>
             </a:r>
             <a:endParaRPr lang="en-US" sz="1300" dirty="0"/>
           </a:p>
-        </p:txBody>
-      </p:sp>
-      <p:sp>
-        <p:nvSpPr>
-          <p:cNvPr id="16" name="Shape 14"/>
+          <a:p>
+            <a:pPr marL="342900" indent="-342900">
+              <a:spcAft>
+                <a:spcPts val="600"/>
+              </a:spcAft>
+              <a:buSzPct val="100000"/>
+              <a:buChar char="•"/>
+            </a:pPr>
+            <a:r>
+              <a:rPr lang="en-US" sz="1300" dirty="0">
+                <a:solidFill>
+                  <a:srgbClr val="1B2533"/>
+                </a:solidFill>
+                <a:latin typeface="Inter" pitchFamily="34" charset="0"/>
+                <a:ea typeface="Inter" pitchFamily="34" charset="-122"/>
+                <a:cs typeface="Inter" pitchFamily="34" charset="-120"/>
+              </a:rPr>
+              <a:t>Average shift 6 minutes longer</a:t>
+            </a:r>
+            <a:endParaRPr lang="en-US" sz="1300" dirty="0"/>
+          </a:p>
+          <a:p>
+            <a:pPr marL="342900" indent="-342900">
+              <a:spcAft>
+                <a:spcPts val="600"/>
+              </a:spcAft>
+              <a:buSzPct val="100000"/>
+              <a:buChar char="•"/>
+            </a:pPr>
+            <a:r>
+              <a:rPr lang="en-US" sz="1300" dirty="0">
+                <a:solidFill>
+                  <a:srgbClr val="1B2533"/>
+                </a:solidFill>
+                <a:latin typeface="Inter" pitchFamily="34" charset="0"/>
+                <a:ea typeface="Inter" pitchFamily="34" charset="-122"/>
+                <a:cs typeface="Inter" pitchFamily="34" charset="-120"/>
+              </a:rPr>
+              <a:t>Best 14-day leave stretch 28 days, not 30</a:t>
+            </a:r>
+            <a:endParaRPr lang="en-US" sz="1300" dirty="0"/>
+          </a:p>
+          <a:p>
+            <a:pPr marL="342900" indent="-342900">
+              <a:spcAft>
+                <a:spcPts val="600"/>
+              </a:spcAft>
+              <a:buSzPct val="100000"/>
+              <a:buChar char="•"/>
+            </a:pPr>
+            <a:r>
+              <a:rPr lang="en-US" sz="1300" dirty="0">
+                <a:solidFill>
+                  <a:srgbClr val="1B2533"/>
+                </a:solidFill>
+                <a:latin typeface="Inter" pitchFamily="34" charset="0"/>
+                <a:ea typeface="Inter" pitchFamily="34" charset="-122"/>
+                <a:cs typeface="Inter" pitchFamily="34" charset="-120"/>
+              </a:rPr>
+              <a:t>Four weeks off takes 15 days’ leave, not 14</a:t>
+            </a:r>
+            <a:endParaRPr lang="en-US" sz="1300" dirty="0"/>
+          </a:p>
+        </p:txBody>
+      </p:sp>
+      <p:sp>
+        <p:nvSpPr>
+          <p:cNvPr id="12" name="Shape 10"/>
           <p:cNvSpPr/>
           <p:nvPr/>
         </p:nvSpPr>
         <p:spPr>
           <a:xfrm>
-            <a:off x="457200" y="3346704"/>
-            <a:ext cx="457200" cy="457200"/>
-          </a:xfrm>
-          <a:prstGeom prst="ellipse">
-            <a:avLst/>
+            <a:off x="457200" y="4160520"/>
+            <a:ext cx="8229600" cy="548640"/>
+          </a:xfrm>
+          <a:prstGeom prst="roundRect">
+            <a:avLst>
+              <a:gd name="adj" fmla="val 16667"/>
+            </a:avLst>
           </a:prstGeom>
           <a:solidFill>
-            <a:srgbClr val="F5C800"/>
+            <a:srgbClr val="001E3C"/>
           </a:solidFill>
           <a:ln w="12700">
             <a:solidFill>
-              <a:srgbClr val="F5C800"/>
+              <a:srgbClr val="001E3C"/>
             </a:solidFill>
             <a:prstDash val="solid"/>
           </a:ln>
@@ -7585,53 +9279,14 @@
       </p:sp>
       <p:sp>
         <p:nvSpPr>
-          <p:cNvPr id="17" name="Text 15"/>
-          <p:cNvSpPr txBox="1"/>
-          <p:nvPr/>
-        </p:nvSpPr>
-        <p:spPr>
-          <a:xfrm>
-            <a:off x="457200" y="3346704"/>
-            <a:ext cx="457200" cy="457200"/>
-          </a:xfrm>
-          <a:prstGeom prst="rect">
-            <a:avLst/>
-          </a:prstGeom>
-          <a:noFill/>
-          <a:ln/>
-        </p:spPr>
-        <p:txBody>
-          <a:bodyPr wrap="square" lIns="0" tIns="0" rIns="0" bIns="0" rtlCol="0" anchor="ctr"/>
-          <a:lstStyle/>
-          <a:p>
-            <a:pPr algn="ctr" indent="0" marL="0">
-              <a:buNone/>
-            </a:pPr>
-            <a:r>
-              <a:rPr lang="en-US" sz="1800" b="1" dirty="0">
-                <a:solidFill>
-                  <a:srgbClr val="001E3C"/>
-                </a:solidFill>
-                <a:latin typeface="Inter" pitchFamily="34" charset="0"/>
-                <a:ea typeface="Inter" pitchFamily="34" charset="-122"/>
-                <a:cs typeface="Inter" pitchFamily="34" charset="-120"/>
-              </a:rPr>
-              <a:t>?</a:t>
-            </a:r>
-            <a:endParaRPr lang="en-US" sz="1800" dirty="0"/>
-          </a:p>
-        </p:txBody>
-      </p:sp>
-      <p:sp>
-        <p:nvSpPr>
-          <p:cNvPr id="18" name="Text 16"/>
-          <p:cNvSpPr txBox="1"/>
-          <p:nvPr/>
-        </p:nvSpPr>
-        <p:spPr>
-          <a:xfrm>
-            <a:off x="1097280" y="3310128"/>
-            <a:ext cx="7589520" cy="292608"/>
+          <p:cNvPr id="13" name="Text 11"/>
+          <p:cNvSpPr txBox="1"/>
+          <p:nvPr/>
+        </p:nvSpPr>
+        <p:spPr>
+          <a:xfrm>
+            <a:off x="640080" y="4160520"/>
+            <a:ext cx="7863840" cy="548640"/>
           </a:xfrm>
           <a:prstGeom prst="rect">
             <a:avLst/>
@@ -7647,62 +9302,23 @@
               <a:buNone/>
             </a:pPr>
             <a:r>
-              <a:rPr lang="en-US" sz="1600" b="1" dirty="0">
-                <a:solidFill>
-                  <a:srgbClr val="1B2533"/>
-                </a:solidFill>
-                <a:latin typeface="Inter" pitchFamily="34" charset="0"/>
-                <a:ea typeface="Inter" pitchFamily="34" charset="-122"/>
-                <a:cs typeface="Inter" pitchFamily="34" charset="-120"/>
-              </a:rPr>
-              <a:t>Still to decide: who goes on which line</a:t>
-            </a:r>
-            <a:endParaRPr lang="en-US" sz="1600" dirty="0"/>
-          </a:p>
-        </p:txBody>
-      </p:sp>
-      <p:sp>
-        <p:nvSpPr>
-          <p:cNvPr id="19" name="Text 17"/>
-          <p:cNvSpPr txBox="1"/>
-          <p:nvPr/>
-        </p:nvSpPr>
-        <p:spPr>
-          <a:xfrm>
-            <a:off x="1097280" y="3593592"/>
-            <a:ext cx="7589520" cy="274320"/>
-          </a:xfrm>
-          <a:prstGeom prst="rect">
-            <a:avLst/>
-          </a:prstGeom>
-          <a:noFill/>
-          <a:ln/>
-        </p:spPr>
-        <p:txBody>
-          <a:bodyPr wrap="square" lIns="0" tIns="0" rIns="0" bIns="0" rtlCol="0" anchor="ctr"/>
-          <a:lstStyle/>
-          <a:p>
-            <a:pPr indent="0" marL="0">
-              <a:buNone/>
-            </a:pPr>
-            <a:r>
-              <a:rPr lang="en-US" sz="1300" dirty="0">
-                <a:solidFill>
-                  <a:srgbClr val="5B6778"/>
-                </a:solidFill>
-                <a:latin typeface="Inter" pitchFamily="34" charset="0"/>
-                <a:ea typeface="Inter" pitchFamily="34" charset="-122"/>
-                <a:cs typeface="Inter" pitchFamily="34" charset="-120"/>
-              </a:rPr>
-              <a:t>Who starts on which week of the link.</a:t>
-            </a:r>
-            <a:endParaRPr lang="en-US" sz="1300" dirty="0"/>
-          </a:p>
-        </p:txBody>
-      </p:sp>
-      <p:sp>
-        <p:nvSpPr>
-          <p:cNvPr id="20" name="Text 18"/>
+              <a:rPr lang="en-US" sz="1400" b="1" dirty="0">
+                <a:solidFill>
+                  <a:srgbClr val="FFFFFF"/>
+                </a:solidFill>
+                <a:latin typeface="Inter" pitchFamily="34" charset="0"/>
+                <a:ea typeface="Inter" pitchFamily="34" charset="-122"/>
+                <a:cs typeface="Inter" pitchFamily="34" charset="-120"/>
+              </a:rPr>
+              <a:t>Expect late finishes to be the first question — the colleague deck answers it openly.</a:t>
+            </a:r>
+            <a:endParaRPr lang="en-US" sz="1400" dirty="0"/>
+          </a:p>
+        </p:txBody>
+      </p:sp>
+      <p:sp>
+        <p:nvSpPr>
+          <p:cNvPr id="14" name="Text 12"/>
           <p:cNvSpPr txBox="1"/>
           <p:nvPr/>
         </p:nvSpPr>
@@ -7753,7 +9369,7 @@
     <p:bg>
       <p:bgPr>
         <a:solidFill>
-          <a:srgbClr val="001E3C"/>
+          <a:srgbClr val="FFFFFF"/>
         </a:solidFill>
       </p:bgPr>
     </p:bg>
@@ -7773,14 +9389,518 @@
       </p:grpSpPr>
       <p:sp>
         <p:nvSpPr>
-          <p:cNvPr id="2" name="Shape 0"/>
+          <p:cNvPr id="2" name="Text 0"/>
+          <p:cNvSpPr txBox="1"/>
+          <p:nvPr/>
+        </p:nvSpPr>
+        <p:spPr>
+          <a:xfrm>
+            <a:off x="457200" y="274320"/>
+            <a:ext cx="8229600" cy="594360"/>
+          </a:xfrm>
+          <a:prstGeom prst="rect">
+            <a:avLst/>
+          </a:prstGeom>
+          <a:noFill/>
+          <a:ln/>
+        </p:spPr>
+        <p:txBody>
+          <a:bodyPr wrap="square" lIns="0" tIns="0" rIns="0" bIns="0" rtlCol="0" anchor="ctr"/>
+          <a:lstStyle/>
+          <a:p>
+            <a:pPr indent="0" marL="0">
+              <a:buNone/>
+            </a:pPr>
+            <a:r>
+              <a:rPr lang="en-US" sz="3000" b="1" dirty="0">
+                <a:solidFill>
+                  <a:srgbClr val="001E3C"/>
+                </a:solidFill>
+                <a:latin typeface="Inter" pitchFamily="34" charset="0"/>
+                <a:ea typeface="Inter" pitchFamily="34" charset="-122"/>
+                <a:cs typeface="Inter" pitchFamily="34" charset="-120"/>
+              </a:rPr>
+              <a:t>Where it stands</a:t>
+            </a:r>
+            <a:endParaRPr lang="en-US" sz="3000" dirty="0"/>
+          </a:p>
+        </p:txBody>
+      </p:sp>
+      <p:sp>
+        <p:nvSpPr>
+          <p:cNvPr id="3" name="Text 1"/>
+          <p:cNvSpPr txBox="1"/>
+          <p:nvPr/>
+        </p:nvSpPr>
+        <p:spPr>
+          <a:xfrm>
+            <a:off x="457200" y="868680"/>
+            <a:ext cx="8229600" cy="365760"/>
+          </a:xfrm>
+          <a:prstGeom prst="rect">
+            <a:avLst/>
+          </a:prstGeom>
+          <a:noFill/>
+          <a:ln/>
+        </p:spPr>
+        <p:txBody>
+          <a:bodyPr wrap="square" lIns="0" tIns="0" rIns="0" bIns="0" rtlCol="0" anchor="ctr"/>
+          <a:lstStyle/>
+          <a:p>
+            <a:pPr indent="0" marL="0">
+              <a:buNone/>
+            </a:pPr>
+            <a:r>
+              <a:rPr lang="en-US" sz="1500" dirty="0">
+                <a:solidFill>
+                  <a:srgbClr val="5B6778"/>
+                </a:solidFill>
+                <a:latin typeface="Inter" pitchFamily="34" charset="0"/>
+                <a:ea typeface="Inter" pitchFamily="34" charset="-122"/>
+                <a:cs typeface="Inter" pitchFamily="34" charset="-120"/>
+              </a:rPr>
+              <a:t>Three things confirmed, two decisions left</a:t>
+            </a:r>
+            <a:endParaRPr lang="en-US" sz="1500" dirty="0"/>
+          </a:p>
+        </p:txBody>
+      </p:sp>
+      <p:sp>
+        <p:nvSpPr>
+          <p:cNvPr id="4" name="Shape 2"/>
           <p:cNvSpPr/>
           <p:nvPr/>
         </p:nvSpPr>
         <p:spPr>
           <a:xfrm>
-            <a:off x="548640" y="640080"/>
-            <a:ext cx="731520" cy="731520"/>
+            <a:off x="457200" y="1325880"/>
+            <a:ext cx="457200" cy="457200"/>
+          </a:xfrm>
+          <a:prstGeom prst="ellipse">
+            <a:avLst/>
+          </a:prstGeom>
+          <a:solidFill>
+            <a:srgbClr val="1E7B4B"/>
+          </a:solidFill>
+          <a:ln w="12700">
+            <a:solidFill>
+              <a:srgbClr val="1E7B4B"/>
+            </a:solidFill>
+            <a:prstDash val="solid"/>
+          </a:ln>
+        </p:spPr>
+      </p:sp>
+      <p:sp>
+        <p:nvSpPr>
+          <p:cNvPr id="5" name="Text 3"/>
+          <p:cNvSpPr txBox="1"/>
+          <p:nvPr/>
+        </p:nvSpPr>
+        <p:spPr>
+          <a:xfrm>
+            <a:off x="457200" y="1325880"/>
+            <a:ext cx="457200" cy="457200"/>
+          </a:xfrm>
+          <a:prstGeom prst="rect">
+            <a:avLst/>
+          </a:prstGeom>
+          <a:noFill/>
+          <a:ln/>
+        </p:spPr>
+        <p:txBody>
+          <a:bodyPr wrap="square" lIns="0" tIns="0" rIns="0" bIns="0" rtlCol="0" anchor="ctr"/>
+          <a:lstStyle/>
+          <a:p>
+            <a:pPr algn="ctr" indent="0" marL="0">
+              <a:buNone/>
+            </a:pPr>
+            <a:r>
+              <a:rPr lang="en-US" sz="1800" b="1" dirty="0">
+                <a:solidFill>
+                  <a:srgbClr val="FFFFFF"/>
+                </a:solidFill>
+                <a:latin typeface="Inter" pitchFamily="34" charset="0"/>
+                <a:ea typeface="Inter" pitchFamily="34" charset="-122"/>
+                <a:cs typeface="Inter" pitchFamily="34" charset="-120"/>
+              </a:rPr>
+              <a:t>✓</a:t>
+            </a:r>
+            <a:endParaRPr lang="en-US" sz="1800" dirty="0"/>
+          </a:p>
+        </p:txBody>
+      </p:sp>
+      <p:sp>
+        <p:nvSpPr>
+          <p:cNvPr id="6" name="Text 4"/>
+          <p:cNvSpPr txBox="1"/>
+          <p:nvPr/>
+        </p:nvSpPr>
+        <p:spPr>
+          <a:xfrm>
+            <a:off x="1097280" y="1289304"/>
+            <a:ext cx="7589520" cy="292608"/>
+          </a:xfrm>
+          <a:prstGeom prst="rect">
+            <a:avLst/>
+          </a:prstGeom>
+          <a:noFill/>
+          <a:ln/>
+        </p:spPr>
+        <p:txBody>
+          <a:bodyPr wrap="square" lIns="0" tIns="0" rIns="0" bIns="0" rtlCol="0" anchor="ctr"/>
+          <a:lstStyle/>
+          <a:p>
+            <a:pPr indent="0" marL="0">
+              <a:buNone/>
+            </a:pPr>
+            <a:r>
+              <a:rPr lang="en-US" sz="1600" b="1" dirty="0">
+                <a:solidFill>
+                  <a:srgbClr val="1B2533"/>
+                </a:solidFill>
+                <a:latin typeface="Inter" pitchFamily="34" charset="0"/>
+                <a:ea typeface="Inter" pitchFamily="34" charset="-122"/>
+                <a:cs typeface="Inter" pitchFamily="34" charset="-120"/>
+              </a:rPr>
+              <a:t>Staffing levels — confirmed</a:t>
+            </a:r>
+            <a:endParaRPr lang="en-US" sz="1600" dirty="0"/>
+          </a:p>
+        </p:txBody>
+      </p:sp>
+      <p:sp>
+        <p:nvSpPr>
+          <p:cNvPr id="7" name="Text 5"/>
+          <p:cNvSpPr txBox="1"/>
+          <p:nvPr/>
+        </p:nvSpPr>
+        <p:spPr>
+          <a:xfrm>
+            <a:off x="1097280" y="1572768"/>
+            <a:ext cx="7589520" cy="274320"/>
+          </a:xfrm>
+          <a:prstGeom prst="rect">
+            <a:avLst/>
+          </a:prstGeom>
+          <a:noFill/>
+          <a:ln/>
+        </p:spPr>
+        <p:txBody>
+          <a:bodyPr wrap="square" lIns="0" tIns="0" rIns="0" bIns="0" rtlCol="0" anchor="ctr"/>
+          <a:lstStyle/>
+          <a:p>
+            <a:pPr indent="0" marL="0">
+              <a:buNone/>
+            </a:pPr>
+            <a:r>
+              <a:rPr lang="en-US" sz="1300" dirty="0">
+                <a:solidFill>
+                  <a:srgbClr val="5B6778"/>
+                </a:solidFill>
+                <a:latin typeface="Inter" pitchFamily="34" charset="0"/>
+                <a:ea typeface="Inter" pitchFamily="34" charset="-122"/>
+                <a:cs typeface="Inter" pitchFamily="34" charset="-120"/>
+              </a:rPr>
+              <a:t>The eleven December rules. Everything here is built on them.</a:t>
+            </a:r>
+            <a:endParaRPr lang="en-US" sz="1300" dirty="0"/>
+          </a:p>
+        </p:txBody>
+      </p:sp>
+      <p:sp>
+        <p:nvSpPr>
+          <p:cNvPr id="8" name="Shape 6"/>
+          <p:cNvSpPr/>
+          <p:nvPr/>
+        </p:nvSpPr>
+        <p:spPr>
+          <a:xfrm>
+            <a:off x="457200" y="1965960"/>
+            <a:ext cx="457200" cy="457200"/>
+          </a:xfrm>
+          <a:prstGeom prst="ellipse">
+            <a:avLst/>
+          </a:prstGeom>
+          <a:solidFill>
+            <a:srgbClr val="1E7B4B"/>
+          </a:solidFill>
+          <a:ln w="12700">
+            <a:solidFill>
+              <a:srgbClr val="1E7B4B"/>
+            </a:solidFill>
+            <a:prstDash val="solid"/>
+          </a:ln>
+        </p:spPr>
+      </p:sp>
+      <p:sp>
+        <p:nvSpPr>
+          <p:cNvPr id="9" name="Text 7"/>
+          <p:cNvSpPr txBox="1"/>
+          <p:nvPr/>
+        </p:nvSpPr>
+        <p:spPr>
+          <a:xfrm>
+            <a:off x="457200" y="1965960"/>
+            <a:ext cx="457200" cy="457200"/>
+          </a:xfrm>
+          <a:prstGeom prst="rect">
+            <a:avLst/>
+          </a:prstGeom>
+          <a:noFill/>
+          <a:ln/>
+        </p:spPr>
+        <p:txBody>
+          <a:bodyPr wrap="square" lIns="0" tIns="0" rIns="0" bIns="0" rtlCol="0" anchor="ctr"/>
+          <a:lstStyle/>
+          <a:p>
+            <a:pPr algn="ctr" indent="0" marL="0">
+              <a:buNone/>
+            </a:pPr>
+            <a:r>
+              <a:rPr lang="en-US" sz="1800" b="1" dirty="0">
+                <a:solidFill>
+                  <a:srgbClr val="FFFFFF"/>
+                </a:solidFill>
+                <a:latin typeface="Inter" pitchFamily="34" charset="0"/>
+                <a:ea typeface="Inter" pitchFamily="34" charset="-122"/>
+                <a:cs typeface="Inter" pitchFamily="34" charset="-120"/>
+              </a:rPr>
+              <a:t>✓</a:t>
+            </a:r>
+            <a:endParaRPr lang="en-US" sz="1800" dirty="0"/>
+          </a:p>
+        </p:txBody>
+      </p:sp>
+      <p:sp>
+        <p:nvSpPr>
+          <p:cNvPr id="10" name="Text 8"/>
+          <p:cNvSpPr txBox="1"/>
+          <p:nvPr/>
+        </p:nvSpPr>
+        <p:spPr>
+          <a:xfrm>
+            <a:off x="1097280" y="1929384"/>
+            <a:ext cx="7589520" cy="292608"/>
+          </a:xfrm>
+          <a:prstGeom prst="rect">
+            <a:avLst/>
+          </a:prstGeom>
+          <a:noFill/>
+          <a:ln/>
+        </p:spPr>
+        <p:txBody>
+          <a:bodyPr wrap="square" lIns="0" tIns="0" rIns="0" bIns="0" rtlCol="0" anchor="ctr"/>
+          <a:lstStyle/>
+          <a:p>
+            <a:pPr indent="0" marL="0">
+              <a:buNone/>
+            </a:pPr>
+            <a:r>
+              <a:rPr lang="en-US" sz="1600" b="1" dirty="0">
+                <a:solidFill>
+                  <a:srgbClr val="1B2533"/>
+                </a:solidFill>
+                <a:latin typeface="Inter" pitchFamily="34" charset="0"/>
+                <a:ea typeface="Inter" pitchFamily="34" charset="-122"/>
+                <a:cs typeface="Inter" pitchFamily="34" charset="-120"/>
+              </a:rPr>
+              <a:t>24 people on the link — confirmed</a:t>
+            </a:r>
+            <a:endParaRPr lang="en-US" sz="1600" dirty="0"/>
+          </a:p>
+        </p:txBody>
+      </p:sp>
+      <p:sp>
+        <p:nvSpPr>
+          <p:cNvPr id="11" name="Text 9"/>
+          <p:cNvSpPr txBox="1"/>
+          <p:nvPr/>
+        </p:nvSpPr>
+        <p:spPr>
+          <a:xfrm>
+            <a:off x="1097280" y="2212848"/>
+            <a:ext cx="7589520" cy="274320"/>
+          </a:xfrm>
+          <a:prstGeom prst="rect">
+            <a:avLst/>
+          </a:prstGeom>
+          <a:noFill/>
+          <a:ln/>
+        </p:spPr>
+        <p:txBody>
+          <a:bodyPr wrap="square" lIns="0" tIns="0" rIns="0" bIns="0" rtlCol="0" anchor="ctr"/>
+          <a:lstStyle/>
+          <a:p>
+            <a:pPr indent="0" marL="0">
+              <a:buNone/>
+            </a:pPr>
+            <a:r>
+              <a:rPr lang="en-US" sz="1300" dirty="0">
+                <a:solidFill>
+                  <a:srgbClr val="5B6778"/>
+                </a:solidFill>
+                <a:latin typeface="Inter" pitchFamily="34" charset="0"/>
+                <a:ea typeface="Inter" pitchFamily="34" charset="-122"/>
+                <a:cs typeface="Inter" pitchFamily="34" charset="-120"/>
+              </a:rPr>
+              <a:t>Four more than today.</a:t>
+            </a:r>
+            <a:endParaRPr lang="en-US" sz="1300" dirty="0"/>
+          </a:p>
+        </p:txBody>
+      </p:sp>
+      <p:sp>
+        <p:nvSpPr>
+          <p:cNvPr id="12" name="Shape 10"/>
+          <p:cNvSpPr/>
+          <p:nvPr/>
+        </p:nvSpPr>
+        <p:spPr>
+          <a:xfrm>
+            <a:off x="457200" y="2606040"/>
+            <a:ext cx="457200" cy="457200"/>
+          </a:xfrm>
+          <a:prstGeom prst="ellipse">
+            <a:avLst/>
+          </a:prstGeom>
+          <a:solidFill>
+            <a:srgbClr val="1E7B4B"/>
+          </a:solidFill>
+          <a:ln w="12700">
+            <a:solidFill>
+              <a:srgbClr val="1E7B4B"/>
+            </a:solidFill>
+            <a:prstDash val="solid"/>
+          </a:ln>
+        </p:spPr>
+      </p:sp>
+      <p:sp>
+        <p:nvSpPr>
+          <p:cNvPr id="13" name="Text 11"/>
+          <p:cNvSpPr txBox="1"/>
+          <p:nvPr/>
+        </p:nvSpPr>
+        <p:spPr>
+          <a:xfrm>
+            <a:off x="457200" y="2606040"/>
+            <a:ext cx="457200" cy="457200"/>
+          </a:xfrm>
+          <a:prstGeom prst="rect">
+            <a:avLst/>
+          </a:prstGeom>
+          <a:noFill/>
+          <a:ln/>
+        </p:spPr>
+        <p:txBody>
+          <a:bodyPr wrap="square" lIns="0" tIns="0" rIns="0" bIns="0" rtlCol="0" anchor="ctr"/>
+          <a:lstStyle/>
+          <a:p>
+            <a:pPr algn="ctr" indent="0" marL="0">
+              <a:buNone/>
+            </a:pPr>
+            <a:r>
+              <a:rPr lang="en-US" sz="1800" b="1" dirty="0">
+                <a:solidFill>
+                  <a:srgbClr val="FFFFFF"/>
+                </a:solidFill>
+                <a:latin typeface="Inter" pitchFamily="34" charset="0"/>
+                <a:ea typeface="Inter" pitchFamily="34" charset="-122"/>
+                <a:cs typeface="Inter" pitchFamily="34" charset="-120"/>
+              </a:rPr>
+              <a:t>✓</a:t>
+            </a:r>
+            <a:endParaRPr lang="en-US" sz="1800" dirty="0"/>
+          </a:p>
+        </p:txBody>
+      </p:sp>
+      <p:sp>
+        <p:nvSpPr>
+          <p:cNvPr id="14" name="Text 12"/>
+          <p:cNvSpPr txBox="1"/>
+          <p:nvPr/>
+        </p:nvSpPr>
+        <p:spPr>
+          <a:xfrm>
+            <a:off x="1097280" y="2569464"/>
+            <a:ext cx="7589520" cy="292608"/>
+          </a:xfrm>
+          <a:prstGeom prst="rect">
+            <a:avLst/>
+          </a:prstGeom>
+          <a:noFill/>
+          <a:ln/>
+        </p:spPr>
+        <p:txBody>
+          <a:bodyPr wrap="square" lIns="0" tIns="0" rIns="0" bIns="0" rtlCol="0" anchor="ctr"/>
+          <a:lstStyle/>
+          <a:p>
+            <a:pPr indent="0" marL="0">
+              <a:buNone/>
+            </a:pPr>
+            <a:r>
+              <a:rPr lang="en-US" sz="1600" b="1" dirty="0">
+                <a:solidFill>
+                  <a:srgbClr val="1B2533"/>
+                </a:solidFill>
+                <a:latin typeface="Inter" pitchFamily="34" charset="0"/>
+                <a:ea typeface="Inter" pitchFamily="34" charset="-122"/>
+                <a:cs typeface="Inter" pitchFamily="34" charset="-120"/>
+              </a:rPr>
+              <a:t>Sunday cover — confirmed</a:t>
+            </a:r>
+            <a:endParaRPr lang="en-US" sz="1600" dirty="0"/>
+          </a:p>
+        </p:txBody>
+      </p:sp>
+      <p:sp>
+        <p:nvSpPr>
+          <p:cNvPr id="15" name="Text 13"/>
+          <p:cNvSpPr txBox="1"/>
+          <p:nvPr/>
+        </p:nvSpPr>
+        <p:spPr>
+          <a:xfrm>
+            <a:off x="1097280" y="2852928"/>
+            <a:ext cx="7589520" cy="274320"/>
+          </a:xfrm>
+          <a:prstGeom prst="rect">
+            <a:avLst/>
+          </a:prstGeom>
+          <a:noFill/>
+          <a:ln/>
+        </p:spPr>
+        <p:txBody>
+          <a:bodyPr wrap="square" lIns="0" tIns="0" rIns="0" bIns="0" rtlCol="0" anchor="ctr"/>
+          <a:lstStyle/>
+          <a:p>
+            <a:pPr indent="0" marL="0">
+              <a:buNone/>
+            </a:pPr>
+            <a:r>
+              <a:rPr lang="en-US" sz="1300" dirty="0">
+                <a:solidFill>
+                  <a:srgbClr val="5B6778"/>
+                </a:solidFill>
+                <a:latin typeface="Inter" pitchFamily="34" charset="0"/>
+                <a:ea typeface="Inter" pitchFamily="34" charset="-122"/>
+                <a:cs typeface="Inter" pitchFamily="34" charset="-120"/>
+              </a:rPr>
+              <a:t>Ten on a Sunday, worked as overtime, as today.</a:t>
+            </a:r>
+            <a:endParaRPr lang="en-US" sz="1300" dirty="0"/>
+          </a:p>
+        </p:txBody>
+      </p:sp>
+      <p:sp>
+        <p:nvSpPr>
+          <p:cNvPr id="16" name="Shape 14"/>
+          <p:cNvSpPr/>
+          <p:nvPr/>
+        </p:nvSpPr>
+        <p:spPr>
+          <a:xfrm>
+            <a:off x="457200" y="3246120"/>
+            <a:ext cx="457200" cy="457200"/>
           </a:xfrm>
           <a:prstGeom prst="ellipse">
             <a:avLst/>
@@ -7796,40 +9916,55 @@
           </a:ln>
         </p:spPr>
       </p:sp>
-      <p:pic>
-        <p:nvPicPr>
-          <p:cNvPr id="3" name="Image 0" descr="preencoded.png">    </p:cNvPr>
-          <p:cNvPicPr>
-            <a:picLocks noChangeAspect="1"/>
-          </p:cNvPicPr>
-          <p:nvPr/>
-        </p:nvPicPr>
-        <p:blipFill>
-          <a:blip r:embed="rId1"/>
-          <a:stretch>
-            <a:fillRect/>
-          </a:stretch>
-        </p:blipFill>
-        <p:spPr>
-          <a:xfrm>
-            <a:off x="709574" y="801014"/>
-            <a:ext cx="409651" cy="409651"/>
-          </a:xfrm>
-          <a:prstGeom prst="rect">
-            <a:avLst/>
-          </a:prstGeom>
-        </p:spPr>
-      </p:pic>
-      <p:sp>
-        <p:nvSpPr>
-          <p:cNvPr id="4" name="Text 1"/>
-          <p:cNvSpPr txBox="1"/>
-          <p:nvPr/>
-        </p:nvSpPr>
-        <p:spPr>
-          <a:xfrm>
-            <a:off x="548640" y="1600200"/>
-            <a:ext cx="8046720" cy="731520"/>
+      <p:sp>
+        <p:nvSpPr>
+          <p:cNvPr id="17" name="Text 15"/>
+          <p:cNvSpPr txBox="1"/>
+          <p:nvPr/>
+        </p:nvSpPr>
+        <p:spPr>
+          <a:xfrm>
+            <a:off x="457200" y="3246120"/>
+            <a:ext cx="457200" cy="457200"/>
+          </a:xfrm>
+          <a:prstGeom prst="rect">
+            <a:avLst/>
+          </a:prstGeom>
+          <a:noFill/>
+          <a:ln/>
+        </p:spPr>
+        <p:txBody>
+          <a:bodyPr wrap="square" lIns="0" tIns="0" rIns="0" bIns="0" rtlCol="0" anchor="ctr"/>
+          <a:lstStyle/>
+          <a:p>
+            <a:pPr algn="ctr" indent="0" marL="0">
+              <a:buNone/>
+            </a:pPr>
+            <a:r>
+              <a:rPr lang="en-US" sz="1800" b="1" dirty="0">
+                <a:solidFill>
+                  <a:srgbClr val="001E3C"/>
+                </a:solidFill>
+                <a:latin typeface="Inter" pitchFamily="34" charset="0"/>
+                <a:ea typeface="Inter" pitchFamily="34" charset="-122"/>
+                <a:cs typeface="Inter" pitchFamily="34" charset="-120"/>
+              </a:rPr>
+              <a:t>?</a:t>
+            </a:r>
+            <a:endParaRPr lang="en-US" sz="1800" dirty="0"/>
+          </a:p>
+        </p:txBody>
+      </p:sp>
+      <p:sp>
+        <p:nvSpPr>
+          <p:cNvPr id="18" name="Text 16"/>
+          <p:cNvSpPr txBox="1"/>
+          <p:nvPr/>
+        </p:nvSpPr>
+        <p:spPr>
+          <a:xfrm>
+            <a:off x="1097280" y="3209544"/>
+            <a:ext cx="7589520" cy="292608"/>
           </a:xfrm>
           <a:prstGeom prst="rect">
             <a:avLst/>
@@ -7845,115 +9980,133 @@
               <a:buNone/>
             </a:pPr>
             <a:r>
-              <a:rPr lang="en-US" sz="4000" b="1" dirty="0">
-                <a:solidFill>
-                  <a:srgbClr val="FFFFFF"/>
-                </a:solidFill>
-                <a:latin typeface="Inter" pitchFamily="34" charset="0"/>
-                <a:ea typeface="Inter" pitchFamily="34" charset="-122"/>
-                <a:cs typeface="Inter" pitchFamily="34" charset="-120"/>
-              </a:rPr>
-              <a:t>The detail</a:t>
-            </a:r>
-            <a:endParaRPr lang="en-US" sz="4000" dirty="0"/>
-          </a:p>
-        </p:txBody>
-      </p:sp>
-      <p:sp>
-        <p:nvSpPr>
-          <p:cNvPr id="5" name="Text 2"/>
-          <p:cNvSpPr txBox="1"/>
-          <p:nvPr/>
-        </p:nvSpPr>
-        <p:spPr>
-          <a:xfrm>
-            <a:off x="548640" y="2468880"/>
-            <a:ext cx="8046720" cy="1463040"/>
-          </a:xfrm>
-          <a:prstGeom prst="rect">
-            <a:avLst/>
-          </a:prstGeom>
-          <a:noFill/>
-          <a:ln/>
-        </p:spPr>
-        <p:txBody>
-          <a:bodyPr wrap="square" lIns="0" tIns="0" rIns="0" bIns="0" rtlCol="0" anchor="ctr"/>
-          <a:lstStyle/>
-          <a:p>
-            <a:pPr marL="342900" indent="-342900">
-              <a:spcAft>
-                <a:spcPts val="800"/>
-              </a:spcAft>
-              <a:buSzPct val="100000"/>
-              <a:buChar char="•"/>
-            </a:pPr>
-            <a:r>
-              <a:rPr lang="en-US" sz="1800" dirty="0">
-                <a:solidFill>
-                  <a:srgbClr val="FFFFFF"/>
-                </a:solidFill>
-                <a:latin typeface="Inter" pitchFamily="34" charset="0"/>
-                <a:ea typeface="Inter" pitchFamily="34" charset="-122"/>
-                <a:cs typeface="Inter" pitchFamily="34" charset="-120"/>
-              </a:rPr>
-              <a:t>Every week of the link, day by day</a:t>
+              <a:rPr lang="en-US" sz="1600" b="1" dirty="0">
+                <a:solidFill>
+                  <a:srgbClr val="1B2533"/>
+                </a:solidFill>
+                <a:latin typeface="Inter" pitchFamily="34" charset="0"/>
+                <a:ea typeface="Inter" pitchFamily="34" charset="-122"/>
+                <a:cs typeface="Inter" pitchFamily="34" charset="-120"/>
+              </a:rPr>
+              <a:t>To decide: which link is adopted</a:t>
+            </a:r>
+            <a:endParaRPr lang="en-US" sz="1600" dirty="0"/>
+          </a:p>
+        </p:txBody>
+      </p:sp>
+      <p:sp>
+        <p:nvSpPr>
+          <p:cNvPr id="19" name="Text 17"/>
+          <p:cNvSpPr txBox="1"/>
+          <p:nvPr/>
+        </p:nvSpPr>
+        <p:spPr>
+          <a:xfrm>
+            <a:off x="1097280" y="3493008"/>
+            <a:ext cx="7589520" cy="274320"/>
+          </a:xfrm>
+          <a:prstGeom prst="rect">
+            <a:avLst/>
+          </a:prstGeom>
+          <a:noFill/>
+          <a:ln/>
+        </p:spPr>
+        <p:txBody>
+          <a:bodyPr wrap="square" lIns="0" tIns="0" rIns="0" bIns="0" rtlCol="0" anchor="ctr"/>
+          <a:lstStyle/>
+          <a:p>
+            <a:pPr indent="0" marL="0">
+              <a:buNone/>
+            </a:pPr>
+            <a:r>
+              <a:rPr lang="en-US" sz="1300" dirty="0">
+                <a:solidFill>
+                  <a:srgbClr val="5B6778"/>
+                </a:solidFill>
+                <a:latin typeface="Inter" pitchFamily="34" charset="0"/>
+                <a:ea typeface="Inter" pitchFamily="34" charset="-122"/>
+                <a:cs typeface="Inter" pitchFamily="34" charset="-120"/>
+              </a:rPr>
+              <a:t>Familiar Nine is one of four that meet every rule. Colleagues’ views come first.</a:t>
+            </a:r>
+            <a:endParaRPr lang="en-US" sz="1300" dirty="0"/>
+          </a:p>
+        </p:txBody>
+      </p:sp>
+      <p:sp>
+        <p:nvSpPr>
+          <p:cNvPr id="20" name="Shape 18"/>
+          <p:cNvSpPr/>
+          <p:nvPr/>
+        </p:nvSpPr>
+        <p:spPr>
+          <a:xfrm>
+            <a:off x="457200" y="3886200"/>
+            <a:ext cx="457200" cy="457200"/>
+          </a:xfrm>
+          <a:prstGeom prst="ellipse">
+            <a:avLst/>
+          </a:prstGeom>
+          <a:solidFill>
+            <a:srgbClr val="F5C800"/>
+          </a:solidFill>
+          <a:ln w="12700">
+            <a:solidFill>
+              <a:srgbClr val="F5C800"/>
+            </a:solidFill>
+            <a:prstDash val="solid"/>
+          </a:ln>
+        </p:spPr>
+      </p:sp>
+      <p:sp>
+        <p:nvSpPr>
+          <p:cNvPr id="21" name="Text 19"/>
+          <p:cNvSpPr txBox="1"/>
+          <p:nvPr/>
+        </p:nvSpPr>
+        <p:spPr>
+          <a:xfrm>
+            <a:off x="457200" y="3886200"/>
+            <a:ext cx="457200" cy="457200"/>
+          </a:xfrm>
+          <a:prstGeom prst="rect">
+            <a:avLst/>
+          </a:prstGeom>
+          <a:noFill/>
+          <a:ln/>
+        </p:spPr>
+        <p:txBody>
+          <a:bodyPr wrap="square" lIns="0" tIns="0" rIns="0" bIns="0" rtlCol="0" anchor="ctr"/>
+          <a:lstStyle/>
+          <a:p>
+            <a:pPr algn="ctr" indent="0" marL="0">
+              <a:buNone/>
+            </a:pPr>
+            <a:r>
+              <a:rPr lang="en-US" sz="1800" b="1" dirty="0">
+                <a:solidFill>
+                  <a:srgbClr val="001E3C"/>
+                </a:solidFill>
+                <a:latin typeface="Inter" pitchFamily="34" charset="0"/>
+                <a:ea typeface="Inter" pitchFamily="34" charset="-122"/>
+                <a:cs typeface="Inter" pitchFamily="34" charset="-120"/>
+              </a:rPr>
+              <a:t>?</a:t>
             </a:r>
             <a:endParaRPr lang="en-US" sz="1800" dirty="0"/>
           </a:p>
-          <a:p>
-            <a:pPr marL="342900" indent="-342900">
-              <a:spcAft>
-                <a:spcPts val="800"/>
-              </a:spcAft>
-              <a:buSzPct val="100000"/>
-              <a:buChar char="•"/>
-            </a:pPr>
-            <a:r>
-              <a:rPr lang="en-US" sz="1800" dirty="0">
-                <a:solidFill>
-                  <a:srgbClr val="FFFFFF"/>
-                </a:solidFill>
-                <a:latin typeface="Inter" pitchFamily="34" charset="0"/>
-                <a:ea typeface="Inter" pitchFamily="34" charset="-122"/>
-                <a:cs typeface="Inter" pitchFamily="34" charset="-120"/>
-              </a:rPr>
-              <a:t>Staff on duty hour by hour, against the trains</a:t>
-            </a:r>
-            <a:endParaRPr lang="en-US" sz="1800" dirty="0"/>
-          </a:p>
-          <a:p>
-            <a:pPr marL="342900" indent="-342900">
-              <a:spcAft>
-                <a:spcPts val="800"/>
-              </a:spcAft>
-              <a:buSzPct val="100000"/>
-              <a:buChar char="•"/>
-            </a:pPr>
-            <a:r>
-              <a:rPr lang="en-US" sz="1800" dirty="0">
-                <a:solidFill>
-                  <a:srgbClr val="FFFFFF"/>
-                </a:solidFill>
-                <a:latin typeface="Inter" pitchFamily="34" charset="0"/>
-                <a:ea typeface="Inter" pitchFamily="34" charset="-122"/>
-                <a:cs typeface="Inter" pitchFamily="34" charset="-120"/>
-              </a:rPr>
-              <a:t>Each staffing rule and each ORR factor, checked</a:t>
-            </a:r>
-            <a:endParaRPr lang="en-US" sz="1800" dirty="0"/>
-          </a:p>
-        </p:txBody>
-      </p:sp>
-      <p:sp>
-        <p:nvSpPr>
-          <p:cNvPr id="6" name="Text 3"/>
-          <p:cNvSpPr txBox="1"/>
-          <p:nvPr/>
-        </p:nvSpPr>
-        <p:spPr>
-          <a:xfrm>
-            <a:off x="548640" y="4343400"/>
-            <a:ext cx="8046720" cy="365760"/>
+        </p:txBody>
+      </p:sp>
+      <p:sp>
+        <p:nvSpPr>
+          <p:cNvPr id="22" name="Text 20"/>
+          <p:cNvSpPr txBox="1"/>
+          <p:nvPr/>
+        </p:nvSpPr>
+        <p:spPr>
+          <a:xfrm>
+            <a:off x="1097280" y="3849624"/>
+            <a:ext cx="7589520" cy="292608"/>
           </a:xfrm>
           <a:prstGeom prst="rect">
             <a:avLst/>
@@ -7969,17 +10122,95 @@
               <a:buNone/>
             </a:pPr>
             <a:r>
+              <a:rPr lang="en-US" sz="1600" b="1" dirty="0">
+                <a:solidFill>
+                  <a:srgbClr val="1B2533"/>
+                </a:solidFill>
+                <a:latin typeface="Inter" pitchFamily="34" charset="0"/>
+                <a:ea typeface="Inter" pitchFamily="34" charset="-122"/>
+                <a:cs typeface="Inter" pitchFamily="34" charset="-120"/>
+              </a:rPr>
+              <a:t>Then: who goes on which line</a:t>
+            </a:r>
+            <a:endParaRPr lang="en-US" sz="1600" dirty="0"/>
+          </a:p>
+        </p:txBody>
+      </p:sp>
+      <p:sp>
+        <p:nvSpPr>
+          <p:cNvPr id="23" name="Text 21"/>
+          <p:cNvSpPr txBox="1"/>
+          <p:nvPr/>
+        </p:nvSpPr>
+        <p:spPr>
+          <a:xfrm>
+            <a:off x="1097280" y="4133088"/>
+            <a:ext cx="7589520" cy="274320"/>
+          </a:xfrm>
+          <a:prstGeom prst="rect">
+            <a:avLst/>
+          </a:prstGeom>
+          <a:noFill/>
+          <a:ln/>
+        </p:spPr>
+        <p:txBody>
+          <a:bodyPr wrap="square" lIns="0" tIns="0" rIns="0" bIns="0" rtlCol="0" anchor="ctr"/>
+          <a:lstStyle/>
+          <a:p>
+            <a:pPr indent="0" marL="0">
+              <a:buNone/>
+            </a:pPr>
+            <a:r>
               <a:rPr lang="en-US" sz="1300" dirty="0">
                 <a:solidFill>
-                  <a:srgbClr val="F5C800"/>
-                </a:solidFill>
-                <a:latin typeface="Inter" pitchFamily="34" charset="0"/>
-                <a:ea typeface="Inter" pitchFamily="34" charset="-122"/>
-                <a:cs typeface="Inter" pitchFamily="34" charset="-120"/>
-              </a:rPr>
-              <a:t>All in the ten-page proposal sheet · Familiar Nine · F9-24-K31</a:t>
+                  <a:srgbClr val="5B6778"/>
+                </a:solidFill>
+                <a:latin typeface="Inter" pitchFamily="34" charset="0"/>
+                <a:ea typeface="Inter" pitchFamily="34" charset="-122"/>
+                <a:cs typeface="Inter" pitchFamily="34" charset="-120"/>
+              </a:rPr>
+              <a:t>Who starts on which week of the link.</a:t>
             </a:r>
             <a:endParaRPr lang="en-US" sz="1300" dirty="0"/>
+          </a:p>
+        </p:txBody>
+      </p:sp>
+      <p:sp>
+        <p:nvSpPr>
+          <p:cNvPr id="24" name="Text 22"/>
+          <p:cNvSpPr txBox="1"/>
+          <p:nvPr/>
+        </p:nvSpPr>
+        <p:spPr>
+          <a:xfrm>
+            <a:off x="457200" y="4800600"/>
+            <a:ext cx="8229600" cy="228600"/>
+          </a:xfrm>
+          <a:prstGeom prst="rect">
+            <a:avLst/>
+          </a:prstGeom>
+          <a:noFill/>
+          <a:ln/>
+        </p:spPr>
+        <p:txBody>
+          <a:bodyPr wrap="square" lIns="0" tIns="0" rIns="0" bIns="0" rtlCol="0" anchor="ctr"/>
+          <a:lstStyle/>
+          <a:p>
+            <a:pPr indent="0" marL="0">
+              <a:buNone/>
+            </a:pPr>
+            <a:r>
+              <a:rPr lang="en-US" sz="900" dirty="0">
+                <a:solidFill>
+                  <a:srgbClr val="5B6778"/>
+                </a:solidFill>
+                <a:latin typeface="Inter" pitchFamily="34" charset="0"/>
+                <a:ea typeface="Inter" pitchFamily="34" charset="-122"/>
+                <a:cs typeface="Inter" pitchFamily="34" charset="-120"/>
+              </a:rPr>
+              <a:t>Familiar Nine · December 2026 CEA link · for managers · 9</a:t>
+            </a:r>
+            <a:endParaRPr lang="en-US" sz="900" dirty="0"/>
           </a:p>
         </p:txBody>
       </p:sp>

--- a/docs/proposals/presentations/Familiar-Nine-for-managers.pptx
+++ b/docs/proposals/presentations/Familiar-Nine-for-managers.pptx
@@ -1458,7 +1458,7 @@
           <a:p>
             <a:r>
               <a:rPr lang="en-US" dirty="0"/>
-              <a:t>All three pass the December rules and have no fatigue finding the design could have avoided, so the choice between them is a judgement about people, not a score. Right Away follows the trains very slightly more closely but asks people to learn twelve new shift times and has a 9h30 duty. All Clear keeps more of an existing supplied design but gives two full weekends off in 24 instead of six, runs to nine days in a row, and follows the trains worse than today’s link on a Sunday. The fourth, Just Enough, also meets every rule but has three fatigue findings. All 28 are on the one-page summary.</a:t>
+              <a:t>This is the case in one slide. It meets every December staffing rule, and it was built to keep the shift times people already work wherever that cost little — nine of its fifteen are worked today. The honest cost is late finishes: the December staffing needs three to the close and five after 22:00, so finishes at 23:00 or later go from about 39 to 59 a year each. Every closing shift is 30 to 45 minutes shorter, which softens it. Six shift times are new.</a:t>
             </a:r>
             <a:endParaRPr lang="en-US" dirty="0"/>
           </a:p>
@@ -2920,7 +2920,7 @@
                 <a:ea typeface="Inter" pitchFamily="34" charset="-122"/>
                 <a:cs typeface="Inter" pitchFamily="34" charset="-120"/>
               </a:rPr>
-              <a:t>design-specific fatigue findings</a:t>
+              <a:t>avoidable fatigue patterns</a:t>
             </a:r>
             <a:endParaRPr lang="en-US" sz="1500" dirty="0"/>
           </a:p>
@@ -3171,7 +3171,7 @@
                 <a:ea typeface="Inter" pitchFamily="34" charset="-122"/>
                 <a:cs typeface="Inter" pitchFamily="34" charset="-120"/>
               </a:rPr>
-              <a:t>Every staffing level met, within the contract, with no design fatigue findings.</a:t>
+              <a:t>Every staffing level met, within the contract, with no avoidable fatigue patterns.</a:t>
             </a:r>
             <a:endParaRPr lang="en-US" sz="1400" dirty="0"/>
           </a:p>
@@ -5616,7 +5616,7 @@
                 <a:ea typeface="Inter" pitchFamily="34" charset="-122"/>
                 <a:cs typeface="Inter" pitchFamily="34" charset="-120"/>
               </a:rPr>
-              <a:t>Design-specific fatigue findings (ORR list)</a:t>
+              <a:t>Avoidable fatigue patterns (ORR list)</a:t>
             </a:r>
             <a:endParaRPr lang="en-US" sz="1400" dirty="0"/>
           </a:p>
@@ -6192,7 +6192,7 @@
                 <a:ea typeface="Inter" pitchFamily="34" charset="-122"/>
                 <a:cs typeface="Inter" pitchFamily="34" charset="-120"/>
               </a:rPr>
-              <a:t>Every limit met with room to spare, and no design-specific fatigue findings.</a:t>
+              <a:t>Every limit met with room to spare, and no avoidable fatigue patterns.</a:t>
             </a:r>
             <a:endParaRPr lang="en-US" sz="1400" dirty="0"/>
           </a:p>
@@ -6231,7 +6231,7 @@
                 <a:ea typeface="Inter" pitchFamily="34" charset="-122"/>
                 <a:cs typeface="Inter" pitchFamily="34" charset="-120"/>
               </a:rPr>
-              <a:t>Not counted: early starts and weekly rotation, which every link has. Not a risk assessment.</a:t>
+              <a:t>Early starts and a weekly rotation come with every link, so are not counted.</a:t>
             </a:r>
             <a:endParaRPr lang="en-US" sz="850" dirty="0"/>
           </a:p>
@@ -6380,2228 +6380,633 @@
                 <a:ea typeface="Inter" pitchFamily="34" charset="-122"/>
                 <a:cs typeface="Inter" pitchFamily="34" charset="-120"/>
               </a:rPr>
-              <a:t>Four of the 28 proposals meet every rule — three with no design fatigue findings</a:t>
+              <a:t>It meets the brief and keeps as much of today as it can</a:t>
             </a:r>
             <a:endParaRPr lang="en-US" sz="1500" dirty="0"/>
           </a:p>
         </p:txBody>
       </p:sp>
-      <p:graphicFrame>
-        <p:nvGraphicFramePr>
-          <p:cNvPr id="8" name="Table 0"/>
-          <p:cNvGraphicFramePr>
-            <a:graphicFrameLocks noGrp="1"/>
-          </p:cNvGraphicFramePr>
-          <p:nvPr>
-            <p:extLst>
-              <p:ext uri="{D42A27DB-BD31-4B8C-83A1-F6EECF244321}">
-                <p14:modId xmlns:p14="http://schemas.microsoft.com/office/powerpoint/2010/main" val="1579011935"/>
-              </p:ext>
-            </p:extLst>
-          </p:nvPr>
-        </p:nvGraphicFramePr>
-        <p:xfrm>
-          <a:off x="457200" y="1325880"/>
-          <a:ext cx="8229600" cy="914400"/>
-        </p:xfrm>
-        <a:graphic>
-          <a:graphicData uri="http://schemas.openxmlformats.org/drawingml/2006/table">
-            <a:tbl>
-              <a:tblPr/>
-              <a:tblGrid>
-                <a:gridCol w="3566160"/>
-                <a:gridCol w="1554480"/>
-                <a:gridCol w="1554480"/>
-                <a:gridCol w="1554480"/>
-              </a:tblGrid>
-              <a:tr h="329184">
-                <a:tc>
-                  <a:txBody>
-                    <a:bodyPr/>
-                    <a:lstStyle/>
-                    <a:p>
-                      <a:pPr algn="ctr" indent="0" marL="0">
-                        <a:buNone/>
-                      </a:pPr>
-                      <a:endParaRPr lang="en-US" sz="1200" dirty="0">
-                        <a:latin typeface="Inter" charset="0"/>
-                        <a:ea typeface="Inter" charset="0"/>
-                        <a:cs typeface="Inter" charset="0"/>
-                      </a:endParaRPr>
-                    </a:p>
-                  </a:txBody>
-                  <a:tcPr marL="91440" marR="91440" marT="0" marB="0" anchor="ctr">
-                    <a:lnL w="9525" cap="flat" cmpd="sng" algn="ctr">
-                      <a:solidFill>
-                        <a:srgbClr val="DDE3EA"/>
-                      </a:solidFill>
-                      <a:prstDash val="solid"/>
-                      <a:round/>
-                      <a:headEnd type="none" w="med" len="med"/>
-                      <a:tailEnd type="none" w="med" len="med"/>
-                    </a:lnL>
-                    <a:lnR w="9525" cap="flat" cmpd="sng" algn="ctr">
-                      <a:solidFill>
-                        <a:srgbClr val="DDE3EA"/>
-                      </a:solidFill>
-                      <a:prstDash val="solid"/>
-                      <a:round/>
-                      <a:headEnd type="none" w="med" len="med"/>
-                      <a:tailEnd type="none" w="med" len="med"/>
-                    </a:lnR>
-                    <a:lnT w="9525" cap="flat" cmpd="sng" algn="ctr">
-                      <a:solidFill>
-                        <a:srgbClr val="DDE3EA"/>
-                      </a:solidFill>
-                      <a:prstDash val="solid"/>
-                      <a:round/>
-                      <a:headEnd type="none" w="med" len="med"/>
-                      <a:tailEnd type="none" w="med" len="med"/>
-                    </a:lnT>
-                    <a:lnB w="9525" cap="flat" cmpd="sng" algn="ctr">
-                      <a:solidFill>
-                        <a:srgbClr val="DDE3EA"/>
-                      </a:solidFill>
-                      <a:prstDash val="solid"/>
-                      <a:round/>
-                      <a:headEnd type="none" w="med" len="med"/>
-                      <a:tailEnd type="none" w="med" len="med"/>
-                    </a:lnB>
-                    <a:solidFill>
-                      <a:srgbClr val="EEF2F7"/>
-                    </a:solidFill>
-                  </a:tcPr>
-                </a:tc>
-                <a:tc>
-                  <a:txBody>
-                    <a:bodyPr/>
-                    <a:lstStyle/>
-                    <a:p>
-                      <a:pPr algn="ctr" indent="0" marL="0">
-                        <a:buNone/>
-                      </a:pPr>
-                      <a:r>
-                        <a:rPr lang="en-US" sz="1200" b="1" dirty="0">
-                          <a:solidFill>
-                            <a:srgbClr val="FFFFFF"/>
-                          </a:solidFill>
-                          <a:latin typeface="Inter" pitchFamily="34" charset="0"/>
-                          <a:ea typeface="Inter" pitchFamily="34" charset="-122"/>
-                          <a:cs typeface="Inter" pitchFamily="34" charset="-120"/>
-                        </a:rPr>
-                        <a:t>Familiar Nine</a:t>
-                      </a:r>
-                      <a:endParaRPr lang="en-US" sz="1200" dirty="0">
-                        <a:latin typeface="Inter" charset="0"/>
-                        <a:ea typeface="Inter" charset="0"/>
-                        <a:cs typeface="Inter" charset="0"/>
-                      </a:endParaRPr>
-                    </a:p>
-                  </a:txBody>
-                  <a:tcPr marL="91440" marR="91440" marT="0" marB="0" anchor="ctr">
-                    <a:lnL w="9525" cap="flat" cmpd="sng" algn="ctr">
-                      <a:solidFill>
-                        <a:srgbClr val="DDE3EA"/>
-                      </a:solidFill>
-                      <a:prstDash val="solid"/>
-                      <a:round/>
-                      <a:headEnd type="none" w="med" len="med"/>
-                      <a:tailEnd type="none" w="med" len="med"/>
-                    </a:lnL>
-                    <a:lnR w="9525" cap="flat" cmpd="sng" algn="ctr">
-                      <a:solidFill>
-                        <a:srgbClr val="DDE3EA"/>
-                      </a:solidFill>
-                      <a:prstDash val="solid"/>
-                      <a:round/>
-                      <a:headEnd type="none" w="med" len="med"/>
-                      <a:tailEnd type="none" w="med" len="med"/>
-                    </a:lnR>
-                    <a:lnT w="9525" cap="flat" cmpd="sng" algn="ctr">
-                      <a:solidFill>
-                        <a:srgbClr val="DDE3EA"/>
-                      </a:solidFill>
-                      <a:prstDash val="solid"/>
-                      <a:round/>
-                      <a:headEnd type="none" w="med" len="med"/>
-                      <a:tailEnd type="none" w="med" len="med"/>
-                    </a:lnT>
-                    <a:lnB w="9525" cap="flat" cmpd="sng" algn="ctr">
-                      <a:solidFill>
-                        <a:srgbClr val="DDE3EA"/>
-                      </a:solidFill>
-                      <a:prstDash val="solid"/>
-                      <a:round/>
-                      <a:headEnd type="none" w="med" len="med"/>
-                      <a:tailEnd type="none" w="med" len="med"/>
-                    </a:lnB>
-                    <a:solidFill>
-                      <a:srgbClr val="001E3C"/>
-                    </a:solidFill>
-                  </a:tcPr>
-                </a:tc>
-                <a:tc>
-                  <a:txBody>
-                    <a:bodyPr/>
-                    <a:lstStyle/>
-                    <a:p>
-                      <a:pPr algn="ctr" indent="0" marL="0">
-                        <a:buNone/>
-                      </a:pPr>
-                      <a:r>
-                        <a:rPr lang="en-US" sz="1200" b="1" dirty="0">
-                          <a:solidFill>
-                            <a:srgbClr val="001E3C"/>
-                          </a:solidFill>
-                          <a:latin typeface="Inter" pitchFamily="34" charset="0"/>
-                          <a:ea typeface="Inter" pitchFamily="34" charset="-122"/>
-                          <a:cs typeface="Inter" pitchFamily="34" charset="-120"/>
-                        </a:rPr>
-                        <a:t>Right Away</a:t>
-                      </a:r>
-                      <a:endParaRPr lang="en-US" sz="1200" dirty="0">
-                        <a:latin typeface="Inter" charset="0"/>
-                        <a:ea typeface="Inter" charset="0"/>
-                        <a:cs typeface="Inter" charset="0"/>
-                      </a:endParaRPr>
-                    </a:p>
-                  </a:txBody>
-                  <a:tcPr marL="91440" marR="91440" marT="0" marB="0" anchor="ctr">
-                    <a:lnL w="9525" cap="flat" cmpd="sng" algn="ctr">
-                      <a:solidFill>
-                        <a:srgbClr val="DDE3EA"/>
-                      </a:solidFill>
-                      <a:prstDash val="solid"/>
-                      <a:round/>
-                      <a:headEnd type="none" w="med" len="med"/>
-                      <a:tailEnd type="none" w="med" len="med"/>
-                    </a:lnL>
-                    <a:lnR w="9525" cap="flat" cmpd="sng" algn="ctr">
-                      <a:solidFill>
-                        <a:srgbClr val="DDE3EA"/>
-                      </a:solidFill>
-                      <a:prstDash val="solid"/>
-                      <a:round/>
-                      <a:headEnd type="none" w="med" len="med"/>
-                      <a:tailEnd type="none" w="med" len="med"/>
-                    </a:lnR>
-                    <a:lnT w="9525" cap="flat" cmpd="sng" algn="ctr">
-                      <a:solidFill>
-                        <a:srgbClr val="DDE3EA"/>
-                      </a:solidFill>
-                      <a:prstDash val="solid"/>
-                      <a:round/>
-                      <a:headEnd type="none" w="med" len="med"/>
-                      <a:tailEnd type="none" w="med" len="med"/>
-                    </a:lnT>
-                    <a:lnB w="9525" cap="flat" cmpd="sng" algn="ctr">
-                      <a:solidFill>
-                        <a:srgbClr val="DDE3EA"/>
-                      </a:solidFill>
-                      <a:prstDash val="solid"/>
-                      <a:round/>
-                      <a:headEnd type="none" w="med" len="med"/>
-                      <a:tailEnd type="none" w="med" len="med"/>
-                    </a:lnB>
-                    <a:solidFill>
-                      <a:srgbClr val="EEF2F7"/>
-                    </a:solidFill>
-                  </a:tcPr>
-                </a:tc>
-                <a:tc>
-                  <a:txBody>
-                    <a:bodyPr/>
-                    <a:lstStyle/>
-                    <a:p>
-                      <a:pPr algn="ctr" indent="0" marL="0">
-                        <a:buNone/>
-                      </a:pPr>
-                      <a:r>
-                        <a:rPr lang="en-US" sz="1200" b="1" dirty="0">
-                          <a:solidFill>
-                            <a:srgbClr val="001E3C"/>
-                          </a:solidFill>
-                          <a:latin typeface="Inter" pitchFamily="34" charset="0"/>
-                          <a:ea typeface="Inter" pitchFamily="34" charset="-122"/>
-                          <a:cs typeface="Inter" pitchFamily="34" charset="-120"/>
-                        </a:rPr>
-                        <a:t>All Clear</a:t>
-                      </a:r>
-                      <a:endParaRPr lang="en-US" sz="1200" dirty="0">
-                        <a:latin typeface="Inter" charset="0"/>
-                        <a:ea typeface="Inter" charset="0"/>
-                        <a:cs typeface="Inter" charset="0"/>
-                      </a:endParaRPr>
-                    </a:p>
-                  </a:txBody>
-                  <a:tcPr marL="91440" marR="91440" marT="0" marB="0" anchor="ctr">
-                    <a:lnL w="9525" cap="flat" cmpd="sng" algn="ctr">
-                      <a:solidFill>
-                        <a:srgbClr val="DDE3EA"/>
-                      </a:solidFill>
-                      <a:prstDash val="solid"/>
-                      <a:round/>
-                      <a:headEnd type="none" w="med" len="med"/>
-                      <a:tailEnd type="none" w="med" len="med"/>
-                    </a:lnL>
-                    <a:lnR w="9525" cap="flat" cmpd="sng" algn="ctr">
-                      <a:solidFill>
-                        <a:srgbClr val="DDE3EA"/>
-                      </a:solidFill>
-                      <a:prstDash val="solid"/>
-                      <a:round/>
-                      <a:headEnd type="none" w="med" len="med"/>
-                      <a:tailEnd type="none" w="med" len="med"/>
-                    </a:lnR>
-                    <a:lnT w="9525" cap="flat" cmpd="sng" algn="ctr">
-                      <a:solidFill>
-                        <a:srgbClr val="DDE3EA"/>
-                      </a:solidFill>
-                      <a:prstDash val="solid"/>
-                      <a:round/>
-                      <a:headEnd type="none" w="med" len="med"/>
-                      <a:tailEnd type="none" w="med" len="med"/>
-                    </a:lnT>
-                    <a:lnB w="9525" cap="flat" cmpd="sng" algn="ctr">
-                      <a:solidFill>
-                        <a:srgbClr val="DDE3EA"/>
-                      </a:solidFill>
-                      <a:prstDash val="solid"/>
-                      <a:round/>
-                      <a:headEnd type="none" w="med" len="med"/>
-                      <a:tailEnd type="none" w="med" len="med"/>
-                    </a:lnB>
-                    <a:solidFill>
-                      <a:srgbClr val="EEF2F7"/>
-                    </a:solidFill>
-                  </a:tcPr>
-                </a:tc>
-              </a:tr>
-              <a:tr h="329184">
-                <a:tc>
-                  <a:txBody>
-                    <a:bodyPr/>
-                    <a:lstStyle/>
-                    <a:p>
-                      <a:pPr algn="l" indent="0" marL="0">
-                        <a:buNone/>
-                      </a:pPr>
-                      <a:r>
-                        <a:rPr lang="en-US" sz="1200" b="1" dirty="0">
-                          <a:solidFill>
-                            <a:srgbClr val="1B2533"/>
-                          </a:solidFill>
-                          <a:latin typeface="Inter" pitchFamily="34" charset="0"/>
-                          <a:ea typeface="Inter" pitchFamily="34" charset="-122"/>
-                          <a:cs typeface="Inter" pitchFamily="34" charset="-120"/>
-                        </a:rPr>
-                        <a:t>December rules met</a:t>
-                      </a:r>
-                      <a:endParaRPr lang="en-US" sz="1200" dirty="0">
-                        <a:latin typeface="Inter" charset="0"/>
-                        <a:ea typeface="Inter" charset="0"/>
-                        <a:cs typeface="Inter" charset="0"/>
-                      </a:endParaRPr>
-                    </a:p>
-                  </a:txBody>
-                  <a:tcPr marL="91440" marR="91440" marT="0" marB="0" anchor="ctr">
-                    <a:lnL w="9525" cap="flat" cmpd="sng" algn="ctr">
-                      <a:solidFill>
-                        <a:srgbClr val="DDE3EA"/>
-                      </a:solidFill>
-                      <a:prstDash val="solid"/>
-                      <a:round/>
-                      <a:headEnd type="none" w="med" len="med"/>
-                      <a:tailEnd type="none" w="med" len="med"/>
-                    </a:lnL>
-                    <a:lnR w="9525" cap="flat" cmpd="sng" algn="ctr">
-                      <a:solidFill>
-                        <a:srgbClr val="DDE3EA"/>
-                      </a:solidFill>
-                      <a:prstDash val="solid"/>
-                      <a:round/>
-                      <a:headEnd type="none" w="med" len="med"/>
-                      <a:tailEnd type="none" w="med" len="med"/>
-                    </a:lnR>
-                    <a:lnT w="9525" cap="flat" cmpd="sng" algn="ctr">
-                      <a:solidFill>
-                        <a:srgbClr val="DDE3EA"/>
-                      </a:solidFill>
-                      <a:prstDash val="solid"/>
-                      <a:round/>
-                      <a:headEnd type="none" w="med" len="med"/>
-                      <a:tailEnd type="none" w="med" len="med"/>
-                    </a:lnT>
-                    <a:lnB w="9525" cap="flat" cmpd="sng" algn="ctr">
-                      <a:solidFill>
-                        <a:srgbClr val="DDE3EA"/>
-                      </a:solidFill>
-                      <a:prstDash val="solid"/>
-                      <a:round/>
-                      <a:headEnd type="none" w="med" len="med"/>
-                      <a:tailEnd type="none" w="med" len="med"/>
-                    </a:lnB>
-                    <a:solidFill>
-                      <a:srgbClr val="FFFFFF"/>
-                    </a:solidFill>
-                  </a:tcPr>
-                </a:tc>
-                <a:tc>
-                  <a:txBody>
-                    <a:bodyPr/>
-                    <a:lstStyle/>
-                    <a:p>
-                      <a:pPr algn="ctr" indent="0" marL="0">
-                        <a:buNone/>
-                      </a:pPr>
-                      <a:r>
-                        <a:rPr lang="en-US" sz="1200" b="1" dirty="0">
-                          <a:solidFill>
-                            <a:srgbClr val="001E3C"/>
-                          </a:solidFill>
-                          <a:latin typeface="Inter" pitchFamily="34" charset="0"/>
-                          <a:ea typeface="Inter" pitchFamily="34" charset="-122"/>
-                          <a:cs typeface="Inter" pitchFamily="34" charset="-120"/>
-                        </a:rPr>
-                        <a:t>11 of 11</a:t>
-                      </a:r>
-                      <a:endParaRPr lang="en-US" sz="1200" dirty="0">
-                        <a:latin typeface="Inter" charset="0"/>
-                        <a:ea typeface="Inter" charset="0"/>
-                        <a:cs typeface="Inter" charset="0"/>
-                      </a:endParaRPr>
-                    </a:p>
-                  </a:txBody>
-                  <a:tcPr marL="91440" marR="91440" marT="0" marB="0" anchor="ctr">
-                    <a:lnL w="9525" cap="flat" cmpd="sng" algn="ctr">
-                      <a:solidFill>
-                        <a:srgbClr val="DDE3EA"/>
-                      </a:solidFill>
-                      <a:prstDash val="solid"/>
-                      <a:round/>
-                      <a:headEnd type="none" w="med" len="med"/>
-                      <a:tailEnd type="none" w="med" len="med"/>
-                    </a:lnL>
-                    <a:lnR w="9525" cap="flat" cmpd="sng" algn="ctr">
-                      <a:solidFill>
-                        <a:srgbClr val="DDE3EA"/>
-                      </a:solidFill>
-                      <a:prstDash val="solid"/>
-                      <a:round/>
-                      <a:headEnd type="none" w="med" len="med"/>
-                      <a:tailEnd type="none" w="med" len="med"/>
-                    </a:lnR>
-                    <a:lnT w="9525" cap="flat" cmpd="sng" algn="ctr">
-                      <a:solidFill>
-                        <a:srgbClr val="DDE3EA"/>
-                      </a:solidFill>
-                      <a:prstDash val="solid"/>
-                      <a:round/>
-                      <a:headEnd type="none" w="med" len="med"/>
-                      <a:tailEnd type="none" w="med" len="med"/>
-                    </a:lnT>
-                    <a:lnB w="9525" cap="flat" cmpd="sng" algn="ctr">
-                      <a:solidFill>
-                        <a:srgbClr val="DDE3EA"/>
-                      </a:solidFill>
-                      <a:prstDash val="solid"/>
-                      <a:round/>
-                      <a:headEnd type="none" w="med" len="med"/>
-                      <a:tailEnd type="none" w="med" len="med"/>
-                    </a:lnB>
-                    <a:solidFill>
-                      <a:srgbClr val="FFF4C2"/>
-                    </a:solidFill>
-                  </a:tcPr>
-                </a:tc>
-                <a:tc>
-                  <a:txBody>
-                    <a:bodyPr/>
-                    <a:lstStyle/>
-                    <a:p>
-                      <a:pPr algn="ctr" indent="0" marL="0">
-                        <a:buNone/>
-                      </a:pPr>
-                      <a:r>
-                        <a:rPr lang="en-US" sz="1200" dirty="0">
-                          <a:solidFill>
-                            <a:srgbClr val="5B6778"/>
-                          </a:solidFill>
-                          <a:latin typeface="Inter" pitchFamily="34" charset="0"/>
-                          <a:ea typeface="Inter" pitchFamily="34" charset="-122"/>
-                          <a:cs typeface="Inter" pitchFamily="34" charset="-120"/>
-                        </a:rPr>
-                        <a:t>11 of 11</a:t>
-                      </a:r>
-                      <a:endParaRPr lang="en-US" sz="1200" dirty="0">
-                        <a:latin typeface="Inter" charset="0"/>
-                        <a:ea typeface="Inter" charset="0"/>
-                        <a:cs typeface="Inter" charset="0"/>
-                      </a:endParaRPr>
-                    </a:p>
-                  </a:txBody>
-                  <a:tcPr marL="91440" marR="91440" marT="0" marB="0" anchor="ctr">
-                    <a:lnL w="9525" cap="flat" cmpd="sng" algn="ctr">
-                      <a:solidFill>
-                        <a:srgbClr val="DDE3EA"/>
-                      </a:solidFill>
-                      <a:prstDash val="solid"/>
-                      <a:round/>
-                      <a:headEnd type="none" w="med" len="med"/>
-                      <a:tailEnd type="none" w="med" len="med"/>
-                    </a:lnL>
-                    <a:lnR w="9525" cap="flat" cmpd="sng" algn="ctr">
-                      <a:solidFill>
-                        <a:srgbClr val="DDE3EA"/>
-                      </a:solidFill>
-                      <a:prstDash val="solid"/>
-                      <a:round/>
-                      <a:headEnd type="none" w="med" len="med"/>
-                      <a:tailEnd type="none" w="med" len="med"/>
-                    </a:lnR>
-                    <a:lnT w="9525" cap="flat" cmpd="sng" algn="ctr">
-                      <a:solidFill>
-                        <a:srgbClr val="DDE3EA"/>
-                      </a:solidFill>
-                      <a:prstDash val="solid"/>
-                      <a:round/>
-                      <a:headEnd type="none" w="med" len="med"/>
-                      <a:tailEnd type="none" w="med" len="med"/>
-                    </a:lnT>
-                    <a:lnB w="9525" cap="flat" cmpd="sng" algn="ctr">
-                      <a:solidFill>
-                        <a:srgbClr val="DDE3EA"/>
-                      </a:solidFill>
-                      <a:prstDash val="solid"/>
-                      <a:round/>
-                      <a:headEnd type="none" w="med" len="med"/>
-                      <a:tailEnd type="none" w="med" len="med"/>
-                    </a:lnB>
-                    <a:solidFill>
-                      <a:srgbClr val="FFFFFF"/>
-                    </a:solidFill>
-                  </a:tcPr>
-                </a:tc>
-                <a:tc>
-                  <a:txBody>
-                    <a:bodyPr/>
-                    <a:lstStyle/>
-                    <a:p>
-                      <a:pPr algn="ctr" indent="0" marL="0">
-                        <a:buNone/>
-                      </a:pPr>
-                      <a:r>
-                        <a:rPr lang="en-US" sz="1200" dirty="0">
-                          <a:solidFill>
-                            <a:srgbClr val="5B6778"/>
-                          </a:solidFill>
-                          <a:latin typeface="Inter" pitchFamily="34" charset="0"/>
-                          <a:ea typeface="Inter" pitchFamily="34" charset="-122"/>
-                          <a:cs typeface="Inter" pitchFamily="34" charset="-120"/>
-                        </a:rPr>
-                        <a:t>11 of 11</a:t>
-                      </a:r>
-                      <a:endParaRPr lang="en-US" sz="1200" dirty="0">
-                        <a:latin typeface="Inter" charset="0"/>
-                        <a:ea typeface="Inter" charset="0"/>
-                        <a:cs typeface="Inter" charset="0"/>
-                      </a:endParaRPr>
-                    </a:p>
-                  </a:txBody>
-                  <a:tcPr marL="91440" marR="91440" marT="0" marB="0" anchor="ctr">
-                    <a:lnL w="9525" cap="flat" cmpd="sng" algn="ctr">
-                      <a:solidFill>
-                        <a:srgbClr val="DDE3EA"/>
-                      </a:solidFill>
-                      <a:prstDash val="solid"/>
-                      <a:round/>
-                      <a:headEnd type="none" w="med" len="med"/>
-                      <a:tailEnd type="none" w="med" len="med"/>
-                    </a:lnL>
-                    <a:lnR w="9525" cap="flat" cmpd="sng" algn="ctr">
-                      <a:solidFill>
-                        <a:srgbClr val="DDE3EA"/>
-                      </a:solidFill>
-                      <a:prstDash val="solid"/>
-                      <a:round/>
-                      <a:headEnd type="none" w="med" len="med"/>
-                      <a:tailEnd type="none" w="med" len="med"/>
-                    </a:lnR>
-                    <a:lnT w="9525" cap="flat" cmpd="sng" algn="ctr">
-                      <a:solidFill>
-                        <a:srgbClr val="DDE3EA"/>
-                      </a:solidFill>
-                      <a:prstDash val="solid"/>
-                      <a:round/>
-                      <a:headEnd type="none" w="med" len="med"/>
-                      <a:tailEnd type="none" w="med" len="med"/>
-                    </a:lnT>
-                    <a:lnB w="9525" cap="flat" cmpd="sng" algn="ctr">
-                      <a:solidFill>
-                        <a:srgbClr val="DDE3EA"/>
-                      </a:solidFill>
-                      <a:prstDash val="solid"/>
-                      <a:round/>
-                      <a:headEnd type="none" w="med" len="med"/>
-                      <a:tailEnd type="none" w="med" len="med"/>
-                    </a:lnB>
-                    <a:solidFill>
-                      <a:srgbClr val="FFFFFF"/>
-                    </a:solidFill>
-                  </a:tcPr>
-                </a:tc>
-              </a:tr>
-              <a:tr h="329184">
-                <a:tc>
-                  <a:txBody>
-                    <a:bodyPr/>
-                    <a:lstStyle/>
-                    <a:p>
-                      <a:pPr algn="l" indent="0" marL="0">
-                        <a:buNone/>
-                      </a:pPr>
-                      <a:r>
-                        <a:rPr lang="en-US" sz="1200" b="1" dirty="0">
-                          <a:solidFill>
-                            <a:srgbClr val="1B2533"/>
-                          </a:solidFill>
-                          <a:latin typeface="Inter" pitchFamily="34" charset="0"/>
-                          <a:ea typeface="Inter" pitchFamily="34" charset="-122"/>
-                          <a:cs typeface="Inter" pitchFamily="34" charset="-120"/>
-                        </a:rPr>
-                        <a:t>Design-specific fatigue findings</a:t>
-                      </a:r>
-                      <a:endParaRPr lang="en-US" sz="1200" dirty="0">
-                        <a:latin typeface="Inter" charset="0"/>
-                        <a:ea typeface="Inter" charset="0"/>
-                        <a:cs typeface="Inter" charset="0"/>
-                      </a:endParaRPr>
-                    </a:p>
-                  </a:txBody>
-                  <a:tcPr marL="91440" marR="91440" marT="0" marB="0" anchor="ctr">
-                    <a:lnL w="9525" cap="flat" cmpd="sng" algn="ctr">
-                      <a:solidFill>
-                        <a:srgbClr val="DDE3EA"/>
-                      </a:solidFill>
-                      <a:prstDash val="solid"/>
-                      <a:round/>
-                      <a:headEnd type="none" w="med" len="med"/>
-                      <a:tailEnd type="none" w="med" len="med"/>
-                    </a:lnL>
-                    <a:lnR w="9525" cap="flat" cmpd="sng" algn="ctr">
-                      <a:solidFill>
-                        <a:srgbClr val="DDE3EA"/>
-                      </a:solidFill>
-                      <a:prstDash val="solid"/>
-                      <a:round/>
-                      <a:headEnd type="none" w="med" len="med"/>
-                      <a:tailEnd type="none" w="med" len="med"/>
-                    </a:lnR>
-                    <a:lnT w="9525" cap="flat" cmpd="sng" algn="ctr">
-                      <a:solidFill>
-                        <a:srgbClr val="DDE3EA"/>
-                      </a:solidFill>
-                      <a:prstDash val="solid"/>
-                      <a:round/>
-                      <a:headEnd type="none" w="med" len="med"/>
-                      <a:tailEnd type="none" w="med" len="med"/>
-                    </a:lnT>
-                    <a:lnB w="9525" cap="flat" cmpd="sng" algn="ctr">
-                      <a:solidFill>
-                        <a:srgbClr val="DDE3EA"/>
-                      </a:solidFill>
-                      <a:prstDash val="solid"/>
-                      <a:round/>
-                      <a:headEnd type="none" w="med" len="med"/>
-                      <a:tailEnd type="none" w="med" len="med"/>
-                    </a:lnB>
-                    <a:solidFill>
-                      <a:srgbClr val="FFFFFF"/>
-                    </a:solidFill>
-                  </a:tcPr>
-                </a:tc>
-                <a:tc>
-                  <a:txBody>
-                    <a:bodyPr/>
-                    <a:lstStyle/>
-                    <a:p>
-                      <a:pPr algn="ctr" indent="0" marL="0">
-                        <a:buNone/>
-                      </a:pPr>
-                      <a:r>
-                        <a:rPr lang="en-US" sz="1200" b="1" dirty="0">
-                          <a:solidFill>
-                            <a:srgbClr val="001E3C"/>
-                          </a:solidFill>
-                          <a:latin typeface="Inter" pitchFamily="34" charset="0"/>
-                          <a:ea typeface="Inter" pitchFamily="34" charset="-122"/>
-                          <a:cs typeface="Inter" pitchFamily="34" charset="-120"/>
-                        </a:rPr>
-                        <a:t>0</a:t>
-                      </a:r>
-                      <a:endParaRPr lang="en-US" sz="1200" dirty="0">
-                        <a:latin typeface="Inter" charset="0"/>
-                        <a:ea typeface="Inter" charset="0"/>
-                        <a:cs typeface="Inter" charset="0"/>
-                      </a:endParaRPr>
-                    </a:p>
-                  </a:txBody>
-                  <a:tcPr marL="91440" marR="91440" marT="0" marB="0" anchor="ctr">
-                    <a:lnL w="9525" cap="flat" cmpd="sng" algn="ctr">
-                      <a:solidFill>
-                        <a:srgbClr val="DDE3EA"/>
-                      </a:solidFill>
-                      <a:prstDash val="solid"/>
-                      <a:round/>
-                      <a:headEnd type="none" w="med" len="med"/>
-                      <a:tailEnd type="none" w="med" len="med"/>
-                    </a:lnL>
-                    <a:lnR w="9525" cap="flat" cmpd="sng" algn="ctr">
-                      <a:solidFill>
-                        <a:srgbClr val="DDE3EA"/>
-                      </a:solidFill>
-                      <a:prstDash val="solid"/>
-                      <a:round/>
-                      <a:headEnd type="none" w="med" len="med"/>
-                      <a:tailEnd type="none" w="med" len="med"/>
-                    </a:lnR>
-                    <a:lnT w="9525" cap="flat" cmpd="sng" algn="ctr">
-                      <a:solidFill>
-                        <a:srgbClr val="DDE3EA"/>
-                      </a:solidFill>
-                      <a:prstDash val="solid"/>
-                      <a:round/>
-                      <a:headEnd type="none" w="med" len="med"/>
-                      <a:tailEnd type="none" w="med" len="med"/>
-                    </a:lnT>
-                    <a:lnB w="9525" cap="flat" cmpd="sng" algn="ctr">
-                      <a:solidFill>
-                        <a:srgbClr val="DDE3EA"/>
-                      </a:solidFill>
-                      <a:prstDash val="solid"/>
-                      <a:round/>
-                      <a:headEnd type="none" w="med" len="med"/>
-                      <a:tailEnd type="none" w="med" len="med"/>
-                    </a:lnB>
-                    <a:solidFill>
-                      <a:srgbClr val="FFF4C2"/>
-                    </a:solidFill>
-                  </a:tcPr>
-                </a:tc>
-                <a:tc>
-                  <a:txBody>
-                    <a:bodyPr/>
-                    <a:lstStyle/>
-                    <a:p>
-                      <a:pPr algn="ctr" indent="0" marL="0">
-                        <a:buNone/>
-                      </a:pPr>
-                      <a:r>
-                        <a:rPr lang="en-US" sz="1200" dirty="0">
-                          <a:solidFill>
-                            <a:srgbClr val="5B6778"/>
-                          </a:solidFill>
-                          <a:latin typeface="Inter" pitchFamily="34" charset="0"/>
-                          <a:ea typeface="Inter" pitchFamily="34" charset="-122"/>
-                          <a:cs typeface="Inter" pitchFamily="34" charset="-120"/>
-                        </a:rPr>
-                        <a:t>0</a:t>
-                      </a:r>
-                      <a:endParaRPr lang="en-US" sz="1200" dirty="0">
-                        <a:latin typeface="Inter" charset="0"/>
-                        <a:ea typeface="Inter" charset="0"/>
-                        <a:cs typeface="Inter" charset="0"/>
-                      </a:endParaRPr>
-                    </a:p>
-                  </a:txBody>
-                  <a:tcPr marL="91440" marR="91440" marT="0" marB="0" anchor="ctr">
-                    <a:lnL w="9525" cap="flat" cmpd="sng" algn="ctr">
-                      <a:solidFill>
-                        <a:srgbClr val="DDE3EA"/>
-                      </a:solidFill>
-                      <a:prstDash val="solid"/>
-                      <a:round/>
-                      <a:headEnd type="none" w="med" len="med"/>
-                      <a:tailEnd type="none" w="med" len="med"/>
-                    </a:lnL>
-                    <a:lnR w="9525" cap="flat" cmpd="sng" algn="ctr">
-                      <a:solidFill>
-                        <a:srgbClr val="DDE3EA"/>
-                      </a:solidFill>
-                      <a:prstDash val="solid"/>
-                      <a:round/>
-                      <a:headEnd type="none" w="med" len="med"/>
-                      <a:tailEnd type="none" w="med" len="med"/>
-                    </a:lnR>
-                    <a:lnT w="9525" cap="flat" cmpd="sng" algn="ctr">
-                      <a:solidFill>
-                        <a:srgbClr val="DDE3EA"/>
-                      </a:solidFill>
-                      <a:prstDash val="solid"/>
-                      <a:round/>
-                      <a:headEnd type="none" w="med" len="med"/>
-                      <a:tailEnd type="none" w="med" len="med"/>
-                    </a:lnT>
-                    <a:lnB w="9525" cap="flat" cmpd="sng" algn="ctr">
-                      <a:solidFill>
-                        <a:srgbClr val="DDE3EA"/>
-                      </a:solidFill>
-                      <a:prstDash val="solid"/>
-                      <a:round/>
-                      <a:headEnd type="none" w="med" len="med"/>
-                      <a:tailEnd type="none" w="med" len="med"/>
-                    </a:lnB>
-                    <a:solidFill>
-                      <a:srgbClr val="FFFFFF"/>
-                    </a:solidFill>
-                  </a:tcPr>
-                </a:tc>
-                <a:tc>
-                  <a:txBody>
-                    <a:bodyPr/>
-                    <a:lstStyle/>
-                    <a:p>
-                      <a:pPr algn="ctr" indent="0" marL="0">
-                        <a:buNone/>
-                      </a:pPr>
-                      <a:r>
-                        <a:rPr lang="en-US" sz="1200" dirty="0">
-                          <a:solidFill>
-                            <a:srgbClr val="5B6778"/>
-                          </a:solidFill>
-                          <a:latin typeface="Inter" pitchFamily="34" charset="0"/>
-                          <a:ea typeface="Inter" pitchFamily="34" charset="-122"/>
-                          <a:cs typeface="Inter" pitchFamily="34" charset="-120"/>
-                        </a:rPr>
-                        <a:t>0</a:t>
-                      </a:r>
-                      <a:endParaRPr lang="en-US" sz="1200" dirty="0">
-                        <a:latin typeface="Inter" charset="0"/>
-                        <a:ea typeface="Inter" charset="0"/>
-                        <a:cs typeface="Inter" charset="0"/>
-                      </a:endParaRPr>
-                    </a:p>
-                  </a:txBody>
-                  <a:tcPr marL="91440" marR="91440" marT="0" marB="0" anchor="ctr">
-                    <a:lnL w="9525" cap="flat" cmpd="sng" algn="ctr">
-                      <a:solidFill>
-                        <a:srgbClr val="DDE3EA"/>
-                      </a:solidFill>
-                      <a:prstDash val="solid"/>
-                      <a:round/>
-                      <a:headEnd type="none" w="med" len="med"/>
-                      <a:tailEnd type="none" w="med" len="med"/>
-                    </a:lnL>
-                    <a:lnR w="9525" cap="flat" cmpd="sng" algn="ctr">
-                      <a:solidFill>
-                        <a:srgbClr val="DDE3EA"/>
-                      </a:solidFill>
-                      <a:prstDash val="solid"/>
-                      <a:round/>
-                      <a:headEnd type="none" w="med" len="med"/>
-                      <a:tailEnd type="none" w="med" len="med"/>
-                    </a:lnR>
-                    <a:lnT w="9525" cap="flat" cmpd="sng" algn="ctr">
-                      <a:solidFill>
-                        <a:srgbClr val="DDE3EA"/>
-                      </a:solidFill>
-                      <a:prstDash val="solid"/>
-                      <a:round/>
-                      <a:headEnd type="none" w="med" len="med"/>
-                      <a:tailEnd type="none" w="med" len="med"/>
-                    </a:lnT>
-                    <a:lnB w="9525" cap="flat" cmpd="sng" algn="ctr">
-                      <a:solidFill>
-                        <a:srgbClr val="DDE3EA"/>
-                      </a:solidFill>
-                      <a:prstDash val="solid"/>
-                      <a:round/>
-                      <a:headEnd type="none" w="med" len="med"/>
-                      <a:tailEnd type="none" w="med" len="med"/>
-                    </a:lnB>
-                    <a:solidFill>
-                      <a:srgbClr val="FFFFFF"/>
-                    </a:solidFill>
-                  </a:tcPr>
-                </a:tc>
-              </a:tr>
-              <a:tr h="329184">
-                <a:tc>
-                  <a:txBody>
-                    <a:bodyPr/>
-                    <a:lstStyle/>
-                    <a:p>
-                      <a:pPr algn="l" indent="0" marL="0">
-                        <a:buNone/>
-                      </a:pPr>
-                      <a:r>
-                        <a:rPr lang="en-US" sz="1200" b="1" dirty="0">
-                          <a:solidFill>
-                            <a:srgbClr val="1B2533"/>
-                          </a:solidFill>
-                          <a:latin typeface="Inter" pitchFamily="34" charset="0"/>
-                          <a:ea typeface="Inter" pitchFamily="34" charset="-122"/>
-                          <a:cs typeface="Inter" pitchFamily="34" charset="-120"/>
-                        </a:rPr>
-                        <a:t>Shift times already worked today</a:t>
-                      </a:r>
-                      <a:endParaRPr lang="en-US" sz="1200" dirty="0">
-                        <a:latin typeface="Inter" charset="0"/>
-                        <a:ea typeface="Inter" charset="0"/>
-                        <a:cs typeface="Inter" charset="0"/>
-                      </a:endParaRPr>
-                    </a:p>
-                  </a:txBody>
-                  <a:tcPr marL="91440" marR="91440" marT="0" marB="0" anchor="ctr">
-                    <a:lnL w="9525" cap="flat" cmpd="sng" algn="ctr">
-                      <a:solidFill>
-                        <a:srgbClr val="DDE3EA"/>
-                      </a:solidFill>
-                      <a:prstDash val="solid"/>
-                      <a:round/>
-                      <a:headEnd type="none" w="med" len="med"/>
-                      <a:tailEnd type="none" w="med" len="med"/>
-                    </a:lnL>
-                    <a:lnR w="9525" cap="flat" cmpd="sng" algn="ctr">
-                      <a:solidFill>
-                        <a:srgbClr val="DDE3EA"/>
-                      </a:solidFill>
-                      <a:prstDash val="solid"/>
-                      <a:round/>
-                      <a:headEnd type="none" w="med" len="med"/>
-                      <a:tailEnd type="none" w="med" len="med"/>
-                    </a:lnR>
-                    <a:lnT w="9525" cap="flat" cmpd="sng" algn="ctr">
-                      <a:solidFill>
-                        <a:srgbClr val="DDE3EA"/>
-                      </a:solidFill>
-                      <a:prstDash val="solid"/>
-                      <a:round/>
-                      <a:headEnd type="none" w="med" len="med"/>
-                      <a:tailEnd type="none" w="med" len="med"/>
-                    </a:lnT>
-                    <a:lnB w="9525" cap="flat" cmpd="sng" algn="ctr">
-                      <a:solidFill>
-                        <a:srgbClr val="DDE3EA"/>
-                      </a:solidFill>
-                      <a:prstDash val="solid"/>
-                      <a:round/>
-                      <a:headEnd type="none" w="med" len="med"/>
-                      <a:tailEnd type="none" w="med" len="med"/>
-                    </a:lnB>
-                    <a:solidFill>
-                      <a:srgbClr val="FFFFFF"/>
-                    </a:solidFill>
-                  </a:tcPr>
-                </a:tc>
-                <a:tc>
-                  <a:txBody>
-                    <a:bodyPr/>
-                    <a:lstStyle/>
-                    <a:p>
-                      <a:pPr algn="ctr" indent="0" marL="0">
-                        <a:buNone/>
-                      </a:pPr>
-                      <a:r>
-                        <a:rPr lang="en-US" sz="1200" b="1" dirty="0">
-                          <a:solidFill>
-                            <a:srgbClr val="001E3C"/>
-                          </a:solidFill>
-                          <a:latin typeface="Inter" pitchFamily="34" charset="0"/>
-                          <a:ea typeface="Inter" pitchFamily="34" charset="-122"/>
-                          <a:cs typeface="Inter" pitchFamily="34" charset="-120"/>
-                        </a:rPr>
-                        <a:t>9 of 15</a:t>
-                      </a:r>
-                      <a:endParaRPr lang="en-US" sz="1200" dirty="0">
-                        <a:latin typeface="Inter" charset="0"/>
-                        <a:ea typeface="Inter" charset="0"/>
-                        <a:cs typeface="Inter" charset="0"/>
-                      </a:endParaRPr>
-                    </a:p>
-                  </a:txBody>
-                  <a:tcPr marL="91440" marR="91440" marT="0" marB="0" anchor="ctr">
-                    <a:lnL w="9525" cap="flat" cmpd="sng" algn="ctr">
-                      <a:solidFill>
-                        <a:srgbClr val="DDE3EA"/>
-                      </a:solidFill>
-                      <a:prstDash val="solid"/>
-                      <a:round/>
-                      <a:headEnd type="none" w="med" len="med"/>
-                      <a:tailEnd type="none" w="med" len="med"/>
-                    </a:lnL>
-                    <a:lnR w="9525" cap="flat" cmpd="sng" algn="ctr">
-                      <a:solidFill>
-                        <a:srgbClr val="DDE3EA"/>
-                      </a:solidFill>
-                      <a:prstDash val="solid"/>
-                      <a:round/>
-                      <a:headEnd type="none" w="med" len="med"/>
-                      <a:tailEnd type="none" w="med" len="med"/>
-                    </a:lnR>
-                    <a:lnT w="9525" cap="flat" cmpd="sng" algn="ctr">
-                      <a:solidFill>
-                        <a:srgbClr val="DDE3EA"/>
-                      </a:solidFill>
-                      <a:prstDash val="solid"/>
-                      <a:round/>
-                      <a:headEnd type="none" w="med" len="med"/>
-                      <a:tailEnd type="none" w="med" len="med"/>
-                    </a:lnT>
-                    <a:lnB w="9525" cap="flat" cmpd="sng" algn="ctr">
-                      <a:solidFill>
-                        <a:srgbClr val="DDE3EA"/>
-                      </a:solidFill>
-                      <a:prstDash val="solid"/>
-                      <a:round/>
-                      <a:headEnd type="none" w="med" len="med"/>
-                      <a:tailEnd type="none" w="med" len="med"/>
-                    </a:lnB>
-                    <a:solidFill>
-                      <a:srgbClr val="FFF4C2"/>
-                    </a:solidFill>
-                  </a:tcPr>
-                </a:tc>
-                <a:tc>
-                  <a:txBody>
-                    <a:bodyPr/>
-                    <a:lstStyle/>
-                    <a:p>
-                      <a:pPr algn="ctr" indent="0" marL="0">
-                        <a:buNone/>
-                      </a:pPr>
-                      <a:r>
-                        <a:rPr lang="en-US" sz="1200" dirty="0">
-                          <a:solidFill>
-                            <a:srgbClr val="5B6778"/>
-                          </a:solidFill>
-                          <a:latin typeface="Inter" pitchFamily="34" charset="0"/>
-                          <a:ea typeface="Inter" pitchFamily="34" charset="-122"/>
-                          <a:cs typeface="Inter" pitchFamily="34" charset="-120"/>
-                        </a:rPr>
-                        <a:t>5 of 17</a:t>
-                      </a:r>
-                      <a:endParaRPr lang="en-US" sz="1200" dirty="0">
-                        <a:latin typeface="Inter" charset="0"/>
-                        <a:ea typeface="Inter" charset="0"/>
-                        <a:cs typeface="Inter" charset="0"/>
-                      </a:endParaRPr>
-                    </a:p>
-                  </a:txBody>
-                  <a:tcPr marL="91440" marR="91440" marT="0" marB="0" anchor="ctr">
-                    <a:lnL w="9525" cap="flat" cmpd="sng" algn="ctr">
-                      <a:solidFill>
-                        <a:srgbClr val="DDE3EA"/>
-                      </a:solidFill>
-                      <a:prstDash val="solid"/>
-                      <a:round/>
-                      <a:headEnd type="none" w="med" len="med"/>
-                      <a:tailEnd type="none" w="med" len="med"/>
-                    </a:lnL>
-                    <a:lnR w="9525" cap="flat" cmpd="sng" algn="ctr">
-                      <a:solidFill>
-                        <a:srgbClr val="DDE3EA"/>
-                      </a:solidFill>
-                      <a:prstDash val="solid"/>
-                      <a:round/>
-                      <a:headEnd type="none" w="med" len="med"/>
-                      <a:tailEnd type="none" w="med" len="med"/>
-                    </a:lnR>
-                    <a:lnT w="9525" cap="flat" cmpd="sng" algn="ctr">
-                      <a:solidFill>
-                        <a:srgbClr val="DDE3EA"/>
-                      </a:solidFill>
-                      <a:prstDash val="solid"/>
-                      <a:round/>
-                      <a:headEnd type="none" w="med" len="med"/>
-                      <a:tailEnd type="none" w="med" len="med"/>
-                    </a:lnT>
-                    <a:lnB w="9525" cap="flat" cmpd="sng" algn="ctr">
-                      <a:solidFill>
-                        <a:srgbClr val="DDE3EA"/>
-                      </a:solidFill>
-                      <a:prstDash val="solid"/>
-                      <a:round/>
-                      <a:headEnd type="none" w="med" len="med"/>
-                      <a:tailEnd type="none" w="med" len="med"/>
-                    </a:lnB>
-                    <a:solidFill>
-                      <a:srgbClr val="FFFFFF"/>
-                    </a:solidFill>
-                  </a:tcPr>
-                </a:tc>
-                <a:tc>
-                  <a:txBody>
-                    <a:bodyPr/>
-                    <a:lstStyle/>
-                    <a:p>
-                      <a:pPr algn="ctr" indent="0" marL="0">
-                        <a:buNone/>
-                      </a:pPr>
-                      <a:r>
-                        <a:rPr lang="en-US" sz="1200" dirty="0">
-                          <a:solidFill>
-                            <a:srgbClr val="5B6778"/>
-                          </a:solidFill>
-                          <a:latin typeface="Inter" pitchFamily="34" charset="0"/>
-                          <a:ea typeface="Inter" pitchFamily="34" charset="-122"/>
-                          <a:cs typeface="Inter" pitchFamily="34" charset="-120"/>
-                        </a:rPr>
-                        <a:t>7 of 16</a:t>
-                      </a:r>
-                      <a:endParaRPr lang="en-US" sz="1200" dirty="0">
-                        <a:latin typeface="Inter" charset="0"/>
-                        <a:ea typeface="Inter" charset="0"/>
-                        <a:cs typeface="Inter" charset="0"/>
-                      </a:endParaRPr>
-                    </a:p>
-                  </a:txBody>
-                  <a:tcPr marL="91440" marR="91440" marT="0" marB="0" anchor="ctr">
-                    <a:lnL w="9525" cap="flat" cmpd="sng" algn="ctr">
-                      <a:solidFill>
-                        <a:srgbClr val="DDE3EA"/>
-                      </a:solidFill>
-                      <a:prstDash val="solid"/>
-                      <a:round/>
-                      <a:headEnd type="none" w="med" len="med"/>
-                      <a:tailEnd type="none" w="med" len="med"/>
-                    </a:lnL>
-                    <a:lnR w="9525" cap="flat" cmpd="sng" algn="ctr">
-                      <a:solidFill>
-                        <a:srgbClr val="DDE3EA"/>
-                      </a:solidFill>
-                      <a:prstDash val="solid"/>
-                      <a:round/>
-                      <a:headEnd type="none" w="med" len="med"/>
-                      <a:tailEnd type="none" w="med" len="med"/>
-                    </a:lnR>
-                    <a:lnT w="9525" cap="flat" cmpd="sng" algn="ctr">
-                      <a:solidFill>
-                        <a:srgbClr val="DDE3EA"/>
-                      </a:solidFill>
-                      <a:prstDash val="solid"/>
-                      <a:round/>
-                      <a:headEnd type="none" w="med" len="med"/>
-                      <a:tailEnd type="none" w="med" len="med"/>
-                    </a:lnT>
-                    <a:lnB w="9525" cap="flat" cmpd="sng" algn="ctr">
-                      <a:solidFill>
-                        <a:srgbClr val="DDE3EA"/>
-                      </a:solidFill>
-                      <a:prstDash val="solid"/>
-                      <a:round/>
-                      <a:headEnd type="none" w="med" len="med"/>
-                      <a:tailEnd type="none" w="med" len="med"/>
-                    </a:lnB>
-                    <a:solidFill>
-                      <a:srgbClr val="FFFFFF"/>
-                    </a:solidFill>
-                  </a:tcPr>
-                </a:tc>
-              </a:tr>
-              <a:tr h="329184">
-                <a:tc>
-                  <a:txBody>
-                    <a:bodyPr/>
-                    <a:lstStyle/>
-                    <a:p>
-                      <a:pPr algn="l" indent="0" marL="0">
-                        <a:buNone/>
-                      </a:pPr>
-                      <a:r>
-                        <a:rPr lang="en-US" sz="1200" b="1" dirty="0">
-                          <a:solidFill>
-                            <a:srgbClr val="1B2533"/>
-                          </a:solidFill>
-                          <a:latin typeface="Inter" pitchFamily="34" charset="0"/>
-                          <a:ea typeface="Inter" pitchFamily="34" charset="-122"/>
-                          <a:cs typeface="Inter" pitchFamily="34" charset="-120"/>
-                        </a:rPr>
-                        <a:t>Longest shift · shortest rest</a:t>
-                      </a:r>
-                      <a:endParaRPr lang="en-US" sz="1200" dirty="0">
-                        <a:latin typeface="Inter" charset="0"/>
-                        <a:ea typeface="Inter" charset="0"/>
-                        <a:cs typeface="Inter" charset="0"/>
-                      </a:endParaRPr>
-                    </a:p>
-                  </a:txBody>
-                  <a:tcPr marL="91440" marR="91440" marT="0" marB="0" anchor="ctr">
-                    <a:lnL w="9525" cap="flat" cmpd="sng" algn="ctr">
-                      <a:solidFill>
-                        <a:srgbClr val="DDE3EA"/>
-                      </a:solidFill>
-                      <a:prstDash val="solid"/>
-                      <a:round/>
-                      <a:headEnd type="none" w="med" len="med"/>
-                      <a:tailEnd type="none" w="med" len="med"/>
-                    </a:lnL>
-                    <a:lnR w="9525" cap="flat" cmpd="sng" algn="ctr">
-                      <a:solidFill>
-                        <a:srgbClr val="DDE3EA"/>
-                      </a:solidFill>
-                      <a:prstDash val="solid"/>
-                      <a:round/>
-                      <a:headEnd type="none" w="med" len="med"/>
-                      <a:tailEnd type="none" w="med" len="med"/>
-                    </a:lnR>
-                    <a:lnT w="9525" cap="flat" cmpd="sng" algn="ctr">
-                      <a:solidFill>
-                        <a:srgbClr val="DDE3EA"/>
-                      </a:solidFill>
-                      <a:prstDash val="solid"/>
-                      <a:round/>
-                      <a:headEnd type="none" w="med" len="med"/>
-                      <a:tailEnd type="none" w="med" len="med"/>
-                    </a:lnT>
-                    <a:lnB w="9525" cap="flat" cmpd="sng" algn="ctr">
-                      <a:solidFill>
-                        <a:srgbClr val="DDE3EA"/>
-                      </a:solidFill>
-                      <a:prstDash val="solid"/>
-                      <a:round/>
-                      <a:headEnd type="none" w="med" len="med"/>
-                      <a:tailEnd type="none" w="med" len="med"/>
-                    </a:lnB>
-                    <a:solidFill>
-                      <a:srgbClr val="FFFFFF"/>
-                    </a:solidFill>
-                  </a:tcPr>
-                </a:tc>
-                <a:tc>
-                  <a:txBody>
-                    <a:bodyPr/>
-                    <a:lstStyle/>
-                    <a:p>
-                      <a:pPr algn="ctr" indent="0" marL="0">
-                        <a:buNone/>
-                      </a:pPr>
-                      <a:r>
-                        <a:rPr lang="en-US" sz="1200" b="1" dirty="0">
-                          <a:solidFill>
-                            <a:srgbClr val="001E3C"/>
-                          </a:solidFill>
-                          <a:latin typeface="Inter" pitchFamily="34" charset="0"/>
-                          <a:ea typeface="Inter" pitchFamily="34" charset="-122"/>
-                          <a:cs typeface="Inter" pitchFamily="34" charset="-120"/>
-                        </a:rPr>
-                        <a:t>9h00 · 14h20</a:t>
-                      </a:r>
-                      <a:endParaRPr lang="en-US" sz="1200" dirty="0">
-                        <a:latin typeface="Inter" charset="0"/>
-                        <a:ea typeface="Inter" charset="0"/>
-                        <a:cs typeface="Inter" charset="0"/>
-                      </a:endParaRPr>
-                    </a:p>
-                  </a:txBody>
-                  <a:tcPr marL="91440" marR="91440" marT="0" marB="0" anchor="ctr">
-                    <a:lnL w="9525" cap="flat" cmpd="sng" algn="ctr">
-                      <a:solidFill>
-                        <a:srgbClr val="DDE3EA"/>
-                      </a:solidFill>
-                      <a:prstDash val="solid"/>
-                      <a:round/>
-                      <a:headEnd type="none" w="med" len="med"/>
-                      <a:tailEnd type="none" w="med" len="med"/>
-                    </a:lnL>
-                    <a:lnR w="9525" cap="flat" cmpd="sng" algn="ctr">
-                      <a:solidFill>
-                        <a:srgbClr val="DDE3EA"/>
-                      </a:solidFill>
-                      <a:prstDash val="solid"/>
-                      <a:round/>
-                      <a:headEnd type="none" w="med" len="med"/>
-                      <a:tailEnd type="none" w="med" len="med"/>
-                    </a:lnR>
-                    <a:lnT w="9525" cap="flat" cmpd="sng" algn="ctr">
-                      <a:solidFill>
-                        <a:srgbClr val="DDE3EA"/>
-                      </a:solidFill>
-                      <a:prstDash val="solid"/>
-                      <a:round/>
-                      <a:headEnd type="none" w="med" len="med"/>
-                      <a:tailEnd type="none" w="med" len="med"/>
-                    </a:lnT>
-                    <a:lnB w="9525" cap="flat" cmpd="sng" algn="ctr">
-                      <a:solidFill>
-                        <a:srgbClr val="DDE3EA"/>
-                      </a:solidFill>
-                      <a:prstDash val="solid"/>
-                      <a:round/>
-                      <a:headEnd type="none" w="med" len="med"/>
-                      <a:tailEnd type="none" w="med" len="med"/>
-                    </a:lnB>
-                    <a:solidFill>
-                      <a:srgbClr val="FFF4C2"/>
-                    </a:solidFill>
-                  </a:tcPr>
-                </a:tc>
-                <a:tc>
-                  <a:txBody>
-                    <a:bodyPr/>
-                    <a:lstStyle/>
-                    <a:p>
-                      <a:pPr algn="ctr" indent="0" marL="0">
-                        <a:buNone/>
-                      </a:pPr>
-                      <a:r>
-                        <a:rPr lang="en-US" sz="1200" dirty="0">
-                          <a:solidFill>
-                            <a:srgbClr val="5B6778"/>
-                          </a:solidFill>
-                          <a:latin typeface="Inter" pitchFamily="34" charset="0"/>
-                          <a:ea typeface="Inter" pitchFamily="34" charset="-122"/>
-                          <a:cs typeface="Inter" pitchFamily="34" charset="-120"/>
-                        </a:rPr>
-                        <a:t>9h30 · 14h05</a:t>
-                      </a:r>
-                      <a:endParaRPr lang="en-US" sz="1200" dirty="0">
-                        <a:latin typeface="Inter" charset="0"/>
-                        <a:ea typeface="Inter" charset="0"/>
-                        <a:cs typeface="Inter" charset="0"/>
-                      </a:endParaRPr>
-                    </a:p>
-                  </a:txBody>
-                  <a:tcPr marL="91440" marR="91440" marT="0" marB="0" anchor="ctr">
-                    <a:lnL w="9525" cap="flat" cmpd="sng" algn="ctr">
-                      <a:solidFill>
-                        <a:srgbClr val="DDE3EA"/>
-                      </a:solidFill>
-                      <a:prstDash val="solid"/>
-                      <a:round/>
-                      <a:headEnd type="none" w="med" len="med"/>
-                      <a:tailEnd type="none" w="med" len="med"/>
-                    </a:lnL>
-                    <a:lnR w="9525" cap="flat" cmpd="sng" algn="ctr">
-                      <a:solidFill>
-                        <a:srgbClr val="DDE3EA"/>
-                      </a:solidFill>
-                      <a:prstDash val="solid"/>
-                      <a:round/>
-                      <a:headEnd type="none" w="med" len="med"/>
-                      <a:tailEnd type="none" w="med" len="med"/>
-                    </a:lnR>
-                    <a:lnT w="9525" cap="flat" cmpd="sng" algn="ctr">
-                      <a:solidFill>
-                        <a:srgbClr val="DDE3EA"/>
-                      </a:solidFill>
-                      <a:prstDash val="solid"/>
-                      <a:round/>
-                      <a:headEnd type="none" w="med" len="med"/>
-                      <a:tailEnd type="none" w="med" len="med"/>
-                    </a:lnT>
-                    <a:lnB w="9525" cap="flat" cmpd="sng" algn="ctr">
-                      <a:solidFill>
-                        <a:srgbClr val="DDE3EA"/>
-                      </a:solidFill>
-                      <a:prstDash val="solid"/>
-                      <a:round/>
-                      <a:headEnd type="none" w="med" len="med"/>
-                      <a:tailEnd type="none" w="med" len="med"/>
-                    </a:lnB>
-                    <a:solidFill>
-                      <a:srgbClr val="FFFFFF"/>
-                    </a:solidFill>
-                  </a:tcPr>
-                </a:tc>
-                <a:tc>
-                  <a:txBody>
-                    <a:bodyPr/>
-                    <a:lstStyle/>
-                    <a:p>
-                      <a:pPr algn="ctr" indent="0" marL="0">
-                        <a:buNone/>
-                      </a:pPr>
-                      <a:r>
-                        <a:rPr lang="en-US" sz="1200" dirty="0">
-                          <a:solidFill>
-                            <a:srgbClr val="5B6778"/>
-                          </a:solidFill>
-                          <a:latin typeface="Inter" pitchFamily="34" charset="0"/>
-                          <a:ea typeface="Inter" pitchFamily="34" charset="-122"/>
-                          <a:cs typeface="Inter" pitchFamily="34" charset="-120"/>
-                        </a:rPr>
-                        <a:t>9h10 · 14h05</a:t>
-                      </a:r>
-                      <a:endParaRPr lang="en-US" sz="1200" dirty="0">
-                        <a:latin typeface="Inter" charset="0"/>
-                        <a:ea typeface="Inter" charset="0"/>
-                        <a:cs typeface="Inter" charset="0"/>
-                      </a:endParaRPr>
-                    </a:p>
-                  </a:txBody>
-                  <a:tcPr marL="91440" marR="91440" marT="0" marB="0" anchor="ctr">
-                    <a:lnL w="9525" cap="flat" cmpd="sng" algn="ctr">
-                      <a:solidFill>
-                        <a:srgbClr val="DDE3EA"/>
-                      </a:solidFill>
-                      <a:prstDash val="solid"/>
-                      <a:round/>
-                      <a:headEnd type="none" w="med" len="med"/>
-                      <a:tailEnd type="none" w="med" len="med"/>
-                    </a:lnL>
-                    <a:lnR w="9525" cap="flat" cmpd="sng" algn="ctr">
-                      <a:solidFill>
-                        <a:srgbClr val="DDE3EA"/>
-                      </a:solidFill>
-                      <a:prstDash val="solid"/>
-                      <a:round/>
-                      <a:headEnd type="none" w="med" len="med"/>
-                      <a:tailEnd type="none" w="med" len="med"/>
-                    </a:lnR>
-                    <a:lnT w="9525" cap="flat" cmpd="sng" algn="ctr">
-                      <a:solidFill>
-                        <a:srgbClr val="DDE3EA"/>
-                      </a:solidFill>
-                      <a:prstDash val="solid"/>
-                      <a:round/>
-                      <a:headEnd type="none" w="med" len="med"/>
-                      <a:tailEnd type="none" w="med" len="med"/>
-                    </a:lnT>
-                    <a:lnB w="9525" cap="flat" cmpd="sng" algn="ctr">
-                      <a:solidFill>
-                        <a:srgbClr val="DDE3EA"/>
-                      </a:solidFill>
-                      <a:prstDash val="solid"/>
-                      <a:round/>
-                      <a:headEnd type="none" w="med" len="med"/>
-                      <a:tailEnd type="none" w="med" len="med"/>
-                    </a:lnB>
-                    <a:solidFill>
-                      <a:srgbClr val="FFFFFF"/>
-                    </a:solidFill>
-                  </a:tcPr>
-                </a:tc>
-              </a:tr>
-              <a:tr h="329184">
-                <a:tc>
-                  <a:txBody>
-                    <a:bodyPr/>
-                    <a:lstStyle/>
-                    <a:p>
-                      <a:pPr algn="l" indent="0" marL="0">
-                        <a:buNone/>
-                      </a:pPr>
-                      <a:r>
-                        <a:rPr lang="en-US" sz="1200" b="1" dirty="0">
-                          <a:solidFill>
-                            <a:srgbClr val="1B2533"/>
-                          </a:solidFill>
-                          <a:latin typeface="Inter" pitchFamily="34" charset="0"/>
-                          <a:ea typeface="Inter" pitchFamily="34" charset="-122"/>
-                          <a:cs typeface="Inter" pitchFamily="34" charset="-120"/>
-                        </a:rPr>
-                        <a:t>Full weekends off · most days in a row</a:t>
-                      </a:r>
-                      <a:endParaRPr lang="en-US" sz="1200" dirty="0">
-                        <a:latin typeface="Inter" charset="0"/>
-                        <a:ea typeface="Inter" charset="0"/>
-                        <a:cs typeface="Inter" charset="0"/>
-                      </a:endParaRPr>
-                    </a:p>
-                  </a:txBody>
-                  <a:tcPr marL="91440" marR="91440" marT="0" marB="0" anchor="ctr">
-                    <a:lnL w="9525" cap="flat" cmpd="sng" algn="ctr">
-                      <a:solidFill>
-                        <a:srgbClr val="DDE3EA"/>
-                      </a:solidFill>
-                      <a:prstDash val="solid"/>
-                      <a:round/>
-                      <a:headEnd type="none" w="med" len="med"/>
-                      <a:tailEnd type="none" w="med" len="med"/>
-                    </a:lnL>
-                    <a:lnR w="9525" cap="flat" cmpd="sng" algn="ctr">
-                      <a:solidFill>
-                        <a:srgbClr val="DDE3EA"/>
-                      </a:solidFill>
-                      <a:prstDash val="solid"/>
-                      <a:round/>
-                      <a:headEnd type="none" w="med" len="med"/>
-                      <a:tailEnd type="none" w="med" len="med"/>
-                    </a:lnR>
-                    <a:lnT w="9525" cap="flat" cmpd="sng" algn="ctr">
-                      <a:solidFill>
-                        <a:srgbClr val="DDE3EA"/>
-                      </a:solidFill>
-                      <a:prstDash val="solid"/>
-                      <a:round/>
-                      <a:headEnd type="none" w="med" len="med"/>
-                      <a:tailEnd type="none" w="med" len="med"/>
-                    </a:lnT>
-                    <a:lnB w="9525" cap="flat" cmpd="sng" algn="ctr">
-                      <a:solidFill>
-                        <a:srgbClr val="DDE3EA"/>
-                      </a:solidFill>
-                      <a:prstDash val="solid"/>
-                      <a:round/>
-                      <a:headEnd type="none" w="med" len="med"/>
-                      <a:tailEnd type="none" w="med" len="med"/>
-                    </a:lnB>
-                    <a:solidFill>
-                      <a:srgbClr val="FFFFFF"/>
-                    </a:solidFill>
-                  </a:tcPr>
-                </a:tc>
-                <a:tc>
-                  <a:txBody>
-                    <a:bodyPr/>
-                    <a:lstStyle/>
-                    <a:p>
-                      <a:pPr algn="ctr" indent="0" marL="0">
-                        <a:buNone/>
-                      </a:pPr>
-                      <a:r>
-                        <a:rPr lang="en-US" sz="1200" b="1" dirty="0">
-                          <a:solidFill>
-                            <a:srgbClr val="001E3C"/>
-                          </a:solidFill>
-                          <a:latin typeface="Inter" pitchFamily="34" charset="0"/>
-                          <a:ea typeface="Inter" pitchFamily="34" charset="-122"/>
-                          <a:cs typeface="Inter" pitchFamily="34" charset="-120"/>
-                        </a:rPr>
-                        <a:t>6 in 24 · 6</a:t>
-                      </a:r>
-                      <a:endParaRPr lang="en-US" sz="1200" dirty="0">
-                        <a:latin typeface="Inter" charset="0"/>
-                        <a:ea typeface="Inter" charset="0"/>
-                        <a:cs typeface="Inter" charset="0"/>
-                      </a:endParaRPr>
-                    </a:p>
-                  </a:txBody>
-                  <a:tcPr marL="91440" marR="91440" marT="0" marB="0" anchor="ctr">
-                    <a:lnL w="9525" cap="flat" cmpd="sng" algn="ctr">
-                      <a:solidFill>
-                        <a:srgbClr val="DDE3EA"/>
-                      </a:solidFill>
-                      <a:prstDash val="solid"/>
-                      <a:round/>
-                      <a:headEnd type="none" w="med" len="med"/>
-                      <a:tailEnd type="none" w="med" len="med"/>
-                    </a:lnL>
-                    <a:lnR w="9525" cap="flat" cmpd="sng" algn="ctr">
-                      <a:solidFill>
-                        <a:srgbClr val="DDE3EA"/>
-                      </a:solidFill>
-                      <a:prstDash val="solid"/>
-                      <a:round/>
-                      <a:headEnd type="none" w="med" len="med"/>
-                      <a:tailEnd type="none" w="med" len="med"/>
-                    </a:lnR>
-                    <a:lnT w="9525" cap="flat" cmpd="sng" algn="ctr">
-                      <a:solidFill>
-                        <a:srgbClr val="DDE3EA"/>
-                      </a:solidFill>
-                      <a:prstDash val="solid"/>
-                      <a:round/>
-                      <a:headEnd type="none" w="med" len="med"/>
-                      <a:tailEnd type="none" w="med" len="med"/>
-                    </a:lnT>
-                    <a:lnB w="9525" cap="flat" cmpd="sng" algn="ctr">
-                      <a:solidFill>
-                        <a:srgbClr val="DDE3EA"/>
-                      </a:solidFill>
-                      <a:prstDash val="solid"/>
-                      <a:round/>
-                      <a:headEnd type="none" w="med" len="med"/>
-                      <a:tailEnd type="none" w="med" len="med"/>
-                    </a:lnB>
-                    <a:solidFill>
-                      <a:srgbClr val="FFF4C2"/>
-                    </a:solidFill>
-                  </a:tcPr>
-                </a:tc>
-                <a:tc>
-                  <a:txBody>
-                    <a:bodyPr/>
-                    <a:lstStyle/>
-                    <a:p>
-                      <a:pPr algn="ctr" indent="0" marL="0">
-                        <a:buNone/>
-                      </a:pPr>
-                      <a:r>
-                        <a:rPr lang="en-US" sz="1200" dirty="0">
-                          <a:solidFill>
-                            <a:srgbClr val="5B6778"/>
-                          </a:solidFill>
-                          <a:latin typeface="Inter" pitchFamily="34" charset="0"/>
-                          <a:ea typeface="Inter" pitchFamily="34" charset="-122"/>
-                          <a:cs typeface="Inter" pitchFamily="34" charset="-120"/>
-                        </a:rPr>
-                        <a:t>6 in 24 · 6</a:t>
-                      </a:r>
-                      <a:endParaRPr lang="en-US" sz="1200" dirty="0">
-                        <a:latin typeface="Inter" charset="0"/>
-                        <a:ea typeface="Inter" charset="0"/>
-                        <a:cs typeface="Inter" charset="0"/>
-                      </a:endParaRPr>
-                    </a:p>
-                  </a:txBody>
-                  <a:tcPr marL="91440" marR="91440" marT="0" marB="0" anchor="ctr">
-                    <a:lnL w="9525" cap="flat" cmpd="sng" algn="ctr">
-                      <a:solidFill>
-                        <a:srgbClr val="DDE3EA"/>
-                      </a:solidFill>
-                      <a:prstDash val="solid"/>
-                      <a:round/>
-                      <a:headEnd type="none" w="med" len="med"/>
-                      <a:tailEnd type="none" w="med" len="med"/>
-                    </a:lnL>
-                    <a:lnR w="9525" cap="flat" cmpd="sng" algn="ctr">
-                      <a:solidFill>
-                        <a:srgbClr val="DDE3EA"/>
-                      </a:solidFill>
-                      <a:prstDash val="solid"/>
-                      <a:round/>
-                      <a:headEnd type="none" w="med" len="med"/>
-                      <a:tailEnd type="none" w="med" len="med"/>
-                    </a:lnR>
-                    <a:lnT w="9525" cap="flat" cmpd="sng" algn="ctr">
-                      <a:solidFill>
-                        <a:srgbClr val="DDE3EA"/>
-                      </a:solidFill>
-                      <a:prstDash val="solid"/>
-                      <a:round/>
-                      <a:headEnd type="none" w="med" len="med"/>
-                      <a:tailEnd type="none" w="med" len="med"/>
-                    </a:lnT>
-                    <a:lnB w="9525" cap="flat" cmpd="sng" algn="ctr">
-                      <a:solidFill>
-                        <a:srgbClr val="DDE3EA"/>
-                      </a:solidFill>
-                      <a:prstDash val="solid"/>
-                      <a:round/>
-                      <a:headEnd type="none" w="med" len="med"/>
-                      <a:tailEnd type="none" w="med" len="med"/>
-                    </a:lnB>
-                    <a:solidFill>
-                      <a:srgbClr val="FFFFFF"/>
-                    </a:solidFill>
-                  </a:tcPr>
-                </a:tc>
-                <a:tc>
-                  <a:txBody>
-                    <a:bodyPr/>
-                    <a:lstStyle/>
-                    <a:p>
-                      <a:pPr algn="ctr" indent="0" marL="0">
-                        <a:buNone/>
-                      </a:pPr>
-                      <a:r>
-                        <a:rPr lang="en-US" sz="1200" dirty="0">
-                          <a:solidFill>
-                            <a:srgbClr val="5B6778"/>
-                          </a:solidFill>
-                          <a:latin typeface="Inter" pitchFamily="34" charset="0"/>
-                          <a:ea typeface="Inter" pitchFamily="34" charset="-122"/>
-                          <a:cs typeface="Inter" pitchFamily="34" charset="-120"/>
-                        </a:rPr>
-                        <a:t>2 in 24 · 9</a:t>
-                      </a:r>
-                      <a:endParaRPr lang="en-US" sz="1200" dirty="0">
-                        <a:latin typeface="Inter" charset="0"/>
-                        <a:ea typeface="Inter" charset="0"/>
-                        <a:cs typeface="Inter" charset="0"/>
-                      </a:endParaRPr>
-                    </a:p>
-                  </a:txBody>
-                  <a:tcPr marL="91440" marR="91440" marT="0" marB="0" anchor="ctr">
-                    <a:lnL w="9525" cap="flat" cmpd="sng" algn="ctr">
-                      <a:solidFill>
-                        <a:srgbClr val="DDE3EA"/>
-                      </a:solidFill>
-                      <a:prstDash val="solid"/>
-                      <a:round/>
-                      <a:headEnd type="none" w="med" len="med"/>
-                      <a:tailEnd type="none" w="med" len="med"/>
-                    </a:lnL>
-                    <a:lnR w="9525" cap="flat" cmpd="sng" algn="ctr">
-                      <a:solidFill>
-                        <a:srgbClr val="DDE3EA"/>
-                      </a:solidFill>
-                      <a:prstDash val="solid"/>
-                      <a:round/>
-                      <a:headEnd type="none" w="med" len="med"/>
-                      <a:tailEnd type="none" w="med" len="med"/>
-                    </a:lnR>
-                    <a:lnT w="9525" cap="flat" cmpd="sng" algn="ctr">
-                      <a:solidFill>
-                        <a:srgbClr val="DDE3EA"/>
-                      </a:solidFill>
-                      <a:prstDash val="solid"/>
-                      <a:round/>
-                      <a:headEnd type="none" w="med" len="med"/>
-                      <a:tailEnd type="none" w="med" len="med"/>
-                    </a:lnT>
-                    <a:lnB w="9525" cap="flat" cmpd="sng" algn="ctr">
-                      <a:solidFill>
-                        <a:srgbClr val="DDE3EA"/>
-                      </a:solidFill>
-                      <a:prstDash val="solid"/>
-                      <a:round/>
-                      <a:headEnd type="none" w="med" len="med"/>
-                      <a:tailEnd type="none" w="med" len="med"/>
-                    </a:lnB>
-                    <a:solidFill>
-                      <a:srgbClr val="FFFFFF"/>
-                    </a:solidFill>
-                  </a:tcPr>
-                </a:tc>
-              </a:tr>
-              <a:tr h="329184">
-                <a:tc>
-                  <a:txBody>
-                    <a:bodyPr/>
-                    <a:lstStyle/>
-                    <a:p>
-                      <a:pPr algn="l" indent="0" marL="0">
-                        <a:buNone/>
-                      </a:pPr>
-                      <a:r>
-                        <a:rPr lang="en-US" sz="1200" b="1" dirty="0">
-                          <a:solidFill>
-                            <a:srgbClr val="1B2533"/>
-                          </a:solidFill>
-                          <a:latin typeface="Inter" pitchFamily="34" charset="0"/>
-                          <a:ea typeface="Inter" pitchFamily="34" charset="-122"/>
-                          <a:cs typeface="Inter" pitchFamily="34" charset="-120"/>
-                        </a:rPr>
-                        <a:t>Fit to the trains: weekday · Sat · Sun (lower is closer)</a:t>
-                      </a:r>
-                      <a:endParaRPr lang="en-US" sz="1200" dirty="0">
-                        <a:latin typeface="Inter" charset="0"/>
-                        <a:ea typeface="Inter" charset="0"/>
-                        <a:cs typeface="Inter" charset="0"/>
-                      </a:endParaRPr>
-                    </a:p>
-                  </a:txBody>
-                  <a:tcPr marL="91440" marR="91440" marT="0" marB="0" anchor="ctr">
-                    <a:lnL w="9525" cap="flat" cmpd="sng" algn="ctr">
-                      <a:solidFill>
-                        <a:srgbClr val="DDE3EA"/>
-                      </a:solidFill>
-                      <a:prstDash val="solid"/>
-                      <a:round/>
-                      <a:headEnd type="none" w="med" len="med"/>
-                      <a:tailEnd type="none" w="med" len="med"/>
-                    </a:lnL>
-                    <a:lnR w="9525" cap="flat" cmpd="sng" algn="ctr">
-                      <a:solidFill>
-                        <a:srgbClr val="DDE3EA"/>
-                      </a:solidFill>
-                      <a:prstDash val="solid"/>
-                      <a:round/>
-                      <a:headEnd type="none" w="med" len="med"/>
-                      <a:tailEnd type="none" w="med" len="med"/>
-                    </a:lnR>
-                    <a:lnT w="9525" cap="flat" cmpd="sng" algn="ctr">
-                      <a:solidFill>
-                        <a:srgbClr val="DDE3EA"/>
-                      </a:solidFill>
-                      <a:prstDash val="solid"/>
-                      <a:round/>
-                      <a:headEnd type="none" w="med" len="med"/>
-                      <a:tailEnd type="none" w="med" len="med"/>
-                    </a:lnT>
-                    <a:lnB w="9525" cap="flat" cmpd="sng" algn="ctr">
-                      <a:solidFill>
-                        <a:srgbClr val="DDE3EA"/>
-                      </a:solidFill>
-                      <a:prstDash val="solid"/>
-                      <a:round/>
-                      <a:headEnd type="none" w="med" len="med"/>
-                      <a:tailEnd type="none" w="med" len="med"/>
-                    </a:lnB>
-                    <a:solidFill>
-                      <a:srgbClr val="FFFFFF"/>
-                    </a:solidFill>
-                  </a:tcPr>
-                </a:tc>
-                <a:tc>
-                  <a:txBody>
-                    <a:bodyPr/>
-                    <a:lstStyle/>
-                    <a:p>
-                      <a:pPr algn="ctr" indent="0" marL="0">
-                        <a:buNone/>
-                      </a:pPr>
-                      <a:r>
-                        <a:rPr lang="en-US" sz="1200" b="1" dirty="0">
-                          <a:solidFill>
-                            <a:srgbClr val="001E3C"/>
-                          </a:solidFill>
-                          <a:latin typeface="Inter" pitchFamily="34" charset="0"/>
-                          <a:ea typeface="Inter" pitchFamily="34" charset="-122"/>
-                          <a:cs typeface="Inter" pitchFamily="34" charset="-120"/>
-                        </a:rPr>
-                        <a:t>28 · 15 · 31</a:t>
-                      </a:r>
-                      <a:endParaRPr lang="en-US" sz="1200" dirty="0">
-                        <a:latin typeface="Inter" charset="0"/>
-                        <a:ea typeface="Inter" charset="0"/>
-                        <a:cs typeface="Inter" charset="0"/>
-                      </a:endParaRPr>
-                    </a:p>
-                  </a:txBody>
-                  <a:tcPr marL="91440" marR="91440" marT="0" marB="0" anchor="ctr">
-                    <a:lnL w="9525" cap="flat" cmpd="sng" algn="ctr">
-                      <a:solidFill>
-                        <a:srgbClr val="DDE3EA"/>
-                      </a:solidFill>
-                      <a:prstDash val="solid"/>
-                      <a:round/>
-                      <a:headEnd type="none" w="med" len="med"/>
-                      <a:tailEnd type="none" w="med" len="med"/>
-                    </a:lnL>
-                    <a:lnR w="9525" cap="flat" cmpd="sng" algn="ctr">
-                      <a:solidFill>
-                        <a:srgbClr val="DDE3EA"/>
-                      </a:solidFill>
-                      <a:prstDash val="solid"/>
-                      <a:round/>
-                      <a:headEnd type="none" w="med" len="med"/>
-                      <a:tailEnd type="none" w="med" len="med"/>
-                    </a:lnR>
-                    <a:lnT w="9525" cap="flat" cmpd="sng" algn="ctr">
-                      <a:solidFill>
-                        <a:srgbClr val="DDE3EA"/>
-                      </a:solidFill>
-                      <a:prstDash val="solid"/>
-                      <a:round/>
-                      <a:headEnd type="none" w="med" len="med"/>
-                      <a:tailEnd type="none" w="med" len="med"/>
-                    </a:lnT>
-                    <a:lnB w="9525" cap="flat" cmpd="sng" algn="ctr">
-                      <a:solidFill>
-                        <a:srgbClr val="DDE3EA"/>
-                      </a:solidFill>
-                      <a:prstDash val="solid"/>
-                      <a:round/>
-                      <a:headEnd type="none" w="med" len="med"/>
-                      <a:tailEnd type="none" w="med" len="med"/>
-                    </a:lnB>
-                    <a:solidFill>
-                      <a:srgbClr val="FFF4C2"/>
-                    </a:solidFill>
-                  </a:tcPr>
-                </a:tc>
-                <a:tc>
-                  <a:txBody>
-                    <a:bodyPr/>
-                    <a:lstStyle/>
-                    <a:p>
-                      <a:pPr algn="ctr" indent="0" marL="0">
-                        <a:buNone/>
-                      </a:pPr>
-                      <a:r>
-                        <a:rPr lang="en-US" sz="1200" dirty="0">
-                          <a:solidFill>
-                            <a:srgbClr val="5B6778"/>
-                          </a:solidFill>
-                          <a:latin typeface="Inter" pitchFamily="34" charset="0"/>
-                          <a:ea typeface="Inter" pitchFamily="34" charset="-122"/>
-                          <a:cs typeface="Inter" pitchFamily="34" charset="-120"/>
-                        </a:rPr>
-                        <a:t>27 · 15 · 29</a:t>
-                      </a:r>
-                      <a:endParaRPr lang="en-US" sz="1200" dirty="0">
-                        <a:latin typeface="Inter" charset="0"/>
-                        <a:ea typeface="Inter" charset="0"/>
-                        <a:cs typeface="Inter" charset="0"/>
-                      </a:endParaRPr>
-                    </a:p>
-                  </a:txBody>
-                  <a:tcPr marL="91440" marR="91440" marT="0" marB="0" anchor="ctr">
-                    <a:lnL w="9525" cap="flat" cmpd="sng" algn="ctr">
-                      <a:solidFill>
-                        <a:srgbClr val="DDE3EA"/>
-                      </a:solidFill>
-                      <a:prstDash val="solid"/>
-                      <a:round/>
-                      <a:headEnd type="none" w="med" len="med"/>
-                      <a:tailEnd type="none" w="med" len="med"/>
-                    </a:lnL>
-                    <a:lnR w="9525" cap="flat" cmpd="sng" algn="ctr">
-                      <a:solidFill>
-                        <a:srgbClr val="DDE3EA"/>
-                      </a:solidFill>
-                      <a:prstDash val="solid"/>
-                      <a:round/>
-                      <a:headEnd type="none" w="med" len="med"/>
-                      <a:tailEnd type="none" w="med" len="med"/>
-                    </a:lnR>
-                    <a:lnT w="9525" cap="flat" cmpd="sng" algn="ctr">
-                      <a:solidFill>
-                        <a:srgbClr val="DDE3EA"/>
-                      </a:solidFill>
-                      <a:prstDash val="solid"/>
-                      <a:round/>
-                      <a:headEnd type="none" w="med" len="med"/>
-                      <a:tailEnd type="none" w="med" len="med"/>
-                    </a:lnT>
-                    <a:lnB w="9525" cap="flat" cmpd="sng" algn="ctr">
-                      <a:solidFill>
-                        <a:srgbClr val="DDE3EA"/>
-                      </a:solidFill>
-                      <a:prstDash val="solid"/>
-                      <a:round/>
-                      <a:headEnd type="none" w="med" len="med"/>
-                      <a:tailEnd type="none" w="med" len="med"/>
-                    </a:lnB>
-                    <a:solidFill>
-                      <a:srgbClr val="FFFFFF"/>
-                    </a:solidFill>
-                  </a:tcPr>
-                </a:tc>
-                <a:tc>
-                  <a:txBody>
-                    <a:bodyPr/>
-                    <a:lstStyle/>
-                    <a:p>
-                      <a:pPr algn="ctr" indent="0" marL="0">
-                        <a:buNone/>
-                      </a:pPr>
-                      <a:r>
-                        <a:rPr lang="en-US" sz="1200" dirty="0">
-                          <a:solidFill>
-                            <a:srgbClr val="5B6778"/>
-                          </a:solidFill>
-                          <a:latin typeface="Inter" pitchFamily="34" charset="0"/>
-                          <a:ea typeface="Inter" pitchFamily="34" charset="-122"/>
-                          <a:cs typeface="Inter" pitchFamily="34" charset="-120"/>
-                        </a:rPr>
-                        <a:t>42 · 38 · 78</a:t>
-                      </a:r>
-                      <a:endParaRPr lang="en-US" sz="1200" dirty="0">
-                        <a:latin typeface="Inter" charset="0"/>
-                        <a:ea typeface="Inter" charset="0"/>
-                        <a:cs typeface="Inter" charset="0"/>
-                      </a:endParaRPr>
-                    </a:p>
-                  </a:txBody>
-                  <a:tcPr marL="91440" marR="91440" marT="0" marB="0" anchor="ctr">
-                    <a:lnL w="9525" cap="flat" cmpd="sng" algn="ctr">
-                      <a:solidFill>
-                        <a:srgbClr val="DDE3EA"/>
-                      </a:solidFill>
-                      <a:prstDash val="solid"/>
-                      <a:round/>
-                      <a:headEnd type="none" w="med" len="med"/>
-                      <a:tailEnd type="none" w="med" len="med"/>
-                    </a:lnL>
-                    <a:lnR w="9525" cap="flat" cmpd="sng" algn="ctr">
-                      <a:solidFill>
-                        <a:srgbClr val="DDE3EA"/>
-                      </a:solidFill>
-                      <a:prstDash val="solid"/>
-                      <a:round/>
-                      <a:headEnd type="none" w="med" len="med"/>
-                      <a:tailEnd type="none" w="med" len="med"/>
-                    </a:lnR>
-                    <a:lnT w="9525" cap="flat" cmpd="sng" algn="ctr">
-                      <a:solidFill>
-                        <a:srgbClr val="DDE3EA"/>
-                      </a:solidFill>
-                      <a:prstDash val="solid"/>
-                      <a:round/>
-                      <a:headEnd type="none" w="med" len="med"/>
-                      <a:tailEnd type="none" w="med" len="med"/>
-                    </a:lnT>
-                    <a:lnB w="9525" cap="flat" cmpd="sng" algn="ctr">
-                      <a:solidFill>
-                        <a:srgbClr val="DDE3EA"/>
-                      </a:solidFill>
-                      <a:prstDash val="solid"/>
-                      <a:round/>
-                      <a:headEnd type="none" w="med" len="med"/>
-                      <a:tailEnd type="none" w="med" len="med"/>
-                    </a:lnB>
-                    <a:solidFill>
-                      <a:srgbClr val="FFFFFF"/>
-                    </a:solidFill>
-                  </a:tcPr>
-                </a:tc>
-              </a:tr>
-              <a:tr h="329184">
-                <a:tc>
-                  <a:txBody>
-                    <a:bodyPr/>
-                    <a:lstStyle/>
-                    <a:p>
-                      <a:pPr algn="l" indent="0" marL="0">
-                        <a:buNone/>
-                      </a:pPr>
-                      <a:r>
-                        <a:rPr lang="en-US" sz="1200" b="1" dirty="0">
-                          <a:solidFill>
-                            <a:srgbClr val="1B2533"/>
-                          </a:solidFill>
-                          <a:latin typeface="Inter" pitchFamily="34" charset="0"/>
-                          <a:ea typeface="Inter" pitchFamily="34" charset="-122"/>
-                          <a:cs typeface="Inter" pitchFamily="34" charset="-120"/>
-                        </a:rPr>
-                        <a:t>Finishing at 23:00 or later — each, a year</a:t>
-                      </a:r>
-                      <a:endParaRPr lang="en-US" sz="1200" dirty="0">
-                        <a:latin typeface="Inter" charset="0"/>
-                        <a:ea typeface="Inter" charset="0"/>
-                        <a:cs typeface="Inter" charset="0"/>
-                      </a:endParaRPr>
-                    </a:p>
-                  </a:txBody>
-                  <a:tcPr marL="91440" marR="91440" marT="0" marB="0" anchor="ctr">
-                    <a:lnL w="9525" cap="flat" cmpd="sng" algn="ctr">
-                      <a:solidFill>
-                        <a:srgbClr val="DDE3EA"/>
-                      </a:solidFill>
-                      <a:prstDash val="solid"/>
-                      <a:round/>
-                      <a:headEnd type="none" w="med" len="med"/>
-                      <a:tailEnd type="none" w="med" len="med"/>
-                    </a:lnL>
-                    <a:lnR w="9525" cap="flat" cmpd="sng" algn="ctr">
-                      <a:solidFill>
-                        <a:srgbClr val="DDE3EA"/>
-                      </a:solidFill>
-                      <a:prstDash val="solid"/>
-                      <a:round/>
-                      <a:headEnd type="none" w="med" len="med"/>
-                      <a:tailEnd type="none" w="med" len="med"/>
-                    </a:lnR>
-                    <a:lnT w="9525" cap="flat" cmpd="sng" algn="ctr">
-                      <a:solidFill>
-                        <a:srgbClr val="DDE3EA"/>
-                      </a:solidFill>
-                      <a:prstDash val="solid"/>
-                      <a:round/>
-                      <a:headEnd type="none" w="med" len="med"/>
-                      <a:tailEnd type="none" w="med" len="med"/>
-                    </a:lnT>
-                    <a:lnB w="9525" cap="flat" cmpd="sng" algn="ctr">
-                      <a:solidFill>
-                        <a:srgbClr val="DDE3EA"/>
-                      </a:solidFill>
-                      <a:prstDash val="solid"/>
-                      <a:round/>
-                      <a:headEnd type="none" w="med" len="med"/>
-                      <a:tailEnd type="none" w="med" len="med"/>
-                    </a:lnB>
-                    <a:solidFill>
-                      <a:srgbClr val="FFFFFF"/>
-                    </a:solidFill>
-                  </a:tcPr>
-                </a:tc>
-                <a:tc>
-                  <a:txBody>
-                    <a:bodyPr/>
-                    <a:lstStyle/>
-                    <a:p>
-                      <a:pPr algn="ctr" indent="0" marL="0">
-                        <a:buNone/>
-                      </a:pPr>
-                      <a:r>
-                        <a:rPr lang="en-US" sz="1200" b="1" dirty="0">
-                          <a:solidFill>
-                            <a:srgbClr val="001E3C"/>
-                          </a:solidFill>
-                          <a:latin typeface="Inter" pitchFamily="34" charset="0"/>
-                          <a:ea typeface="Inter" pitchFamily="34" charset="-122"/>
-                          <a:cs typeface="Inter" pitchFamily="34" charset="-120"/>
-                        </a:rPr>
-                        <a:t>59</a:t>
-                      </a:r>
-                      <a:endParaRPr lang="en-US" sz="1200" dirty="0">
-                        <a:latin typeface="Inter" charset="0"/>
-                        <a:ea typeface="Inter" charset="0"/>
-                        <a:cs typeface="Inter" charset="0"/>
-                      </a:endParaRPr>
-                    </a:p>
-                  </a:txBody>
-                  <a:tcPr marL="91440" marR="91440" marT="0" marB="0" anchor="ctr">
-                    <a:lnL w="9525" cap="flat" cmpd="sng" algn="ctr">
-                      <a:solidFill>
-                        <a:srgbClr val="DDE3EA"/>
-                      </a:solidFill>
-                      <a:prstDash val="solid"/>
-                      <a:round/>
-                      <a:headEnd type="none" w="med" len="med"/>
-                      <a:tailEnd type="none" w="med" len="med"/>
-                    </a:lnL>
-                    <a:lnR w="9525" cap="flat" cmpd="sng" algn="ctr">
-                      <a:solidFill>
-                        <a:srgbClr val="DDE3EA"/>
-                      </a:solidFill>
-                      <a:prstDash val="solid"/>
-                      <a:round/>
-                      <a:headEnd type="none" w="med" len="med"/>
-                      <a:tailEnd type="none" w="med" len="med"/>
-                    </a:lnR>
-                    <a:lnT w="9525" cap="flat" cmpd="sng" algn="ctr">
-                      <a:solidFill>
-                        <a:srgbClr val="DDE3EA"/>
-                      </a:solidFill>
-                      <a:prstDash val="solid"/>
-                      <a:round/>
-                      <a:headEnd type="none" w="med" len="med"/>
-                      <a:tailEnd type="none" w="med" len="med"/>
-                    </a:lnT>
-                    <a:lnB w="9525" cap="flat" cmpd="sng" algn="ctr">
-                      <a:solidFill>
-                        <a:srgbClr val="DDE3EA"/>
-                      </a:solidFill>
-                      <a:prstDash val="solid"/>
-                      <a:round/>
-                      <a:headEnd type="none" w="med" len="med"/>
-                      <a:tailEnd type="none" w="med" len="med"/>
-                    </a:lnB>
-                    <a:solidFill>
-                      <a:srgbClr val="FFF4C2"/>
-                    </a:solidFill>
-                  </a:tcPr>
-                </a:tc>
-                <a:tc>
-                  <a:txBody>
-                    <a:bodyPr/>
-                    <a:lstStyle/>
-                    <a:p>
-                      <a:pPr algn="ctr" indent="0" marL="0">
-                        <a:buNone/>
-                      </a:pPr>
-                      <a:r>
-                        <a:rPr lang="en-US" sz="1200" dirty="0">
-                          <a:solidFill>
-                            <a:srgbClr val="5B6778"/>
-                          </a:solidFill>
-                          <a:latin typeface="Inter" pitchFamily="34" charset="0"/>
-                          <a:ea typeface="Inter" pitchFamily="34" charset="-122"/>
-                          <a:cs typeface="Inter" pitchFamily="34" charset="-120"/>
-                        </a:rPr>
-                        <a:t>59</a:t>
-                      </a:r>
-                      <a:endParaRPr lang="en-US" sz="1200" dirty="0">
-                        <a:latin typeface="Inter" charset="0"/>
-                        <a:ea typeface="Inter" charset="0"/>
-                        <a:cs typeface="Inter" charset="0"/>
-                      </a:endParaRPr>
-                    </a:p>
-                  </a:txBody>
-                  <a:tcPr marL="91440" marR="91440" marT="0" marB="0" anchor="ctr">
-                    <a:lnL w="9525" cap="flat" cmpd="sng" algn="ctr">
-                      <a:solidFill>
-                        <a:srgbClr val="DDE3EA"/>
-                      </a:solidFill>
-                      <a:prstDash val="solid"/>
-                      <a:round/>
-                      <a:headEnd type="none" w="med" len="med"/>
-                      <a:tailEnd type="none" w="med" len="med"/>
-                    </a:lnL>
-                    <a:lnR w="9525" cap="flat" cmpd="sng" algn="ctr">
-                      <a:solidFill>
-                        <a:srgbClr val="DDE3EA"/>
-                      </a:solidFill>
-                      <a:prstDash val="solid"/>
-                      <a:round/>
-                      <a:headEnd type="none" w="med" len="med"/>
-                      <a:tailEnd type="none" w="med" len="med"/>
-                    </a:lnR>
-                    <a:lnT w="9525" cap="flat" cmpd="sng" algn="ctr">
-                      <a:solidFill>
-                        <a:srgbClr val="DDE3EA"/>
-                      </a:solidFill>
-                      <a:prstDash val="solid"/>
-                      <a:round/>
-                      <a:headEnd type="none" w="med" len="med"/>
-                      <a:tailEnd type="none" w="med" len="med"/>
-                    </a:lnT>
-                    <a:lnB w="9525" cap="flat" cmpd="sng" algn="ctr">
-                      <a:solidFill>
-                        <a:srgbClr val="DDE3EA"/>
-                      </a:solidFill>
-                      <a:prstDash val="solid"/>
-                      <a:round/>
-                      <a:headEnd type="none" w="med" len="med"/>
-                      <a:tailEnd type="none" w="med" len="med"/>
-                    </a:lnB>
-                    <a:solidFill>
-                      <a:srgbClr val="FFFFFF"/>
-                    </a:solidFill>
-                  </a:tcPr>
-                </a:tc>
-                <a:tc>
-                  <a:txBody>
-                    <a:bodyPr/>
-                    <a:lstStyle/>
-                    <a:p>
-                      <a:pPr algn="ctr" indent="0" marL="0">
-                        <a:buNone/>
-                      </a:pPr>
-                      <a:r>
-                        <a:rPr lang="en-US" sz="1200" dirty="0">
-                          <a:solidFill>
-                            <a:srgbClr val="5B6778"/>
-                          </a:solidFill>
-                          <a:latin typeface="Inter" pitchFamily="34" charset="0"/>
-                          <a:ea typeface="Inter" pitchFamily="34" charset="-122"/>
-                          <a:cs typeface="Inter" pitchFamily="34" charset="-120"/>
-                        </a:rPr>
-                        <a:t>50</a:t>
-                      </a:r>
-                      <a:endParaRPr lang="en-US" sz="1200" dirty="0">
-                        <a:latin typeface="Inter" charset="0"/>
-                        <a:ea typeface="Inter" charset="0"/>
-                        <a:cs typeface="Inter" charset="0"/>
-                      </a:endParaRPr>
-                    </a:p>
-                  </a:txBody>
-                  <a:tcPr marL="91440" marR="91440" marT="0" marB="0" anchor="ctr">
-                    <a:lnL w="9525" cap="flat" cmpd="sng" algn="ctr">
-                      <a:solidFill>
-                        <a:srgbClr val="DDE3EA"/>
-                      </a:solidFill>
-                      <a:prstDash val="solid"/>
-                      <a:round/>
-                      <a:headEnd type="none" w="med" len="med"/>
-                      <a:tailEnd type="none" w="med" len="med"/>
-                    </a:lnL>
-                    <a:lnR w="9525" cap="flat" cmpd="sng" algn="ctr">
-                      <a:solidFill>
-                        <a:srgbClr val="DDE3EA"/>
-                      </a:solidFill>
-                      <a:prstDash val="solid"/>
-                      <a:round/>
-                      <a:headEnd type="none" w="med" len="med"/>
-                      <a:tailEnd type="none" w="med" len="med"/>
-                    </a:lnR>
-                    <a:lnT w="9525" cap="flat" cmpd="sng" algn="ctr">
-                      <a:solidFill>
-                        <a:srgbClr val="DDE3EA"/>
-                      </a:solidFill>
-                      <a:prstDash val="solid"/>
-                      <a:round/>
-                      <a:headEnd type="none" w="med" len="med"/>
-                      <a:tailEnd type="none" w="med" len="med"/>
-                    </a:lnT>
-                    <a:lnB w="9525" cap="flat" cmpd="sng" algn="ctr">
-                      <a:solidFill>
-                        <a:srgbClr val="DDE3EA"/>
-                      </a:solidFill>
-                      <a:prstDash val="solid"/>
-                      <a:round/>
-                      <a:headEnd type="none" w="med" len="med"/>
-                      <a:tailEnd type="none" w="med" len="med"/>
-                    </a:lnB>
-                    <a:solidFill>
-                      <a:srgbClr val="FFFFFF"/>
-                    </a:solidFill>
-                  </a:tcPr>
-                </a:tc>
-              </a:tr>
-            </a:tbl>
-          </a:graphicData>
-        </a:graphic>
-      </p:graphicFrame>
-      <p:sp>
-        <p:nvSpPr>
-          <p:cNvPr id="5" name="Shape 2"/>
+      <p:sp>
+        <p:nvSpPr>
+          <p:cNvPr id="4" name="Shape 2"/>
+          <p:cNvSpPr/>
+          <p:nvPr/>
+        </p:nvSpPr>
+        <p:spPr>
+          <a:xfrm>
+            <a:off x="457200" y="1325880"/>
+            <a:ext cx="292608" cy="292608"/>
+          </a:xfrm>
+          <a:prstGeom prst="ellipse">
+            <a:avLst/>
+          </a:prstGeom>
+          <a:solidFill>
+            <a:srgbClr val="1E7B4B"/>
+          </a:solidFill>
+          <a:ln w="12700">
+            <a:solidFill>
+              <a:srgbClr val="1E7B4B"/>
+            </a:solidFill>
+            <a:prstDash val="solid"/>
+          </a:ln>
+        </p:spPr>
+      </p:sp>
+      <p:sp>
+        <p:nvSpPr>
+          <p:cNvPr id="5" name="Text 3"/>
+          <p:cNvSpPr txBox="1"/>
+          <p:nvPr/>
+        </p:nvSpPr>
+        <p:spPr>
+          <a:xfrm>
+            <a:off x="457200" y="1325880"/>
+            <a:ext cx="292608" cy="292608"/>
+          </a:xfrm>
+          <a:prstGeom prst="rect">
+            <a:avLst/>
+          </a:prstGeom>
+          <a:noFill/>
+          <a:ln/>
+        </p:spPr>
+        <p:txBody>
+          <a:bodyPr wrap="square" lIns="0" tIns="0" rIns="0" bIns="0" rtlCol="0" anchor="ctr"/>
+          <a:lstStyle/>
+          <a:p>
+            <a:pPr algn="ctr" indent="0" marL="0">
+              <a:buNone/>
+            </a:pPr>
+            <a:r>
+              <a:rPr lang="en-US" sz="1200" b="1" dirty="0">
+                <a:solidFill>
+                  <a:srgbClr val="FFFFFF"/>
+                </a:solidFill>
+                <a:latin typeface="Inter" pitchFamily="34" charset="0"/>
+                <a:ea typeface="Inter" pitchFamily="34" charset="-122"/>
+                <a:cs typeface="Inter" pitchFamily="34" charset="-120"/>
+              </a:rPr>
+              <a:t>✓</a:t>
+            </a:r>
+            <a:endParaRPr lang="en-US" sz="1200" dirty="0"/>
+          </a:p>
+        </p:txBody>
+      </p:sp>
+      <p:sp>
+        <p:nvSpPr>
+          <p:cNvPr id="6" name="Text 4"/>
+          <p:cNvSpPr txBox="1"/>
+          <p:nvPr/>
+        </p:nvSpPr>
+        <p:spPr>
+          <a:xfrm>
+            <a:off x="914400" y="1307592"/>
+            <a:ext cx="7772400" cy="329184"/>
+          </a:xfrm>
+          <a:prstGeom prst="rect">
+            <a:avLst/>
+          </a:prstGeom>
+          <a:noFill/>
+          <a:ln/>
+        </p:spPr>
+        <p:txBody>
+          <a:bodyPr wrap="square" lIns="0" tIns="0" rIns="0" bIns="0" rtlCol="0" anchor="ctr"/>
+          <a:lstStyle/>
+          <a:p>
+            <a:pPr indent="0" marL="0">
+              <a:buNone/>
+            </a:pPr>
+            <a:r>
+              <a:rPr lang="en-US" sz="1500" dirty="0">
+                <a:solidFill>
+                  <a:srgbClr val="1B2533"/>
+                </a:solidFill>
+                <a:latin typeface="Inter" pitchFamily="34" charset="0"/>
+                <a:ea typeface="Inter" pitchFamily="34" charset="-122"/>
+                <a:cs typeface="Inter" pitchFamily="34" charset="-120"/>
+              </a:rPr>
+              <a:t>Meets all 11 December staffing rules</a:t>
+            </a:r>
+            <a:endParaRPr lang="en-US" sz="1500" dirty="0"/>
+          </a:p>
+        </p:txBody>
+      </p:sp>
+      <p:sp>
+        <p:nvSpPr>
+          <p:cNvPr id="7" name="Shape 5"/>
+          <p:cNvSpPr/>
+          <p:nvPr/>
+        </p:nvSpPr>
+        <p:spPr>
+          <a:xfrm>
+            <a:off x="457200" y="1728216"/>
+            <a:ext cx="292608" cy="292608"/>
+          </a:xfrm>
+          <a:prstGeom prst="ellipse">
+            <a:avLst/>
+          </a:prstGeom>
+          <a:solidFill>
+            <a:srgbClr val="1E7B4B"/>
+          </a:solidFill>
+          <a:ln w="12700">
+            <a:solidFill>
+              <a:srgbClr val="1E7B4B"/>
+            </a:solidFill>
+            <a:prstDash val="solid"/>
+          </a:ln>
+        </p:spPr>
+      </p:sp>
+      <p:sp>
+        <p:nvSpPr>
+          <p:cNvPr id="8" name="Text 6"/>
+          <p:cNvSpPr txBox="1"/>
+          <p:nvPr/>
+        </p:nvSpPr>
+        <p:spPr>
+          <a:xfrm>
+            <a:off x="457200" y="1728216"/>
+            <a:ext cx="292608" cy="292608"/>
+          </a:xfrm>
+          <a:prstGeom prst="rect">
+            <a:avLst/>
+          </a:prstGeom>
+          <a:noFill/>
+          <a:ln/>
+        </p:spPr>
+        <p:txBody>
+          <a:bodyPr wrap="square" lIns="0" tIns="0" rIns="0" bIns="0" rtlCol="0" anchor="ctr"/>
+          <a:lstStyle/>
+          <a:p>
+            <a:pPr algn="ctr" indent="0" marL="0">
+              <a:buNone/>
+            </a:pPr>
+            <a:r>
+              <a:rPr lang="en-US" sz="1200" b="1" dirty="0">
+                <a:solidFill>
+                  <a:srgbClr val="FFFFFF"/>
+                </a:solidFill>
+                <a:latin typeface="Inter" pitchFamily="34" charset="0"/>
+                <a:ea typeface="Inter" pitchFamily="34" charset="-122"/>
+                <a:cs typeface="Inter" pitchFamily="34" charset="-120"/>
+              </a:rPr>
+              <a:t>✓</a:t>
+            </a:r>
+            <a:endParaRPr lang="en-US" sz="1200" dirty="0"/>
+          </a:p>
+        </p:txBody>
+      </p:sp>
+      <p:sp>
+        <p:nvSpPr>
+          <p:cNvPr id="9" name="Text 7"/>
+          <p:cNvSpPr txBox="1"/>
+          <p:nvPr/>
+        </p:nvSpPr>
+        <p:spPr>
+          <a:xfrm>
+            <a:off x="914400" y="1709928"/>
+            <a:ext cx="7772400" cy="329184"/>
+          </a:xfrm>
+          <a:prstGeom prst="rect">
+            <a:avLst/>
+          </a:prstGeom>
+          <a:noFill/>
+          <a:ln/>
+        </p:spPr>
+        <p:txBody>
+          <a:bodyPr wrap="square" lIns="0" tIns="0" rIns="0" bIns="0" rtlCol="0" anchor="ctr"/>
+          <a:lstStyle/>
+          <a:p>
+            <a:pPr indent="0" marL="0">
+              <a:buNone/>
+            </a:pPr>
+            <a:r>
+              <a:rPr lang="en-US" sz="1500" dirty="0">
+                <a:solidFill>
+                  <a:srgbClr val="1B2533"/>
+                </a:solidFill>
+                <a:latin typeface="Inter" pitchFamily="34" charset="0"/>
+                <a:ea typeface="Inter" pitchFamily="34" charset="-122"/>
+                <a:cs typeface="Inter" pitchFamily="34" charset="-120"/>
+              </a:rPr>
+              <a:t>A full weekend off one week in four — today one in five</a:t>
+            </a:r>
+            <a:endParaRPr lang="en-US" sz="1500" dirty="0"/>
+          </a:p>
+        </p:txBody>
+      </p:sp>
+      <p:sp>
+        <p:nvSpPr>
+          <p:cNvPr id="10" name="Shape 8"/>
+          <p:cNvSpPr/>
+          <p:nvPr/>
+        </p:nvSpPr>
+        <p:spPr>
+          <a:xfrm>
+            <a:off x="457200" y="2130552"/>
+            <a:ext cx="292608" cy="292608"/>
+          </a:xfrm>
+          <a:prstGeom prst="ellipse">
+            <a:avLst/>
+          </a:prstGeom>
+          <a:solidFill>
+            <a:srgbClr val="1E7B4B"/>
+          </a:solidFill>
+          <a:ln w="12700">
+            <a:solidFill>
+              <a:srgbClr val="1E7B4B"/>
+            </a:solidFill>
+            <a:prstDash val="solid"/>
+          </a:ln>
+        </p:spPr>
+      </p:sp>
+      <p:sp>
+        <p:nvSpPr>
+          <p:cNvPr id="11" name="Text 9"/>
+          <p:cNvSpPr txBox="1"/>
+          <p:nvPr/>
+        </p:nvSpPr>
+        <p:spPr>
+          <a:xfrm>
+            <a:off x="457200" y="2130552"/>
+            <a:ext cx="292608" cy="292608"/>
+          </a:xfrm>
+          <a:prstGeom prst="rect">
+            <a:avLst/>
+          </a:prstGeom>
+          <a:noFill/>
+          <a:ln/>
+        </p:spPr>
+        <p:txBody>
+          <a:bodyPr wrap="square" lIns="0" tIns="0" rIns="0" bIns="0" rtlCol="0" anchor="ctr"/>
+          <a:lstStyle/>
+          <a:p>
+            <a:pPr algn="ctr" indent="0" marL="0">
+              <a:buNone/>
+            </a:pPr>
+            <a:r>
+              <a:rPr lang="en-US" sz="1200" b="1" dirty="0">
+                <a:solidFill>
+                  <a:srgbClr val="FFFFFF"/>
+                </a:solidFill>
+                <a:latin typeface="Inter" pitchFamily="34" charset="0"/>
+                <a:ea typeface="Inter" pitchFamily="34" charset="-122"/>
+                <a:cs typeface="Inter" pitchFamily="34" charset="-120"/>
+              </a:rPr>
+              <a:t>✓</a:t>
+            </a:r>
+            <a:endParaRPr lang="en-US" sz="1200" dirty="0"/>
+          </a:p>
+        </p:txBody>
+      </p:sp>
+      <p:sp>
+        <p:nvSpPr>
+          <p:cNvPr id="12" name="Text 10"/>
+          <p:cNvSpPr txBox="1"/>
+          <p:nvPr/>
+        </p:nvSpPr>
+        <p:spPr>
+          <a:xfrm>
+            <a:off x="914400" y="2112264"/>
+            <a:ext cx="7772400" cy="329184"/>
+          </a:xfrm>
+          <a:prstGeom prst="rect">
+            <a:avLst/>
+          </a:prstGeom>
+          <a:noFill/>
+          <a:ln/>
+        </p:spPr>
+        <p:txBody>
+          <a:bodyPr wrap="square" lIns="0" tIns="0" rIns="0" bIns="0" rtlCol="0" anchor="ctr"/>
+          <a:lstStyle/>
+          <a:p>
+            <a:pPr indent="0" marL="0">
+              <a:buNone/>
+            </a:pPr>
+            <a:r>
+              <a:rPr lang="en-US" sz="1500" dirty="0">
+                <a:solidFill>
+                  <a:srgbClr val="1B2533"/>
+                </a:solidFill>
+                <a:latin typeface="Inter" pitchFamily="34" charset="0"/>
+                <a:ea typeface="Inter" pitchFamily="34" charset="-122"/>
+                <a:cs typeface="Inter" pitchFamily="34" charset="-120"/>
+              </a:rPr>
+              <a:t>Never more than 6 days in a row — today 9</a:t>
+            </a:r>
+            <a:endParaRPr lang="en-US" sz="1500" dirty="0"/>
+          </a:p>
+        </p:txBody>
+      </p:sp>
+      <p:sp>
+        <p:nvSpPr>
+          <p:cNvPr id="13" name="Shape 11"/>
+          <p:cNvSpPr/>
+          <p:nvPr/>
+        </p:nvSpPr>
+        <p:spPr>
+          <a:xfrm>
+            <a:off x="457200" y="2532888"/>
+            <a:ext cx="292608" cy="292608"/>
+          </a:xfrm>
+          <a:prstGeom prst="ellipse">
+            <a:avLst/>
+          </a:prstGeom>
+          <a:solidFill>
+            <a:srgbClr val="1E7B4B"/>
+          </a:solidFill>
+          <a:ln w="12700">
+            <a:solidFill>
+              <a:srgbClr val="1E7B4B"/>
+            </a:solidFill>
+            <a:prstDash val="solid"/>
+          </a:ln>
+        </p:spPr>
+      </p:sp>
+      <p:sp>
+        <p:nvSpPr>
+          <p:cNvPr id="14" name="Text 12"/>
+          <p:cNvSpPr txBox="1"/>
+          <p:nvPr/>
+        </p:nvSpPr>
+        <p:spPr>
+          <a:xfrm>
+            <a:off x="457200" y="2532888"/>
+            <a:ext cx="292608" cy="292608"/>
+          </a:xfrm>
+          <a:prstGeom prst="rect">
+            <a:avLst/>
+          </a:prstGeom>
+          <a:noFill/>
+          <a:ln/>
+        </p:spPr>
+        <p:txBody>
+          <a:bodyPr wrap="square" lIns="0" tIns="0" rIns="0" bIns="0" rtlCol="0" anchor="ctr"/>
+          <a:lstStyle/>
+          <a:p>
+            <a:pPr algn="ctr" indent="0" marL="0">
+              <a:buNone/>
+            </a:pPr>
+            <a:r>
+              <a:rPr lang="en-US" sz="1200" b="1" dirty="0">
+                <a:solidFill>
+                  <a:srgbClr val="FFFFFF"/>
+                </a:solidFill>
+                <a:latin typeface="Inter" pitchFamily="34" charset="0"/>
+                <a:ea typeface="Inter" pitchFamily="34" charset="-122"/>
+                <a:cs typeface="Inter" pitchFamily="34" charset="-120"/>
+              </a:rPr>
+              <a:t>✓</a:t>
+            </a:r>
+            <a:endParaRPr lang="en-US" sz="1200" dirty="0"/>
+          </a:p>
+        </p:txBody>
+      </p:sp>
+      <p:sp>
+        <p:nvSpPr>
+          <p:cNvPr id="15" name="Text 13"/>
+          <p:cNvSpPr txBox="1"/>
+          <p:nvPr/>
+        </p:nvSpPr>
+        <p:spPr>
+          <a:xfrm>
+            <a:off x="914400" y="2514600"/>
+            <a:ext cx="7772400" cy="329184"/>
+          </a:xfrm>
+          <a:prstGeom prst="rect">
+            <a:avLst/>
+          </a:prstGeom>
+          <a:noFill/>
+          <a:ln/>
+        </p:spPr>
+        <p:txBody>
+          <a:bodyPr wrap="square" lIns="0" tIns="0" rIns="0" bIns="0" rtlCol="0" anchor="ctr"/>
+          <a:lstStyle/>
+          <a:p>
+            <a:pPr indent="0" marL="0">
+              <a:buNone/>
+            </a:pPr>
+            <a:r>
+              <a:rPr lang="en-US" sz="1500" dirty="0">
+                <a:solidFill>
+                  <a:srgbClr val="1B2533"/>
+                </a:solidFill>
+                <a:latin typeface="Inter" pitchFamily="34" charset="0"/>
+                <a:ea typeface="Inter" pitchFamily="34" charset="-122"/>
+                <a:cs typeface="Inter" pitchFamily="34" charset="-120"/>
+              </a:rPr>
+              <a:t>9 of its 15 shift times are worked today</a:t>
+            </a:r>
+            <a:endParaRPr lang="en-US" sz="1500" dirty="0"/>
+          </a:p>
+        </p:txBody>
+      </p:sp>
+      <p:sp>
+        <p:nvSpPr>
+          <p:cNvPr id="16" name="Shape 14"/>
+          <p:cNvSpPr/>
+          <p:nvPr/>
+        </p:nvSpPr>
+        <p:spPr>
+          <a:xfrm>
+            <a:off x="457200" y="2935224"/>
+            <a:ext cx="292608" cy="292608"/>
+          </a:xfrm>
+          <a:prstGeom prst="ellipse">
+            <a:avLst/>
+          </a:prstGeom>
+          <a:solidFill>
+            <a:srgbClr val="1E7B4B"/>
+          </a:solidFill>
+          <a:ln w="12700">
+            <a:solidFill>
+              <a:srgbClr val="1E7B4B"/>
+            </a:solidFill>
+            <a:prstDash val="solid"/>
+          </a:ln>
+        </p:spPr>
+      </p:sp>
+      <p:sp>
+        <p:nvSpPr>
+          <p:cNvPr id="17" name="Text 15"/>
+          <p:cNvSpPr txBox="1"/>
+          <p:nvPr/>
+        </p:nvSpPr>
+        <p:spPr>
+          <a:xfrm>
+            <a:off x="457200" y="2935224"/>
+            <a:ext cx="292608" cy="292608"/>
+          </a:xfrm>
+          <a:prstGeom prst="rect">
+            <a:avLst/>
+          </a:prstGeom>
+          <a:noFill/>
+          <a:ln/>
+        </p:spPr>
+        <p:txBody>
+          <a:bodyPr wrap="square" lIns="0" tIns="0" rIns="0" bIns="0" rtlCol="0" anchor="ctr"/>
+          <a:lstStyle/>
+          <a:p>
+            <a:pPr algn="ctr" indent="0" marL="0">
+              <a:buNone/>
+            </a:pPr>
+            <a:r>
+              <a:rPr lang="en-US" sz="1200" b="1" dirty="0">
+                <a:solidFill>
+                  <a:srgbClr val="FFFFFF"/>
+                </a:solidFill>
+                <a:latin typeface="Inter" pitchFamily="34" charset="0"/>
+                <a:ea typeface="Inter" pitchFamily="34" charset="-122"/>
+                <a:cs typeface="Inter" pitchFamily="34" charset="-120"/>
+              </a:rPr>
+              <a:t>✓</a:t>
+            </a:r>
+            <a:endParaRPr lang="en-US" sz="1200" dirty="0"/>
+          </a:p>
+        </p:txBody>
+      </p:sp>
+      <p:sp>
+        <p:nvSpPr>
+          <p:cNvPr id="18" name="Text 16"/>
+          <p:cNvSpPr txBox="1"/>
+          <p:nvPr/>
+        </p:nvSpPr>
+        <p:spPr>
+          <a:xfrm>
+            <a:off x="914400" y="2916936"/>
+            <a:ext cx="7772400" cy="329184"/>
+          </a:xfrm>
+          <a:prstGeom prst="rect">
+            <a:avLst/>
+          </a:prstGeom>
+          <a:noFill/>
+          <a:ln/>
+        </p:spPr>
+        <p:txBody>
+          <a:bodyPr wrap="square" lIns="0" tIns="0" rIns="0" bIns="0" rtlCol="0" anchor="ctr"/>
+          <a:lstStyle/>
+          <a:p>
+            <a:pPr indent="0" marL="0">
+              <a:buNone/>
+            </a:pPr>
+            <a:r>
+              <a:rPr lang="en-US" sz="1500" dirty="0">
+                <a:solidFill>
+                  <a:srgbClr val="1B2533"/>
+                </a:solidFill>
+                <a:latin typeface="Inter" pitchFamily="34" charset="0"/>
+                <a:ea typeface="Inter" pitchFamily="34" charset="-122"/>
+                <a:cs typeface="Inter" pitchFamily="34" charset="-120"/>
+              </a:rPr>
+              <a:t>No shift over 9 hours, and every closing shift is shorter</a:t>
+            </a:r>
+            <a:endParaRPr lang="en-US" sz="1500" dirty="0"/>
+          </a:p>
+        </p:txBody>
+      </p:sp>
+      <p:sp>
+        <p:nvSpPr>
+          <p:cNvPr id="19" name="Shape 17"/>
+          <p:cNvSpPr/>
+          <p:nvPr/>
+        </p:nvSpPr>
+        <p:spPr>
+          <a:xfrm>
+            <a:off x="457200" y="3337560"/>
+            <a:ext cx="292608" cy="292608"/>
+          </a:xfrm>
+          <a:prstGeom prst="ellipse">
+            <a:avLst/>
+          </a:prstGeom>
+          <a:solidFill>
+            <a:srgbClr val="1E7B4B"/>
+          </a:solidFill>
+          <a:ln w="12700">
+            <a:solidFill>
+              <a:srgbClr val="1E7B4B"/>
+            </a:solidFill>
+            <a:prstDash val="solid"/>
+          </a:ln>
+        </p:spPr>
+      </p:sp>
+      <p:sp>
+        <p:nvSpPr>
+          <p:cNvPr id="20" name="Text 18"/>
+          <p:cNvSpPr txBox="1"/>
+          <p:nvPr/>
+        </p:nvSpPr>
+        <p:spPr>
+          <a:xfrm>
+            <a:off x="457200" y="3337560"/>
+            <a:ext cx="292608" cy="292608"/>
+          </a:xfrm>
+          <a:prstGeom prst="rect">
+            <a:avLst/>
+          </a:prstGeom>
+          <a:noFill/>
+          <a:ln/>
+        </p:spPr>
+        <p:txBody>
+          <a:bodyPr wrap="square" lIns="0" tIns="0" rIns="0" bIns="0" rtlCol="0" anchor="ctr"/>
+          <a:lstStyle/>
+          <a:p>
+            <a:pPr algn="ctr" indent="0" marL="0">
+              <a:buNone/>
+            </a:pPr>
+            <a:r>
+              <a:rPr lang="en-US" sz="1200" b="1" dirty="0">
+                <a:solidFill>
+                  <a:srgbClr val="FFFFFF"/>
+                </a:solidFill>
+                <a:latin typeface="Inter" pitchFamily="34" charset="0"/>
+                <a:ea typeface="Inter" pitchFamily="34" charset="-122"/>
+                <a:cs typeface="Inter" pitchFamily="34" charset="-120"/>
+              </a:rPr>
+              <a:t>✓</a:t>
+            </a:r>
+            <a:endParaRPr lang="en-US" sz="1200" dirty="0"/>
+          </a:p>
+        </p:txBody>
+      </p:sp>
+      <p:sp>
+        <p:nvSpPr>
+          <p:cNvPr id="21" name="Text 19"/>
+          <p:cNvSpPr txBox="1"/>
+          <p:nvPr/>
+        </p:nvSpPr>
+        <p:spPr>
+          <a:xfrm>
+            <a:off x="914400" y="3319272"/>
+            <a:ext cx="7772400" cy="329184"/>
+          </a:xfrm>
+          <a:prstGeom prst="rect">
+            <a:avLst/>
+          </a:prstGeom>
+          <a:noFill/>
+          <a:ln/>
+        </p:spPr>
+        <p:txBody>
+          <a:bodyPr wrap="square" lIns="0" tIns="0" rIns="0" bIns="0" rtlCol="0" anchor="ctr"/>
+          <a:lstStyle/>
+          <a:p>
+            <a:pPr indent="0" marL="0">
+              <a:buNone/>
+            </a:pPr>
+            <a:r>
+              <a:rPr lang="en-US" sz="1500" dirty="0">
+                <a:solidFill>
+                  <a:srgbClr val="1B2533"/>
+                </a:solidFill>
+                <a:latin typeface="Inter" pitchFamily="34" charset="0"/>
+                <a:ea typeface="Inter" pitchFamily="34" charset="-122"/>
+                <a:cs typeface="Inter" pitchFamily="34" charset="-120"/>
+              </a:rPr>
+              <a:t>No avoidable fatigue patterns</a:t>
+            </a:r>
+            <a:endParaRPr lang="en-US" sz="1500" dirty="0"/>
+          </a:p>
+        </p:txBody>
+      </p:sp>
+      <p:sp>
+        <p:nvSpPr>
+          <p:cNvPr id="22" name="Shape 20"/>
           <p:cNvSpPr/>
           <p:nvPr/>
         </p:nvSpPr>
@@ -8628,7 +7033,7 @@
       </p:sp>
       <p:sp>
         <p:nvSpPr>
-          <p:cNvPr id="6" name="Text 3"/>
+          <p:cNvPr id="23" name="Text 21"/>
           <p:cNvSpPr txBox="1"/>
           <p:nvPr/>
         </p:nvSpPr>
@@ -8659,7 +7064,7 @@
                 <a:ea typeface="Inter" pitchFamily="34" charset="-122"/>
                 <a:cs typeface="Inter" pitchFamily="34" charset="-120"/>
               </a:rPr>
-              <a:t>Not the only good option — it trades a little train fit for familiar, shorter shifts.</a:t>
+              <a:t>The trade-off: more late finishes — about one extra each every two or three weeks.</a:t>
             </a:r>
             <a:endParaRPr lang="en-US" sz="1400" dirty="0"/>
           </a:p>
@@ -8667,7 +7072,7 @@
       </p:sp>
       <p:sp>
         <p:nvSpPr>
-          <p:cNvPr id="7" name="Text 4"/>
+          <p:cNvPr id="24" name="Text 22"/>
           <p:cNvSpPr txBox="1"/>
           <p:nvPr/>
         </p:nvSpPr>
@@ -8942,7 +7347,7 @@
                 <a:ea typeface="Inter" pitchFamily="34" charset="-122"/>
                 <a:cs typeface="Inter" pitchFamily="34" charset="-120"/>
               </a:rPr>
-              <a:t>6 full weekends off in 24 (today 4 in 20)</a:t>
+              <a:t>A weekend off one week in four (today one in five)</a:t>
             </a:r>
             <a:endParaRPr lang="en-US" sz="1300" dirty="0"/>
           </a:p>
@@ -9160,7 +7565,7 @@
                 <a:ea typeface="Inter" pitchFamily="34" charset="-122"/>
                 <a:cs typeface="Inter" pitchFamily="34" charset="-120"/>
               </a:rPr>
-              <a:t>59 finishes at 23:00 or later a year each (today 39)</a:t>
+              <a:t>About one extra late finish every 2–3 weeks</a:t>
             </a:r>
             <a:endParaRPr lang="en-US" sz="1300" dirty="0"/>
           </a:p>
@@ -9988,7 +8393,7 @@
                 <a:ea typeface="Inter" pitchFamily="34" charset="-122"/>
                 <a:cs typeface="Inter" pitchFamily="34" charset="-120"/>
               </a:rPr>
-              <a:t>To decide: which link is adopted</a:t>
+              <a:t>To decide: which link we use</a:t>
             </a:r>
             <a:endParaRPr lang="en-US" sz="1600" dirty="0"/>
           </a:p>
@@ -10027,7 +8432,7 @@
                 <a:ea typeface="Inter" pitchFamily="34" charset="-122"/>
                 <a:cs typeface="Inter" pitchFamily="34" charset="-120"/>
               </a:rPr>
-              <a:t>Familiar Nine is one of four that meet every rule. Colleagues’ views come first.</a:t>
+              <a:t>Colleagues’ views come first.</a:t>
             </a:r>
             <a:endParaRPr lang="en-US" sz="1300" dirty="0"/>
           </a:p>
@@ -10130,7 +8535,7 @@
                 <a:ea typeface="Inter" pitchFamily="34" charset="-122"/>
                 <a:cs typeface="Inter" pitchFamily="34" charset="-120"/>
               </a:rPr>
-              <a:t>Then: who goes on which line</a:t>
+              <a:t>Then: who starts on which line</a:t>
             </a:r>
             <a:endParaRPr lang="en-US" sz="1600" dirty="0"/>
           </a:p>
@@ -10169,7 +8574,7 @@
                 <a:ea typeface="Inter" pitchFamily="34" charset="-122"/>
                 <a:cs typeface="Inter" pitchFamily="34" charset="-120"/>
               </a:rPr>
-              <a:t>Who starts on which week of the link.</a:t>
+              <a:t>Who begins on which week of the link.</a:t>
             </a:r>
             <a:endParaRPr lang="en-US" sz="1300" dirty="0"/>
           </a:p>

--- a/docs/proposals/presentations/Familiar-Nine-for-managers.pptx
+++ b/docs/proposals/presentations/Familiar-Nine-for-managers.pptx
@@ -14,9 +14,10 @@
     <p:sldId id="262" r:id="rId8"/>
     <p:sldId id="263" r:id="rId9"/>
     <p:sldId id="264" r:id="rId10"/>
+    <p:sldId id="265" r:id="rId11"/>
   </p:sldIdLst>
   <p:notesMasterIdLst>
-    <p:notesMasterId r:id="rId11"/>
+    <p:notesMasterId r:id="rId12"/>
   </p:notesMasterIdLst>
   <p:sldSz cx="9144000" cy="5143500"/>
   <p:notesSz cx="5143500" cy="9144000"/>
@@ -883,6 +884,94 @@
 </p:notes>
 </file>
 
+<file path=ppt/notesSlides/notesSlide10.xml><?xml version="1.0" encoding="utf-8"?>
+<p:notes xmlns:a="http://schemas.openxmlformats.org/drawingml/2006/main" xmlns:r="http://schemas.openxmlformats.org/officeDocument/2006/relationships" xmlns:p="http://schemas.openxmlformats.org/presentationml/2006/main">
+  <p:cSld>
+    <p:spTree>
+      <p:nvGrpSpPr>
+        <p:cNvPr id="1" name=""/>
+        <p:cNvGrpSpPr/>
+        <p:nvPr/>
+      </p:nvGrpSpPr>
+      <p:grpSpPr>
+        <a:xfrm>
+          <a:off x="0" y="0"/>
+          <a:ext cx="0" cy="0"/>
+          <a:chOff x="0" y="0"/>
+          <a:chExt cx="0" cy="0"/>
+        </a:xfrm>
+      </p:grpSpPr>
+      <p:sp>
+        <p:nvSpPr>
+          <p:cNvPr id="2" name="Slide Image Placeholder 1"/>
+          <p:cNvSpPr>
+            <a:spLocks noGrp="1" noRot="1" noChangeAspect="1"/>
+          </p:cNvSpPr>
+          <p:nvPr>
+            <p:ph type="sldImg"/>
+          </p:nvPr>
+        </p:nvSpPr>
+        <p:spPr/>
+      </p:sp>
+      <p:sp>
+        <p:nvSpPr>
+          <p:cNvPr id="3" name="Notes Placeholder 2"/>
+          <p:cNvSpPr>
+            <a:spLocks noGrp="1"/>
+          </p:cNvSpPr>
+          <p:nvPr>
+            <p:ph type="body" idx="1"/>
+          </p:nvPr>
+        </p:nvSpPr>
+        <p:spPr/>
+        <p:txBody>
+          <a:bodyPr/>
+          <a:lstStyle/>
+          <a:p>
+            <a:r>
+              <a:rPr lang="en-US" dirty="0"/>
+              <a:t>Leave the sheet with them. Questions about a particular week or hour are answered there.</a:t>
+            </a:r>
+            <a:endParaRPr lang="en-US" dirty="0"/>
+          </a:p>
+        </p:txBody>
+      </p:sp>
+      <p:sp>
+        <p:nvSpPr>
+          <p:cNvPr id="4" name="Slide Number Placeholder 3"/>
+          <p:cNvSpPr>
+            <a:spLocks noGrp="1"/>
+          </p:cNvSpPr>
+          <p:nvPr>
+            <p:ph type="sldNum" sz="quarter" idx="10"/>
+          </p:nvPr>
+        </p:nvSpPr>
+        <p:spPr/>
+        <p:txBody>
+          <a:bodyPr/>
+          <a:lstStyle/>
+          <a:p>
+            <a:fld id="{F7021451-1387-4CA6-816F-3879F97B5CBC}" type="slidenum">
+              <a:rPr lang="en-US"/>
+              <a:t>10</a:t>
+            </a:fld>
+            <a:endParaRPr lang="en-US"/>
+          </a:p>
+        </p:txBody>
+      </p:sp>
+    </p:spTree>
+    <p:extLst>
+      <p:ext uri="{BB962C8B-B14F-4D97-AF65-F5344CB8AC3E}">
+        <p14:creationId xmlns:p14="http://schemas.microsoft.com/office/powerpoint/2010/main" val="1024086991"/>
+      </p:ext>
+    </p:extLst>
+  </p:cSld>
+  <p:clrMapOvr>
+    <a:masterClrMapping/>
+  </p:clrMapOvr>
+</p:notes>
+</file>
+
 <file path=ppt/notesSlides/notesSlide2.xml><?xml version="1.0" encoding="utf-8"?>
 <p:notes xmlns:a="http://schemas.openxmlformats.org/drawingml/2006/main" xmlns:r="http://schemas.openxmlformats.org/officeDocument/2006/relationships" xmlns:p="http://schemas.openxmlformats.org/presentationml/2006/main">
   <p:cSld>
@@ -1193,7 +1282,7 @@
           <a:p>
             <a:r>
               <a:rPr lang="en-US" dirty="0"/>
-              <a:t>Every working week pays exactly 35 hours Monday to Saturday — 42,000 minutes across the link — so no overtime is built into the rota. Sunday is not contracted, so the ten Sunday duties are worked as rest-day overtime, exactly as today’s eight are. Cover weeks stay at four, which is a slightly smaller share of a longer link: worth deciding deliberately.</a:t>
+              <a:t>Every working week pays exactly 35 hours Monday to Saturday — 42,000 minutes across the link — so no overtime is built into the rota. Sunday is not contracted, so the ten Sunday duties are worked as rest-day overtime, exactly as today’s eight are. Cover weeks stay at four, which is a slightly smaller share of a longer link: worth deciding deliberately. The two extra Sunday overtime duties a week come from the confirmed Sunday staffing of ten, not from Familiar Nine — any link that meets the rules needs them.</a:t>
             </a:r>
             <a:endParaRPr lang="en-US" dirty="0"/>
           </a:p>
@@ -1369,7 +1458,7 @@
           <a:p>
             <a:r>
               <a:rPr lang="en-US" dirty="0"/>
-              <a:t>Same 35 hours; the average shift is six minutes longer (8h20 against 8h14), which is what pays for the two fewer days. Annual leave works the same way, and a cover week still counts as four days of leave. Expect the late finishes to be the main objection: three to the close and five after 22:00 put about 20 more a year on each person — one extra every two or three weeks.</a:t>
+              <a:t>This is the case in one slide. It meets every December staffing rule, and it was built to keep the shift times people already work wherever that cost little — nine of its fifteen are worked today. The honest cost is late finishes: the December staffing needs three to the close and five after 22:00, so finishes at 23:00 or later go from about 39 to 59 a year each. Every closing shift is 30 to 45 minutes shorter, which softens it. Six shift times are new.</a:t>
             </a:r>
             <a:endParaRPr lang="en-US" dirty="0"/>
           </a:p>
@@ -1457,7 +1546,7 @@
           <a:p>
             <a:r>
               <a:rPr lang="en-US" dirty="0"/>
-              <a:t>The Sunday finish stays at 23:25 — that is agreed practice. The 13-day limit used in the checks is Chiltern practice; its written source is still to be cited.</a:t>
+              <a:t>Days at work fall from 219 to 217 a year (Monday to Saturday; Sunday is overtime). The late finishes come from the December staffing — three to the close and five after 22:00, where today has two and four — so any link that meets the rules will have more of them; they average about 20 more a year each, one extra every two or three weeks.</a:t>
             </a:r>
             <a:endParaRPr lang="en-US" dirty="0"/>
           </a:p>
@@ -1545,7 +1634,7 @@
           <a:p>
             <a:r>
               <a:rPr lang="en-US" dirty="0"/>
-              <a:t>Leave the sheet with them. Questions about a particular week or hour are answered there.</a:t>
+              <a:t>The Sunday finish stays at 23:25 — that is agreed practice. The 13-day limit used in the checks is Chiltern practice; its written source is still to be cited.</a:t>
             </a:r>
             <a:endParaRPr lang="en-US" dirty="0"/>
           </a:p>
@@ -2092,6 +2181,250 @@
 </p:sld>
 </file>
 
+<file path=ppt/slides/slide10.xml><?xml version="1.0" encoding="utf-8"?>
+<p:sld xmlns:a="http://schemas.openxmlformats.org/drawingml/2006/main" xmlns:r="http://schemas.openxmlformats.org/officeDocument/2006/relationships" xmlns:p="http://schemas.openxmlformats.org/presentationml/2006/main">
+  <p:cSld name="Slide 10">
+    <p:bg>
+      <p:bgPr>
+        <a:solidFill>
+          <a:srgbClr val="001E3C"/>
+        </a:solidFill>
+      </p:bgPr>
+    </p:bg>
+    <p:spTree>
+      <p:nvGrpSpPr>
+        <p:cNvPr id="1" name=""/>
+        <p:cNvGrpSpPr/>
+        <p:nvPr/>
+      </p:nvGrpSpPr>
+      <p:grpSpPr>
+        <a:xfrm>
+          <a:off x="0" y="0"/>
+          <a:ext cx="0" cy="0"/>
+          <a:chOff x="0" y="0"/>
+          <a:chExt cx="0" cy="0"/>
+        </a:xfrm>
+      </p:grpSpPr>
+      <p:sp>
+        <p:nvSpPr>
+          <p:cNvPr id="2" name="Shape 0"/>
+          <p:cNvSpPr/>
+          <p:nvPr/>
+        </p:nvSpPr>
+        <p:spPr>
+          <a:xfrm>
+            <a:off x="548640" y="640080"/>
+            <a:ext cx="731520" cy="731520"/>
+          </a:xfrm>
+          <a:prstGeom prst="ellipse">
+            <a:avLst/>
+          </a:prstGeom>
+          <a:solidFill>
+            <a:srgbClr val="F5C800"/>
+          </a:solidFill>
+          <a:ln w="12700">
+            <a:solidFill>
+              <a:srgbClr val="F5C800"/>
+            </a:solidFill>
+            <a:prstDash val="solid"/>
+          </a:ln>
+        </p:spPr>
+      </p:sp>
+      <p:pic>
+        <p:nvPicPr>
+          <p:cNvPr id="3" name="Image 0" descr="preencoded.png">    </p:cNvPr>
+          <p:cNvPicPr>
+            <a:picLocks noChangeAspect="1"/>
+          </p:cNvPicPr>
+          <p:nvPr/>
+        </p:nvPicPr>
+        <p:blipFill>
+          <a:blip r:embed="rId1"/>
+          <a:stretch>
+            <a:fillRect/>
+          </a:stretch>
+        </p:blipFill>
+        <p:spPr>
+          <a:xfrm>
+            <a:off x="709574" y="801014"/>
+            <a:ext cx="409651" cy="409651"/>
+          </a:xfrm>
+          <a:prstGeom prst="rect">
+            <a:avLst/>
+          </a:prstGeom>
+        </p:spPr>
+      </p:pic>
+      <p:sp>
+        <p:nvSpPr>
+          <p:cNvPr id="4" name="Text 1"/>
+          <p:cNvSpPr txBox="1"/>
+          <p:nvPr/>
+        </p:nvSpPr>
+        <p:spPr>
+          <a:xfrm>
+            <a:off x="548640" y="1600200"/>
+            <a:ext cx="8046720" cy="731520"/>
+          </a:xfrm>
+          <a:prstGeom prst="rect">
+            <a:avLst/>
+          </a:prstGeom>
+          <a:noFill/>
+          <a:ln/>
+        </p:spPr>
+        <p:txBody>
+          <a:bodyPr wrap="square" lIns="0" tIns="0" rIns="0" bIns="0" rtlCol="0" anchor="ctr"/>
+          <a:lstStyle/>
+          <a:p>
+            <a:pPr indent="0" marL="0">
+              <a:buNone/>
+            </a:pPr>
+            <a:r>
+              <a:rPr lang="en-US" sz="4000" b="1" dirty="0">
+                <a:solidFill>
+                  <a:srgbClr val="FFFFFF"/>
+                </a:solidFill>
+                <a:latin typeface="Inter" pitchFamily="34" charset="0"/>
+                <a:ea typeface="Inter" pitchFamily="34" charset="-122"/>
+                <a:cs typeface="Inter" pitchFamily="34" charset="-120"/>
+              </a:rPr>
+              <a:t>The detail</a:t>
+            </a:r>
+            <a:endParaRPr lang="en-US" sz="4000" dirty="0"/>
+          </a:p>
+        </p:txBody>
+      </p:sp>
+      <p:sp>
+        <p:nvSpPr>
+          <p:cNvPr id="5" name="Text 2"/>
+          <p:cNvSpPr txBox="1"/>
+          <p:nvPr/>
+        </p:nvSpPr>
+        <p:spPr>
+          <a:xfrm>
+            <a:off x="548640" y="2468880"/>
+            <a:ext cx="8046720" cy="1463040"/>
+          </a:xfrm>
+          <a:prstGeom prst="rect">
+            <a:avLst/>
+          </a:prstGeom>
+          <a:noFill/>
+          <a:ln/>
+        </p:spPr>
+        <p:txBody>
+          <a:bodyPr wrap="square" lIns="0" tIns="0" rIns="0" bIns="0" rtlCol="0" anchor="ctr"/>
+          <a:lstStyle/>
+          <a:p>
+            <a:pPr marL="342900" indent="-342900">
+              <a:spcAft>
+                <a:spcPts val="800"/>
+              </a:spcAft>
+              <a:buSzPct val="100000"/>
+              <a:buChar char="•"/>
+            </a:pPr>
+            <a:r>
+              <a:rPr lang="en-US" sz="1800" dirty="0">
+                <a:solidFill>
+                  <a:srgbClr val="FFFFFF"/>
+                </a:solidFill>
+                <a:latin typeface="Inter" pitchFamily="34" charset="0"/>
+                <a:ea typeface="Inter" pitchFamily="34" charset="-122"/>
+                <a:cs typeface="Inter" pitchFamily="34" charset="-120"/>
+              </a:rPr>
+              <a:t>Every week of the link, day by day</a:t>
+            </a:r>
+            <a:endParaRPr lang="en-US" sz="1800" dirty="0"/>
+          </a:p>
+          <a:p>
+            <a:pPr marL="342900" indent="-342900">
+              <a:spcAft>
+                <a:spcPts val="800"/>
+              </a:spcAft>
+              <a:buSzPct val="100000"/>
+              <a:buChar char="•"/>
+            </a:pPr>
+            <a:r>
+              <a:rPr lang="en-US" sz="1800" dirty="0">
+                <a:solidFill>
+                  <a:srgbClr val="FFFFFF"/>
+                </a:solidFill>
+                <a:latin typeface="Inter" pitchFamily="34" charset="0"/>
+                <a:ea typeface="Inter" pitchFamily="34" charset="-122"/>
+                <a:cs typeface="Inter" pitchFamily="34" charset="-120"/>
+              </a:rPr>
+              <a:t>Staff on duty hour by hour, against the trains</a:t>
+            </a:r>
+            <a:endParaRPr lang="en-US" sz="1800" dirty="0"/>
+          </a:p>
+          <a:p>
+            <a:pPr marL="342900" indent="-342900">
+              <a:spcAft>
+                <a:spcPts val="800"/>
+              </a:spcAft>
+              <a:buSzPct val="100000"/>
+              <a:buChar char="•"/>
+            </a:pPr>
+            <a:r>
+              <a:rPr lang="en-US" sz="1800" dirty="0">
+                <a:solidFill>
+                  <a:srgbClr val="FFFFFF"/>
+                </a:solidFill>
+                <a:latin typeface="Inter" pitchFamily="34" charset="0"/>
+                <a:ea typeface="Inter" pitchFamily="34" charset="-122"/>
+                <a:cs typeface="Inter" pitchFamily="34" charset="-120"/>
+              </a:rPr>
+              <a:t>Each staffing rule and each ORR factor, checked</a:t>
+            </a:r>
+            <a:endParaRPr lang="en-US" sz="1800" dirty="0"/>
+          </a:p>
+        </p:txBody>
+      </p:sp>
+      <p:sp>
+        <p:nvSpPr>
+          <p:cNvPr id="6" name="Text 3"/>
+          <p:cNvSpPr txBox="1"/>
+          <p:nvPr/>
+        </p:nvSpPr>
+        <p:spPr>
+          <a:xfrm>
+            <a:off x="548640" y="4343400"/>
+            <a:ext cx="8046720" cy="365760"/>
+          </a:xfrm>
+          <a:prstGeom prst="rect">
+            <a:avLst/>
+          </a:prstGeom>
+          <a:noFill/>
+          <a:ln/>
+        </p:spPr>
+        <p:txBody>
+          <a:bodyPr wrap="square" lIns="0" tIns="0" rIns="0" bIns="0" rtlCol="0" anchor="ctr"/>
+          <a:lstStyle/>
+          <a:p>
+            <a:pPr indent="0" marL="0">
+              <a:buNone/>
+            </a:pPr>
+            <a:r>
+              <a:rPr lang="en-US" sz="1300" dirty="0">
+                <a:solidFill>
+                  <a:srgbClr val="F5C800"/>
+                </a:solidFill>
+                <a:latin typeface="Inter" pitchFamily="34" charset="0"/>
+                <a:ea typeface="Inter" pitchFamily="34" charset="-122"/>
+                <a:cs typeface="Inter" pitchFamily="34" charset="-120"/>
+              </a:rPr>
+              <a:t>All in the ten-page proposal sheet · Familiar Nine · F9-24-K31</a:t>
+            </a:r>
+            <a:endParaRPr lang="en-US" sz="1300" dirty="0"/>
+          </a:p>
+        </p:txBody>
+      </p:sp>
+    </p:spTree>
+  </p:cSld>
+  <p:clrMapOvr>
+    <a:masterClrMapping/>
+  </p:clrMapOvr>
+</p:sld>
+</file>
+
 <file path=ppt/slides/slide2.xml><?xml version="1.0" encoding="utf-8"?>
 <p:sld xmlns:a="http://schemas.openxmlformats.org/drawingml/2006/main" xmlns:r="http://schemas.openxmlformats.org/officeDocument/2006/relationships" xmlns:p="http://schemas.openxmlformats.org/presentationml/2006/main">
   <p:cSld name="Slide 2">
@@ -2587,7 +2920,7 @@
                 <a:ea typeface="Inter" pitchFamily="34" charset="-122"/>
                 <a:cs typeface="Inter" pitchFamily="34" charset="-120"/>
               </a:rPr>
-              <a:t>fatigue warning signs</a:t>
+              <a:t>avoidable fatigue patterns</a:t>
             </a:r>
             <a:endParaRPr lang="en-US" sz="1500" dirty="0"/>
           </a:p>
@@ -2838,7 +3171,7 @@
                 <a:ea typeface="Inter" pitchFamily="34" charset="-122"/>
                 <a:cs typeface="Inter" pitchFamily="34" charset="-120"/>
               </a:rPr>
-              <a:t>Every staffing level you set, within the contract, with no fatigue warnings — on 24 people.</a:t>
+              <a:t>Every staffing level met, within the contract, with no avoidable fatigue patterns.</a:t>
             </a:r>
             <a:endParaRPr lang="en-US" sz="1400" dirty="0"/>
           </a:p>
@@ -4082,7 +4415,7 @@
                 <a:ea typeface="Inter" pitchFamily="34" charset="-122"/>
                 <a:cs typeface="Inter" pitchFamily="34" charset="-120"/>
               </a:rPr>
-              <a:t>Nearly twice as close to the timetable on weekdays; more than twice at weekends.</a:t>
+              <a:t>Staff are where the trains are — much closer to the December pattern, every day.</a:t>
             </a:r>
             <a:endParaRPr lang="en-US" sz="1400" dirty="0"/>
           </a:p>
@@ -4091,6 +4424,45 @@
       <p:sp>
         <p:nvSpPr>
           <p:cNvPr id="7" name="Text 4"/>
+          <p:cNvSpPr txBox="1"/>
+          <p:nvPr/>
+        </p:nvSpPr>
+        <p:spPr>
+          <a:xfrm>
+            <a:off x="4023360" y="4754880"/>
+            <a:ext cx="4663440" cy="310896"/>
+          </a:xfrm>
+          <a:prstGeom prst="rect">
+            <a:avLst/>
+          </a:prstGeom>
+          <a:noFill/>
+          <a:ln/>
+        </p:spPr>
+        <p:txBody>
+          <a:bodyPr wrap="square" lIns="0" tIns="0" rIns="0" bIns="0" rtlCol="0" anchor="t"/>
+          <a:lstStyle/>
+          <a:p>
+            <a:pPr algn="r" indent="0" marL="0">
+              <a:buNone/>
+            </a:pPr>
+            <a:r>
+              <a:rPr lang="en-US" sz="850" i="1" dirty="0">
+                <a:solidFill>
+                  <a:srgbClr val="5B6778"/>
+                </a:solidFill>
+                <a:latin typeface="Inter" pitchFamily="34" charset="0"/>
+                <a:ea typeface="Inter" pitchFamily="34" charset="-122"/>
+                <a:cs typeface="Inter" pitchFamily="34" charset="-120"/>
+              </a:rPr>
+              <a:t>A measure of the day’s shape only — not a staffing requirement or a passenger forecast.</a:t>
+            </a:r>
+            <a:endParaRPr lang="en-US" sz="850" dirty="0"/>
+          </a:p>
+        </p:txBody>
+      </p:sp>
+      <p:sp>
+        <p:nvSpPr>
+          <p:cNvPr id="8" name="Text 5"/>
           <p:cNvSpPr txBox="1"/>
           <p:nvPr/>
         </p:nvSpPr>
@@ -4192,7 +4564,7 @@
                 <a:ea typeface="Inter" pitchFamily="34" charset="-122"/>
                 <a:cs typeface="Inter" pitchFamily="34" charset="-120"/>
               </a:rPr>
-              <a:t>People and cost</a:t>
+              <a:t>People and hours</a:t>
             </a:r>
             <a:endParaRPr lang="en-US" sz="3000" dirty="0"/>
           </a:p>
@@ -5061,7 +5433,7 @@
                 <a:ea typeface="Inter" pitchFamily="34" charset="-122"/>
                 <a:cs typeface="Inter" pitchFamily="34" charset="-120"/>
               </a:rPr>
-              <a:t>Fatigue and safety</a:t>
+              <a:t>Fatigue checks</a:t>
             </a:r>
             <a:endParaRPr lang="en-US" sz="3000" dirty="0"/>
           </a:p>
@@ -5244,7 +5616,7 @@
                 <a:ea typeface="Inter" pitchFamily="34" charset="-122"/>
                 <a:cs typeface="Inter" pitchFamily="34" charset="-120"/>
               </a:rPr>
-              <a:t>ORR fatigue warning signs in the design</a:t>
+              <a:t>Avoidable fatigue patterns (ORR list)</a:t>
             </a:r>
             <a:endParaRPr lang="en-US" sz="1400" dirty="0"/>
           </a:p>
@@ -5388,7 +5760,7 @@
                 <a:ea typeface="Inter" pitchFamily="34" charset="-122"/>
                 <a:cs typeface="Inter" pitchFamily="34" charset="-120"/>
               </a:rPr>
-              <a:t>Most days worked in a row (limit 13)</a:t>
+              <a:t>Most days in a row (limit 13, source to confirm)</a:t>
             </a:r>
             <a:endParaRPr lang="en-US" sz="1400" dirty="0"/>
           </a:p>
@@ -5820,7 +6192,7 @@
                 <a:ea typeface="Inter" pitchFamily="34" charset="-122"/>
                 <a:cs typeface="Inter" pitchFamily="34" charset="-120"/>
               </a:rPr>
-              <a:t>Every limit met with room to spare, and none of the ORR’s warning signs.</a:t>
+              <a:t>Every limit met with room to spare, and no avoidable fatigue patterns.</a:t>
             </a:r>
             <a:endParaRPr lang="en-US" sz="1400" dirty="0"/>
           </a:p>
@@ -5829,6 +6201,45 @@
       <p:sp>
         <p:nvSpPr>
           <p:cNvPr id="24" name="Text 22"/>
+          <p:cNvSpPr txBox="1"/>
+          <p:nvPr/>
+        </p:nvSpPr>
+        <p:spPr>
+          <a:xfrm>
+            <a:off x="4023360" y="4754880"/>
+            <a:ext cx="4663440" cy="310896"/>
+          </a:xfrm>
+          <a:prstGeom prst="rect">
+            <a:avLst/>
+          </a:prstGeom>
+          <a:noFill/>
+          <a:ln/>
+        </p:spPr>
+        <p:txBody>
+          <a:bodyPr wrap="square" lIns="0" tIns="0" rIns="0" bIns="0" rtlCol="0" anchor="t"/>
+          <a:lstStyle/>
+          <a:p>
+            <a:pPr algn="r" indent="0" marL="0">
+              <a:buNone/>
+            </a:pPr>
+            <a:r>
+              <a:rPr lang="en-US" sz="850" i="1" dirty="0">
+                <a:solidFill>
+                  <a:srgbClr val="5B6778"/>
+                </a:solidFill>
+                <a:latin typeface="Inter" pitchFamily="34" charset="0"/>
+                <a:ea typeface="Inter" pitchFamily="34" charset="-122"/>
+                <a:cs typeface="Inter" pitchFamily="34" charset="-120"/>
+              </a:rPr>
+              <a:t>Early starts and a weekly rotation come with every link, so are not counted.</a:t>
+            </a:r>
+            <a:endParaRPr lang="en-US" sz="850" dirty="0"/>
+          </a:p>
+        </p:txBody>
+      </p:sp>
+      <p:sp>
+        <p:nvSpPr>
+          <p:cNvPr id="25" name="Text 23"/>
           <p:cNvSpPr txBox="1"/>
           <p:nvPr/>
         </p:nvSpPr>
@@ -5930,7 +6341,7 @@
                 <a:ea typeface="Inter" pitchFamily="34" charset="-122"/>
                 <a:cs typeface="Inter" pitchFamily="34" charset="-120"/>
               </a:rPr>
-              <a:t>Will staff accept it?</a:t>
+              <a:t>Why Familiar Nine?</a:t>
             </a:r>
             <a:endParaRPr lang="en-US" sz="3000" dirty="0"/>
           </a:p>
@@ -5969,7 +6380,7 @@
                 <a:ea typeface="Inter" pitchFamily="34" charset="-122"/>
                 <a:cs typeface="Inter" pitchFamily="34" charset="-120"/>
               </a:rPr>
-              <a:t>The things colleagues ask first</a:t>
+              <a:t>It meets the brief and keeps as much of today as it can</a:t>
             </a:r>
             <a:endParaRPr lang="en-US" sz="1500" dirty="0"/>
           </a:p>
@@ -5977,104 +6388,24 @@
       </p:sp>
       <p:sp>
         <p:nvSpPr>
-          <p:cNvPr id="4" name="Text 2"/>
-          <p:cNvSpPr txBox="1"/>
-          <p:nvPr/>
-        </p:nvSpPr>
-        <p:spPr>
-          <a:xfrm>
-            <a:off x="4297680" y="1417320"/>
-            <a:ext cx="2194560" cy="320040"/>
-          </a:xfrm>
-          <a:prstGeom prst="rect">
-            <a:avLst/>
-          </a:prstGeom>
-          <a:noFill/>
-          <a:ln/>
-        </p:spPr>
-        <p:txBody>
-          <a:bodyPr wrap="square" lIns="0" tIns="0" rIns="0" bIns="0" rtlCol="0" anchor="ctr"/>
-          <a:lstStyle/>
-          <a:p>
-            <a:pPr algn="ctr" indent="0" marL="0">
-              <a:buNone/>
-            </a:pPr>
-            <a:r>
-              <a:rPr lang="en-US" sz="1300" b="1" dirty="0">
-                <a:solidFill>
-                  <a:srgbClr val="5B6778"/>
-                </a:solidFill>
-                <a:latin typeface="Inter" pitchFamily="34" charset="0"/>
-                <a:ea typeface="Inter" pitchFamily="34" charset="-122"/>
-                <a:cs typeface="Inter" pitchFamily="34" charset="-120"/>
-              </a:rPr>
-              <a:t>Today</a:t>
-            </a:r>
-            <a:endParaRPr lang="en-US" sz="1300" dirty="0"/>
-          </a:p>
-        </p:txBody>
-      </p:sp>
-      <p:sp>
-        <p:nvSpPr>
-          <p:cNvPr id="5" name="Text 3"/>
-          <p:cNvSpPr txBox="1"/>
-          <p:nvPr/>
-        </p:nvSpPr>
-        <p:spPr>
-          <a:xfrm>
-            <a:off x="6492240" y="1417320"/>
-            <a:ext cx="2194560" cy="320040"/>
-          </a:xfrm>
-          <a:prstGeom prst="rect">
-            <a:avLst/>
-          </a:prstGeom>
-          <a:noFill/>
-          <a:ln/>
-        </p:spPr>
-        <p:txBody>
-          <a:bodyPr wrap="square" lIns="0" tIns="0" rIns="0" bIns="0" rtlCol="0" anchor="ctr"/>
-          <a:lstStyle/>
-          <a:p>
-            <a:pPr algn="ctr" indent="0" marL="0">
-              <a:buNone/>
-            </a:pPr>
-            <a:r>
-              <a:rPr lang="en-US" sz="1300" b="1" dirty="0">
-                <a:solidFill>
-                  <a:srgbClr val="001E3C"/>
-                </a:solidFill>
-                <a:latin typeface="Inter" pitchFamily="34" charset="0"/>
-                <a:ea typeface="Inter" pitchFamily="34" charset="-122"/>
-                <a:cs typeface="Inter" pitchFamily="34" charset="-120"/>
-              </a:rPr>
-              <a:t>Familiar Nine</a:t>
-            </a:r>
-            <a:endParaRPr lang="en-US" sz="1300" dirty="0"/>
-          </a:p>
-        </p:txBody>
-      </p:sp>
-      <p:sp>
-        <p:nvSpPr>
-          <p:cNvPr id="6" name="Shape 4"/>
+          <p:cNvPr id="4" name="Shape 2"/>
           <p:cNvSpPr/>
           <p:nvPr/>
         </p:nvSpPr>
         <p:spPr>
           <a:xfrm>
-            <a:off x="457200" y="1801368"/>
-            <a:ext cx="8229600" cy="301752"/>
-          </a:xfrm>
-          <a:prstGeom prst="roundRect">
-            <a:avLst>
-              <a:gd name="adj" fmla="val 18182"/>
-            </a:avLst>
+            <a:off x="457200" y="1325880"/>
+            <a:ext cx="292608" cy="292608"/>
+          </a:xfrm>
+          <a:prstGeom prst="ellipse">
+            <a:avLst/>
           </a:prstGeom>
           <a:solidFill>
-            <a:srgbClr val="EEF2F7"/>
+            <a:srgbClr val="1E7B4B"/>
           </a:solidFill>
           <a:ln w="12700">
             <a:solidFill>
-              <a:srgbClr val="EEF2F7"/>
+              <a:srgbClr val="1E7B4B"/>
             </a:solidFill>
             <a:prstDash val="solid"/>
           </a:ln>
@@ -6082,14 +6413,53 @@
       </p:sp>
       <p:sp>
         <p:nvSpPr>
-          <p:cNvPr id="7" name="Text 5"/>
-          <p:cNvSpPr txBox="1"/>
-          <p:nvPr/>
-        </p:nvSpPr>
-        <p:spPr>
-          <a:xfrm>
-            <a:off x="640080" y="1801368"/>
-            <a:ext cx="3657600" cy="301752"/>
+          <p:cNvPr id="5" name="Text 3"/>
+          <p:cNvSpPr txBox="1"/>
+          <p:nvPr/>
+        </p:nvSpPr>
+        <p:spPr>
+          <a:xfrm>
+            <a:off x="457200" y="1325880"/>
+            <a:ext cx="292608" cy="292608"/>
+          </a:xfrm>
+          <a:prstGeom prst="rect">
+            <a:avLst/>
+          </a:prstGeom>
+          <a:noFill/>
+          <a:ln/>
+        </p:spPr>
+        <p:txBody>
+          <a:bodyPr wrap="square" lIns="0" tIns="0" rIns="0" bIns="0" rtlCol="0" anchor="ctr"/>
+          <a:lstStyle/>
+          <a:p>
+            <a:pPr algn="ctr" indent="0" marL="0">
+              <a:buNone/>
+            </a:pPr>
+            <a:r>
+              <a:rPr lang="en-US" sz="1200" b="1" dirty="0">
+                <a:solidFill>
+                  <a:srgbClr val="FFFFFF"/>
+                </a:solidFill>
+                <a:latin typeface="Inter" pitchFamily="34" charset="0"/>
+                <a:ea typeface="Inter" pitchFamily="34" charset="-122"/>
+                <a:cs typeface="Inter" pitchFamily="34" charset="-120"/>
+              </a:rPr>
+              <a:t>✓</a:t>
+            </a:r>
+            <a:endParaRPr lang="en-US" sz="1200" dirty="0"/>
+          </a:p>
+        </p:txBody>
+      </p:sp>
+      <p:sp>
+        <p:nvSpPr>
+          <p:cNvPr id="6" name="Text 4"/>
+          <p:cNvSpPr txBox="1"/>
+          <p:nvPr/>
+        </p:nvSpPr>
+        <p:spPr>
+          <a:xfrm>
+            <a:off x="914400" y="1307592"/>
+            <a:ext cx="7772400" cy="329184"/>
           </a:xfrm>
           <a:prstGeom prst="rect">
             <a:avLst/>
@@ -6105,7 +6475,7 @@
               <a:buNone/>
             </a:pPr>
             <a:r>
-              <a:rPr lang="en-US" sz="1400" dirty="0">
+              <a:rPr lang="en-US" sz="1500" dirty="0">
                 <a:solidFill>
                   <a:srgbClr val="1B2533"/>
                 </a:solidFill>
@@ -6113,112 +6483,32 @@
                 <a:ea typeface="Inter" pitchFamily="34" charset="-122"/>
                 <a:cs typeface="Inter" pitchFamily="34" charset="-120"/>
               </a:rPr>
-              <a:t>Shift times people already work</a:t>
-            </a:r>
-            <a:endParaRPr lang="en-US" sz="1400" dirty="0"/>
-          </a:p>
-        </p:txBody>
-      </p:sp>
-      <p:sp>
-        <p:nvSpPr>
-          <p:cNvPr id="8" name="Text 6"/>
-          <p:cNvSpPr txBox="1"/>
-          <p:nvPr/>
-        </p:nvSpPr>
-        <p:spPr>
-          <a:xfrm>
-            <a:off x="4297680" y="1801368"/>
-            <a:ext cx="2194560" cy="301752"/>
-          </a:xfrm>
-          <a:prstGeom prst="rect">
-            <a:avLst/>
-          </a:prstGeom>
-          <a:noFill/>
-          <a:ln/>
-        </p:spPr>
-        <p:txBody>
-          <a:bodyPr wrap="square" lIns="0" tIns="0" rIns="0" bIns="0" rtlCol="0" anchor="ctr"/>
-          <a:lstStyle/>
-          <a:p>
-            <a:pPr algn="ctr" indent="0" marL="0">
-              <a:buNone/>
-            </a:pPr>
-            <a:r>
-              <a:rPr lang="en-US" sz="1600" dirty="0">
-                <a:solidFill>
-                  <a:srgbClr val="5B6778"/>
-                </a:solidFill>
-                <a:latin typeface="Inter" pitchFamily="34" charset="0"/>
-                <a:ea typeface="Inter" pitchFamily="34" charset="-122"/>
-                <a:cs typeface="Inter" pitchFamily="34" charset="-120"/>
-              </a:rPr>
-              <a:t>—</a:t>
-            </a:r>
-            <a:endParaRPr lang="en-US" sz="1600" dirty="0"/>
-          </a:p>
-        </p:txBody>
-      </p:sp>
-      <p:sp>
-        <p:nvSpPr>
-          <p:cNvPr id="9" name="Text 7"/>
-          <p:cNvSpPr txBox="1"/>
-          <p:nvPr/>
-        </p:nvSpPr>
-        <p:spPr>
-          <a:xfrm>
-            <a:off x="6492240" y="1801368"/>
-            <a:ext cx="2194560" cy="301752"/>
-          </a:xfrm>
-          <a:prstGeom prst="rect">
-            <a:avLst/>
-          </a:prstGeom>
-          <a:noFill/>
-          <a:ln/>
-        </p:spPr>
-        <p:txBody>
-          <a:bodyPr wrap="square" lIns="0" tIns="0" rIns="0" bIns="0" rtlCol="0" anchor="ctr"/>
-          <a:lstStyle/>
-          <a:p>
-            <a:pPr algn="ctr" indent="0" marL="0">
-              <a:buNone/>
-            </a:pPr>
-            <a:r>
-              <a:rPr lang="en-US" sz="1800" b="1" dirty="0">
-                <a:solidFill>
-                  <a:srgbClr val="1E7B4B"/>
-                </a:solidFill>
-                <a:latin typeface="Inter" pitchFamily="34" charset="0"/>
-                <a:ea typeface="Inter" pitchFamily="34" charset="-122"/>
-                <a:cs typeface="Inter" pitchFamily="34" charset="-120"/>
-              </a:rPr>
-              <a:t>9 of 15</a:t>
-            </a:r>
-            <a:endParaRPr lang="en-US" sz="1800" dirty="0"/>
-          </a:p>
-        </p:txBody>
-      </p:sp>
-      <p:sp>
-        <p:nvSpPr>
-          <p:cNvPr id="10" name="Shape 8"/>
+              <a:t>Meets all 11 December staffing rules</a:t>
+            </a:r>
+            <a:endParaRPr lang="en-US" sz="1500" dirty="0"/>
+          </a:p>
+        </p:txBody>
+      </p:sp>
+      <p:sp>
+        <p:nvSpPr>
+          <p:cNvPr id="7" name="Shape 5"/>
           <p:cNvSpPr/>
           <p:nvPr/>
         </p:nvSpPr>
         <p:spPr>
           <a:xfrm>
-            <a:off x="457200" y="2194560"/>
-            <a:ext cx="8229600" cy="301752"/>
-          </a:xfrm>
-          <a:prstGeom prst="roundRect">
-            <a:avLst>
-              <a:gd name="adj" fmla="val 18182"/>
-            </a:avLst>
+            <a:off x="457200" y="1728216"/>
+            <a:ext cx="292608" cy="292608"/>
+          </a:xfrm>
+          <a:prstGeom prst="ellipse">
+            <a:avLst/>
           </a:prstGeom>
           <a:solidFill>
-            <a:srgbClr val="FFFFFF"/>
+            <a:srgbClr val="1E7B4B"/>
           </a:solidFill>
           <a:ln w="12700">
             <a:solidFill>
-              <a:srgbClr val="DDE3EA"/>
+              <a:srgbClr val="1E7B4B"/>
             </a:solidFill>
             <a:prstDash val="solid"/>
           </a:ln>
@@ -6226,14 +6516,53 @@
       </p:sp>
       <p:sp>
         <p:nvSpPr>
-          <p:cNvPr id="11" name="Text 9"/>
-          <p:cNvSpPr txBox="1"/>
-          <p:nvPr/>
-        </p:nvSpPr>
-        <p:spPr>
-          <a:xfrm>
-            <a:off x="640080" y="2194560"/>
-            <a:ext cx="3657600" cy="301752"/>
+          <p:cNvPr id="8" name="Text 6"/>
+          <p:cNvSpPr txBox="1"/>
+          <p:nvPr/>
+        </p:nvSpPr>
+        <p:spPr>
+          <a:xfrm>
+            <a:off x="457200" y="1728216"/>
+            <a:ext cx="292608" cy="292608"/>
+          </a:xfrm>
+          <a:prstGeom prst="rect">
+            <a:avLst/>
+          </a:prstGeom>
+          <a:noFill/>
+          <a:ln/>
+        </p:spPr>
+        <p:txBody>
+          <a:bodyPr wrap="square" lIns="0" tIns="0" rIns="0" bIns="0" rtlCol="0" anchor="ctr"/>
+          <a:lstStyle/>
+          <a:p>
+            <a:pPr algn="ctr" indent="0" marL="0">
+              <a:buNone/>
+            </a:pPr>
+            <a:r>
+              <a:rPr lang="en-US" sz="1200" b="1" dirty="0">
+                <a:solidFill>
+                  <a:srgbClr val="FFFFFF"/>
+                </a:solidFill>
+                <a:latin typeface="Inter" pitchFamily="34" charset="0"/>
+                <a:ea typeface="Inter" pitchFamily="34" charset="-122"/>
+                <a:cs typeface="Inter" pitchFamily="34" charset="-120"/>
+              </a:rPr>
+              <a:t>✓</a:t>
+            </a:r>
+            <a:endParaRPr lang="en-US" sz="1200" dirty="0"/>
+          </a:p>
+        </p:txBody>
+      </p:sp>
+      <p:sp>
+        <p:nvSpPr>
+          <p:cNvPr id="9" name="Text 7"/>
+          <p:cNvSpPr txBox="1"/>
+          <p:nvPr/>
+        </p:nvSpPr>
+        <p:spPr>
+          <a:xfrm>
+            <a:off x="914400" y="1709928"/>
+            <a:ext cx="7772400" cy="329184"/>
           </a:xfrm>
           <a:prstGeom prst="rect">
             <a:avLst/>
@@ -6249,7 +6578,7 @@
               <a:buNone/>
             </a:pPr>
             <a:r>
-              <a:rPr lang="en-US" sz="1400" dirty="0">
+              <a:rPr lang="en-US" sz="1500" dirty="0">
                 <a:solidFill>
                   <a:srgbClr val="1B2533"/>
                 </a:solidFill>
@@ -6257,112 +6586,32 @@
                 <a:ea typeface="Inter" pitchFamily="34" charset="-122"/>
                 <a:cs typeface="Inter" pitchFamily="34" charset="-120"/>
               </a:rPr>
-              <a:t>Full weekends off</a:t>
-            </a:r>
-            <a:endParaRPr lang="en-US" sz="1400" dirty="0"/>
-          </a:p>
-        </p:txBody>
-      </p:sp>
-      <p:sp>
-        <p:nvSpPr>
-          <p:cNvPr id="12" name="Text 10"/>
-          <p:cNvSpPr txBox="1"/>
-          <p:nvPr/>
-        </p:nvSpPr>
-        <p:spPr>
-          <a:xfrm>
-            <a:off x="4297680" y="2194560"/>
-            <a:ext cx="2194560" cy="301752"/>
-          </a:xfrm>
-          <a:prstGeom prst="rect">
-            <a:avLst/>
-          </a:prstGeom>
-          <a:noFill/>
-          <a:ln/>
-        </p:spPr>
-        <p:txBody>
-          <a:bodyPr wrap="square" lIns="0" tIns="0" rIns="0" bIns="0" rtlCol="0" anchor="ctr"/>
-          <a:lstStyle/>
-          <a:p>
-            <a:pPr algn="ctr" indent="0" marL="0">
-              <a:buNone/>
-            </a:pPr>
-            <a:r>
-              <a:rPr lang="en-US" sz="1600" dirty="0">
-                <a:solidFill>
-                  <a:srgbClr val="5B6778"/>
-                </a:solidFill>
-                <a:latin typeface="Inter" pitchFamily="34" charset="0"/>
-                <a:ea typeface="Inter" pitchFamily="34" charset="-122"/>
-                <a:cs typeface="Inter" pitchFamily="34" charset="-120"/>
-              </a:rPr>
-              <a:t>4 in 20</a:t>
-            </a:r>
-            <a:endParaRPr lang="en-US" sz="1600" dirty="0"/>
-          </a:p>
-        </p:txBody>
-      </p:sp>
-      <p:sp>
-        <p:nvSpPr>
-          <p:cNvPr id="13" name="Text 11"/>
-          <p:cNvSpPr txBox="1"/>
-          <p:nvPr/>
-        </p:nvSpPr>
-        <p:spPr>
-          <a:xfrm>
-            <a:off x="6492240" y="2194560"/>
-            <a:ext cx="2194560" cy="301752"/>
-          </a:xfrm>
-          <a:prstGeom prst="rect">
-            <a:avLst/>
-          </a:prstGeom>
-          <a:noFill/>
-          <a:ln/>
-        </p:spPr>
-        <p:txBody>
-          <a:bodyPr wrap="square" lIns="0" tIns="0" rIns="0" bIns="0" rtlCol="0" anchor="ctr"/>
-          <a:lstStyle/>
-          <a:p>
-            <a:pPr algn="ctr" indent="0" marL="0">
-              <a:buNone/>
-            </a:pPr>
-            <a:r>
-              <a:rPr lang="en-US" sz="1800" b="1" dirty="0">
-                <a:solidFill>
-                  <a:srgbClr val="1E7B4B"/>
-                </a:solidFill>
-                <a:latin typeface="Inter" pitchFamily="34" charset="0"/>
-                <a:ea typeface="Inter" pitchFamily="34" charset="-122"/>
-                <a:cs typeface="Inter" pitchFamily="34" charset="-120"/>
-              </a:rPr>
-              <a:t>6 in 24</a:t>
-            </a:r>
-            <a:endParaRPr lang="en-US" sz="1800" dirty="0"/>
-          </a:p>
-        </p:txBody>
-      </p:sp>
-      <p:sp>
-        <p:nvSpPr>
-          <p:cNvPr id="14" name="Shape 12"/>
+              <a:t>A full weekend off one week in four — today one in five</a:t>
+            </a:r>
+            <a:endParaRPr lang="en-US" sz="1500" dirty="0"/>
+          </a:p>
+        </p:txBody>
+      </p:sp>
+      <p:sp>
+        <p:nvSpPr>
+          <p:cNvPr id="10" name="Shape 8"/>
           <p:cNvSpPr/>
           <p:nvPr/>
         </p:nvSpPr>
         <p:spPr>
           <a:xfrm>
-            <a:off x="457200" y="2587752"/>
-            <a:ext cx="8229600" cy="301752"/>
-          </a:xfrm>
-          <a:prstGeom prst="roundRect">
-            <a:avLst>
-              <a:gd name="adj" fmla="val 18182"/>
-            </a:avLst>
+            <a:off x="457200" y="2130552"/>
+            <a:ext cx="292608" cy="292608"/>
+          </a:xfrm>
+          <a:prstGeom prst="ellipse">
+            <a:avLst/>
           </a:prstGeom>
           <a:solidFill>
-            <a:srgbClr val="EEF2F7"/>
+            <a:srgbClr val="1E7B4B"/>
           </a:solidFill>
           <a:ln w="12700">
             <a:solidFill>
-              <a:srgbClr val="EEF2F7"/>
+              <a:srgbClr val="1E7B4B"/>
             </a:solidFill>
             <a:prstDash val="solid"/>
           </a:ln>
@@ -6370,14 +6619,53 @@
       </p:sp>
       <p:sp>
         <p:nvSpPr>
-          <p:cNvPr id="15" name="Text 13"/>
-          <p:cNvSpPr txBox="1"/>
-          <p:nvPr/>
-        </p:nvSpPr>
-        <p:spPr>
-          <a:xfrm>
-            <a:off x="640080" y="2587752"/>
-            <a:ext cx="3657600" cy="301752"/>
+          <p:cNvPr id="11" name="Text 9"/>
+          <p:cNvSpPr txBox="1"/>
+          <p:nvPr/>
+        </p:nvSpPr>
+        <p:spPr>
+          <a:xfrm>
+            <a:off x="457200" y="2130552"/>
+            <a:ext cx="292608" cy="292608"/>
+          </a:xfrm>
+          <a:prstGeom prst="rect">
+            <a:avLst/>
+          </a:prstGeom>
+          <a:noFill/>
+          <a:ln/>
+        </p:spPr>
+        <p:txBody>
+          <a:bodyPr wrap="square" lIns="0" tIns="0" rIns="0" bIns="0" rtlCol="0" anchor="ctr"/>
+          <a:lstStyle/>
+          <a:p>
+            <a:pPr algn="ctr" indent="0" marL="0">
+              <a:buNone/>
+            </a:pPr>
+            <a:r>
+              <a:rPr lang="en-US" sz="1200" b="1" dirty="0">
+                <a:solidFill>
+                  <a:srgbClr val="FFFFFF"/>
+                </a:solidFill>
+                <a:latin typeface="Inter" pitchFamily="34" charset="0"/>
+                <a:ea typeface="Inter" pitchFamily="34" charset="-122"/>
+                <a:cs typeface="Inter" pitchFamily="34" charset="-120"/>
+              </a:rPr>
+              <a:t>✓</a:t>
+            </a:r>
+            <a:endParaRPr lang="en-US" sz="1200" dirty="0"/>
+          </a:p>
+        </p:txBody>
+      </p:sp>
+      <p:sp>
+        <p:nvSpPr>
+          <p:cNvPr id="12" name="Text 10"/>
+          <p:cNvSpPr txBox="1"/>
+          <p:nvPr/>
+        </p:nvSpPr>
+        <p:spPr>
+          <a:xfrm>
+            <a:off x="914400" y="2112264"/>
+            <a:ext cx="7772400" cy="329184"/>
           </a:xfrm>
           <a:prstGeom prst="rect">
             <a:avLst/>
@@ -6393,7 +6681,7 @@
               <a:buNone/>
             </a:pPr>
             <a:r>
-              <a:rPr lang="en-US" sz="1400" dirty="0">
+              <a:rPr lang="en-US" sz="1500" dirty="0">
                 <a:solidFill>
                   <a:srgbClr val="1B2533"/>
                 </a:solidFill>
@@ -6401,112 +6689,32 @@
                 <a:ea typeface="Inter" pitchFamily="34" charset="-122"/>
                 <a:cs typeface="Inter" pitchFamily="34" charset="-120"/>
               </a:rPr>
-              <a:t>Days at work a year</a:t>
-            </a:r>
-            <a:endParaRPr lang="en-US" sz="1400" dirty="0"/>
-          </a:p>
-        </p:txBody>
-      </p:sp>
-      <p:sp>
-        <p:nvSpPr>
-          <p:cNvPr id="16" name="Text 14"/>
-          <p:cNvSpPr txBox="1"/>
-          <p:nvPr/>
-        </p:nvSpPr>
-        <p:spPr>
-          <a:xfrm>
-            <a:off x="4297680" y="2587752"/>
-            <a:ext cx="2194560" cy="301752"/>
-          </a:xfrm>
-          <a:prstGeom prst="rect">
-            <a:avLst/>
-          </a:prstGeom>
-          <a:noFill/>
-          <a:ln/>
-        </p:spPr>
-        <p:txBody>
-          <a:bodyPr wrap="square" lIns="0" tIns="0" rIns="0" bIns="0" rtlCol="0" anchor="ctr"/>
-          <a:lstStyle/>
-          <a:p>
-            <a:pPr algn="ctr" indent="0" marL="0">
-              <a:buNone/>
-            </a:pPr>
-            <a:r>
-              <a:rPr lang="en-US" sz="1600" dirty="0">
-                <a:solidFill>
-                  <a:srgbClr val="5B6778"/>
-                </a:solidFill>
-                <a:latin typeface="Inter" pitchFamily="34" charset="0"/>
-                <a:ea typeface="Inter" pitchFamily="34" charset="-122"/>
-                <a:cs typeface="Inter" pitchFamily="34" charset="-120"/>
-              </a:rPr>
-              <a:t>219</a:t>
-            </a:r>
-            <a:endParaRPr lang="en-US" sz="1600" dirty="0"/>
-          </a:p>
-        </p:txBody>
-      </p:sp>
-      <p:sp>
-        <p:nvSpPr>
-          <p:cNvPr id="17" name="Text 15"/>
-          <p:cNvSpPr txBox="1"/>
-          <p:nvPr/>
-        </p:nvSpPr>
-        <p:spPr>
-          <a:xfrm>
-            <a:off x="6492240" y="2587752"/>
-            <a:ext cx="2194560" cy="301752"/>
-          </a:xfrm>
-          <a:prstGeom prst="rect">
-            <a:avLst/>
-          </a:prstGeom>
-          <a:noFill/>
-          <a:ln/>
-        </p:spPr>
-        <p:txBody>
-          <a:bodyPr wrap="square" lIns="0" tIns="0" rIns="0" bIns="0" rtlCol="0" anchor="ctr"/>
-          <a:lstStyle/>
-          <a:p>
-            <a:pPr algn="ctr" indent="0" marL="0">
-              <a:buNone/>
-            </a:pPr>
-            <a:r>
-              <a:rPr lang="en-US" sz="1800" b="1" dirty="0">
-                <a:solidFill>
-                  <a:srgbClr val="1E7B4B"/>
-                </a:solidFill>
-                <a:latin typeface="Inter" pitchFamily="34" charset="0"/>
-                <a:ea typeface="Inter" pitchFamily="34" charset="-122"/>
-                <a:cs typeface="Inter" pitchFamily="34" charset="-120"/>
-              </a:rPr>
-              <a:t>217</a:t>
-            </a:r>
-            <a:endParaRPr lang="en-US" sz="1800" dirty="0"/>
-          </a:p>
-        </p:txBody>
-      </p:sp>
-      <p:sp>
-        <p:nvSpPr>
-          <p:cNvPr id="18" name="Shape 16"/>
+              <a:t>Never more than 6 days in a row — today 9</a:t>
+            </a:r>
+            <a:endParaRPr lang="en-US" sz="1500" dirty="0"/>
+          </a:p>
+        </p:txBody>
+      </p:sp>
+      <p:sp>
+        <p:nvSpPr>
+          <p:cNvPr id="13" name="Shape 11"/>
           <p:cNvSpPr/>
           <p:nvPr/>
         </p:nvSpPr>
         <p:spPr>
           <a:xfrm>
-            <a:off x="457200" y="2980944"/>
-            <a:ext cx="8229600" cy="301752"/>
-          </a:xfrm>
-          <a:prstGeom prst="roundRect">
-            <a:avLst>
-              <a:gd name="adj" fmla="val 18182"/>
-            </a:avLst>
+            <a:off x="457200" y="2532888"/>
+            <a:ext cx="292608" cy="292608"/>
+          </a:xfrm>
+          <a:prstGeom prst="ellipse">
+            <a:avLst/>
           </a:prstGeom>
           <a:solidFill>
-            <a:srgbClr val="FFFFFF"/>
+            <a:srgbClr val="1E7B4B"/>
           </a:solidFill>
           <a:ln w="12700">
             <a:solidFill>
-              <a:srgbClr val="DDE3EA"/>
+              <a:srgbClr val="1E7B4B"/>
             </a:solidFill>
             <a:prstDash val="solid"/>
           </a:ln>
@@ -6514,14 +6722,53 @@
       </p:sp>
       <p:sp>
         <p:nvSpPr>
-          <p:cNvPr id="19" name="Text 17"/>
-          <p:cNvSpPr txBox="1"/>
-          <p:nvPr/>
-        </p:nvSpPr>
-        <p:spPr>
-          <a:xfrm>
-            <a:off x="640080" y="2980944"/>
-            <a:ext cx="3657600" cy="301752"/>
+          <p:cNvPr id="14" name="Text 12"/>
+          <p:cNvSpPr txBox="1"/>
+          <p:nvPr/>
+        </p:nvSpPr>
+        <p:spPr>
+          <a:xfrm>
+            <a:off x="457200" y="2532888"/>
+            <a:ext cx="292608" cy="292608"/>
+          </a:xfrm>
+          <a:prstGeom prst="rect">
+            <a:avLst/>
+          </a:prstGeom>
+          <a:noFill/>
+          <a:ln/>
+        </p:spPr>
+        <p:txBody>
+          <a:bodyPr wrap="square" lIns="0" tIns="0" rIns="0" bIns="0" rtlCol="0" anchor="ctr"/>
+          <a:lstStyle/>
+          <a:p>
+            <a:pPr algn="ctr" indent="0" marL="0">
+              <a:buNone/>
+            </a:pPr>
+            <a:r>
+              <a:rPr lang="en-US" sz="1200" b="1" dirty="0">
+                <a:solidFill>
+                  <a:srgbClr val="FFFFFF"/>
+                </a:solidFill>
+                <a:latin typeface="Inter" pitchFamily="34" charset="0"/>
+                <a:ea typeface="Inter" pitchFamily="34" charset="-122"/>
+                <a:cs typeface="Inter" pitchFamily="34" charset="-120"/>
+              </a:rPr>
+              <a:t>✓</a:t>
+            </a:r>
+            <a:endParaRPr lang="en-US" sz="1200" dirty="0"/>
+          </a:p>
+        </p:txBody>
+      </p:sp>
+      <p:sp>
+        <p:nvSpPr>
+          <p:cNvPr id="15" name="Text 13"/>
+          <p:cNvSpPr txBox="1"/>
+          <p:nvPr/>
+        </p:nvSpPr>
+        <p:spPr>
+          <a:xfrm>
+            <a:off x="914400" y="2514600"/>
+            <a:ext cx="7772400" cy="329184"/>
           </a:xfrm>
           <a:prstGeom prst="rect">
             <a:avLst/>
@@ -6537,7 +6784,7 @@
               <a:buNone/>
             </a:pPr>
             <a:r>
-              <a:rPr lang="en-US" sz="1400" dirty="0">
+              <a:rPr lang="en-US" sz="1500" dirty="0">
                 <a:solidFill>
                   <a:srgbClr val="1B2533"/>
                 </a:solidFill>
@@ -6545,112 +6792,32 @@
                 <a:ea typeface="Inter" pitchFamily="34" charset="-122"/>
                 <a:cs typeface="Inter" pitchFamily="34" charset="-120"/>
               </a:rPr>
-              <a:t>Weeks on one shift time all week</a:t>
-            </a:r>
-            <a:endParaRPr lang="en-US" sz="1400" dirty="0"/>
-          </a:p>
-        </p:txBody>
-      </p:sp>
-      <p:sp>
-        <p:nvSpPr>
-          <p:cNvPr id="20" name="Text 18"/>
-          <p:cNvSpPr txBox="1"/>
-          <p:nvPr/>
-        </p:nvSpPr>
-        <p:spPr>
-          <a:xfrm>
-            <a:off x="4297680" y="2980944"/>
-            <a:ext cx="2194560" cy="301752"/>
-          </a:xfrm>
-          <a:prstGeom prst="rect">
-            <a:avLst/>
-          </a:prstGeom>
-          <a:noFill/>
-          <a:ln/>
-        </p:spPr>
-        <p:txBody>
-          <a:bodyPr wrap="square" lIns="0" tIns="0" rIns="0" bIns="0" rtlCol="0" anchor="ctr"/>
-          <a:lstStyle/>
-          <a:p>
-            <a:pPr algn="ctr" indent="0" marL="0">
-              <a:buNone/>
-            </a:pPr>
-            <a:r>
-              <a:rPr lang="en-US" sz="1600" dirty="0">
-                <a:solidFill>
-                  <a:srgbClr val="5B6778"/>
-                </a:solidFill>
-                <a:latin typeface="Inter" pitchFamily="34" charset="0"/>
-                <a:ea typeface="Inter" pitchFamily="34" charset="-122"/>
-                <a:cs typeface="Inter" pitchFamily="34" charset="-120"/>
-              </a:rPr>
-              <a:t>7 of 16</a:t>
-            </a:r>
-            <a:endParaRPr lang="en-US" sz="1600" dirty="0"/>
-          </a:p>
-        </p:txBody>
-      </p:sp>
-      <p:sp>
-        <p:nvSpPr>
-          <p:cNvPr id="21" name="Text 19"/>
-          <p:cNvSpPr txBox="1"/>
-          <p:nvPr/>
-        </p:nvSpPr>
-        <p:spPr>
-          <a:xfrm>
-            <a:off x="6492240" y="2980944"/>
-            <a:ext cx="2194560" cy="301752"/>
-          </a:xfrm>
-          <a:prstGeom prst="rect">
-            <a:avLst/>
-          </a:prstGeom>
-          <a:noFill/>
-          <a:ln/>
-        </p:spPr>
-        <p:txBody>
-          <a:bodyPr wrap="square" lIns="0" tIns="0" rIns="0" bIns="0" rtlCol="0" anchor="ctr"/>
-          <a:lstStyle/>
-          <a:p>
-            <a:pPr algn="ctr" indent="0" marL="0">
-              <a:buNone/>
-            </a:pPr>
-            <a:r>
-              <a:rPr lang="en-US" sz="1800" b="1" dirty="0">
-                <a:solidFill>
-                  <a:srgbClr val="1E7B4B"/>
-                </a:solidFill>
-                <a:latin typeface="Inter" pitchFamily="34" charset="0"/>
-                <a:ea typeface="Inter" pitchFamily="34" charset="-122"/>
-                <a:cs typeface="Inter" pitchFamily="34" charset="-120"/>
-              </a:rPr>
-              <a:t>14 of 20</a:t>
-            </a:r>
-            <a:endParaRPr lang="en-US" sz="1800" dirty="0"/>
-          </a:p>
-        </p:txBody>
-      </p:sp>
-      <p:sp>
-        <p:nvSpPr>
-          <p:cNvPr id="22" name="Shape 20"/>
+              <a:t>9 of its 15 shift times are worked today</a:t>
+            </a:r>
+            <a:endParaRPr lang="en-US" sz="1500" dirty="0"/>
+          </a:p>
+        </p:txBody>
+      </p:sp>
+      <p:sp>
+        <p:nvSpPr>
+          <p:cNvPr id="16" name="Shape 14"/>
           <p:cNvSpPr/>
           <p:nvPr/>
         </p:nvSpPr>
         <p:spPr>
           <a:xfrm>
-            <a:off x="457200" y="3374136"/>
-            <a:ext cx="8229600" cy="301752"/>
-          </a:xfrm>
-          <a:prstGeom prst="roundRect">
-            <a:avLst>
-              <a:gd name="adj" fmla="val 18182"/>
-            </a:avLst>
+            <a:off x="457200" y="2935224"/>
+            <a:ext cx="292608" cy="292608"/>
+          </a:xfrm>
+          <a:prstGeom prst="ellipse">
+            <a:avLst/>
           </a:prstGeom>
           <a:solidFill>
-            <a:srgbClr val="EEF2F7"/>
+            <a:srgbClr val="1E7B4B"/>
           </a:solidFill>
           <a:ln w="12700">
             <a:solidFill>
-              <a:srgbClr val="EEF2F7"/>
+              <a:srgbClr val="1E7B4B"/>
             </a:solidFill>
             <a:prstDash val="solid"/>
           </a:ln>
@@ -6658,14 +6825,53 @@
       </p:sp>
       <p:sp>
         <p:nvSpPr>
-          <p:cNvPr id="23" name="Text 21"/>
-          <p:cNvSpPr txBox="1"/>
-          <p:nvPr/>
-        </p:nvSpPr>
-        <p:spPr>
-          <a:xfrm>
-            <a:off x="640080" y="3374136"/>
-            <a:ext cx="3657600" cy="301752"/>
+          <p:cNvPr id="17" name="Text 15"/>
+          <p:cNvSpPr txBox="1"/>
+          <p:nvPr/>
+        </p:nvSpPr>
+        <p:spPr>
+          <a:xfrm>
+            <a:off x="457200" y="2935224"/>
+            <a:ext cx="292608" cy="292608"/>
+          </a:xfrm>
+          <a:prstGeom prst="rect">
+            <a:avLst/>
+          </a:prstGeom>
+          <a:noFill/>
+          <a:ln/>
+        </p:spPr>
+        <p:txBody>
+          <a:bodyPr wrap="square" lIns="0" tIns="0" rIns="0" bIns="0" rtlCol="0" anchor="ctr"/>
+          <a:lstStyle/>
+          <a:p>
+            <a:pPr algn="ctr" indent="0" marL="0">
+              <a:buNone/>
+            </a:pPr>
+            <a:r>
+              <a:rPr lang="en-US" sz="1200" b="1" dirty="0">
+                <a:solidFill>
+                  <a:srgbClr val="FFFFFF"/>
+                </a:solidFill>
+                <a:latin typeface="Inter" pitchFamily="34" charset="0"/>
+                <a:ea typeface="Inter" pitchFamily="34" charset="-122"/>
+                <a:cs typeface="Inter" pitchFamily="34" charset="-120"/>
+              </a:rPr>
+              <a:t>✓</a:t>
+            </a:r>
+            <a:endParaRPr lang="en-US" sz="1200" dirty="0"/>
+          </a:p>
+        </p:txBody>
+      </p:sp>
+      <p:sp>
+        <p:nvSpPr>
+          <p:cNvPr id="18" name="Text 16"/>
+          <p:cNvSpPr txBox="1"/>
+          <p:nvPr/>
+        </p:nvSpPr>
+        <p:spPr>
+          <a:xfrm>
+            <a:off x="914400" y="2916936"/>
+            <a:ext cx="7772400" cy="329184"/>
           </a:xfrm>
           <a:prstGeom prst="rect">
             <a:avLst/>
@@ -6681,7 +6887,7 @@
               <a:buNone/>
             </a:pPr>
             <a:r>
-              <a:rPr lang="en-US" sz="1400" dirty="0">
+              <a:rPr lang="en-US" sz="1500" dirty="0">
                 <a:solidFill>
                   <a:srgbClr val="1B2533"/>
                 </a:solidFill>
@@ -6689,112 +6895,32 @@
                 <a:ea typeface="Inter" pitchFamily="34" charset="-122"/>
                 <a:cs typeface="Inter" pitchFamily="34" charset="-120"/>
               </a:rPr>
-              <a:t>Closing shift: weekday · Sat · Sun</a:t>
-            </a:r>
-            <a:endParaRPr lang="en-US" sz="1400" dirty="0"/>
-          </a:p>
-        </p:txBody>
-      </p:sp>
-      <p:sp>
-        <p:nvSpPr>
-          <p:cNvPr id="24" name="Text 22"/>
-          <p:cNvSpPr txBox="1"/>
-          <p:nvPr/>
-        </p:nvSpPr>
-        <p:spPr>
-          <a:xfrm>
-            <a:off x="4297680" y="3374136"/>
-            <a:ext cx="2194560" cy="301752"/>
-          </a:xfrm>
-          <a:prstGeom prst="rect">
-            <a:avLst/>
-          </a:prstGeom>
-          <a:noFill/>
-          <a:ln/>
-        </p:spPr>
-        <p:txBody>
-          <a:bodyPr wrap="square" lIns="0" tIns="0" rIns="0" bIns="0" rtlCol="0" anchor="ctr"/>
-          <a:lstStyle/>
-          <a:p>
-            <a:pPr algn="ctr" indent="0" marL="0">
-              <a:buNone/>
-            </a:pPr>
-            <a:r>
-              <a:rPr lang="en-US" sz="1600" dirty="0">
-                <a:solidFill>
-                  <a:srgbClr val="5B6778"/>
-                </a:solidFill>
-                <a:latin typeface="Inter" pitchFamily="34" charset="0"/>
-                <a:ea typeface="Inter" pitchFamily="34" charset="-122"/>
-                <a:cs typeface="Inter" pitchFamily="34" charset="-120"/>
-              </a:rPr>
-              <a:t>8h40 · 9h10 · 8h55</a:t>
-            </a:r>
-            <a:endParaRPr lang="en-US" sz="1600" dirty="0"/>
-          </a:p>
-        </p:txBody>
-      </p:sp>
-      <p:sp>
-        <p:nvSpPr>
-          <p:cNvPr id="25" name="Text 23"/>
-          <p:cNvSpPr txBox="1"/>
-          <p:nvPr/>
-        </p:nvSpPr>
-        <p:spPr>
-          <a:xfrm>
-            <a:off x="6492240" y="3374136"/>
-            <a:ext cx="2194560" cy="301752"/>
-          </a:xfrm>
-          <a:prstGeom prst="rect">
-            <a:avLst/>
-          </a:prstGeom>
-          <a:noFill/>
-          <a:ln/>
-        </p:spPr>
-        <p:txBody>
-          <a:bodyPr wrap="square" lIns="0" tIns="0" rIns="0" bIns="0" rtlCol="0" anchor="ctr"/>
-          <a:lstStyle/>
-          <a:p>
-            <a:pPr algn="ctr" indent="0" marL="0">
-              <a:buNone/>
-            </a:pPr>
-            <a:r>
-              <a:rPr lang="en-US" sz="1800" b="1" dirty="0">
-                <a:solidFill>
-                  <a:srgbClr val="1E7B4B"/>
-                </a:solidFill>
-                <a:latin typeface="Inter" pitchFamily="34" charset="0"/>
-                <a:ea typeface="Inter" pitchFamily="34" charset="-122"/>
-                <a:cs typeface="Inter" pitchFamily="34" charset="-120"/>
-              </a:rPr>
-              <a:t>8h10 · 8h40 · 8h10</a:t>
-            </a:r>
-            <a:endParaRPr lang="en-US" sz="1800" dirty="0"/>
-          </a:p>
-        </p:txBody>
-      </p:sp>
-      <p:sp>
-        <p:nvSpPr>
-          <p:cNvPr id="26" name="Shape 24"/>
+              <a:t>No shift over 9 hours, and every closing shift is shorter</a:t>
+            </a:r>
+            <a:endParaRPr lang="en-US" sz="1500" dirty="0"/>
+          </a:p>
+        </p:txBody>
+      </p:sp>
+      <p:sp>
+        <p:nvSpPr>
+          <p:cNvPr id="19" name="Shape 17"/>
           <p:cNvSpPr/>
           <p:nvPr/>
         </p:nvSpPr>
         <p:spPr>
           <a:xfrm>
-            <a:off x="457200" y="3767328"/>
-            <a:ext cx="8229600" cy="301752"/>
-          </a:xfrm>
-          <a:prstGeom prst="roundRect">
-            <a:avLst>
-              <a:gd name="adj" fmla="val 18182"/>
-            </a:avLst>
+            <a:off x="457200" y="3337560"/>
+            <a:ext cx="292608" cy="292608"/>
+          </a:xfrm>
+          <a:prstGeom prst="ellipse">
+            <a:avLst/>
           </a:prstGeom>
           <a:solidFill>
-            <a:srgbClr val="FFFFFF"/>
+            <a:srgbClr val="1E7B4B"/>
           </a:solidFill>
           <a:ln w="12700">
             <a:solidFill>
-              <a:srgbClr val="DDE3EA"/>
+              <a:srgbClr val="1E7B4B"/>
             </a:solidFill>
             <a:prstDash val="solid"/>
           </a:ln>
@@ -6802,14 +6928,53 @@
       </p:sp>
       <p:sp>
         <p:nvSpPr>
-          <p:cNvPr id="27" name="Text 25"/>
-          <p:cNvSpPr txBox="1"/>
-          <p:nvPr/>
-        </p:nvSpPr>
-        <p:spPr>
-          <a:xfrm>
-            <a:off x="640080" y="3767328"/>
-            <a:ext cx="3657600" cy="301752"/>
+          <p:cNvPr id="20" name="Text 18"/>
+          <p:cNvSpPr txBox="1"/>
+          <p:nvPr/>
+        </p:nvSpPr>
+        <p:spPr>
+          <a:xfrm>
+            <a:off x="457200" y="3337560"/>
+            <a:ext cx="292608" cy="292608"/>
+          </a:xfrm>
+          <a:prstGeom prst="rect">
+            <a:avLst/>
+          </a:prstGeom>
+          <a:noFill/>
+          <a:ln/>
+        </p:spPr>
+        <p:txBody>
+          <a:bodyPr wrap="square" lIns="0" tIns="0" rIns="0" bIns="0" rtlCol="0" anchor="ctr"/>
+          <a:lstStyle/>
+          <a:p>
+            <a:pPr algn="ctr" indent="0" marL="0">
+              <a:buNone/>
+            </a:pPr>
+            <a:r>
+              <a:rPr lang="en-US" sz="1200" b="1" dirty="0">
+                <a:solidFill>
+                  <a:srgbClr val="FFFFFF"/>
+                </a:solidFill>
+                <a:latin typeface="Inter" pitchFamily="34" charset="0"/>
+                <a:ea typeface="Inter" pitchFamily="34" charset="-122"/>
+                <a:cs typeface="Inter" pitchFamily="34" charset="-120"/>
+              </a:rPr>
+              <a:t>✓</a:t>
+            </a:r>
+            <a:endParaRPr lang="en-US" sz="1200" dirty="0"/>
+          </a:p>
+        </p:txBody>
+      </p:sp>
+      <p:sp>
+        <p:nvSpPr>
+          <p:cNvPr id="21" name="Text 19"/>
+          <p:cNvSpPr txBox="1"/>
+          <p:nvPr/>
+        </p:nvSpPr>
+        <p:spPr>
+          <a:xfrm>
+            <a:off x="914400" y="3319272"/>
+            <a:ext cx="7772400" cy="329184"/>
           </a:xfrm>
           <a:prstGeom prst="rect">
             <a:avLst/>
@@ -6825,7 +6990,7 @@
               <a:buNone/>
             </a:pPr>
             <a:r>
-              <a:rPr lang="en-US" sz="1400" dirty="0">
+              <a:rPr lang="en-US" sz="1500" dirty="0">
                 <a:solidFill>
                   <a:srgbClr val="1B2533"/>
                 </a:solidFill>
@@ -6833,93 +6998,15 @@
                 <a:ea typeface="Inter" pitchFamily="34" charset="-122"/>
                 <a:cs typeface="Inter" pitchFamily="34" charset="-120"/>
               </a:rPr>
-              <a:t>Finishing at 23:00 or later — each, a year</a:t>
-            </a:r>
-            <a:endParaRPr lang="en-US" sz="1400" dirty="0"/>
-          </a:p>
-        </p:txBody>
-      </p:sp>
-      <p:sp>
-        <p:nvSpPr>
-          <p:cNvPr id="28" name="Text 26"/>
-          <p:cNvSpPr txBox="1"/>
-          <p:nvPr/>
-        </p:nvSpPr>
-        <p:spPr>
-          <a:xfrm>
-            <a:off x="4297680" y="3767328"/>
-            <a:ext cx="2194560" cy="301752"/>
-          </a:xfrm>
-          <a:prstGeom prst="rect">
-            <a:avLst/>
-          </a:prstGeom>
-          <a:noFill/>
-          <a:ln/>
-        </p:spPr>
-        <p:txBody>
-          <a:bodyPr wrap="square" lIns="0" tIns="0" rIns="0" bIns="0" rtlCol="0" anchor="ctr"/>
-          <a:lstStyle/>
-          <a:p>
-            <a:pPr algn="ctr" indent="0" marL="0">
-              <a:buNone/>
-            </a:pPr>
-            <a:r>
-              <a:rPr lang="en-US" sz="1600" dirty="0">
-                <a:solidFill>
-                  <a:srgbClr val="5B6778"/>
-                </a:solidFill>
-                <a:latin typeface="Inter" pitchFamily="34" charset="0"/>
-                <a:ea typeface="Inter" pitchFamily="34" charset="-122"/>
-                <a:cs typeface="Inter" pitchFamily="34" charset="-120"/>
-              </a:rPr>
-              <a:t>39</a:t>
-            </a:r>
-            <a:endParaRPr lang="en-US" sz="1600" dirty="0"/>
-          </a:p>
-        </p:txBody>
-      </p:sp>
-      <p:sp>
-        <p:nvSpPr>
-          <p:cNvPr id="29" name="Text 27"/>
-          <p:cNvSpPr txBox="1"/>
-          <p:nvPr/>
-        </p:nvSpPr>
-        <p:spPr>
-          <a:xfrm>
-            <a:off x="6492240" y="3767328"/>
-            <a:ext cx="2194560" cy="301752"/>
-          </a:xfrm>
-          <a:prstGeom prst="rect">
-            <a:avLst/>
-          </a:prstGeom>
-          <a:noFill/>
-          <a:ln/>
-        </p:spPr>
-        <p:txBody>
-          <a:bodyPr wrap="square" lIns="0" tIns="0" rIns="0" bIns="0" rtlCol="0" anchor="ctr"/>
-          <a:lstStyle/>
-          <a:p>
-            <a:pPr algn="ctr" indent="0" marL="0">
-              <a:buNone/>
-            </a:pPr>
-            <a:r>
-              <a:rPr lang="en-US" sz="1800" b="1" dirty="0">
-                <a:solidFill>
-                  <a:srgbClr val="A15C00"/>
-                </a:solidFill>
-                <a:latin typeface="Inter" pitchFamily="34" charset="0"/>
-                <a:ea typeface="Inter" pitchFamily="34" charset="-122"/>
-                <a:cs typeface="Inter" pitchFamily="34" charset="-120"/>
-              </a:rPr>
-              <a:t>59</a:t>
-            </a:r>
-            <a:endParaRPr lang="en-US" sz="1800" dirty="0"/>
-          </a:p>
-        </p:txBody>
-      </p:sp>
-      <p:sp>
-        <p:nvSpPr>
-          <p:cNvPr id="30" name="Shape 28"/>
+              <a:t>No avoidable fatigue patterns</a:t>
+            </a:r>
+            <a:endParaRPr lang="en-US" sz="1500" dirty="0"/>
+          </a:p>
+        </p:txBody>
+      </p:sp>
+      <p:sp>
+        <p:nvSpPr>
+          <p:cNvPr id="22" name="Shape 20"/>
           <p:cNvSpPr/>
           <p:nvPr/>
         </p:nvSpPr>
@@ -6946,7 +7033,7 @@
       </p:sp>
       <p:sp>
         <p:nvSpPr>
-          <p:cNvPr id="31" name="Text 29"/>
+          <p:cNvPr id="23" name="Text 21"/>
           <p:cNvSpPr txBox="1"/>
           <p:nvPr/>
         </p:nvSpPr>
@@ -6977,7 +7064,7 @@
                 <a:ea typeface="Inter" pitchFamily="34" charset="-122"/>
                 <a:cs typeface="Inter" pitchFamily="34" charset="-120"/>
               </a:rPr>
-              <a:t>Familiar times, shorter closers, more weekends, fewer days at work — easier to agree.</a:t>
+              <a:t>The trade-off: more late finishes — about one extra each every two or three weeks.</a:t>
             </a:r>
             <a:endParaRPr lang="en-US" sz="1400" dirty="0"/>
           </a:p>
@@ -6985,7 +7072,7 @@
       </p:sp>
       <p:sp>
         <p:nvSpPr>
-          <p:cNvPr id="32" name="Text 30"/>
+          <p:cNvPr id="24" name="Text 22"/>
           <p:cNvSpPr txBox="1"/>
           <p:nvPr/>
         </p:nvSpPr>
@@ -7087,7 +7174,7 @@
                 <a:ea typeface="Inter" pitchFamily="34" charset="-122"/>
                 <a:cs typeface="Inter" pitchFamily="34" charset="-120"/>
               </a:rPr>
-              <a:t>Where it stands</a:t>
+              <a:t>What colleagues will notice</a:t>
             </a:r>
             <a:endParaRPr lang="en-US" sz="3000" dirty="0"/>
           </a:p>
@@ -7126,7 +7213,7 @@
                 <a:ea typeface="Inter" pitchFamily="34" charset="-122"/>
                 <a:cs typeface="Inter" pitchFamily="34" charset="-120"/>
               </a:rPr>
-              <a:t>Three things confirmed, one decision left</a:t>
+              <a:t>The good and the not so good — the colleague presentation shows both</a:t>
             </a:r>
             <a:endParaRPr lang="en-US" sz="1500" dirty="0"/>
           </a:p>
@@ -7140,10 +7227,37 @@
         </p:nvSpPr>
         <p:spPr>
           <a:xfrm>
-            <a:off x="457200" y="1371600"/>
-            <a:ext cx="457200" cy="457200"/>
-          </a:xfrm>
-          <a:prstGeom prst="ellipse">
+            <a:off x="457200" y="1325880"/>
+            <a:ext cx="4023360" cy="2697480"/>
+          </a:xfrm>
+          <a:prstGeom prst="roundRect">
+            <a:avLst>
+              <a:gd name="adj" fmla="val 3390"/>
+            </a:avLst>
+          </a:prstGeom>
+          <a:solidFill>
+            <a:srgbClr val="EEF2F7"/>
+          </a:solidFill>
+          <a:ln w="12700">
+            <a:solidFill>
+              <a:srgbClr val="EEF2F7"/>
+            </a:solidFill>
+            <a:prstDash val="solid"/>
+          </a:ln>
+        </p:spPr>
+      </p:sp>
+      <p:sp>
+        <p:nvSpPr>
+          <p:cNvPr id="5" name="Shape 3"/>
+          <p:cNvSpPr/>
+          <p:nvPr/>
+        </p:nvSpPr>
+        <p:spPr>
+          <a:xfrm>
+            <a:off x="457200" y="1325880"/>
+            <a:ext cx="73152" cy="2697480"/>
+          </a:xfrm>
+          <a:prstGeom prst="rect">
             <a:avLst/>
           </a:prstGeom>
           <a:solidFill>
@@ -7159,53 +7273,14 @@
       </p:sp>
       <p:sp>
         <p:nvSpPr>
-          <p:cNvPr id="5" name="Text 3"/>
-          <p:cNvSpPr txBox="1"/>
-          <p:nvPr/>
-        </p:nvSpPr>
-        <p:spPr>
-          <a:xfrm>
-            <a:off x="457200" y="1371600"/>
-            <a:ext cx="457200" cy="457200"/>
-          </a:xfrm>
-          <a:prstGeom prst="rect">
-            <a:avLst/>
-          </a:prstGeom>
-          <a:noFill/>
-          <a:ln/>
-        </p:spPr>
-        <p:txBody>
-          <a:bodyPr wrap="square" lIns="0" tIns="0" rIns="0" bIns="0" rtlCol="0" anchor="ctr"/>
-          <a:lstStyle/>
-          <a:p>
-            <a:pPr algn="ctr" indent="0" marL="0">
-              <a:buNone/>
-            </a:pPr>
-            <a:r>
-              <a:rPr lang="en-US" sz="1800" b="1" dirty="0">
-                <a:solidFill>
-                  <a:srgbClr val="FFFFFF"/>
-                </a:solidFill>
-                <a:latin typeface="Inter" pitchFamily="34" charset="0"/>
-                <a:ea typeface="Inter" pitchFamily="34" charset="-122"/>
-                <a:cs typeface="Inter" pitchFamily="34" charset="-120"/>
-              </a:rPr>
-              <a:t>✓</a:t>
-            </a:r>
-            <a:endParaRPr lang="en-US" sz="1800" dirty="0"/>
-          </a:p>
-        </p:txBody>
-      </p:sp>
-      <p:sp>
-        <p:nvSpPr>
           <p:cNvPr id="6" name="Text 4"/>
           <p:cNvSpPr txBox="1"/>
           <p:nvPr/>
         </p:nvSpPr>
         <p:spPr>
           <a:xfrm>
-            <a:off x="1097280" y="1335024"/>
-            <a:ext cx="7589520" cy="292608"/>
+            <a:off x="731520" y="1463040"/>
+            <a:ext cx="3566160" cy="365760"/>
           </a:xfrm>
           <a:prstGeom prst="rect">
             <a:avLst/>
@@ -7223,52 +7298,140 @@
             <a:r>
               <a:rPr lang="en-US" sz="1600" b="1" dirty="0">
                 <a:solidFill>
+                  <a:srgbClr val="1E7B4B"/>
+                </a:solidFill>
+                <a:latin typeface="Inter" pitchFamily="34" charset="0"/>
+                <a:ea typeface="Inter" pitchFamily="34" charset="-122"/>
+                <a:cs typeface="Inter" pitchFamily="34" charset="-120"/>
+              </a:rPr>
+              <a:t>Likely to welcome</a:t>
+            </a:r>
+            <a:endParaRPr lang="en-US" sz="1600" dirty="0"/>
+          </a:p>
+        </p:txBody>
+      </p:sp>
+      <p:sp>
+        <p:nvSpPr>
+          <p:cNvPr id="7" name="Text 5"/>
+          <p:cNvSpPr txBox="1"/>
+          <p:nvPr/>
+        </p:nvSpPr>
+        <p:spPr>
+          <a:xfrm>
+            <a:off x="731520" y="1901952"/>
+            <a:ext cx="3611880" cy="2011680"/>
+          </a:xfrm>
+          <a:prstGeom prst="rect">
+            <a:avLst/>
+          </a:prstGeom>
+          <a:noFill/>
+          <a:ln/>
+        </p:spPr>
+        <p:txBody>
+          <a:bodyPr wrap="square" lIns="0" tIns="0" rIns="0" bIns="0" rtlCol="0" anchor="t"/>
+          <a:lstStyle/>
+          <a:p>
+            <a:pPr marL="342900" indent="-342900">
+              <a:spcAft>
+                <a:spcPts val="600"/>
+              </a:spcAft>
+              <a:buSzPct val="100000"/>
+              <a:buChar char="•"/>
+            </a:pPr>
+            <a:r>
+              <a:rPr lang="en-US" sz="1300" dirty="0">
+                <a:solidFill>
                   <a:srgbClr val="1B2533"/>
                 </a:solidFill>
                 <a:latin typeface="Inter" pitchFamily="34" charset="0"/>
                 <a:ea typeface="Inter" pitchFamily="34" charset="-122"/>
                 <a:cs typeface="Inter" pitchFamily="34" charset="-120"/>
               </a:rPr>
-              <a:t>Staffing levels — confirmed</a:t>
-            </a:r>
-            <a:endParaRPr lang="en-US" sz="1600" dirty="0"/>
-          </a:p>
-        </p:txBody>
-      </p:sp>
-      <p:sp>
-        <p:nvSpPr>
-          <p:cNvPr id="7" name="Text 5"/>
-          <p:cNvSpPr txBox="1"/>
-          <p:nvPr/>
-        </p:nvSpPr>
-        <p:spPr>
-          <a:xfrm>
-            <a:off x="1097280" y="1618488"/>
-            <a:ext cx="7589520" cy="274320"/>
-          </a:xfrm>
-          <a:prstGeom prst="rect">
-            <a:avLst/>
-          </a:prstGeom>
-          <a:noFill/>
-          <a:ln/>
-        </p:spPr>
-        <p:txBody>
-          <a:bodyPr wrap="square" lIns="0" tIns="0" rIns="0" bIns="0" rtlCol="0" anchor="ctr"/>
-          <a:lstStyle/>
-          <a:p>
-            <a:pPr indent="0" marL="0">
-              <a:buNone/>
+              <a:t>A weekend off one week in four (today one in five)</a:t>
+            </a:r>
+            <a:endParaRPr lang="en-US" sz="1300" dirty="0"/>
+          </a:p>
+          <a:p>
+            <a:pPr marL="342900" indent="-342900">
+              <a:spcAft>
+                <a:spcPts val="600"/>
+              </a:spcAft>
+              <a:buSzPct val="100000"/>
+              <a:buChar char="•"/>
             </a:pPr>
             <a:r>
               <a:rPr lang="en-US" sz="1300" dirty="0">
                 <a:solidFill>
-                  <a:srgbClr val="5B6778"/>
-                </a:solidFill>
-                <a:latin typeface="Inter" pitchFamily="34" charset="0"/>
-                <a:ea typeface="Inter" pitchFamily="34" charset="-122"/>
-                <a:cs typeface="Inter" pitchFamily="34" charset="-120"/>
-              </a:rPr>
-              <a:t>The eleven December rules. Everything here is built on them.</a:t>
+                  <a:srgbClr val="1B2533"/>
+                </a:solidFill>
+                <a:latin typeface="Inter" pitchFamily="34" charset="0"/>
+                <a:ea typeface="Inter" pitchFamily="34" charset="-122"/>
+                <a:cs typeface="Inter" pitchFamily="34" charset="-120"/>
+              </a:rPr>
+              <a:t>At most 6 days in a row (today 9)</a:t>
+            </a:r>
+            <a:endParaRPr lang="en-US" sz="1300" dirty="0"/>
+          </a:p>
+          <a:p>
+            <a:pPr marL="342900" indent="-342900">
+              <a:spcAft>
+                <a:spcPts val="600"/>
+              </a:spcAft>
+              <a:buSzPct val="100000"/>
+              <a:buChar char="•"/>
+            </a:pPr>
+            <a:r>
+              <a:rPr lang="en-US" sz="1300" dirty="0">
+                <a:solidFill>
+                  <a:srgbClr val="1B2533"/>
+                </a:solidFill>
+                <a:latin typeface="Inter" pitchFamily="34" charset="0"/>
+                <a:ea typeface="Inter" pitchFamily="34" charset="-122"/>
+                <a:cs typeface="Inter" pitchFamily="34" charset="-120"/>
+              </a:rPr>
+              <a:t>Every closing shift 30–45 minutes shorter</a:t>
+            </a:r>
+            <a:endParaRPr lang="en-US" sz="1300" dirty="0"/>
+          </a:p>
+          <a:p>
+            <a:pPr marL="342900" indent="-342900">
+              <a:spcAft>
+                <a:spcPts val="600"/>
+              </a:spcAft>
+              <a:buSzPct val="100000"/>
+              <a:buChar char="•"/>
+            </a:pPr>
+            <a:r>
+              <a:rPr lang="en-US" sz="1300" dirty="0">
+                <a:solidFill>
+                  <a:srgbClr val="1B2533"/>
+                </a:solidFill>
+                <a:latin typeface="Inter" pitchFamily="34" charset="0"/>
+                <a:ea typeface="Inter" pitchFamily="34" charset="-122"/>
+                <a:cs typeface="Inter" pitchFamily="34" charset="-120"/>
+              </a:rPr>
+              <a:t>9 of the 15 shift times already worked</a:t>
+            </a:r>
+            <a:endParaRPr lang="en-US" sz="1300" dirty="0"/>
+          </a:p>
+          <a:p>
+            <a:pPr marL="342900" indent="-342900">
+              <a:spcAft>
+                <a:spcPts val="600"/>
+              </a:spcAft>
+              <a:buSzPct val="100000"/>
+              <a:buChar char="•"/>
+            </a:pPr>
+            <a:r>
+              <a:rPr lang="en-US" sz="1300" dirty="0">
+                <a:solidFill>
+                  <a:srgbClr val="1B2533"/>
+                </a:solidFill>
+                <a:latin typeface="Inter" pitchFamily="34" charset="0"/>
+                <a:ea typeface="Inter" pitchFamily="34" charset="-122"/>
+                <a:cs typeface="Inter" pitchFamily="34" charset="-120"/>
+              </a:rPr>
+              <a:t>Shortest rest 14h20 (today 12h30)</a:t>
             </a:r>
             <a:endParaRPr lang="en-US" sz="1300" dirty="0"/>
           </a:p>
@@ -7282,18 +7445,20 @@
         </p:nvSpPr>
         <p:spPr>
           <a:xfrm>
-            <a:off x="457200" y="2029968"/>
-            <a:ext cx="457200" cy="457200"/>
-          </a:xfrm>
-          <a:prstGeom prst="ellipse">
-            <a:avLst/>
+            <a:off x="4663440" y="1325880"/>
+            <a:ext cx="4023360" cy="2697480"/>
+          </a:xfrm>
+          <a:prstGeom prst="roundRect">
+            <a:avLst>
+              <a:gd name="adj" fmla="val 3390"/>
+            </a:avLst>
           </a:prstGeom>
           <a:solidFill>
-            <a:srgbClr val="1E7B4B"/>
+            <a:srgbClr val="EEF2F7"/>
           </a:solidFill>
           <a:ln w="12700">
             <a:solidFill>
-              <a:srgbClr val="1E7B4B"/>
+              <a:srgbClr val="EEF2F7"/>
             </a:solidFill>
             <a:prstDash val="solid"/>
           </a:ln>
@@ -7301,141 +7466,24 @@
       </p:sp>
       <p:sp>
         <p:nvSpPr>
-          <p:cNvPr id="9" name="Text 7"/>
-          <p:cNvSpPr txBox="1"/>
-          <p:nvPr/>
-        </p:nvSpPr>
-        <p:spPr>
-          <a:xfrm>
-            <a:off x="457200" y="2029968"/>
-            <a:ext cx="457200" cy="457200"/>
-          </a:xfrm>
-          <a:prstGeom prst="rect">
-            <a:avLst/>
-          </a:prstGeom>
-          <a:noFill/>
-          <a:ln/>
-        </p:spPr>
-        <p:txBody>
-          <a:bodyPr wrap="square" lIns="0" tIns="0" rIns="0" bIns="0" rtlCol="0" anchor="ctr"/>
-          <a:lstStyle/>
-          <a:p>
-            <a:pPr algn="ctr" indent="0" marL="0">
-              <a:buNone/>
-            </a:pPr>
-            <a:r>
-              <a:rPr lang="en-US" sz="1800" b="1" dirty="0">
-                <a:solidFill>
-                  <a:srgbClr val="FFFFFF"/>
-                </a:solidFill>
-                <a:latin typeface="Inter" pitchFamily="34" charset="0"/>
-                <a:ea typeface="Inter" pitchFamily="34" charset="-122"/>
-                <a:cs typeface="Inter" pitchFamily="34" charset="-120"/>
-              </a:rPr>
-              <a:t>✓</a:t>
-            </a:r>
-            <a:endParaRPr lang="en-US" sz="1800" dirty="0"/>
-          </a:p>
-        </p:txBody>
-      </p:sp>
-      <p:sp>
-        <p:nvSpPr>
-          <p:cNvPr id="10" name="Text 8"/>
-          <p:cNvSpPr txBox="1"/>
-          <p:nvPr/>
-        </p:nvSpPr>
-        <p:spPr>
-          <a:xfrm>
-            <a:off x="1097280" y="1993392"/>
-            <a:ext cx="7589520" cy="292608"/>
-          </a:xfrm>
-          <a:prstGeom prst="rect">
-            <a:avLst/>
-          </a:prstGeom>
-          <a:noFill/>
-          <a:ln/>
-        </p:spPr>
-        <p:txBody>
-          <a:bodyPr wrap="square" lIns="0" tIns="0" rIns="0" bIns="0" rtlCol="0" anchor="ctr"/>
-          <a:lstStyle/>
-          <a:p>
-            <a:pPr indent="0" marL="0">
-              <a:buNone/>
-            </a:pPr>
-            <a:r>
-              <a:rPr lang="en-US" sz="1600" b="1" dirty="0">
-                <a:solidFill>
-                  <a:srgbClr val="1B2533"/>
-                </a:solidFill>
-                <a:latin typeface="Inter" pitchFamily="34" charset="0"/>
-                <a:ea typeface="Inter" pitchFamily="34" charset="-122"/>
-                <a:cs typeface="Inter" pitchFamily="34" charset="-120"/>
-              </a:rPr>
-              <a:t>24 people on the link — confirmed</a:t>
-            </a:r>
-            <a:endParaRPr lang="en-US" sz="1600" dirty="0"/>
-          </a:p>
-        </p:txBody>
-      </p:sp>
-      <p:sp>
-        <p:nvSpPr>
-          <p:cNvPr id="11" name="Text 9"/>
-          <p:cNvSpPr txBox="1"/>
-          <p:nvPr/>
-        </p:nvSpPr>
-        <p:spPr>
-          <a:xfrm>
-            <a:off x="1097280" y="2276856"/>
-            <a:ext cx="7589520" cy="274320"/>
-          </a:xfrm>
-          <a:prstGeom prst="rect">
-            <a:avLst/>
-          </a:prstGeom>
-          <a:noFill/>
-          <a:ln/>
-        </p:spPr>
-        <p:txBody>
-          <a:bodyPr wrap="square" lIns="0" tIns="0" rIns="0" bIns="0" rtlCol="0" anchor="ctr"/>
-          <a:lstStyle/>
-          <a:p>
-            <a:pPr indent="0" marL="0">
-              <a:buNone/>
-            </a:pPr>
-            <a:r>
-              <a:rPr lang="en-US" sz="1300" dirty="0">
-                <a:solidFill>
-                  <a:srgbClr val="5B6778"/>
-                </a:solidFill>
-                <a:latin typeface="Inter" pitchFamily="34" charset="0"/>
-                <a:ea typeface="Inter" pitchFamily="34" charset="-122"/>
-                <a:cs typeface="Inter" pitchFamily="34" charset="-120"/>
-              </a:rPr>
-              <a:t>Four more than today.</a:t>
-            </a:r>
-            <a:endParaRPr lang="en-US" sz="1300" dirty="0"/>
-          </a:p>
-        </p:txBody>
-      </p:sp>
-      <p:sp>
-        <p:nvSpPr>
-          <p:cNvPr id="12" name="Shape 10"/>
+          <p:cNvPr id="9" name="Shape 7"/>
           <p:cNvSpPr/>
           <p:nvPr/>
         </p:nvSpPr>
         <p:spPr>
           <a:xfrm>
-            <a:off x="457200" y="2688336"/>
-            <a:ext cx="457200" cy="457200"/>
-          </a:xfrm>
-          <a:prstGeom prst="ellipse">
+            <a:off x="4663440" y="1325880"/>
+            <a:ext cx="73152" cy="2697480"/>
+          </a:xfrm>
+          <a:prstGeom prst="rect">
             <a:avLst/>
           </a:prstGeom>
           <a:solidFill>
-            <a:srgbClr val="1E7B4B"/>
+            <a:srgbClr val="A15C00"/>
           </a:solidFill>
           <a:ln w="12700">
             <a:solidFill>
-              <a:srgbClr val="1E7B4B"/>
+              <a:srgbClr val="A15C00"/>
             </a:solidFill>
             <a:prstDash val="solid"/>
           </a:ln>
@@ -7443,53 +7491,14 @@
       </p:sp>
       <p:sp>
         <p:nvSpPr>
-          <p:cNvPr id="13" name="Text 11"/>
-          <p:cNvSpPr txBox="1"/>
-          <p:nvPr/>
-        </p:nvSpPr>
-        <p:spPr>
-          <a:xfrm>
-            <a:off x="457200" y="2688336"/>
-            <a:ext cx="457200" cy="457200"/>
-          </a:xfrm>
-          <a:prstGeom prst="rect">
-            <a:avLst/>
-          </a:prstGeom>
-          <a:noFill/>
-          <a:ln/>
-        </p:spPr>
-        <p:txBody>
-          <a:bodyPr wrap="square" lIns="0" tIns="0" rIns="0" bIns="0" rtlCol="0" anchor="ctr"/>
-          <a:lstStyle/>
-          <a:p>
-            <a:pPr algn="ctr" indent="0" marL="0">
-              <a:buNone/>
-            </a:pPr>
-            <a:r>
-              <a:rPr lang="en-US" sz="1800" b="1" dirty="0">
-                <a:solidFill>
-                  <a:srgbClr val="FFFFFF"/>
-                </a:solidFill>
-                <a:latin typeface="Inter" pitchFamily="34" charset="0"/>
-                <a:ea typeface="Inter" pitchFamily="34" charset="-122"/>
-                <a:cs typeface="Inter" pitchFamily="34" charset="-120"/>
-              </a:rPr>
-              <a:t>✓</a:t>
-            </a:r>
-            <a:endParaRPr lang="en-US" sz="1800" dirty="0"/>
-          </a:p>
-        </p:txBody>
-      </p:sp>
-      <p:sp>
-        <p:nvSpPr>
-          <p:cNvPr id="14" name="Text 12"/>
-          <p:cNvSpPr txBox="1"/>
-          <p:nvPr/>
-        </p:nvSpPr>
-        <p:spPr>
-          <a:xfrm>
-            <a:off x="1097280" y="2651760"/>
-            <a:ext cx="7589520" cy="292608"/>
+          <p:cNvPr id="10" name="Text 8"/>
+          <p:cNvSpPr txBox="1"/>
+          <p:nvPr/>
+        </p:nvSpPr>
+        <p:spPr>
+          <a:xfrm>
+            <a:off x="4937760" y="1463040"/>
+            <a:ext cx="3566160" cy="365760"/>
           </a:xfrm>
           <a:prstGeom prst="rect">
             <a:avLst/>
@@ -7507,77 +7516,167 @@
             <a:r>
               <a:rPr lang="en-US" sz="1600" b="1" dirty="0">
                 <a:solidFill>
+                  <a:srgbClr val="A15C00"/>
+                </a:solidFill>
+                <a:latin typeface="Inter" pitchFamily="34" charset="0"/>
+                <a:ea typeface="Inter" pitchFamily="34" charset="-122"/>
+                <a:cs typeface="Inter" pitchFamily="34" charset="-120"/>
+              </a:rPr>
+              <a:t>Likely to worry about</a:t>
+            </a:r>
+            <a:endParaRPr lang="en-US" sz="1600" dirty="0"/>
+          </a:p>
+        </p:txBody>
+      </p:sp>
+      <p:sp>
+        <p:nvSpPr>
+          <p:cNvPr id="11" name="Text 9"/>
+          <p:cNvSpPr txBox="1"/>
+          <p:nvPr/>
+        </p:nvSpPr>
+        <p:spPr>
+          <a:xfrm>
+            <a:off x="4937760" y="1901952"/>
+            <a:ext cx="3611880" cy="2011680"/>
+          </a:xfrm>
+          <a:prstGeom prst="rect">
+            <a:avLst/>
+          </a:prstGeom>
+          <a:noFill/>
+          <a:ln/>
+        </p:spPr>
+        <p:txBody>
+          <a:bodyPr wrap="square" lIns="0" tIns="0" rIns="0" bIns="0" rtlCol="0" anchor="t"/>
+          <a:lstStyle/>
+          <a:p>
+            <a:pPr marL="342900" indent="-342900">
+              <a:spcAft>
+                <a:spcPts val="600"/>
+              </a:spcAft>
+              <a:buSzPct val="100000"/>
+              <a:buChar char="•"/>
+            </a:pPr>
+            <a:r>
+              <a:rPr lang="en-US" sz="1300" dirty="0">
+                <a:solidFill>
                   <a:srgbClr val="1B2533"/>
                 </a:solidFill>
                 <a:latin typeface="Inter" pitchFamily="34" charset="0"/>
                 <a:ea typeface="Inter" pitchFamily="34" charset="-122"/>
                 <a:cs typeface="Inter" pitchFamily="34" charset="-120"/>
               </a:rPr>
-              <a:t>Sunday cover — confirmed</a:t>
-            </a:r>
-            <a:endParaRPr lang="en-US" sz="1600" dirty="0"/>
-          </a:p>
-        </p:txBody>
-      </p:sp>
-      <p:sp>
-        <p:nvSpPr>
-          <p:cNvPr id="15" name="Text 13"/>
-          <p:cNvSpPr txBox="1"/>
-          <p:nvPr/>
-        </p:nvSpPr>
-        <p:spPr>
-          <a:xfrm>
-            <a:off x="1097280" y="2935224"/>
-            <a:ext cx="7589520" cy="274320"/>
-          </a:xfrm>
-          <a:prstGeom prst="rect">
-            <a:avLst/>
-          </a:prstGeom>
-          <a:noFill/>
-          <a:ln/>
-        </p:spPr>
-        <p:txBody>
-          <a:bodyPr wrap="square" lIns="0" tIns="0" rIns="0" bIns="0" rtlCol="0" anchor="ctr"/>
-          <a:lstStyle/>
-          <a:p>
-            <a:pPr indent="0" marL="0">
-              <a:buNone/>
+              <a:t>About one extra late finish every 2–3 weeks</a:t>
+            </a:r>
+            <a:endParaRPr lang="en-US" sz="1300" dirty="0"/>
+          </a:p>
+          <a:p>
+            <a:pPr marL="342900" indent="-342900">
+              <a:spcAft>
+                <a:spcPts val="600"/>
+              </a:spcAft>
+              <a:buSzPct val="100000"/>
+              <a:buChar char="•"/>
             </a:pPr>
             <a:r>
               <a:rPr lang="en-US" sz="1300" dirty="0">
                 <a:solidFill>
-                  <a:srgbClr val="5B6778"/>
-                </a:solidFill>
-                <a:latin typeface="Inter" pitchFamily="34" charset="0"/>
-                <a:ea typeface="Inter" pitchFamily="34" charset="-122"/>
-                <a:cs typeface="Inter" pitchFamily="34" charset="-120"/>
-              </a:rPr>
-              <a:t>Ten on a Sunday, worked as overtime, as today.</a:t>
+                  <a:srgbClr val="1B2533"/>
+                </a:solidFill>
+                <a:latin typeface="Inter" pitchFamily="34" charset="0"/>
+                <a:ea typeface="Inter" pitchFamily="34" charset="-122"/>
+                <a:cs typeface="Inter" pitchFamily="34" charset="-120"/>
+              </a:rPr>
+              <a:t>6 new shift times to learn</a:t>
             </a:r>
             <a:endParaRPr lang="en-US" sz="1300" dirty="0"/>
           </a:p>
-        </p:txBody>
-      </p:sp>
-      <p:sp>
-        <p:nvSpPr>
-          <p:cNvPr id="16" name="Shape 14"/>
+          <a:p>
+            <a:pPr marL="342900" indent="-342900">
+              <a:spcAft>
+                <a:spcPts val="600"/>
+              </a:spcAft>
+              <a:buSzPct val="100000"/>
+              <a:buChar char="•"/>
+            </a:pPr>
+            <a:r>
+              <a:rPr lang="en-US" sz="1300" dirty="0">
+                <a:solidFill>
+                  <a:srgbClr val="1B2533"/>
+                </a:solidFill>
+                <a:latin typeface="Inter" pitchFamily="34" charset="0"/>
+                <a:ea typeface="Inter" pitchFamily="34" charset="-122"/>
+                <a:cs typeface="Inter" pitchFamily="34" charset="-120"/>
+              </a:rPr>
+              <a:t>Average shift 6 minutes longer</a:t>
+            </a:r>
+            <a:endParaRPr lang="en-US" sz="1300" dirty="0"/>
+          </a:p>
+          <a:p>
+            <a:pPr marL="342900" indent="-342900">
+              <a:spcAft>
+                <a:spcPts val="600"/>
+              </a:spcAft>
+              <a:buSzPct val="100000"/>
+              <a:buChar char="•"/>
+            </a:pPr>
+            <a:r>
+              <a:rPr lang="en-US" sz="1300" dirty="0">
+                <a:solidFill>
+                  <a:srgbClr val="1B2533"/>
+                </a:solidFill>
+                <a:latin typeface="Inter" pitchFamily="34" charset="0"/>
+                <a:ea typeface="Inter" pitchFamily="34" charset="-122"/>
+                <a:cs typeface="Inter" pitchFamily="34" charset="-120"/>
+              </a:rPr>
+              <a:t>Best 14-day leave stretch 28 days, not 30</a:t>
+            </a:r>
+            <a:endParaRPr lang="en-US" sz="1300" dirty="0"/>
+          </a:p>
+          <a:p>
+            <a:pPr marL="342900" indent="-342900">
+              <a:spcAft>
+                <a:spcPts val="600"/>
+              </a:spcAft>
+              <a:buSzPct val="100000"/>
+              <a:buChar char="•"/>
+            </a:pPr>
+            <a:r>
+              <a:rPr lang="en-US" sz="1300" dirty="0">
+                <a:solidFill>
+                  <a:srgbClr val="1B2533"/>
+                </a:solidFill>
+                <a:latin typeface="Inter" pitchFamily="34" charset="0"/>
+                <a:ea typeface="Inter" pitchFamily="34" charset="-122"/>
+                <a:cs typeface="Inter" pitchFamily="34" charset="-120"/>
+              </a:rPr>
+              <a:t>Four weeks off takes 15 days’ leave, not 14</a:t>
+            </a:r>
+            <a:endParaRPr lang="en-US" sz="1300" dirty="0"/>
+          </a:p>
+        </p:txBody>
+      </p:sp>
+      <p:sp>
+        <p:nvSpPr>
+          <p:cNvPr id="12" name="Shape 10"/>
           <p:cNvSpPr/>
           <p:nvPr/>
         </p:nvSpPr>
         <p:spPr>
           <a:xfrm>
-            <a:off x="457200" y="3346704"/>
-            <a:ext cx="457200" cy="457200"/>
-          </a:xfrm>
-          <a:prstGeom prst="ellipse">
-            <a:avLst/>
+            <a:off x="457200" y="4160520"/>
+            <a:ext cx="8229600" cy="548640"/>
+          </a:xfrm>
+          <a:prstGeom prst="roundRect">
+            <a:avLst>
+              <a:gd name="adj" fmla="val 16667"/>
+            </a:avLst>
           </a:prstGeom>
           <a:solidFill>
-            <a:srgbClr val="F5C800"/>
+            <a:srgbClr val="001E3C"/>
           </a:solidFill>
           <a:ln w="12700">
             <a:solidFill>
-              <a:srgbClr val="F5C800"/>
+              <a:srgbClr val="001E3C"/>
             </a:solidFill>
             <a:prstDash val="solid"/>
           </a:ln>
@@ -7585,53 +7684,14 @@
       </p:sp>
       <p:sp>
         <p:nvSpPr>
-          <p:cNvPr id="17" name="Text 15"/>
-          <p:cNvSpPr txBox="1"/>
-          <p:nvPr/>
-        </p:nvSpPr>
-        <p:spPr>
-          <a:xfrm>
-            <a:off x="457200" y="3346704"/>
-            <a:ext cx="457200" cy="457200"/>
-          </a:xfrm>
-          <a:prstGeom prst="rect">
-            <a:avLst/>
-          </a:prstGeom>
-          <a:noFill/>
-          <a:ln/>
-        </p:spPr>
-        <p:txBody>
-          <a:bodyPr wrap="square" lIns="0" tIns="0" rIns="0" bIns="0" rtlCol="0" anchor="ctr"/>
-          <a:lstStyle/>
-          <a:p>
-            <a:pPr algn="ctr" indent="0" marL="0">
-              <a:buNone/>
-            </a:pPr>
-            <a:r>
-              <a:rPr lang="en-US" sz="1800" b="1" dirty="0">
-                <a:solidFill>
-                  <a:srgbClr val="001E3C"/>
-                </a:solidFill>
-                <a:latin typeface="Inter" pitchFamily="34" charset="0"/>
-                <a:ea typeface="Inter" pitchFamily="34" charset="-122"/>
-                <a:cs typeface="Inter" pitchFamily="34" charset="-120"/>
-              </a:rPr>
-              <a:t>?</a:t>
-            </a:r>
-            <a:endParaRPr lang="en-US" sz="1800" dirty="0"/>
-          </a:p>
-        </p:txBody>
-      </p:sp>
-      <p:sp>
-        <p:nvSpPr>
-          <p:cNvPr id="18" name="Text 16"/>
-          <p:cNvSpPr txBox="1"/>
-          <p:nvPr/>
-        </p:nvSpPr>
-        <p:spPr>
-          <a:xfrm>
-            <a:off x="1097280" y="3310128"/>
-            <a:ext cx="7589520" cy="292608"/>
+          <p:cNvPr id="13" name="Text 11"/>
+          <p:cNvSpPr txBox="1"/>
+          <p:nvPr/>
+        </p:nvSpPr>
+        <p:spPr>
+          <a:xfrm>
+            <a:off x="640080" y="4160520"/>
+            <a:ext cx="7863840" cy="548640"/>
           </a:xfrm>
           <a:prstGeom prst="rect">
             <a:avLst/>
@@ -7647,62 +7707,23 @@
               <a:buNone/>
             </a:pPr>
             <a:r>
-              <a:rPr lang="en-US" sz="1600" b="1" dirty="0">
-                <a:solidFill>
-                  <a:srgbClr val="1B2533"/>
-                </a:solidFill>
-                <a:latin typeface="Inter" pitchFamily="34" charset="0"/>
-                <a:ea typeface="Inter" pitchFamily="34" charset="-122"/>
-                <a:cs typeface="Inter" pitchFamily="34" charset="-120"/>
-              </a:rPr>
-              <a:t>Still to decide: who goes on which line</a:t>
-            </a:r>
-            <a:endParaRPr lang="en-US" sz="1600" dirty="0"/>
-          </a:p>
-        </p:txBody>
-      </p:sp>
-      <p:sp>
-        <p:nvSpPr>
-          <p:cNvPr id="19" name="Text 17"/>
-          <p:cNvSpPr txBox="1"/>
-          <p:nvPr/>
-        </p:nvSpPr>
-        <p:spPr>
-          <a:xfrm>
-            <a:off x="1097280" y="3593592"/>
-            <a:ext cx="7589520" cy="274320"/>
-          </a:xfrm>
-          <a:prstGeom prst="rect">
-            <a:avLst/>
-          </a:prstGeom>
-          <a:noFill/>
-          <a:ln/>
-        </p:spPr>
-        <p:txBody>
-          <a:bodyPr wrap="square" lIns="0" tIns="0" rIns="0" bIns="0" rtlCol="0" anchor="ctr"/>
-          <a:lstStyle/>
-          <a:p>
-            <a:pPr indent="0" marL="0">
-              <a:buNone/>
-            </a:pPr>
-            <a:r>
-              <a:rPr lang="en-US" sz="1300" dirty="0">
-                <a:solidFill>
-                  <a:srgbClr val="5B6778"/>
-                </a:solidFill>
-                <a:latin typeface="Inter" pitchFamily="34" charset="0"/>
-                <a:ea typeface="Inter" pitchFamily="34" charset="-122"/>
-                <a:cs typeface="Inter" pitchFamily="34" charset="-120"/>
-              </a:rPr>
-              <a:t>Who starts on which week of the link.</a:t>
-            </a:r>
-            <a:endParaRPr lang="en-US" sz="1300" dirty="0"/>
-          </a:p>
-        </p:txBody>
-      </p:sp>
-      <p:sp>
-        <p:nvSpPr>
-          <p:cNvPr id="20" name="Text 18"/>
+              <a:rPr lang="en-US" sz="1400" b="1" dirty="0">
+                <a:solidFill>
+                  <a:srgbClr val="FFFFFF"/>
+                </a:solidFill>
+                <a:latin typeface="Inter" pitchFamily="34" charset="0"/>
+                <a:ea typeface="Inter" pitchFamily="34" charset="-122"/>
+                <a:cs typeface="Inter" pitchFamily="34" charset="-120"/>
+              </a:rPr>
+              <a:t>Expect late finishes to be the first question — the colleague deck answers it openly.</a:t>
+            </a:r>
+            <a:endParaRPr lang="en-US" sz="1400" dirty="0"/>
+          </a:p>
+        </p:txBody>
+      </p:sp>
+      <p:sp>
+        <p:nvSpPr>
+          <p:cNvPr id="14" name="Text 12"/>
           <p:cNvSpPr txBox="1"/>
           <p:nvPr/>
         </p:nvSpPr>
@@ -7753,7 +7774,7 @@
     <p:bg>
       <p:bgPr>
         <a:solidFill>
-          <a:srgbClr val="001E3C"/>
+          <a:srgbClr val="FFFFFF"/>
         </a:solidFill>
       </p:bgPr>
     </p:bg>
@@ -7773,14 +7794,518 @@
       </p:grpSpPr>
       <p:sp>
         <p:nvSpPr>
-          <p:cNvPr id="2" name="Shape 0"/>
+          <p:cNvPr id="2" name="Text 0"/>
+          <p:cNvSpPr txBox="1"/>
+          <p:nvPr/>
+        </p:nvSpPr>
+        <p:spPr>
+          <a:xfrm>
+            <a:off x="457200" y="274320"/>
+            <a:ext cx="8229600" cy="594360"/>
+          </a:xfrm>
+          <a:prstGeom prst="rect">
+            <a:avLst/>
+          </a:prstGeom>
+          <a:noFill/>
+          <a:ln/>
+        </p:spPr>
+        <p:txBody>
+          <a:bodyPr wrap="square" lIns="0" tIns="0" rIns="0" bIns="0" rtlCol="0" anchor="ctr"/>
+          <a:lstStyle/>
+          <a:p>
+            <a:pPr indent="0" marL="0">
+              <a:buNone/>
+            </a:pPr>
+            <a:r>
+              <a:rPr lang="en-US" sz="3000" b="1" dirty="0">
+                <a:solidFill>
+                  <a:srgbClr val="001E3C"/>
+                </a:solidFill>
+                <a:latin typeface="Inter" pitchFamily="34" charset="0"/>
+                <a:ea typeface="Inter" pitchFamily="34" charset="-122"/>
+                <a:cs typeface="Inter" pitchFamily="34" charset="-120"/>
+              </a:rPr>
+              <a:t>Where it stands</a:t>
+            </a:r>
+            <a:endParaRPr lang="en-US" sz="3000" dirty="0"/>
+          </a:p>
+        </p:txBody>
+      </p:sp>
+      <p:sp>
+        <p:nvSpPr>
+          <p:cNvPr id="3" name="Text 1"/>
+          <p:cNvSpPr txBox="1"/>
+          <p:nvPr/>
+        </p:nvSpPr>
+        <p:spPr>
+          <a:xfrm>
+            <a:off x="457200" y="868680"/>
+            <a:ext cx="8229600" cy="365760"/>
+          </a:xfrm>
+          <a:prstGeom prst="rect">
+            <a:avLst/>
+          </a:prstGeom>
+          <a:noFill/>
+          <a:ln/>
+        </p:spPr>
+        <p:txBody>
+          <a:bodyPr wrap="square" lIns="0" tIns="0" rIns="0" bIns="0" rtlCol="0" anchor="ctr"/>
+          <a:lstStyle/>
+          <a:p>
+            <a:pPr indent="0" marL="0">
+              <a:buNone/>
+            </a:pPr>
+            <a:r>
+              <a:rPr lang="en-US" sz="1500" dirty="0">
+                <a:solidFill>
+                  <a:srgbClr val="5B6778"/>
+                </a:solidFill>
+                <a:latin typeface="Inter" pitchFamily="34" charset="0"/>
+                <a:ea typeface="Inter" pitchFamily="34" charset="-122"/>
+                <a:cs typeface="Inter" pitchFamily="34" charset="-120"/>
+              </a:rPr>
+              <a:t>Three things confirmed, two decisions left</a:t>
+            </a:r>
+            <a:endParaRPr lang="en-US" sz="1500" dirty="0"/>
+          </a:p>
+        </p:txBody>
+      </p:sp>
+      <p:sp>
+        <p:nvSpPr>
+          <p:cNvPr id="4" name="Shape 2"/>
           <p:cNvSpPr/>
           <p:nvPr/>
         </p:nvSpPr>
         <p:spPr>
           <a:xfrm>
-            <a:off x="548640" y="640080"/>
-            <a:ext cx="731520" cy="731520"/>
+            <a:off x="457200" y="1325880"/>
+            <a:ext cx="457200" cy="457200"/>
+          </a:xfrm>
+          <a:prstGeom prst="ellipse">
+            <a:avLst/>
+          </a:prstGeom>
+          <a:solidFill>
+            <a:srgbClr val="1E7B4B"/>
+          </a:solidFill>
+          <a:ln w="12700">
+            <a:solidFill>
+              <a:srgbClr val="1E7B4B"/>
+            </a:solidFill>
+            <a:prstDash val="solid"/>
+          </a:ln>
+        </p:spPr>
+      </p:sp>
+      <p:sp>
+        <p:nvSpPr>
+          <p:cNvPr id="5" name="Text 3"/>
+          <p:cNvSpPr txBox="1"/>
+          <p:nvPr/>
+        </p:nvSpPr>
+        <p:spPr>
+          <a:xfrm>
+            <a:off x="457200" y="1325880"/>
+            <a:ext cx="457200" cy="457200"/>
+          </a:xfrm>
+          <a:prstGeom prst="rect">
+            <a:avLst/>
+          </a:prstGeom>
+          <a:noFill/>
+          <a:ln/>
+        </p:spPr>
+        <p:txBody>
+          <a:bodyPr wrap="square" lIns="0" tIns="0" rIns="0" bIns="0" rtlCol="0" anchor="ctr"/>
+          <a:lstStyle/>
+          <a:p>
+            <a:pPr algn="ctr" indent="0" marL="0">
+              <a:buNone/>
+            </a:pPr>
+            <a:r>
+              <a:rPr lang="en-US" sz="1800" b="1" dirty="0">
+                <a:solidFill>
+                  <a:srgbClr val="FFFFFF"/>
+                </a:solidFill>
+                <a:latin typeface="Inter" pitchFamily="34" charset="0"/>
+                <a:ea typeface="Inter" pitchFamily="34" charset="-122"/>
+                <a:cs typeface="Inter" pitchFamily="34" charset="-120"/>
+              </a:rPr>
+              <a:t>✓</a:t>
+            </a:r>
+            <a:endParaRPr lang="en-US" sz="1800" dirty="0"/>
+          </a:p>
+        </p:txBody>
+      </p:sp>
+      <p:sp>
+        <p:nvSpPr>
+          <p:cNvPr id="6" name="Text 4"/>
+          <p:cNvSpPr txBox="1"/>
+          <p:nvPr/>
+        </p:nvSpPr>
+        <p:spPr>
+          <a:xfrm>
+            <a:off x="1097280" y="1289304"/>
+            <a:ext cx="7589520" cy="292608"/>
+          </a:xfrm>
+          <a:prstGeom prst="rect">
+            <a:avLst/>
+          </a:prstGeom>
+          <a:noFill/>
+          <a:ln/>
+        </p:spPr>
+        <p:txBody>
+          <a:bodyPr wrap="square" lIns="0" tIns="0" rIns="0" bIns="0" rtlCol="0" anchor="ctr"/>
+          <a:lstStyle/>
+          <a:p>
+            <a:pPr indent="0" marL="0">
+              <a:buNone/>
+            </a:pPr>
+            <a:r>
+              <a:rPr lang="en-US" sz="1600" b="1" dirty="0">
+                <a:solidFill>
+                  <a:srgbClr val="1B2533"/>
+                </a:solidFill>
+                <a:latin typeface="Inter" pitchFamily="34" charset="0"/>
+                <a:ea typeface="Inter" pitchFamily="34" charset="-122"/>
+                <a:cs typeface="Inter" pitchFamily="34" charset="-120"/>
+              </a:rPr>
+              <a:t>Staffing levels — confirmed</a:t>
+            </a:r>
+            <a:endParaRPr lang="en-US" sz="1600" dirty="0"/>
+          </a:p>
+        </p:txBody>
+      </p:sp>
+      <p:sp>
+        <p:nvSpPr>
+          <p:cNvPr id="7" name="Text 5"/>
+          <p:cNvSpPr txBox="1"/>
+          <p:nvPr/>
+        </p:nvSpPr>
+        <p:spPr>
+          <a:xfrm>
+            <a:off x="1097280" y="1572768"/>
+            <a:ext cx="7589520" cy="274320"/>
+          </a:xfrm>
+          <a:prstGeom prst="rect">
+            <a:avLst/>
+          </a:prstGeom>
+          <a:noFill/>
+          <a:ln/>
+        </p:spPr>
+        <p:txBody>
+          <a:bodyPr wrap="square" lIns="0" tIns="0" rIns="0" bIns="0" rtlCol="0" anchor="ctr"/>
+          <a:lstStyle/>
+          <a:p>
+            <a:pPr indent="0" marL="0">
+              <a:buNone/>
+            </a:pPr>
+            <a:r>
+              <a:rPr lang="en-US" sz="1300" dirty="0">
+                <a:solidFill>
+                  <a:srgbClr val="5B6778"/>
+                </a:solidFill>
+                <a:latin typeface="Inter" pitchFamily="34" charset="0"/>
+                <a:ea typeface="Inter" pitchFamily="34" charset="-122"/>
+                <a:cs typeface="Inter" pitchFamily="34" charset="-120"/>
+              </a:rPr>
+              <a:t>The eleven December rules. Everything here is built on them.</a:t>
+            </a:r>
+            <a:endParaRPr lang="en-US" sz="1300" dirty="0"/>
+          </a:p>
+        </p:txBody>
+      </p:sp>
+      <p:sp>
+        <p:nvSpPr>
+          <p:cNvPr id="8" name="Shape 6"/>
+          <p:cNvSpPr/>
+          <p:nvPr/>
+        </p:nvSpPr>
+        <p:spPr>
+          <a:xfrm>
+            <a:off x="457200" y="1965960"/>
+            <a:ext cx="457200" cy="457200"/>
+          </a:xfrm>
+          <a:prstGeom prst="ellipse">
+            <a:avLst/>
+          </a:prstGeom>
+          <a:solidFill>
+            <a:srgbClr val="1E7B4B"/>
+          </a:solidFill>
+          <a:ln w="12700">
+            <a:solidFill>
+              <a:srgbClr val="1E7B4B"/>
+            </a:solidFill>
+            <a:prstDash val="solid"/>
+          </a:ln>
+        </p:spPr>
+      </p:sp>
+      <p:sp>
+        <p:nvSpPr>
+          <p:cNvPr id="9" name="Text 7"/>
+          <p:cNvSpPr txBox="1"/>
+          <p:nvPr/>
+        </p:nvSpPr>
+        <p:spPr>
+          <a:xfrm>
+            <a:off x="457200" y="1965960"/>
+            <a:ext cx="457200" cy="457200"/>
+          </a:xfrm>
+          <a:prstGeom prst="rect">
+            <a:avLst/>
+          </a:prstGeom>
+          <a:noFill/>
+          <a:ln/>
+        </p:spPr>
+        <p:txBody>
+          <a:bodyPr wrap="square" lIns="0" tIns="0" rIns="0" bIns="0" rtlCol="0" anchor="ctr"/>
+          <a:lstStyle/>
+          <a:p>
+            <a:pPr algn="ctr" indent="0" marL="0">
+              <a:buNone/>
+            </a:pPr>
+            <a:r>
+              <a:rPr lang="en-US" sz="1800" b="1" dirty="0">
+                <a:solidFill>
+                  <a:srgbClr val="FFFFFF"/>
+                </a:solidFill>
+                <a:latin typeface="Inter" pitchFamily="34" charset="0"/>
+                <a:ea typeface="Inter" pitchFamily="34" charset="-122"/>
+                <a:cs typeface="Inter" pitchFamily="34" charset="-120"/>
+              </a:rPr>
+              <a:t>✓</a:t>
+            </a:r>
+            <a:endParaRPr lang="en-US" sz="1800" dirty="0"/>
+          </a:p>
+        </p:txBody>
+      </p:sp>
+      <p:sp>
+        <p:nvSpPr>
+          <p:cNvPr id="10" name="Text 8"/>
+          <p:cNvSpPr txBox="1"/>
+          <p:nvPr/>
+        </p:nvSpPr>
+        <p:spPr>
+          <a:xfrm>
+            <a:off x="1097280" y="1929384"/>
+            <a:ext cx="7589520" cy="292608"/>
+          </a:xfrm>
+          <a:prstGeom prst="rect">
+            <a:avLst/>
+          </a:prstGeom>
+          <a:noFill/>
+          <a:ln/>
+        </p:spPr>
+        <p:txBody>
+          <a:bodyPr wrap="square" lIns="0" tIns="0" rIns="0" bIns="0" rtlCol="0" anchor="ctr"/>
+          <a:lstStyle/>
+          <a:p>
+            <a:pPr indent="0" marL="0">
+              <a:buNone/>
+            </a:pPr>
+            <a:r>
+              <a:rPr lang="en-US" sz="1600" b="1" dirty="0">
+                <a:solidFill>
+                  <a:srgbClr val="1B2533"/>
+                </a:solidFill>
+                <a:latin typeface="Inter" pitchFamily="34" charset="0"/>
+                <a:ea typeface="Inter" pitchFamily="34" charset="-122"/>
+                <a:cs typeface="Inter" pitchFamily="34" charset="-120"/>
+              </a:rPr>
+              <a:t>24 people on the link — confirmed</a:t>
+            </a:r>
+            <a:endParaRPr lang="en-US" sz="1600" dirty="0"/>
+          </a:p>
+        </p:txBody>
+      </p:sp>
+      <p:sp>
+        <p:nvSpPr>
+          <p:cNvPr id="11" name="Text 9"/>
+          <p:cNvSpPr txBox="1"/>
+          <p:nvPr/>
+        </p:nvSpPr>
+        <p:spPr>
+          <a:xfrm>
+            <a:off x="1097280" y="2212848"/>
+            <a:ext cx="7589520" cy="274320"/>
+          </a:xfrm>
+          <a:prstGeom prst="rect">
+            <a:avLst/>
+          </a:prstGeom>
+          <a:noFill/>
+          <a:ln/>
+        </p:spPr>
+        <p:txBody>
+          <a:bodyPr wrap="square" lIns="0" tIns="0" rIns="0" bIns="0" rtlCol="0" anchor="ctr"/>
+          <a:lstStyle/>
+          <a:p>
+            <a:pPr indent="0" marL="0">
+              <a:buNone/>
+            </a:pPr>
+            <a:r>
+              <a:rPr lang="en-US" sz="1300" dirty="0">
+                <a:solidFill>
+                  <a:srgbClr val="5B6778"/>
+                </a:solidFill>
+                <a:latin typeface="Inter" pitchFamily="34" charset="0"/>
+                <a:ea typeface="Inter" pitchFamily="34" charset="-122"/>
+                <a:cs typeface="Inter" pitchFamily="34" charset="-120"/>
+              </a:rPr>
+              <a:t>Four more than today.</a:t>
+            </a:r>
+            <a:endParaRPr lang="en-US" sz="1300" dirty="0"/>
+          </a:p>
+        </p:txBody>
+      </p:sp>
+      <p:sp>
+        <p:nvSpPr>
+          <p:cNvPr id="12" name="Shape 10"/>
+          <p:cNvSpPr/>
+          <p:nvPr/>
+        </p:nvSpPr>
+        <p:spPr>
+          <a:xfrm>
+            <a:off x="457200" y="2606040"/>
+            <a:ext cx="457200" cy="457200"/>
+          </a:xfrm>
+          <a:prstGeom prst="ellipse">
+            <a:avLst/>
+          </a:prstGeom>
+          <a:solidFill>
+            <a:srgbClr val="1E7B4B"/>
+          </a:solidFill>
+          <a:ln w="12700">
+            <a:solidFill>
+              <a:srgbClr val="1E7B4B"/>
+            </a:solidFill>
+            <a:prstDash val="solid"/>
+          </a:ln>
+        </p:spPr>
+      </p:sp>
+      <p:sp>
+        <p:nvSpPr>
+          <p:cNvPr id="13" name="Text 11"/>
+          <p:cNvSpPr txBox="1"/>
+          <p:nvPr/>
+        </p:nvSpPr>
+        <p:spPr>
+          <a:xfrm>
+            <a:off x="457200" y="2606040"/>
+            <a:ext cx="457200" cy="457200"/>
+          </a:xfrm>
+          <a:prstGeom prst="rect">
+            <a:avLst/>
+          </a:prstGeom>
+          <a:noFill/>
+          <a:ln/>
+        </p:spPr>
+        <p:txBody>
+          <a:bodyPr wrap="square" lIns="0" tIns="0" rIns="0" bIns="0" rtlCol="0" anchor="ctr"/>
+          <a:lstStyle/>
+          <a:p>
+            <a:pPr algn="ctr" indent="0" marL="0">
+              <a:buNone/>
+            </a:pPr>
+            <a:r>
+              <a:rPr lang="en-US" sz="1800" b="1" dirty="0">
+                <a:solidFill>
+                  <a:srgbClr val="FFFFFF"/>
+                </a:solidFill>
+                <a:latin typeface="Inter" pitchFamily="34" charset="0"/>
+                <a:ea typeface="Inter" pitchFamily="34" charset="-122"/>
+                <a:cs typeface="Inter" pitchFamily="34" charset="-120"/>
+              </a:rPr>
+              <a:t>✓</a:t>
+            </a:r>
+            <a:endParaRPr lang="en-US" sz="1800" dirty="0"/>
+          </a:p>
+        </p:txBody>
+      </p:sp>
+      <p:sp>
+        <p:nvSpPr>
+          <p:cNvPr id="14" name="Text 12"/>
+          <p:cNvSpPr txBox="1"/>
+          <p:nvPr/>
+        </p:nvSpPr>
+        <p:spPr>
+          <a:xfrm>
+            <a:off x="1097280" y="2569464"/>
+            <a:ext cx="7589520" cy="292608"/>
+          </a:xfrm>
+          <a:prstGeom prst="rect">
+            <a:avLst/>
+          </a:prstGeom>
+          <a:noFill/>
+          <a:ln/>
+        </p:spPr>
+        <p:txBody>
+          <a:bodyPr wrap="square" lIns="0" tIns="0" rIns="0" bIns="0" rtlCol="0" anchor="ctr"/>
+          <a:lstStyle/>
+          <a:p>
+            <a:pPr indent="0" marL="0">
+              <a:buNone/>
+            </a:pPr>
+            <a:r>
+              <a:rPr lang="en-US" sz="1600" b="1" dirty="0">
+                <a:solidFill>
+                  <a:srgbClr val="1B2533"/>
+                </a:solidFill>
+                <a:latin typeface="Inter" pitchFamily="34" charset="0"/>
+                <a:ea typeface="Inter" pitchFamily="34" charset="-122"/>
+                <a:cs typeface="Inter" pitchFamily="34" charset="-120"/>
+              </a:rPr>
+              <a:t>Sunday cover — confirmed</a:t>
+            </a:r>
+            <a:endParaRPr lang="en-US" sz="1600" dirty="0"/>
+          </a:p>
+        </p:txBody>
+      </p:sp>
+      <p:sp>
+        <p:nvSpPr>
+          <p:cNvPr id="15" name="Text 13"/>
+          <p:cNvSpPr txBox="1"/>
+          <p:nvPr/>
+        </p:nvSpPr>
+        <p:spPr>
+          <a:xfrm>
+            <a:off x="1097280" y="2852928"/>
+            <a:ext cx="7589520" cy="274320"/>
+          </a:xfrm>
+          <a:prstGeom prst="rect">
+            <a:avLst/>
+          </a:prstGeom>
+          <a:noFill/>
+          <a:ln/>
+        </p:spPr>
+        <p:txBody>
+          <a:bodyPr wrap="square" lIns="0" tIns="0" rIns="0" bIns="0" rtlCol="0" anchor="ctr"/>
+          <a:lstStyle/>
+          <a:p>
+            <a:pPr indent="0" marL="0">
+              <a:buNone/>
+            </a:pPr>
+            <a:r>
+              <a:rPr lang="en-US" sz="1300" dirty="0">
+                <a:solidFill>
+                  <a:srgbClr val="5B6778"/>
+                </a:solidFill>
+                <a:latin typeface="Inter" pitchFamily="34" charset="0"/>
+                <a:ea typeface="Inter" pitchFamily="34" charset="-122"/>
+                <a:cs typeface="Inter" pitchFamily="34" charset="-120"/>
+              </a:rPr>
+              <a:t>Ten on a Sunday, worked as overtime, as today.</a:t>
+            </a:r>
+            <a:endParaRPr lang="en-US" sz="1300" dirty="0"/>
+          </a:p>
+        </p:txBody>
+      </p:sp>
+      <p:sp>
+        <p:nvSpPr>
+          <p:cNvPr id="16" name="Shape 14"/>
+          <p:cNvSpPr/>
+          <p:nvPr/>
+        </p:nvSpPr>
+        <p:spPr>
+          <a:xfrm>
+            <a:off x="457200" y="3246120"/>
+            <a:ext cx="457200" cy="457200"/>
           </a:xfrm>
           <a:prstGeom prst="ellipse">
             <a:avLst/>
@@ -7796,40 +8321,55 @@
           </a:ln>
         </p:spPr>
       </p:sp>
-      <p:pic>
-        <p:nvPicPr>
-          <p:cNvPr id="3" name="Image 0" descr="preencoded.png">    </p:cNvPr>
-          <p:cNvPicPr>
-            <a:picLocks noChangeAspect="1"/>
-          </p:cNvPicPr>
-          <p:nvPr/>
-        </p:nvPicPr>
-        <p:blipFill>
-          <a:blip r:embed="rId1"/>
-          <a:stretch>
-            <a:fillRect/>
-          </a:stretch>
-        </p:blipFill>
-        <p:spPr>
-          <a:xfrm>
-            <a:off x="709574" y="801014"/>
-            <a:ext cx="409651" cy="409651"/>
-          </a:xfrm>
-          <a:prstGeom prst="rect">
-            <a:avLst/>
-          </a:prstGeom>
-        </p:spPr>
-      </p:pic>
-      <p:sp>
-        <p:nvSpPr>
-          <p:cNvPr id="4" name="Text 1"/>
-          <p:cNvSpPr txBox="1"/>
-          <p:nvPr/>
-        </p:nvSpPr>
-        <p:spPr>
-          <a:xfrm>
-            <a:off x="548640" y="1600200"/>
-            <a:ext cx="8046720" cy="731520"/>
+      <p:sp>
+        <p:nvSpPr>
+          <p:cNvPr id="17" name="Text 15"/>
+          <p:cNvSpPr txBox="1"/>
+          <p:nvPr/>
+        </p:nvSpPr>
+        <p:spPr>
+          <a:xfrm>
+            <a:off x="457200" y="3246120"/>
+            <a:ext cx="457200" cy="457200"/>
+          </a:xfrm>
+          <a:prstGeom prst="rect">
+            <a:avLst/>
+          </a:prstGeom>
+          <a:noFill/>
+          <a:ln/>
+        </p:spPr>
+        <p:txBody>
+          <a:bodyPr wrap="square" lIns="0" tIns="0" rIns="0" bIns="0" rtlCol="0" anchor="ctr"/>
+          <a:lstStyle/>
+          <a:p>
+            <a:pPr algn="ctr" indent="0" marL="0">
+              <a:buNone/>
+            </a:pPr>
+            <a:r>
+              <a:rPr lang="en-US" sz="1800" b="1" dirty="0">
+                <a:solidFill>
+                  <a:srgbClr val="001E3C"/>
+                </a:solidFill>
+                <a:latin typeface="Inter" pitchFamily="34" charset="0"/>
+                <a:ea typeface="Inter" pitchFamily="34" charset="-122"/>
+                <a:cs typeface="Inter" pitchFamily="34" charset="-120"/>
+              </a:rPr>
+              <a:t>?</a:t>
+            </a:r>
+            <a:endParaRPr lang="en-US" sz="1800" dirty="0"/>
+          </a:p>
+        </p:txBody>
+      </p:sp>
+      <p:sp>
+        <p:nvSpPr>
+          <p:cNvPr id="18" name="Text 16"/>
+          <p:cNvSpPr txBox="1"/>
+          <p:nvPr/>
+        </p:nvSpPr>
+        <p:spPr>
+          <a:xfrm>
+            <a:off x="1097280" y="3209544"/>
+            <a:ext cx="7589520" cy="292608"/>
           </a:xfrm>
           <a:prstGeom prst="rect">
             <a:avLst/>
@@ -7845,115 +8385,133 @@
               <a:buNone/>
             </a:pPr>
             <a:r>
-              <a:rPr lang="en-US" sz="4000" b="1" dirty="0">
-                <a:solidFill>
-                  <a:srgbClr val="FFFFFF"/>
-                </a:solidFill>
-                <a:latin typeface="Inter" pitchFamily="34" charset="0"/>
-                <a:ea typeface="Inter" pitchFamily="34" charset="-122"/>
-                <a:cs typeface="Inter" pitchFamily="34" charset="-120"/>
-              </a:rPr>
-              <a:t>The detail</a:t>
-            </a:r>
-            <a:endParaRPr lang="en-US" sz="4000" dirty="0"/>
-          </a:p>
-        </p:txBody>
-      </p:sp>
-      <p:sp>
-        <p:nvSpPr>
-          <p:cNvPr id="5" name="Text 2"/>
-          <p:cNvSpPr txBox="1"/>
-          <p:nvPr/>
-        </p:nvSpPr>
-        <p:spPr>
-          <a:xfrm>
-            <a:off x="548640" y="2468880"/>
-            <a:ext cx="8046720" cy="1463040"/>
-          </a:xfrm>
-          <a:prstGeom prst="rect">
-            <a:avLst/>
-          </a:prstGeom>
-          <a:noFill/>
-          <a:ln/>
-        </p:spPr>
-        <p:txBody>
-          <a:bodyPr wrap="square" lIns="0" tIns="0" rIns="0" bIns="0" rtlCol="0" anchor="ctr"/>
-          <a:lstStyle/>
-          <a:p>
-            <a:pPr marL="342900" indent="-342900">
-              <a:spcAft>
-                <a:spcPts val="800"/>
-              </a:spcAft>
-              <a:buSzPct val="100000"/>
-              <a:buChar char="•"/>
-            </a:pPr>
-            <a:r>
-              <a:rPr lang="en-US" sz="1800" dirty="0">
-                <a:solidFill>
-                  <a:srgbClr val="FFFFFF"/>
-                </a:solidFill>
-                <a:latin typeface="Inter" pitchFamily="34" charset="0"/>
-                <a:ea typeface="Inter" pitchFamily="34" charset="-122"/>
-                <a:cs typeface="Inter" pitchFamily="34" charset="-120"/>
-              </a:rPr>
-              <a:t>Every week of the link, day by day</a:t>
+              <a:rPr lang="en-US" sz="1600" b="1" dirty="0">
+                <a:solidFill>
+                  <a:srgbClr val="1B2533"/>
+                </a:solidFill>
+                <a:latin typeface="Inter" pitchFamily="34" charset="0"/>
+                <a:ea typeface="Inter" pitchFamily="34" charset="-122"/>
+                <a:cs typeface="Inter" pitchFamily="34" charset="-120"/>
+              </a:rPr>
+              <a:t>To decide: which link we use</a:t>
+            </a:r>
+            <a:endParaRPr lang="en-US" sz="1600" dirty="0"/>
+          </a:p>
+        </p:txBody>
+      </p:sp>
+      <p:sp>
+        <p:nvSpPr>
+          <p:cNvPr id="19" name="Text 17"/>
+          <p:cNvSpPr txBox="1"/>
+          <p:nvPr/>
+        </p:nvSpPr>
+        <p:spPr>
+          <a:xfrm>
+            <a:off x="1097280" y="3493008"/>
+            <a:ext cx="7589520" cy="274320"/>
+          </a:xfrm>
+          <a:prstGeom prst="rect">
+            <a:avLst/>
+          </a:prstGeom>
+          <a:noFill/>
+          <a:ln/>
+        </p:spPr>
+        <p:txBody>
+          <a:bodyPr wrap="square" lIns="0" tIns="0" rIns="0" bIns="0" rtlCol="0" anchor="ctr"/>
+          <a:lstStyle/>
+          <a:p>
+            <a:pPr indent="0" marL="0">
+              <a:buNone/>
+            </a:pPr>
+            <a:r>
+              <a:rPr lang="en-US" sz="1300" dirty="0">
+                <a:solidFill>
+                  <a:srgbClr val="5B6778"/>
+                </a:solidFill>
+                <a:latin typeface="Inter" pitchFamily="34" charset="0"/>
+                <a:ea typeface="Inter" pitchFamily="34" charset="-122"/>
+                <a:cs typeface="Inter" pitchFamily="34" charset="-120"/>
+              </a:rPr>
+              <a:t>Colleagues’ views come first.</a:t>
+            </a:r>
+            <a:endParaRPr lang="en-US" sz="1300" dirty="0"/>
+          </a:p>
+        </p:txBody>
+      </p:sp>
+      <p:sp>
+        <p:nvSpPr>
+          <p:cNvPr id="20" name="Shape 18"/>
+          <p:cNvSpPr/>
+          <p:nvPr/>
+        </p:nvSpPr>
+        <p:spPr>
+          <a:xfrm>
+            <a:off x="457200" y="3886200"/>
+            <a:ext cx="457200" cy="457200"/>
+          </a:xfrm>
+          <a:prstGeom prst="ellipse">
+            <a:avLst/>
+          </a:prstGeom>
+          <a:solidFill>
+            <a:srgbClr val="F5C800"/>
+          </a:solidFill>
+          <a:ln w="12700">
+            <a:solidFill>
+              <a:srgbClr val="F5C800"/>
+            </a:solidFill>
+            <a:prstDash val="solid"/>
+          </a:ln>
+        </p:spPr>
+      </p:sp>
+      <p:sp>
+        <p:nvSpPr>
+          <p:cNvPr id="21" name="Text 19"/>
+          <p:cNvSpPr txBox="1"/>
+          <p:nvPr/>
+        </p:nvSpPr>
+        <p:spPr>
+          <a:xfrm>
+            <a:off x="457200" y="3886200"/>
+            <a:ext cx="457200" cy="457200"/>
+          </a:xfrm>
+          <a:prstGeom prst="rect">
+            <a:avLst/>
+          </a:prstGeom>
+          <a:noFill/>
+          <a:ln/>
+        </p:spPr>
+        <p:txBody>
+          <a:bodyPr wrap="square" lIns="0" tIns="0" rIns="0" bIns="0" rtlCol="0" anchor="ctr"/>
+          <a:lstStyle/>
+          <a:p>
+            <a:pPr algn="ctr" indent="0" marL="0">
+              <a:buNone/>
+            </a:pPr>
+            <a:r>
+              <a:rPr lang="en-US" sz="1800" b="1" dirty="0">
+                <a:solidFill>
+                  <a:srgbClr val="001E3C"/>
+                </a:solidFill>
+                <a:latin typeface="Inter" pitchFamily="34" charset="0"/>
+                <a:ea typeface="Inter" pitchFamily="34" charset="-122"/>
+                <a:cs typeface="Inter" pitchFamily="34" charset="-120"/>
+              </a:rPr>
+              <a:t>?</a:t>
             </a:r>
             <a:endParaRPr lang="en-US" sz="1800" dirty="0"/>
           </a:p>
-          <a:p>
-            <a:pPr marL="342900" indent="-342900">
-              <a:spcAft>
-                <a:spcPts val="800"/>
-              </a:spcAft>
-              <a:buSzPct val="100000"/>
-              <a:buChar char="•"/>
-            </a:pPr>
-            <a:r>
-              <a:rPr lang="en-US" sz="1800" dirty="0">
-                <a:solidFill>
-                  <a:srgbClr val="FFFFFF"/>
-                </a:solidFill>
-                <a:latin typeface="Inter" pitchFamily="34" charset="0"/>
-                <a:ea typeface="Inter" pitchFamily="34" charset="-122"/>
-                <a:cs typeface="Inter" pitchFamily="34" charset="-120"/>
-              </a:rPr>
-              <a:t>Staff on duty hour by hour, against the trains</a:t>
-            </a:r>
-            <a:endParaRPr lang="en-US" sz="1800" dirty="0"/>
-          </a:p>
-          <a:p>
-            <a:pPr marL="342900" indent="-342900">
-              <a:spcAft>
-                <a:spcPts val="800"/>
-              </a:spcAft>
-              <a:buSzPct val="100000"/>
-              <a:buChar char="•"/>
-            </a:pPr>
-            <a:r>
-              <a:rPr lang="en-US" sz="1800" dirty="0">
-                <a:solidFill>
-                  <a:srgbClr val="FFFFFF"/>
-                </a:solidFill>
-                <a:latin typeface="Inter" pitchFamily="34" charset="0"/>
-                <a:ea typeface="Inter" pitchFamily="34" charset="-122"/>
-                <a:cs typeface="Inter" pitchFamily="34" charset="-120"/>
-              </a:rPr>
-              <a:t>Each staffing rule and each ORR factor, checked</a:t>
-            </a:r>
-            <a:endParaRPr lang="en-US" sz="1800" dirty="0"/>
-          </a:p>
-        </p:txBody>
-      </p:sp>
-      <p:sp>
-        <p:nvSpPr>
-          <p:cNvPr id="6" name="Text 3"/>
-          <p:cNvSpPr txBox="1"/>
-          <p:nvPr/>
-        </p:nvSpPr>
-        <p:spPr>
-          <a:xfrm>
-            <a:off x="548640" y="4343400"/>
-            <a:ext cx="8046720" cy="365760"/>
+        </p:txBody>
+      </p:sp>
+      <p:sp>
+        <p:nvSpPr>
+          <p:cNvPr id="22" name="Text 20"/>
+          <p:cNvSpPr txBox="1"/>
+          <p:nvPr/>
+        </p:nvSpPr>
+        <p:spPr>
+          <a:xfrm>
+            <a:off x="1097280" y="3849624"/>
+            <a:ext cx="7589520" cy="292608"/>
           </a:xfrm>
           <a:prstGeom prst="rect">
             <a:avLst/>
@@ -7969,17 +8527,95 @@
               <a:buNone/>
             </a:pPr>
             <a:r>
+              <a:rPr lang="en-US" sz="1600" b="1" dirty="0">
+                <a:solidFill>
+                  <a:srgbClr val="1B2533"/>
+                </a:solidFill>
+                <a:latin typeface="Inter" pitchFamily="34" charset="0"/>
+                <a:ea typeface="Inter" pitchFamily="34" charset="-122"/>
+                <a:cs typeface="Inter" pitchFamily="34" charset="-120"/>
+              </a:rPr>
+              <a:t>Then: who starts on which line</a:t>
+            </a:r>
+            <a:endParaRPr lang="en-US" sz="1600" dirty="0"/>
+          </a:p>
+        </p:txBody>
+      </p:sp>
+      <p:sp>
+        <p:nvSpPr>
+          <p:cNvPr id="23" name="Text 21"/>
+          <p:cNvSpPr txBox="1"/>
+          <p:nvPr/>
+        </p:nvSpPr>
+        <p:spPr>
+          <a:xfrm>
+            <a:off x="1097280" y="4133088"/>
+            <a:ext cx="7589520" cy="274320"/>
+          </a:xfrm>
+          <a:prstGeom prst="rect">
+            <a:avLst/>
+          </a:prstGeom>
+          <a:noFill/>
+          <a:ln/>
+        </p:spPr>
+        <p:txBody>
+          <a:bodyPr wrap="square" lIns="0" tIns="0" rIns="0" bIns="0" rtlCol="0" anchor="ctr"/>
+          <a:lstStyle/>
+          <a:p>
+            <a:pPr indent="0" marL="0">
+              <a:buNone/>
+            </a:pPr>
+            <a:r>
               <a:rPr lang="en-US" sz="1300" dirty="0">
                 <a:solidFill>
-                  <a:srgbClr val="F5C800"/>
-                </a:solidFill>
-                <a:latin typeface="Inter" pitchFamily="34" charset="0"/>
-                <a:ea typeface="Inter" pitchFamily="34" charset="-122"/>
-                <a:cs typeface="Inter" pitchFamily="34" charset="-120"/>
-              </a:rPr>
-              <a:t>All in the ten-page proposal sheet · Familiar Nine · F9-24-K31</a:t>
+                  <a:srgbClr val="5B6778"/>
+                </a:solidFill>
+                <a:latin typeface="Inter" pitchFamily="34" charset="0"/>
+                <a:ea typeface="Inter" pitchFamily="34" charset="-122"/>
+                <a:cs typeface="Inter" pitchFamily="34" charset="-120"/>
+              </a:rPr>
+              <a:t>Who begins on which week of the link.</a:t>
             </a:r>
             <a:endParaRPr lang="en-US" sz="1300" dirty="0"/>
+          </a:p>
+        </p:txBody>
+      </p:sp>
+      <p:sp>
+        <p:nvSpPr>
+          <p:cNvPr id="24" name="Text 22"/>
+          <p:cNvSpPr txBox="1"/>
+          <p:nvPr/>
+        </p:nvSpPr>
+        <p:spPr>
+          <a:xfrm>
+            <a:off x="457200" y="4800600"/>
+            <a:ext cx="8229600" cy="228600"/>
+          </a:xfrm>
+          <a:prstGeom prst="rect">
+            <a:avLst/>
+          </a:prstGeom>
+          <a:noFill/>
+          <a:ln/>
+        </p:spPr>
+        <p:txBody>
+          <a:bodyPr wrap="square" lIns="0" tIns="0" rIns="0" bIns="0" rtlCol="0" anchor="ctr"/>
+          <a:lstStyle/>
+          <a:p>
+            <a:pPr indent="0" marL="0">
+              <a:buNone/>
+            </a:pPr>
+            <a:r>
+              <a:rPr lang="en-US" sz="900" dirty="0">
+                <a:solidFill>
+                  <a:srgbClr val="5B6778"/>
+                </a:solidFill>
+                <a:latin typeface="Inter" pitchFamily="34" charset="0"/>
+                <a:ea typeface="Inter" pitchFamily="34" charset="-122"/>
+                <a:cs typeface="Inter" pitchFamily="34" charset="-120"/>
+              </a:rPr>
+              <a:t>Familiar Nine · December 2026 CEA link · for managers · 9</a:t>
+            </a:r>
+            <a:endParaRPr lang="en-US" sz="900" dirty="0"/>
           </a:p>
         </p:txBody>
       </p:sp>

--- a/docs/proposals/presentations/Familiar-Nine-for-managers.pptx
+++ b/docs/proposals/presentations/Familiar-Nine-for-managers.pptx
@@ -842,7 +842,7 @@
           <a:p>
             <a:r>
               <a:rPr lang="en-US" dirty="0"/>
-              <a:t>The headline figures only. Everything week-by-week, hour-by-hour and rule-by-rule is on the ten-page proposal sheet, and every number here was worked out from the rota by the Marylebone Roster app, not typed in.</a:t>
+              <a:t>The headline figures only. Everything week-by-week, hour-by-hour and rule-by-rule is on the nine-page proposal sheet, and every number here was worked out from the rota by the Marylebone Roster app, not typed in.</a:t>
             </a:r>
             <a:endParaRPr lang="en-US" dirty="0"/>
           </a:p>
@@ -1018,7 +1018,7 @@
           <a:p>
             <a:r>
               <a:rPr lang="en-US" dirty="0"/>
-              <a:t>The eleven rules are the December 2026 staffing levels, as confirmed: at least four at the open, three to the close, five after 22:00, 14 on a Saturday and 10 on a Sunday, four evenly spaced cover weeks, the ticket office in fixed pairs, 15:45 weekday closers, two on the floor at all times, handovers, 8–9 hour Sundays and no more shift times than today.</a:t>
+              <a:t>The eleven rules are the December 2026 staffing levels, as confirmed verbally: at least four at the open, three to the close, five after 22:00, 14 on a Saturday and 10 on a Sunday, four evenly spaced cover weeks, the ticket office in fixed pairs, 15:45 weekday closers, two on the floor at all times, handovers, 8–9 hour Sundays and no more shift times than today.</a:t>
             </a:r>
             <a:endParaRPr lang="en-US" dirty="0"/>
           </a:p>
@@ -2411,7 +2411,7 @@
                 <a:ea typeface="Inter" pitchFamily="34" charset="-122"/>
                 <a:cs typeface="Inter" pitchFamily="34" charset="-120"/>
               </a:rPr>
-              <a:t>All in the ten-page proposal sheet · Familiar Nine · F9-24-K31</a:t>
+              <a:t>All in the nine-page proposal sheet · Familiar Nine · F9-24-K31</a:t>
             </a:r>
             <a:endParaRPr lang="en-US" sz="1300" dirty="0"/>
           </a:p>
@@ -2813,7 +2813,7 @@
                 <a:ea typeface="Inter" pitchFamily="34" charset="-122"/>
                 <a:cs typeface="Inter" pitchFamily="34" charset="-120"/>
               </a:rPr>
-              <a:t>no overtime built in</a:t>
+              <a:t>no overtime Monday to Saturday</a:t>
             </a:r>
             <a:endParaRPr lang="en-US" sz="1300" dirty="0"/>
           </a:p>
@@ -5472,7 +5472,7 @@
                 <a:ea typeface="Inter" pitchFamily="34" charset="-122"/>
                 <a:cs typeface="Inter" pitchFamily="34" charset="-120"/>
               </a:rPr>
-              <a:t>Against the Office of Rail and Road’s good-practice list</a:t>
+              <a:t>Against the ORR’s good-practice list and rail-industry checks</a:t>
             </a:r>
             <a:endParaRPr lang="en-US" sz="1500" dirty="0"/>
           </a:p>
@@ -5616,7 +5616,7 @@
                 <a:ea typeface="Inter" pitchFamily="34" charset="-122"/>
                 <a:cs typeface="Inter" pitchFamily="34" charset="-120"/>
               </a:rPr>
-              <a:t>Avoidable fatigue patterns (ORR list)</a:t>
+              <a:t>Avoidable fatigue patterns (ORR and industry)</a:t>
             </a:r>
             <a:endParaRPr lang="en-US" sz="1400" dirty="0"/>
           </a:p>
@@ -6231,7 +6231,7 @@
                 <a:ea typeface="Inter" pitchFamily="34" charset="-122"/>
                 <a:cs typeface="Inter" pitchFamily="34" charset="-120"/>
               </a:rPr>
-              <a:t>Early starts and a weekly rotation come with every link, so are not counted.</a:t>
+              <a:t>Early starts and weekly rotation come with every link. One check awaits Chiltern’s definition.</a:t>
             </a:r>
             <a:endParaRPr lang="en-US" sz="850" dirty="0"/>
           </a:p>
@@ -7649,7 +7649,7 @@
                 <a:ea typeface="Inter" pitchFamily="34" charset="-122"/>
                 <a:cs typeface="Inter" pitchFamily="34" charset="-120"/>
               </a:rPr>
-              <a:t>Four weeks off takes 15 days’ leave, not 14</a:t>
+              <a:t>Four whole weeks off (Sun–Sat) take 15 days’ leave, not 14</a:t>
             </a:r>
             <a:endParaRPr lang="en-US" sz="1300" dirty="0"/>
           </a:p>
@@ -7864,7 +7864,7 @@
                 <a:ea typeface="Inter" pitchFamily="34" charset="-122"/>
                 <a:cs typeface="Inter" pitchFamily="34" charset="-120"/>
               </a:rPr>
-              <a:t>Three things confirmed, two decisions left</a:t>
+              <a:t>Three things confirmed verbally, two decisions left</a:t>
             </a:r>
             <a:endParaRPr lang="en-US" sz="1500" dirty="0"/>
           </a:p>
@@ -7967,7 +7967,7 @@
                 <a:ea typeface="Inter" pitchFamily="34" charset="-122"/>
                 <a:cs typeface="Inter" pitchFamily="34" charset="-120"/>
               </a:rPr>
-              <a:t>Staffing levels — confirmed</a:t>
+              <a:t>Staffing levels — confirmed verbally</a:t>
             </a:r>
             <a:endParaRPr lang="en-US" sz="1600" dirty="0"/>
           </a:p>
@@ -8109,7 +8109,7 @@
                 <a:ea typeface="Inter" pitchFamily="34" charset="-122"/>
                 <a:cs typeface="Inter" pitchFamily="34" charset="-120"/>
               </a:rPr>
-              <a:t>24 people on the link — confirmed</a:t>
+              <a:t>24 people on the link — confirmed verbally</a:t>
             </a:r>
             <a:endParaRPr lang="en-US" sz="1600" dirty="0"/>
           </a:p>
@@ -8251,7 +8251,7 @@
                 <a:ea typeface="Inter" pitchFamily="34" charset="-122"/>
                 <a:cs typeface="Inter" pitchFamily="34" charset="-120"/>
               </a:rPr>
-              <a:t>Sunday cover — confirmed</a:t>
+              <a:t>Sunday cover — confirmed verbally</a:t>
             </a:r>
             <a:endParaRPr lang="en-US" sz="1600" dirty="0"/>
           </a:p>

--- a/docs/proposals/presentations/Familiar-Nine-for-managers.pptx
+++ b/docs/proposals/presentations/Familiar-Nine-for-managers.pptx
@@ -842,7 +842,7 @@
           <a:p>
             <a:r>
               <a:rPr lang="en-US" dirty="0"/>
-              <a:t>The headline figures only. Everything week-by-week, hour-by-hour and rule-by-rule is on the nine-page proposal sheet, and every number here was worked out from the rota by the Marylebone Roster app, not typed in.</a:t>
+              <a:t>The headline figures only. Everything week-by-week, hour-by-hour and rule-by-rule is on the eight-page proposal sheet, and every number here was worked out from the rota by the Marylebone Roster app, not typed in.</a:t>
             </a:r>
             <a:endParaRPr lang="en-US" dirty="0"/>
           </a:p>
@@ -1018,7 +1018,7 @@
           <a:p>
             <a:r>
               <a:rPr lang="en-US" dirty="0"/>
-              <a:t>The eleven rules are the December 2026 staffing levels, as confirmed verbally: at least four at the open, three to the close, five after 22:00, 14 on a Saturday and 10 on a Sunday, four evenly spaced cover weeks, the ticket office in fixed pairs, 15:45 weekday closers, two on the floor at all times, handovers, 8–9 hour Sundays and no more shift times than today.</a:t>
+              <a:t>The eleven rules are the December 2026 staffing levels, as confirmed: at least four at the open, three to the close, five after 22:00, 14 on a Saturday and 10 on a Sunday, four evenly spaced cover weeks, the ticket office in fixed pairs, 15:45 weekday closers, two on the floor at all times, handovers, 8–9 hour Sundays and no more shift times than today.</a:t>
             </a:r>
             <a:endParaRPr lang="en-US" dirty="0"/>
           </a:p>
@@ -2411,7 +2411,7 @@
                 <a:ea typeface="Inter" pitchFamily="34" charset="-122"/>
                 <a:cs typeface="Inter" pitchFamily="34" charset="-120"/>
               </a:rPr>
-              <a:t>All in the nine-page proposal sheet · Familiar Nine · F9-24-K31</a:t>
+              <a:t>All in the eight-page proposal sheet · Familiar Nine · F9-24-K31</a:t>
             </a:r>
             <a:endParaRPr lang="en-US" sz="1300" dirty="0"/>
           </a:p>
@@ -2813,7 +2813,7 @@
                 <a:ea typeface="Inter" pitchFamily="34" charset="-122"/>
                 <a:cs typeface="Inter" pitchFamily="34" charset="-120"/>
               </a:rPr>
-              <a:t>no overtime Monday to Saturday</a:t>
+              <a:t>no overtime built in</a:t>
             </a:r>
             <a:endParaRPr lang="en-US" sz="1300" dirty="0"/>
           </a:p>
@@ -5472,7 +5472,7 @@
                 <a:ea typeface="Inter" pitchFamily="34" charset="-122"/>
                 <a:cs typeface="Inter" pitchFamily="34" charset="-120"/>
               </a:rPr>
-              <a:t>Against the ORR’s good-practice list and rail-industry checks</a:t>
+              <a:t>Against the Office of Rail and Road’s good-practice list</a:t>
             </a:r>
             <a:endParaRPr lang="en-US" sz="1500" dirty="0"/>
           </a:p>
@@ -5616,7 +5616,7 @@
                 <a:ea typeface="Inter" pitchFamily="34" charset="-122"/>
                 <a:cs typeface="Inter" pitchFamily="34" charset="-120"/>
               </a:rPr>
-              <a:t>Avoidable fatigue patterns (ORR and industry)</a:t>
+              <a:t>Avoidable fatigue patterns (ORR list)</a:t>
             </a:r>
             <a:endParaRPr lang="en-US" sz="1400" dirty="0"/>
           </a:p>
@@ -6231,7 +6231,7 @@
                 <a:ea typeface="Inter" pitchFamily="34" charset="-122"/>
                 <a:cs typeface="Inter" pitchFamily="34" charset="-120"/>
               </a:rPr>
-              <a:t>Early starts and weekly rotation come with every link. One check awaits Chiltern’s definition.</a:t>
+              <a:t>Early starts and a weekly rotation come with every link, so are not counted.</a:t>
             </a:r>
             <a:endParaRPr lang="en-US" sz="850" dirty="0"/>
           </a:p>
@@ -7649,7 +7649,7 @@
                 <a:ea typeface="Inter" pitchFamily="34" charset="-122"/>
                 <a:cs typeface="Inter" pitchFamily="34" charset="-120"/>
               </a:rPr>
-              <a:t>Four whole weeks off (Sun–Sat) take 15 days’ leave, not 14</a:t>
+              <a:t>Four weeks off takes 15 days’ leave, not 14</a:t>
             </a:r>
             <a:endParaRPr lang="en-US" sz="1300" dirty="0"/>
           </a:p>
@@ -7864,7 +7864,7 @@
                 <a:ea typeface="Inter" pitchFamily="34" charset="-122"/>
                 <a:cs typeface="Inter" pitchFamily="34" charset="-120"/>
               </a:rPr>
-              <a:t>Three things confirmed verbally, two decisions left</a:t>
+              <a:t>Three things confirmed, two decisions left</a:t>
             </a:r>
             <a:endParaRPr lang="en-US" sz="1500" dirty="0"/>
           </a:p>
@@ -7967,7 +7967,7 @@
                 <a:ea typeface="Inter" pitchFamily="34" charset="-122"/>
                 <a:cs typeface="Inter" pitchFamily="34" charset="-120"/>
               </a:rPr>
-              <a:t>Staffing levels — confirmed verbally</a:t>
+              <a:t>Staffing levels — confirmed</a:t>
             </a:r>
             <a:endParaRPr lang="en-US" sz="1600" dirty="0"/>
           </a:p>
@@ -8109,7 +8109,7 @@
                 <a:ea typeface="Inter" pitchFamily="34" charset="-122"/>
                 <a:cs typeface="Inter" pitchFamily="34" charset="-120"/>
               </a:rPr>
-              <a:t>24 people on the link — confirmed verbally</a:t>
+              <a:t>24 people on the link — confirmed</a:t>
             </a:r>
             <a:endParaRPr lang="en-US" sz="1600" dirty="0"/>
           </a:p>
@@ -8251,7 +8251,7 @@
                 <a:ea typeface="Inter" pitchFamily="34" charset="-122"/>
                 <a:cs typeface="Inter" pitchFamily="34" charset="-120"/>
               </a:rPr>
-              <a:t>Sunday cover — confirmed verbally</a:t>
+              <a:t>Sunday cover — confirmed</a:t>
             </a:r>
             <a:endParaRPr lang="en-US" sz="1600" dirty="0"/>
           </a:p>

--- a/docs/proposals/presentations/Familiar-Nine-for-managers.pptx
+++ b/docs/proposals/presentations/Familiar-Nine-for-managers.pptx
@@ -842,7 +842,7 @@
           <a:p>
             <a:r>
               <a:rPr lang="en-US" dirty="0"/>
-              <a:t>The headline figures only. Everything week-by-week, hour-by-hour and rule-by-rule is on the ten-page proposal sheet, and every number here was worked out from the rota by the Marylebone Roster app, not typed in.</a:t>
+              <a:t>The headline figures only. Everything week-by-week, hour-by-hour and rule-by-rule is on the eight-page proposal sheet, and every number here was worked out from the rota by the Marylebone Roster app, not typed in.</a:t>
             </a:r>
             <a:endParaRPr lang="en-US" dirty="0"/>
           </a:p>
@@ -2411,7 +2411,7 @@
                 <a:ea typeface="Inter" pitchFamily="34" charset="-122"/>
                 <a:cs typeface="Inter" pitchFamily="34" charset="-120"/>
               </a:rPr>
-              <a:t>All in the ten-page proposal sheet · Familiar Nine · F9-24-K31</a:t>
+              <a:t>All in the eight-page proposal sheet · Familiar Nine · F9-24-K31</a:t>
             </a:r>
             <a:endParaRPr lang="en-US" sz="1300" dirty="0"/>
           </a:p>

--- a/docs/proposals/presentations/Familiar-Nine-for-managers.pptx
+++ b/docs/proposals/presentations/Familiar-Nine-for-managers.pptx
@@ -1282,7 +1282,7 @@
           <a:p>
             <a:r>
               <a:rPr lang="en-US" dirty="0"/>
-              <a:t>Every working week pays exactly 35 hours Monday to Saturday — 42,000 minutes across the link — so no overtime is built into the rota. Sunday is not contracted, so the ten Sunday duties are worked as rest-day overtime, exactly as today’s eight are. Cover weeks stay at four, which is a slightly smaller share of a longer link: worth deciding deliberately. The two extra Sunday overtime duties a week come from the confirmed Sunday staffing of ten, not from Familiar Nine — any link that meets the rules needs them.</a:t>
+              <a:t>Every working week pays exactly 35 hours Monday to Saturday — 42,000 minutes across the link — so no overtime is needed to balance the Monday-to-Saturday week. Ask the room: are four cover weeks enough for leave and sickness in a 24-person link? Sunday is not contracted, so the ten Sunday duties are worked as rest-day overtime, exactly as today’s eight are. Cover weeks stay at four, which is a slightly smaller share of a longer link: worth deciding deliberately. The two extra Sunday overtime duties a week come from the confirmed Sunday staffing of ten, not from Familiar Nine — any link that meets the rules needs them.</a:t>
             </a:r>
             <a:endParaRPr lang="en-US" dirty="0"/>
           </a:p>
@@ -2813,7 +2813,7 @@
                 <a:ea typeface="Inter" pitchFamily="34" charset="-122"/>
                 <a:cs typeface="Inter" pitchFamily="34" charset="-120"/>
               </a:rPr>
-              <a:t>no overtime built in</a:t>
+              <a:t>Monday to Saturday</a:t>
             </a:r>
             <a:endParaRPr lang="en-US" sz="1300" dirty="0"/>
           </a:p>

--- a/docs/proposals/presentations/Familiar-Nine-for-managers.pptx
+++ b/docs/proposals/presentations/Familiar-Nine-for-managers.pptx
@@ -288,7 +288,7 @@
                   <c:v>15</c:v>
                 </c:pt>
                 <c:pt idx="2">
-                  <c:v>31.3</c:v>
+                  <c:v>26.4</c:v>
                 </c:pt>
               </c:numCache>
             </c:numRef>
@@ -1458,7 +1458,7 @@
           <a:p>
             <a:r>
               <a:rPr lang="en-US" dirty="0"/>
-              <a:t>This is the case in one slide. It meets every December staffing rule, and it was built to keep the shift times people already work wherever that cost little — nine of its fifteen are worked today. The honest cost is late finishes: the December staffing needs three to the close and five after 22:00, so finishes at 23:00 or later go from about 39 to 59 a year each. Every closing shift is 30 to 45 minutes shorter, which softens it. Six shift times are new.</a:t>
+              <a:t>This is the case in one slide. It meets every December staffing rule, and it was built to keep the shift times people already work wherever that cost little — eight of its sixteen are worked today. The honest cost is late finishes: the December staffing needs three to the close and five after 22:00, so finishes at 23:00 or later go from about 39 to 59 a year each. Every closing shift is 30 to 45 minutes shorter, which softens it. Six shift times are new.</a:t>
             </a:r>
             <a:endParaRPr lang="en-US" dirty="0"/>
           </a:p>
@@ -2167,7 +2167,7 @@
                 <a:ea typeface="Inter" pitchFamily="34" charset="-122"/>
                 <a:cs typeface="Inter" pitchFamily="34" charset="-120"/>
               </a:rPr>
-              <a:t>For managers · 24 weeks · code F9-24-K31 · the full proposal sheet has the detail</a:t>
+              <a:t>For managers · 24 weeks · code F9-24-K31s · the full proposal sheet has the detail</a:t>
             </a:r>
             <a:endParaRPr lang="en-US" sz="1300" dirty="0"/>
           </a:p>
@@ -2411,7 +2411,7 @@
                 <a:ea typeface="Inter" pitchFamily="34" charset="-122"/>
                 <a:cs typeface="Inter" pitchFamily="34" charset="-120"/>
               </a:rPr>
-              <a:t>All in the eight-page proposal sheet · Familiar Nine · F9-24-K31</a:t>
+              <a:t>All in the eight-page proposal sheet · Familiar Nine · F9-24-K31s</a:t>
             </a:r>
             <a:endParaRPr lang="en-US" sz="1300" dirty="0"/>
           </a:p>
@@ -6792,7 +6792,7 @@
                 <a:ea typeface="Inter" pitchFamily="34" charset="-122"/>
                 <a:cs typeface="Inter" pitchFamily="34" charset="-120"/>
               </a:rPr>
-              <a:t>9 of its 15 shift times are worked today</a:t>
+              <a:t>8 of its 16 shift times are worked today</a:t>
             </a:r>
             <a:endParaRPr lang="en-US" sz="1500" dirty="0"/>
           </a:p>
@@ -7410,7 +7410,7 @@
                 <a:ea typeface="Inter" pitchFamily="34" charset="-122"/>
                 <a:cs typeface="Inter" pitchFamily="34" charset="-120"/>
               </a:rPr>
-              <a:t>9 of the 15 shift times already worked</a:t>
+              <a:t>8 of the 16 shift times already worked</a:t>
             </a:r>
             <a:endParaRPr lang="en-US" sz="1300" dirty="0"/>
           </a:p>
@@ -7586,7 +7586,7 @@
                 <a:ea typeface="Inter" pitchFamily="34" charset="-122"/>
                 <a:cs typeface="Inter" pitchFamily="34" charset="-120"/>
               </a:rPr>
-              <a:t>6 new shift times to learn</a:t>
+              <a:t>8 new shift times to learn</a:t>
             </a:r>
             <a:endParaRPr lang="en-US" sz="1300" dirty="0"/>
           </a:p>

--- a/docs/proposals/presentations/Familiar-Nine-for-managers.pptx
+++ b/docs/proposals/presentations/Familiar-Nine-for-managers.pptx
@@ -1018,7 +1018,7 @@
           <a:p>
             <a:r>
               <a:rPr lang="en-US" dirty="0"/>
-              <a:t>The eleven rules are the December 2026 staffing levels, as confirmed: at least four at the open, three to the close, five after 22:00, 14 on a Saturday and 10 on a Sunday, four evenly spaced cover weeks, the ticket office in fixed pairs, 15:45 weekday closers, two on the floor at all times, handovers, 8–9 hour Sundays and no more shift times than today.</a:t>
+              <a:t>The nine rules are the December 2026 rules, as confirmed: at least four at the open, three to the close, five after 22:00, 10 on a Sunday, the ticket office in fixed pairs, two on the floor at all times, handovers, 8–9 hour Sundays and no more shift times than today. Behind them sit three flexible rules that are aimed for when designing but not scored on: 14 on a Saturday, cover weeks evenly spaced, and weekday closers starting at 15:45. Familiar Nine meets all three.</a:t>
             </a:r>
             <a:endParaRPr lang="en-US" dirty="0"/>
           </a:p>
@@ -1106,7 +1106,7 @@
           <a:p>
             <a:r>
               <a:rPr lang="en-US" dirty="0"/>
-              <a:t>Today’s link meets 4 of the 11 December rules; Familiar Nine meets all 11. Someone finishing at exactly 22:00 is not counted as still on after 22:00. The floor figure leaves out the ticket office, except its second person at the quiet ends of the day.</a:t>
+              <a:t>Today’s link meets 4 of the 9 December rules; Familiar Nine meets all 9, and the three flexible ones as well (14 on a Saturday, evenly spaced cover weeks, 15:45 weekday closers). Someone finishing at exactly 22:00 is not counted as still on after 22:00. The floor figure leaves out the ticket office, except its second person at the quiet ends of the day.</a:t>
             </a:r>
             <a:endParaRPr lang="en-US" dirty="0"/>
           </a:p>
@@ -1282,7 +1282,7 @@
           <a:p>
             <a:r>
               <a:rPr lang="en-US" dirty="0"/>
-              <a:t>Every working week pays exactly 35 hours Monday to Saturday — 42,000 minutes across the link — so no overtime is needed to balance the Monday-to-Saturday week. Ask the room: are four cover weeks enough for leave and sickness in a 24-person link? Sunday is not contracted, so the ten Sunday duties are worked as rest-day overtime, exactly as today’s eight are. Cover weeks stay at four, which is a slightly smaller share of a longer link: worth deciding deliberately. The two extra Sunday overtime duties a week come from the confirmed Sunday staffing of ten, not from Familiar Nine — any link that meets the rules needs them.</a:t>
+              <a:t>Working weeks average exactly 35 hours Monday to Saturday — 42,000 minutes across the 20 working weeks — so no overtime is needed to balance the Monday-to-Saturday week. Individual weeks range from 24h 30m to 41h 45m; only the average is the contract, as today. Ask the room: are four cover weeks enough for leave and sickness in a 24-person link? Sunday is not contracted, so the ten Sunday duties are worked as rest-day overtime, exactly as today’s eight are. Cover weeks stay at four, which is a slightly smaller share of a longer link: worth deciding deliberately. The two extra Sunday overtime duties a week come from the confirmed Sunday staffing of ten, not from Familiar Nine — any link that meets the rules needs them.</a:t>
             </a:r>
             <a:endParaRPr lang="en-US" dirty="0"/>
           </a:p>
@@ -1458,7 +1458,7 @@
           <a:p>
             <a:r>
               <a:rPr lang="en-US" dirty="0"/>
-              <a:t>This is the case in one slide. It meets every December staffing rule, and it was built to keep the shift times people already work wherever that cost little — eight of its sixteen are worked today. The honest cost is late finishes: the December staffing needs three to the close and five after 22:00, so finishes at 23:00 or later go from about 39 to 59 a year each. Every closing shift is 30 to 45 minutes shorter, which softens it. Six shift times are new.</a:t>
+              <a:t>This is the case in one slide. It meets every December staffing rule, and it was built to keep the shift times people already work wherever that cost little — eight of its sixteen are worked today. The honest cost is late finishes: the December staffing needs three to the close and five after 22:00, so finishes at 23:00 or later go from about 39 to 59 a year each. Every closing shift is 30 to 45 minutes shorter, which softens it. Eight shift times are new.</a:t>
             </a:r>
             <a:endParaRPr lang="en-US" dirty="0"/>
           </a:p>
@@ -2589,7 +2589,7 @@
                 <a:ea typeface="Inter" pitchFamily="34" charset="-122"/>
                 <a:cs typeface="Inter" pitchFamily="34" charset="-120"/>
               </a:rPr>
-              <a:t>11 of 11</a:t>
+              <a:t>9 of 9</a:t>
             </a:r>
             <a:endParaRPr lang="en-US" sz="3400" dirty="0"/>
           </a:p>
@@ -2920,7 +2920,7 @@
                 <a:ea typeface="Inter" pitchFamily="34" charset="-122"/>
                 <a:cs typeface="Inter" pitchFamily="34" charset="-120"/>
               </a:rPr>
-              <a:t>avoidable fatigue patterns</a:t>
+              <a:t>avoidable fatigue warnings</a:t>
             </a:r>
             <a:endParaRPr lang="en-US" sz="1500" dirty="0"/>
           </a:p>
@@ -3171,7 +3171,7 @@
                 <a:ea typeface="Inter" pitchFamily="34" charset="-122"/>
                 <a:cs typeface="Inter" pitchFamily="34" charset="-120"/>
               </a:rPr>
-              <a:t>Every staffing level met, within the contract, with no avoidable fatigue patterns.</a:t>
+              <a:t>Every staffing level met, within the contract, with no avoidable fatigue warnings.</a:t>
             </a:r>
             <a:endParaRPr lang="en-US" sz="1400" dirty="0"/>
           </a:p>
@@ -5472,7 +5472,7 @@
                 <a:ea typeface="Inter" pitchFamily="34" charset="-122"/>
                 <a:cs typeface="Inter" pitchFamily="34" charset="-120"/>
               </a:rPr>
-              <a:t>Against the Office of Rail and Road’s good-practice list</a:t>
+              <a:t>Against the Office of Rail and Road’s good-practice list and the rail industry’s own checks</a:t>
             </a:r>
             <a:endParaRPr lang="en-US" sz="1500" dirty="0"/>
           </a:p>
@@ -5616,7 +5616,7 @@
                 <a:ea typeface="Inter" pitchFamily="34" charset="-122"/>
                 <a:cs typeface="Inter" pitchFamily="34" charset="-120"/>
               </a:rPr>
-              <a:t>Avoidable fatigue patterns (ORR list)</a:t>
+              <a:t>Avoidable fatigue warnings (ORR + industry)</a:t>
             </a:r>
             <a:endParaRPr lang="en-US" sz="1400" dirty="0"/>
           </a:p>
@@ -6192,7 +6192,7 @@
                 <a:ea typeface="Inter" pitchFamily="34" charset="-122"/>
                 <a:cs typeface="Inter" pitchFamily="34" charset="-120"/>
               </a:rPr>
-              <a:t>Every limit met with room to spare, and no avoidable fatigue patterns.</a:t>
+              <a:t>Every limit met with room to spare, and no avoidable fatigue warnings.</a:t>
             </a:r>
             <a:endParaRPr lang="en-US" sz="1400" dirty="0"/>
           </a:p>
@@ -6483,7 +6483,7 @@
                 <a:ea typeface="Inter" pitchFamily="34" charset="-122"/>
                 <a:cs typeface="Inter" pitchFamily="34" charset="-120"/>
               </a:rPr>
-              <a:t>Meets all 11 December staffing rules</a:t>
+              <a:t>Meets all 9 December staffing rules, and all 3 flexible ones</a:t>
             </a:r>
             <a:endParaRPr lang="en-US" sz="1500" dirty="0"/>
           </a:p>
@@ -6998,7 +6998,7 @@
                 <a:ea typeface="Inter" pitchFamily="34" charset="-122"/>
                 <a:cs typeface="Inter" pitchFamily="34" charset="-120"/>
               </a:rPr>
-              <a:t>No avoidable fatigue patterns</a:t>
+              <a:t>No avoidable fatigue warnings</a:t>
             </a:r>
             <a:endParaRPr lang="en-US" sz="1500" dirty="0"/>
           </a:p>
@@ -7967,7 +7967,7 @@
                 <a:ea typeface="Inter" pitchFamily="34" charset="-122"/>
                 <a:cs typeface="Inter" pitchFamily="34" charset="-120"/>
               </a:rPr>
-              <a:t>Staffing levels — confirmed</a:t>
+              <a:t>December rules — confirmed</a:t>
             </a:r>
             <a:endParaRPr lang="en-US" sz="1600" dirty="0"/>
           </a:p>
@@ -8006,7 +8006,7 @@
                 <a:ea typeface="Inter" pitchFamily="34" charset="-122"/>
                 <a:cs typeface="Inter" pitchFamily="34" charset="-120"/>
               </a:rPr>
-              <a:t>The eleven December rules. Everything here is built on them.</a:t>
+              <a:t>The nine December rules. Everything here is built on them.</a:t>
             </a:r>
             <a:endParaRPr lang="en-US" sz="1300" dirty="0"/>
           </a:p>

--- a/docs/proposals/presentations/Familiar-Nine-for-managers.pptx
+++ b/docs/proposals/presentations/Familiar-Nine-for-managers.pptx
@@ -842,7 +842,7 @@
           <a:p>
             <a:r>
               <a:rPr lang="en-US" dirty="0"/>
-              <a:t>The headline figures only. Everything week-by-week, hour-by-hour and rule-by-rule is on the eight-page proposal sheet, and every number here was worked out from the rota by the Marylebone Roster app, not typed in.</a:t>
+              <a:t>The headline figures only. Everything week-by-week, hour-by-hour and rule-by-rule is on the eight-page proposal sheet, and every number here comes from the Marylebone Roster app’s rota calculations and has been independently checked; the slides present those results by hand.</a:t>
             </a:r>
             <a:endParaRPr lang="en-US" dirty="0"/>
           </a:p>
@@ -1194,7 +1194,7 @@
           <a:p>
             <a:r>
               <a:rPr lang="en-US" dirty="0"/>
-              <a:t>The figure compares, hour by hour, the share of the day’s floor staff on duty with the share of the day’s train movements. 0 would be a perfect match. It is a guide to shape, not a staffing requirement — the rules on the previous slide are the requirement.</a:t>
+              <a:t>The figure compares, hour by hour, the share of the day’s floor staff on duty with the share of the day’s train service, each train weighted by its length. 0 would be a perfect match. It is a guide to shape, not a staffing requirement — the rules on the previous slide are the requirement.</a:t>
             </a:r>
             <a:endParaRPr lang="en-US" dirty="0"/>
           </a:p>
@@ -4415,7 +4415,7 @@
                 <a:ea typeface="Inter" pitchFamily="34" charset="-122"/>
                 <a:cs typeface="Inter" pitchFamily="34" charset="-120"/>
               </a:rPr>
-              <a:t>Staff are where the trains are — much closer to the December pattern, every day.</a:t>
+              <a:t>Staff are where the trains are — much closer to the December pattern on weekdays, Saturday and Sunday.</a:t>
             </a:r>
             <a:endParaRPr lang="en-US" sz="1400" dirty="0"/>
           </a:p>
@@ -6192,7 +6192,7 @@
                 <a:ea typeface="Inter" pitchFamily="34" charset="-122"/>
                 <a:cs typeface="Inter" pitchFamily="34" charset="-120"/>
               </a:rPr>
-              <a:t>Every limit met with room to spare, and no avoidable fatigue warnings.</a:t>
+              <a:t>The rest and run limits met with room to spare, and no avoidable fatigue warnings.</a:t>
             </a:r>
             <a:endParaRPr lang="en-US" sz="1400" dirty="0"/>
           </a:p>

--- a/docs/proposals/presentations/Familiar-Nine-for-managers.pptx
+++ b/docs/proposals/presentations/Familiar-Nine-for-managers.pptx
@@ -2314,7 +2314,7 @@
           <a:bodyPr wrap="square" lIns="0" tIns="0" rIns="0" bIns="0" rtlCol="0" anchor="ctr"/>
           <a:lstStyle/>
           <a:p>
-            <a:pPr marL="342900" indent="-342900">
+            <a:pPr marL="203200" indent="-203200">
               <a:spcAft>
                 <a:spcPts val="800"/>
               </a:spcAft>
@@ -2335,7 +2335,7 @@
             <a:endParaRPr lang="en-US" sz="1800" dirty="0"/>
           </a:p>
           <a:p>
-            <a:pPr marL="342900" indent="-342900">
+            <a:pPr marL="203200" indent="-203200">
               <a:spcAft>
                 <a:spcPts val="800"/>
               </a:spcAft>
@@ -2356,7 +2356,7 @@
             <a:endParaRPr lang="en-US" sz="1800" dirty="0"/>
           </a:p>
           <a:p>
-            <a:pPr marL="342900" indent="-342900">
+            <a:pPr marL="203200" indent="-203200">
               <a:spcAft>
                 <a:spcPts val="800"/>
               </a:spcAft>
@@ -2372,7 +2372,7 @@
                 <a:ea typeface="Inter" pitchFamily="34" charset="-122"/>
                 <a:cs typeface="Inter" pitchFamily="34" charset="-120"/>
               </a:rPr>
-              <a:t>Each staffing rule and each ORR factor, checked</a:t>
+              <a:t>Every December rule and fatigue check, worked through</a:t>
             </a:r>
             <a:endParaRPr lang="en-US" sz="1800" dirty="0"/>
           </a:p>
@@ -2628,7 +2628,7 @@
                 <a:ea typeface="Inter" pitchFamily="34" charset="-122"/>
                 <a:cs typeface="Inter" pitchFamily="34" charset="-120"/>
               </a:rPr>
-              <a:t>December staffing rules met</a:t>
+              <a:t>December rules met</a:t>
             </a:r>
             <a:endParaRPr lang="en-US" sz="1500" dirty="0"/>
           </a:p>
@@ -3171,7 +3171,7 @@
                 <a:ea typeface="Inter" pitchFamily="34" charset="-122"/>
                 <a:cs typeface="Inter" pitchFamily="34" charset="-120"/>
               </a:rPr>
-              <a:t>Every staffing level met, within the contract, with no avoidable fatigue warnings.</a:t>
+              <a:t>Every December rule met, within the contract, with no avoidable fatigue warnings.</a:t>
             </a:r>
             <a:endParaRPr lang="en-US" sz="1400" dirty="0"/>
           </a:p>
@@ -4415,7 +4415,7 @@
                 <a:ea typeface="Inter" pitchFamily="34" charset="-122"/>
                 <a:cs typeface="Inter" pitchFamily="34" charset="-120"/>
               </a:rPr>
-              <a:t>Staff are where the trains are — much closer to the December pattern on weekdays, Saturday and Sunday.</a:t>
+              <a:t>Much closer to the December pattern on weekdays, Saturday and Sunday.</a:t>
             </a:r>
             <a:endParaRPr lang="en-US" sz="1400" dirty="0"/>
           </a:p>
@@ -5616,7 +5616,7 @@
                 <a:ea typeface="Inter" pitchFamily="34" charset="-122"/>
                 <a:cs typeface="Inter" pitchFamily="34" charset="-120"/>
               </a:rPr>
-              <a:t>Avoidable fatigue warnings (ORR + industry)</a:t>
+              <a:t>Avoidable fatigue warnings</a:t>
             </a:r>
             <a:endParaRPr lang="en-US" sz="1400" dirty="0"/>
           </a:p>
@@ -5760,7 +5760,7 @@
                 <a:ea typeface="Inter" pitchFamily="34" charset="-122"/>
                 <a:cs typeface="Inter" pitchFamily="34" charset="-120"/>
               </a:rPr>
-              <a:t>Most days in a row (limit 13, source to confirm)</a:t>
+              <a:t>Most days in a row (limit 13)</a:t>
             </a:r>
             <a:endParaRPr lang="en-US" sz="1400" dirty="0"/>
           </a:p>
@@ -5904,7 +5904,7 @@
                 <a:ea typeface="Inter" pitchFamily="34" charset="-122"/>
                 <a:cs typeface="Inter" pitchFamily="34" charset="-120"/>
               </a:rPr>
-              <a:t>Shortest rest between two shifts (at least 12h)</a:t>
+              <a:t>Shortest rest between shifts (limit 12h)</a:t>
             </a:r>
             <a:endParaRPr lang="en-US" sz="1400" dirty="0"/>
           </a:p>
@@ -5943,7 +5943,7 @@
                 <a:ea typeface="Inter" pitchFamily="34" charset="-122"/>
                 <a:cs typeface="Inter" pitchFamily="34" charset="-120"/>
               </a:rPr>
-              <a:t>12h30</a:t>
+              <a:t>12h 30m</a:t>
             </a:r>
             <a:endParaRPr lang="en-US" sz="1600" dirty="0"/>
           </a:p>
@@ -5982,7 +5982,7 @@
                 <a:ea typeface="Inter" pitchFamily="34" charset="-122"/>
                 <a:cs typeface="Inter" pitchFamily="34" charset="-120"/>
               </a:rPr>
-              <a:t>14h20</a:t>
+              <a:t>14h 20m</a:t>
             </a:r>
             <a:endParaRPr lang="en-US" sz="1800" dirty="0"/>
           </a:p>
@@ -6087,7 +6087,7 @@
                 <a:ea typeface="Inter" pitchFamily="34" charset="-122"/>
                 <a:cs typeface="Inter" pitchFamily="34" charset="-120"/>
               </a:rPr>
-              <a:t>9h10</a:t>
+              <a:t>9h 10m</a:t>
             </a:r>
             <a:endParaRPr lang="en-US" sz="1600" dirty="0"/>
           </a:p>
@@ -6126,7 +6126,7 @@
                 <a:ea typeface="Inter" pitchFamily="34" charset="-122"/>
                 <a:cs typeface="Inter" pitchFamily="34" charset="-120"/>
               </a:rPr>
-              <a:t>9h00</a:t>
+              <a:t>9h 00m</a:t>
             </a:r>
             <a:endParaRPr lang="en-US" sz="1800" dirty="0"/>
           </a:p>
@@ -6231,7 +6231,7 @@
                 <a:ea typeface="Inter" pitchFamily="34" charset="-122"/>
                 <a:cs typeface="Inter" pitchFamily="34" charset="-120"/>
               </a:rPr>
-              <a:t>Early starts and a weekly rotation come with every link, so are not counted.</a:t>
+              <a:t>Early starts and a weekly rotation come with every link, so are not counted. The written source of the 13-day limit is still to be confirmed.</a:t>
             </a:r>
             <a:endParaRPr lang="en-US" sz="850" dirty="0"/>
           </a:p>
@@ -6483,7 +6483,7 @@
                 <a:ea typeface="Inter" pitchFamily="34" charset="-122"/>
                 <a:cs typeface="Inter" pitchFamily="34" charset="-120"/>
               </a:rPr>
-              <a:t>Meets all 9 December staffing rules, and all 3 flexible ones</a:t>
+              <a:t>Meets all 9 December rules, and all 3 flexible ones</a:t>
             </a:r>
             <a:endParaRPr lang="en-US" sz="1500" dirty="0"/>
           </a:p>
@@ -7331,7 +7331,7 @@
           <a:bodyPr wrap="square" lIns="0" tIns="0" rIns="0" bIns="0" rtlCol="0" anchor="t"/>
           <a:lstStyle/>
           <a:p>
-            <a:pPr marL="342900" indent="-342900">
+            <a:pPr marL="152400" indent="-152400">
               <a:spcAft>
                 <a:spcPts val="600"/>
               </a:spcAft>
@@ -7352,7 +7352,7 @@
             <a:endParaRPr lang="en-US" sz="1300" dirty="0"/>
           </a:p>
           <a:p>
-            <a:pPr marL="342900" indent="-342900">
+            <a:pPr marL="152400" indent="-152400">
               <a:spcAft>
                 <a:spcPts val="600"/>
               </a:spcAft>
@@ -7373,7 +7373,7 @@
             <a:endParaRPr lang="en-US" sz="1300" dirty="0"/>
           </a:p>
           <a:p>
-            <a:pPr marL="342900" indent="-342900">
+            <a:pPr marL="152400" indent="-152400">
               <a:spcAft>
                 <a:spcPts val="600"/>
               </a:spcAft>
@@ -7394,7 +7394,7 @@
             <a:endParaRPr lang="en-US" sz="1300" dirty="0"/>
           </a:p>
           <a:p>
-            <a:pPr marL="342900" indent="-342900">
+            <a:pPr marL="152400" indent="-152400">
               <a:spcAft>
                 <a:spcPts val="600"/>
               </a:spcAft>
@@ -7415,7 +7415,7 @@
             <a:endParaRPr lang="en-US" sz="1300" dirty="0"/>
           </a:p>
           <a:p>
-            <a:pPr marL="342900" indent="-342900">
+            <a:pPr marL="152400" indent="-152400">
               <a:spcAft>
                 <a:spcPts val="600"/>
               </a:spcAft>
@@ -7431,7 +7431,7 @@
                 <a:ea typeface="Inter" pitchFamily="34" charset="-122"/>
                 <a:cs typeface="Inter" pitchFamily="34" charset="-120"/>
               </a:rPr>
-              <a:t>Shortest rest 14h20 (today 12h30)</a:t>
+              <a:t>Shortest rest 14h 20m (today 12h 30m)</a:t>
             </a:r>
             <a:endParaRPr lang="en-US" sz="1300" dirty="0"/>
           </a:p>
@@ -7549,7 +7549,7 @@
           <a:bodyPr wrap="square" lIns="0" tIns="0" rIns="0" bIns="0" rtlCol="0" anchor="t"/>
           <a:lstStyle/>
           <a:p>
-            <a:pPr marL="342900" indent="-342900">
+            <a:pPr marL="152400" indent="-152400">
               <a:spcAft>
                 <a:spcPts val="600"/>
               </a:spcAft>
@@ -7570,7 +7570,7 @@
             <a:endParaRPr lang="en-US" sz="1300" dirty="0"/>
           </a:p>
           <a:p>
-            <a:pPr marL="342900" indent="-342900">
+            <a:pPr marL="152400" indent="-152400">
               <a:spcAft>
                 <a:spcPts val="600"/>
               </a:spcAft>
@@ -7591,7 +7591,7 @@
             <a:endParaRPr lang="en-US" sz="1300" dirty="0"/>
           </a:p>
           <a:p>
-            <a:pPr marL="342900" indent="-342900">
+            <a:pPr marL="152400" indent="-152400">
               <a:spcAft>
                 <a:spcPts val="600"/>
               </a:spcAft>
@@ -7612,7 +7612,7 @@
             <a:endParaRPr lang="en-US" sz="1300" dirty="0"/>
           </a:p>
           <a:p>
-            <a:pPr marL="342900" indent="-342900">
+            <a:pPr marL="152400" indent="-152400">
               <a:spcAft>
                 <a:spcPts val="600"/>
               </a:spcAft>
@@ -7633,7 +7633,7 @@
             <a:endParaRPr lang="en-US" sz="1300" dirty="0"/>
           </a:p>
           <a:p>
-            <a:pPr marL="342900" indent="-342900">
+            <a:pPr marL="152400" indent="-152400">
               <a:spcAft>
                 <a:spcPts val="600"/>
               </a:spcAft>

--- a/docs/proposals/presentations/Familiar-Nine-for-managers.pptx
+++ b/docs/proposals/presentations/Familiar-Nine-for-managers.pptx
@@ -1546,7 +1546,7 @@
           <a:p>
             <a:r>
               <a:rPr lang="en-US" dirty="0"/>
-              <a:t>Days at work fall from 219 to 217 a year (Monday to Saturday; Sunday is overtime). The late finishes come from the December staffing — three to the close and five after 22:00, where today has two and four — so any link that meets the rules will have more of them; they average about 20 more a year each, one extra every two or three weeks.</a:t>
+              <a:t>Days at work fall from 219 to 217 a year (Monday to Saturday; Sunday is overtime). The late finishes come from the December staffing — three to the close and five after 22:00, where today’s weekdays have two and four — so any link that meets the rules will have more of them; they average about 20 more a year each, one extra every two or three weeks.</a:t>
             </a:r>
             <a:endParaRPr lang="en-US" dirty="0"/>
           </a:p>
@@ -4963,7 +4963,7 @@
             <a:r>
               <a:rPr lang="en-US" sz="1800" b="1" dirty="0">
                 <a:solidFill>
-                  <a:srgbClr val="1E7B4B"/>
+                  <a:srgbClr val="001E3C"/>
                 </a:solidFill>
                 <a:latin typeface="Inter" pitchFamily="34" charset="0"/>
                 <a:ea typeface="Inter" pitchFamily="34" charset="-122"/>

--- a/docs/proposals/presentations/Familiar-Nine-for-managers.pptx
+++ b/docs/proposals/presentations/Familiar-Nine-for-managers.pptx
@@ -2959,7 +2959,7 @@
                 <a:ea typeface="Inter" pitchFamily="34" charset="-122"/>
                 <a:cs typeface="Inter" pitchFamily="34" charset="-120"/>
               </a:rPr>
-              <a:t>today’s link: 5</a:t>
+              <a:t>in the fixed rota · today 5</a:t>
             </a:r>
             <a:endParaRPr lang="en-US" sz="1300" dirty="0"/>
           </a:p>
@@ -3171,7 +3171,7 @@
                 <a:ea typeface="Inter" pitchFamily="34" charset="-122"/>
                 <a:cs typeface="Inter" pitchFamily="34" charset="-120"/>
               </a:rPr>
-              <a:t>Every December rule met, within the contract, with no avoidable fatigue warnings.</a:t>
+              <a:t>Every December rule met — and no avoidable fatigue warnings in the fixed rota.</a:t>
             </a:r>
             <a:endParaRPr lang="en-US" sz="1400" dirty="0"/>
           </a:p>
@@ -5616,7 +5616,7 @@
                 <a:ea typeface="Inter" pitchFamily="34" charset="-122"/>
                 <a:cs typeface="Inter" pitchFamily="34" charset="-120"/>
               </a:rPr>
-              <a:t>Avoidable fatigue warnings</a:t>
+              <a:t>Avoidable fatigue warnings, fixed rota</a:t>
             </a:r>
             <a:endParaRPr lang="en-US" sz="1400" dirty="0"/>
           </a:p>
@@ -6192,7 +6192,7 @@
                 <a:ea typeface="Inter" pitchFamily="34" charset="-122"/>
                 <a:cs typeface="Inter" pitchFamily="34" charset="-120"/>
               </a:rPr>
-              <a:t>The rest and run limits met with room to spare, and no avoidable fatigue warnings.</a:t>
+              <a:t>Rest and run limits met with room to spare; no avoidable fatigue warnings in the fixed rota.</a:t>
             </a:r>
             <a:endParaRPr lang="en-US" sz="1400" dirty="0"/>
           </a:p>
@@ -6380,7 +6380,7 @@
                 <a:ea typeface="Inter" pitchFamily="34" charset="-122"/>
                 <a:cs typeface="Inter" pitchFamily="34" charset="-120"/>
               </a:rPr>
-              <a:t>It meets the brief and keeps as much of today as it can</a:t>
+              <a:t>It meets the brief while keeping 8 of its 16 shift times familiar</a:t>
             </a:r>
             <a:endParaRPr lang="en-US" sz="1500" dirty="0"/>
           </a:p>
@@ -6998,7 +6998,7 @@
                 <a:ea typeface="Inter" pitchFamily="34" charset="-122"/>
                 <a:cs typeface="Inter" pitchFamily="34" charset="-120"/>
               </a:rPr>
-              <a:t>No avoidable fatigue warnings</a:t>
+              <a:t>No avoidable fatigue warnings in the fixed rota</a:t>
             </a:r>
             <a:endParaRPr lang="en-US" sz="1500" dirty="0"/>
           </a:p>
@@ -8290,7 +8290,7 @@
                 <a:ea typeface="Inter" pitchFamily="34" charset="-122"/>
                 <a:cs typeface="Inter" pitchFamily="34" charset="-120"/>
               </a:rPr>
-              <a:t>Ten on a Sunday, worked as overtime, as today.</a:t>
+              <a:t>Ten on a Sunday — Sunday work stays overtime.</a:t>
             </a:r>
             <a:endParaRPr lang="en-US" sz="1300" dirty="0"/>
           </a:p>

--- a/docs/proposals/presentations/Familiar-Nine-for-managers.pptx
+++ b/docs/proposals/presentations/Familiar-Nine-for-managers.pptx
@@ -2959,7 +2959,7 @@
                 <a:ea typeface="Inter" pitchFamily="34" charset="-122"/>
                 <a:cs typeface="Inter" pitchFamily="34" charset="-120"/>
               </a:rPr>
-              <a:t>in the fixed rota · today 5</a:t>
+              <a:t>in the fixed rota · today 4</a:t>
             </a:r>
             <a:endParaRPr lang="en-US" sz="1300" dirty="0"/>
           </a:p>
@@ -5655,7 +5655,7 @@
                 <a:ea typeface="Inter" pitchFamily="34" charset="-122"/>
                 <a:cs typeface="Inter" pitchFamily="34" charset="-120"/>
               </a:rPr>
-              <a:t>5</a:t>
+              <a:t>4 (up to 5)</a:t>
             </a:r>
             <a:endParaRPr lang="en-US" sz="1600" dirty="0"/>
           </a:p>
@@ -5799,7 +5799,7 @@
                 <a:ea typeface="Inter" pitchFamily="34" charset="-122"/>
                 <a:cs typeface="Inter" pitchFamily="34" charset="-120"/>
               </a:rPr>
-              <a:t>9</a:t>
+              <a:t>7 (up to 9)</a:t>
             </a:r>
             <a:endParaRPr lang="en-US" sz="1600" dirty="0"/>
           </a:p>
@@ -6689,7 +6689,7 @@
                 <a:ea typeface="Inter" pitchFamily="34" charset="-122"/>
                 <a:cs typeface="Inter" pitchFamily="34" charset="-120"/>
               </a:rPr>
-              <a:t>Never more than 6 days in a row — today 9</a:t>
+              <a:t>Never more than 6 days in a row — today 7</a:t>
             </a:r>
             <a:endParaRPr lang="en-US" sz="1500" dirty="0"/>
           </a:p>
@@ -7368,7 +7368,7 @@
                 <a:ea typeface="Inter" pitchFamily="34" charset="-122"/>
                 <a:cs typeface="Inter" pitchFamily="34" charset="-120"/>
               </a:rPr>
-              <a:t>At most 6 days in a row (today 9)</a:t>
+              <a:t>At most 6 days in a row (today 7)</a:t>
             </a:r>
             <a:endParaRPr lang="en-US" sz="1300" dirty="0"/>
           </a:p>

--- a/docs/proposals/presentations/Familiar-Nine-for-managers.pptx
+++ b/docs/proposals/presentations/Familiar-Nine-for-managers.pptx
@@ -4040,7 +4040,7 @@
                 <a:ea typeface="Inter" pitchFamily="34" charset="-122"/>
                 <a:cs typeface="Inter" pitchFamily="34" charset="-120"/>
               </a:rPr>
-              <a:t>Fewest ever on the floor</a:t>
+              <a:t>Fewest rostered on the floor</a:t>
             </a:r>
             <a:endParaRPr lang="en-US" sz="1400" dirty="0"/>
           </a:p>

--- a/docs/proposals/presentations/Familiar-Nine-for-managers.pptx
+++ b/docs/proposals/presentations/Familiar-Nine-for-managers.pptx
@@ -1018,7 +1018,7 @@
           <a:p>
             <a:r>
               <a:rPr lang="en-US" dirty="0"/>
-              <a:t>The nine rules are the December 2026 rules, as confirmed: at least four at the open, three to the close, five after 22:00, 10 on a Sunday, the ticket office in fixed pairs, two on the floor at all times, handovers, 8–9 hour Sundays and no more shift times than today. Behind them sit three flexible rules that are aimed for when designing but not scored on: 14 on a Saturday, cover weeks evenly spaced, and weekday closers starting at 15:45. Familiar Nine meets all three.</a:t>
+              <a:t>The nine rules are the December 2026 rules, as confirmed verbally on 29 September 2026: at least four at the open, three to the close, five after 22:00, 10 on a Sunday, the ticket office in fixed pairs, two on the floor at all times, handovers, 8–9 hour Sundays and no more shift times than today. Behind them sit three flexible rules that are aimed for when designing but not scored on: 14 on a Saturday, cover weeks evenly spaced, and weekday closers starting at 15:45. Familiar Nine meets all three.</a:t>
             </a:r>
             <a:endParaRPr lang="en-US" dirty="0"/>
           </a:p>
@@ -1282,7 +1282,7 @@
           <a:p>
             <a:r>
               <a:rPr lang="en-US" dirty="0"/>
-              <a:t>Working weeks average exactly 35 hours Monday to Saturday — 42,000 minutes across the 20 working weeks — so no overtime is needed to balance the Monday-to-Saturday week. Individual weeks range from 24h 30m to 41h 45m; only the average is the contract, as today. Ask the room: are four cover weeks enough for leave and sickness in a 24-person link? Sunday is not contracted, so the ten Sunday duties are worked as rest-day overtime, exactly as today’s eight are. Cover weeks stay at four, which is a slightly smaller share of a longer link: worth deciding deliberately. The two extra Sunday overtime duties a week come from the confirmed Sunday staffing of ten, not from Familiar Nine — any link that meets the rules needs them.</a:t>
+              <a:t>Working weeks average exactly 35 hours Monday to Saturday — 42,000 minutes across the 20 working weeks — so no overtime is needed to balance the Monday-to-Saturday week. Individual weeks range from 24h 30m to 41h 45m; only the average is the contract, as today. Ask the room: are four cover weeks enough for leave and sickness in a 24-person link? Sunday is not contracted, so the ten Sunday duties are worked as rest-day overtime, exactly as today’s eight are. Cover weeks stay at four, which is a slightly smaller share of a longer link: worth deciding deliberately. The two extra Sunday overtime duties a week come from the Sunday staffing of ten, confirmed verbally, not from Familiar Nine — any link that meets the rules needs them.</a:t>
             </a:r>
             <a:endParaRPr lang="en-US" dirty="0"/>
           </a:p>
@@ -1546,7 +1546,7 @@
           <a:p>
             <a:r>
               <a:rPr lang="en-US" dirty="0"/>
-              <a:t>Days at work fall from 219 to 217 a year (Monday to Saturday; Sunday is overtime). The late finishes come from the December staffing — three to the close and five after 22:00, where today’s weekdays have two and four — so any link that meets the rules will have more of them; they average about 20 more a year each, one extra every two or three weeks.</a:t>
+              <a:t>Days at work fall from 219 to 217 a year (Monday to Saturday; Sunday is overtime). The late finishes average about 20 more a year each, one extra every two or three weeks. Only about six or seven of those come from the December staffing — three to the close, where today’s weekdays have two, spread over 24 people; the rest is how this design places its late shifts, so another link meeting the same rules could have fewer.</a:t>
             </a:r>
             <a:endParaRPr lang="en-US" dirty="0"/>
           </a:p>
@@ -2774,7 +2774,7 @@
                 <a:ea typeface="Inter" pitchFamily="34" charset="-122"/>
                 <a:cs typeface="Inter" pitchFamily="34" charset="-120"/>
               </a:rPr>
-              <a:t>contract paid exactly</a:t>
+              <a:t>contract rostered exactly, on average</a:t>
             </a:r>
             <a:endParaRPr lang="en-US" sz="1500" dirty="0"/>
           </a:p>
@@ -5323,7 +5323,7 @@
                 <a:ea typeface="Inter" pitchFamily="34" charset="-122"/>
                 <a:cs typeface="Inter" pitchFamily="34" charset="-120"/>
               </a:rPr>
-              <a:t>Four more people, the contract paid exactly — Sundays still rely on overtime.</a:t>
+              <a:t>Four more people, the contract rostered exactly on average — Sundays still rely on overtime.</a:t>
             </a:r>
             <a:endParaRPr lang="en-US" sz="1400" dirty="0"/>
           </a:p>
@@ -7649,7 +7649,7 @@
                 <a:ea typeface="Inter" pitchFamily="34" charset="-122"/>
                 <a:cs typeface="Inter" pitchFamily="34" charset="-120"/>
               </a:rPr>
-              <a:t>Four weeks off takes 15 days’ leave, not 14</a:t>
+              <a:t>Four weeks off takes 15 days’ leave at best, not 14</a:t>
             </a:r>
             <a:endParaRPr lang="en-US" sz="1300" dirty="0"/>
           </a:p>
@@ -7864,7 +7864,7 @@
                 <a:ea typeface="Inter" pitchFamily="34" charset="-122"/>
                 <a:cs typeface="Inter" pitchFamily="34" charset="-120"/>
               </a:rPr>
-              <a:t>Three things confirmed, two decisions left</a:t>
+              <a:t>Three things confirmed verbally (29 Sep 2026), two decisions left</a:t>
             </a:r>
             <a:endParaRPr lang="en-US" sz="1500" dirty="0"/>
           </a:p>

--- a/docs/proposals/presentations/Familiar-Nine-for-managers.pptx
+++ b/docs/proposals/presentations/Familiar-Nine-for-managers.pptx
@@ -5323,7 +5323,7 @@
                 <a:ea typeface="Inter" pitchFamily="34" charset="-122"/>
                 <a:cs typeface="Inter" pitchFamily="34" charset="-120"/>
               </a:rPr>
-              <a:t>Four more people, the contract rostered exactly on average — Sundays still rely on overtime.</a:t>
+              <a:t>Four more people, 35 hours a week on average — Sundays still rely on overtime.</a:t>
             </a:r>
             <a:endParaRPr lang="en-US" sz="1400" dirty="0"/>
           </a:p>

--- a/docs/proposals/presentations/Familiar-Nine-for-managers.pptx
+++ b/docs/proposals/presentations/Familiar-Nine-for-managers.pptx
@@ -1018,7 +1018,7 @@
           <a:p>
             <a:r>
               <a:rPr lang="en-US" dirty="0"/>
-              <a:t>The nine rules are the December 2026 rules, as confirmed: at least four at the open, three to the close, five after 22:00, 10 on a Sunday, the ticket office in fixed pairs, two on the floor at all times, handovers, 8–9 hour Sundays and no more shift times than today. Behind them sit three flexible rules that are aimed for when designing but not scored on: 14 on a Saturday, cover weeks evenly spaced, and weekday closers starting at 15:45. Familiar Nine meets all three.</a:t>
+              <a:t>The nine rules are the December 2026 rules, as confirmed verbally on 29 September 2026: at least four at the open, three to the close, five after 22:00, 10 on a Sunday, the ticket office in fixed pairs, two on the floor at all times, handovers, 8–9 hour Sundays and no more shift times than today. Behind them sit three flexible rules that are aimed for when designing but not scored on: 14 on a Saturday, cover weeks evenly spaced, and weekday closers starting at 15:45. Familiar Nine meets all three.</a:t>
             </a:r>
             <a:endParaRPr lang="en-US" dirty="0"/>
           </a:p>
@@ -1282,7 +1282,7 @@
           <a:p>
             <a:r>
               <a:rPr lang="en-US" dirty="0"/>
-              <a:t>Working weeks average exactly 35 hours Monday to Saturday — 42,000 minutes across the 20 working weeks — so no overtime is needed to balance the Monday-to-Saturday week. Individual weeks range from 24h 30m to 41h 45m; only the average is the contract, as today. Ask the room: are four cover weeks enough for leave and sickness in a 24-person link? Sunday is not contracted, so the ten Sunday duties are worked as rest-day overtime, exactly as today’s eight are. Cover weeks stay at four, which is a slightly smaller share of a longer link: worth deciding deliberately. The two extra Sunday overtime duties a week come from the confirmed Sunday staffing of ten, not from Familiar Nine — any link that meets the rules needs them.</a:t>
+              <a:t>Working weeks average exactly 35 hours Monday to Saturday — 42,000 minutes across the 20 working weeks — so no overtime is needed to balance the Monday-to-Saturday week. Individual weeks range from 24h 30m to 41h 45m; only the average is the contract, as today. Ask the room: are four cover weeks enough for leave and sickness in a 24-person link? Sunday is not contracted, so the ten Sunday duties are worked as rest-day overtime, exactly as today’s eight are. Cover weeks stay at four, which is a slightly smaller share of a longer link: worth deciding deliberately. The two extra Sunday overtime duties a week come from the Sunday staffing of ten, confirmed verbally, not from Familiar Nine — any link that meets the rules needs them.</a:t>
             </a:r>
             <a:endParaRPr lang="en-US" dirty="0"/>
           </a:p>
@@ -1546,7 +1546,7 @@
           <a:p>
             <a:r>
               <a:rPr lang="en-US" dirty="0"/>
-              <a:t>Days at work fall from 219 to 217 a year (Monday to Saturday; Sunday is overtime). The late finishes come from the December staffing — three to the close and five after 22:00, where today’s weekdays have two and four — so any link that meets the rules will have more of them; they average about 20 more a year each, one extra every two or three weeks.</a:t>
+              <a:t>Days at work fall from 219 to 217 a year (Monday to Saturday; Sunday is overtime). The late finishes average about 20 more a year each, one extra every two or three weeks. Only about six or seven of those come from the December staffing — three to the close, where today’s weekdays have two, spread over 24 people; the rest is how this design places its late shifts, so another link meeting the same rules could have fewer.</a:t>
             </a:r>
             <a:endParaRPr lang="en-US" dirty="0"/>
           </a:p>
@@ -2774,7 +2774,7 @@
                 <a:ea typeface="Inter" pitchFamily="34" charset="-122"/>
                 <a:cs typeface="Inter" pitchFamily="34" charset="-120"/>
               </a:rPr>
-              <a:t>contract paid exactly</a:t>
+              <a:t>contract rostered exactly, on average</a:t>
             </a:r>
             <a:endParaRPr lang="en-US" sz="1500" dirty="0"/>
           </a:p>
@@ -2959,7 +2959,7 @@
                 <a:ea typeface="Inter" pitchFamily="34" charset="-122"/>
                 <a:cs typeface="Inter" pitchFamily="34" charset="-120"/>
               </a:rPr>
-              <a:t>in the fixed rota · today 5</a:t>
+              <a:t>in the fixed rota · today 4</a:t>
             </a:r>
             <a:endParaRPr lang="en-US" sz="1300" dirty="0"/>
           </a:p>
@@ -4040,7 +4040,7 @@
                 <a:ea typeface="Inter" pitchFamily="34" charset="-122"/>
                 <a:cs typeface="Inter" pitchFamily="34" charset="-120"/>
               </a:rPr>
-              <a:t>Fewest ever on the floor</a:t>
+              <a:t>Fewest rostered on the floor</a:t>
             </a:r>
             <a:endParaRPr lang="en-US" sz="1400" dirty="0"/>
           </a:p>
@@ -5323,7 +5323,7 @@
                 <a:ea typeface="Inter" pitchFamily="34" charset="-122"/>
                 <a:cs typeface="Inter" pitchFamily="34" charset="-120"/>
               </a:rPr>
-              <a:t>Four more people, the contract paid exactly — Sundays still rely on overtime.</a:t>
+              <a:t>Four more people, 35 hours a week on average — Sundays still rely on overtime.</a:t>
             </a:r>
             <a:endParaRPr lang="en-US" sz="1400" dirty="0"/>
           </a:p>
@@ -5655,7 +5655,7 @@
                 <a:ea typeface="Inter" pitchFamily="34" charset="-122"/>
                 <a:cs typeface="Inter" pitchFamily="34" charset="-120"/>
               </a:rPr>
-              <a:t>5</a:t>
+              <a:t>4 (up to 5)</a:t>
             </a:r>
             <a:endParaRPr lang="en-US" sz="1600" dirty="0"/>
           </a:p>
@@ -5799,7 +5799,7 @@
                 <a:ea typeface="Inter" pitchFamily="34" charset="-122"/>
                 <a:cs typeface="Inter" pitchFamily="34" charset="-120"/>
               </a:rPr>
-              <a:t>9</a:t>
+              <a:t>7 (up to 9)</a:t>
             </a:r>
             <a:endParaRPr lang="en-US" sz="1600" dirty="0"/>
           </a:p>
@@ -6689,7 +6689,7 @@
                 <a:ea typeface="Inter" pitchFamily="34" charset="-122"/>
                 <a:cs typeface="Inter" pitchFamily="34" charset="-120"/>
               </a:rPr>
-              <a:t>Never more than 6 days in a row — today 9</a:t>
+              <a:t>Never more than 6 days in a row — today 7</a:t>
             </a:r>
             <a:endParaRPr lang="en-US" sz="1500" dirty="0"/>
           </a:p>
@@ -7368,7 +7368,7 @@
                 <a:ea typeface="Inter" pitchFamily="34" charset="-122"/>
                 <a:cs typeface="Inter" pitchFamily="34" charset="-120"/>
               </a:rPr>
-              <a:t>At most 6 days in a row (today 9)</a:t>
+              <a:t>At most 6 days in a row (today 7)</a:t>
             </a:r>
             <a:endParaRPr lang="en-US" sz="1300" dirty="0"/>
           </a:p>
@@ -7649,7 +7649,7 @@
                 <a:ea typeface="Inter" pitchFamily="34" charset="-122"/>
                 <a:cs typeface="Inter" pitchFamily="34" charset="-120"/>
               </a:rPr>
-              <a:t>Four weeks off takes 15 days’ leave, not 14</a:t>
+              <a:t>Four weeks off takes 15 days’ leave at best, not 14</a:t>
             </a:r>
             <a:endParaRPr lang="en-US" sz="1300" dirty="0"/>
           </a:p>
@@ -7864,7 +7864,7 @@
                 <a:ea typeface="Inter" pitchFamily="34" charset="-122"/>
                 <a:cs typeface="Inter" pitchFamily="34" charset="-120"/>
               </a:rPr>
-              <a:t>Three things confirmed, two decisions left</a:t>
+              <a:t>Three things confirmed verbally (29 Sep 2026), two decisions left</a:t>
             </a:r>
             <a:endParaRPr lang="en-US" sz="1500" dirty="0"/>
           </a:p>
